--- a/skh-pt/pptx/deck5.pptx
+++ b/skh-pt/pptx/deck5.pptx
@@ -4630,14 +4630,14 @@
       </p:sp>
       <p:sp>
         <p:nvSpPr>
-          <p:cNvPr id="87" name="BIM 전면 도입이 추진되지만, BIM은 여전히"/>
+          <p:cNvPr id="87" name="BIM 전면 도입이 추진되지만, BIM은 여전히사람이 2D 도면을 보고 "/>
           <p:cNvSpPr txBox="1"/>
           <p:nvPr/>
         </p:nvSpPr>
         <p:spPr>
           <a:xfrm>
-            <a:off x="609600" y="666750"/>
-            <a:ext cx="4968845" cy="349250"/>
+            <a:off x="609600" y="653852"/>
+            <a:ext cx="5143115" cy="724297"/>
           </a:xfrm>
           <a:prstGeom prst="rect">
             <a:avLst/>
@@ -4646,10 +4646,13 @@
           <a:ln/>
         </p:spPr>
         <p:txBody>
-          <a:bodyPr wrap="none" lIns="0" tIns="0" rIns="0" bIns="0" rtlCol="0" anchor="ctr"/>
-          <a:lstStyle/>
-          <a:p>
-            <a:pPr algn="l" indent="0" marL="0">
+          <a:bodyPr wrap="none" lIns="0" tIns="0" rIns="0" bIns="0" rtlCol="0" anchor="t"/>
+          <a:lstStyle/>
+          <a:p>
+            <a:pPr algn="l" indent="0" marL="0">
+              <a:lnSpc>
+                <a:spcPts val="2852"/>
+              </a:lnSpc>
               <a:buNone/>
             </a:pPr>
             <a:r>
@@ -4665,30 +4668,11 @@
             </a:r>
             <a:endParaRPr lang="en-US" sz="2300" dirty="0"/>
           </a:p>
-        </p:txBody>
-      </p:sp>
-      <p:sp>
-        <p:nvSpPr>
-          <p:cNvPr id="88" name="사람이 2D 도면을 보고 직접 만들고 있습니다."/>
-          <p:cNvSpPr txBox="1"/>
-          <p:nvPr/>
-        </p:nvSpPr>
-        <p:spPr>
-          <a:xfrm>
-            <a:off x="609600" y="1028898"/>
-            <a:ext cx="5143115" cy="349250"/>
-          </a:xfrm>
-          <a:prstGeom prst="rect">
-            <a:avLst/>
-          </a:prstGeom>
-          <a:noFill/>
-          <a:ln/>
-        </p:spPr>
-        <p:txBody>
-          <a:bodyPr wrap="none" lIns="0" tIns="0" rIns="0" bIns="0" rtlCol="0" anchor="ctr"/>
-          <a:lstStyle/>
-          <a:p>
-            <a:pPr algn="l" indent="0" marL="0">
+          <a:p>
+            <a:pPr algn="l" indent="0" marL="0">
+              <a:lnSpc>
+                <a:spcPts val="2852"/>
+              </a:lnSpc>
               <a:buNone/>
             </a:pPr>
             <a:r>
@@ -4703,6 +4687,9 @@
               <a:t>사람이 2D 도면을 보고 직접</a:t>
             </a:r>
             <a:pPr algn="l" indent="0" marL="0">
+              <a:lnSpc>
+                <a:spcPts val="2852"/>
+              </a:lnSpc>
               <a:buNone/>
             </a:pPr>
             <a:r>
@@ -4722,7 +4709,7 @@
       </p:sp>
       <p:sp>
         <p:nvSpPr>
-          <p:cNvPr id="89" name="01"/>
+          <p:cNvPr id="88" name="01"/>
           <p:cNvSpPr txBox="1"/>
           <p:nvPr/>
         </p:nvSpPr>
@@ -4761,7 +4748,7 @@
       </p:sp>
       <p:sp>
         <p:nvSpPr>
-          <p:cNvPr id="90" name="02"/>
+          <p:cNvPr id="89" name="02"/>
           <p:cNvSpPr txBox="1"/>
           <p:nvPr/>
         </p:nvSpPr>
@@ -4800,7 +4787,7 @@
       </p:sp>
       <p:sp>
         <p:nvSpPr>
-          <p:cNvPr id="91" name="03"/>
+          <p:cNvPr id="90" name="03"/>
           <p:cNvSpPr txBox="1"/>
           <p:nvPr/>
         </p:nvSpPr>
@@ -4839,7 +4826,7 @@
       </p:sp>
       <p:sp>
         <p:nvSpPr>
-          <p:cNvPr id="92" name="04"/>
+          <p:cNvPr id="91" name="04"/>
           <p:cNvSpPr txBox="1"/>
           <p:nvPr/>
         </p:nvSpPr>
@@ -4878,7 +4865,7 @@
       </p:sp>
       <p:sp>
         <p:nvSpPr>
-          <p:cNvPr id="93" name="05"/>
+          <p:cNvPr id="92" name="05"/>
           <p:cNvSpPr txBox="1"/>
           <p:nvPr/>
         </p:nvSpPr>
@@ -4917,7 +4904,7 @@
       </p:sp>
       <p:sp>
         <p:nvSpPr>
-          <p:cNvPr id="94" name="정책"/>
+          <p:cNvPr id="93" name="정책"/>
           <p:cNvSpPr txBox="1"/>
           <p:nvPr/>
         </p:nvSpPr>
@@ -4956,7 +4943,7 @@
       </p:sp>
       <p:sp>
         <p:nvSpPr>
-          <p:cNvPr id="95" name="국토교통부, BIM 전면 도입 추진"/>
+          <p:cNvPr id="94" name="국토교통부, BIM 전면 도입 추진"/>
           <p:cNvSpPr txBox="1"/>
           <p:nvPr/>
         </p:nvSpPr>
@@ -4995,7 +4982,7 @@
       </p:sp>
       <p:sp>
         <p:nvSpPr>
-          <p:cNvPr id="96" name="공공공사 BIM 의무화 단계적 확대"/>
+          <p:cNvPr id="95" name="공공공사 BIM 의무화 단계적 확대"/>
           <p:cNvSpPr txBox="1"/>
           <p:nvPr/>
         </p:nvSpPr>
@@ -5034,7 +5021,7 @@
       </p:sp>
       <p:sp>
         <p:nvSpPr>
-          <p:cNvPr id="97" name="'22~'24"/>
+          <p:cNvPr id="96" name="'22~'24"/>
           <p:cNvSpPr txBox="1"/>
           <p:nvPr/>
         </p:nvSpPr>
@@ -5073,7 +5060,7 @@
       </p:sp>
       <p:sp>
         <p:nvSpPr>
-          <p:cNvPr id="98" name="'26"/>
+          <p:cNvPr id="97" name="'26"/>
           <p:cNvSpPr txBox="1"/>
           <p:nvPr/>
         </p:nvSpPr>
@@ -5112,7 +5099,7 @@
       </p:sp>
       <p:sp>
         <p:nvSpPr>
-          <p:cNvPr id="99" name="'28"/>
+          <p:cNvPr id="98" name="'28"/>
           <p:cNvSpPr txBox="1"/>
           <p:nvPr/>
         </p:nvSpPr>
@@ -5151,7 +5138,7 @@
       </p:sp>
       <p:sp>
         <p:nvSpPr>
-          <p:cNvPr id="100" name="1,000억원 이상 신규 사업"/>
+          <p:cNvPr id="99" name="1,000억원 이상 신규 사업"/>
           <p:cNvSpPr txBox="1"/>
           <p:nvPr/>
         </p:nvSpPr>
@@ -5190,7 +5177,7 @@
       </p:sp>
       <p:sp>
         <p:nvSpPr>
-          <p:cNvPr id="101" name="도로 → 철도·건축 → 하천·항만"/>
+          <p:cNvPr id="100" name="도로 → 철도·건축 → 하천·항만"/>
           <p:cNvSpPr txBox="1"/>
           <p:nvPr/>
         </p:nvSpPr>
@@ -5229,7 +5216,7 @@
       </p:sp>
       <p:sp>
         <p:nvSpPr>
-          <p:cNvPr id="102" name="500억원 이상"/>
+          <p:cNvPr id="101" name="500억원 이상"/>
           <p:cNvSpPr txBox="1"/>
           <p:nvPr/>
         </p:nvSpPr>
@@ -5268,7 +5255,7 @@
       </p:sp>
       <p:sp>
         <p:nvSpPr>
-          <p:cNvPr id="103" name="300억원 이상"/>
+          <p:cNvPr id="102" name="300억원 이상"/>
           <p:cNvSpPr txBox="1"/>
           <p:nvPr/>
         </p:nvSpPr>
@@ -5307,7 +5294,7 @@
       </p:sp>
       <p:sp>
         <p:nvSpPr>
-          <p:cNvPr id="104" name="2030 건축BIM 로드맵"/>
+          <p:cNvPr id="103" name="2030 건축BIM 로드맵"/>
           <p:cNvSpPr txBox="1"/>
           <p:nvPr/>
         </p:nvSpPr>
@@ -5346,7 +5333,7 @@
       </p:sp>
       <p:sp>
         <p:nvSpPr>
-          <p:cNvPr id="105" name="'25"/>
+          <p:cNvPr id="104" name="'25"/>
           <p:cNvSpPr txBox="1"/>
           <p:nvPr/>
         </p:nvSpPr>
@@ -5385,7 +5372,7 @@
       </p:sp>
       <p:sp>
         <p:nvSpPr>
-          <p:cNvPr id="106" name="BIM 설계 기반 구축"/>
+          <p:cNvPr id="105" name="BIM 설계 기반 구축"/>
           <p:cNvSpPr txBox="1"/>
           <p:nvPr/>
         </p:nvSpPr>
@@ -5424,7 +5411,7 @@
       </p:sp>
       <p:sp>
         <p:nvSpPr>
-          <p:cNvPr id="107" name="'30"/>
+          <p:cNvPr id="106" name="'30"/>
           <p:cNvSpPr txBox="1"/>
           <p:nvPr/>
         </p:nvSpPr>
@@ -5463,7 +5450,7 @@
       </p:sp>
       <p:sp>
         <p:nvSpPr>
-          <p:cNvPr id="108" name="디지털 건축서비스 완전 구현"/>
+          <p:cNvPr id="107" name="디지털 건축서비스 완전 구현"/>
           <p:cNvSpPr txBox="1"/>
           <p:nvPr/>
         </p:nvSpPr>
@@ -5502,7 +5489,7 @@
       </p:sp>
       <p:sp>
         <p:nvSpPr>
-          <p:cNvPr id="109" name="출처: 국토교통부 「스마트 건설 활성화 방안」, 「2030 건축BIM 로"/>
+          <p:cNvPr id="108" name="출처: 국토교통부 「스마트 건설 활성화 방안」, 「2030 건축BIM 로"/>
           <p:cNvSpPr txBox="1"/>
           <p:nvPr/>
         </p:nvSpPr>
@@ -5541,7 +5528,7 @@
       </p:sp>
       <p:sp>
         <p:nvSpPr>
-          <p:cNvPr id="110" name="현실"/>
+          <p:cNvPr id="109" name="현실"/>
           <p:cNvSpPr txBox="1"/>
           <p:nvPr/>
         </p:nvSpPr>
@@ -5580,7 +5567,7 @@
       </p:sp>
       <p:sp>
         <p:nvSpPr>
-          <p:cNvPr id="111" name="대부분의 BIM은 2D 도면에서 출발"/>
+          <p:cNvPr id="110" name="대부분의 BIM은 2D 도면에서 출발"/>
           <p:cNvSpPr txBox="1"/>
           <p:nvPr/>
         </p:nvSpPr>
@@ -5619,7 +5606,7 @@
       </p:sp>
       <p:sp>
         <p:nvSpPr>
-          <p:cNvPr id="112" name="신규 건설 프로젝트"/>
+          <p:cNvPr id="111" name="신규 건설 프로젝트"/>
           <p:cNvSpPr txBox="1"/>
           <p:nvPr/>
         </p:nvSpPr>
@@ -5658,14 +5645,14 @@
       </p:sp>
       <p:sp>
         <p:nvSpPr>
-          <p:cNvPr id="113" name="2D 도면을 먼저 그린 뒤 BIM으로 옮기는"/>
+          <p:cNvPr id="112" name="2D 도면을 먼저 그린 뒤 BIM으로 옮기는'BIM 전환설계'가 대부분"/>
           <p:cNvSpPr txBox="1"/>
           <p:nvPr/>
         </p:nvSpPr>
         <p:spPr>
           <a:xfrm>
-            <a:off x="4470400" y="2718197"/>
-            <a:ext cx="2239635" cy="165100"/>
+            <a:off x="4470400" y="2673747"/>
+            <a:ext cx="2239635" cy="419100"/>
           </a:xfrm>
           <a:prstGeom prst="rect">
             <a:avLst/>
@@ -5674,10 +5661,13 @@
           <a:ln/>
         </p:spPr>
         <p:txBody>
-          <a:bodyPr wrap="none" lIns="0" tIns="0" rIns="0" bIns="0" rtlCol="0" anchor="ctr"/>
-          <a:lstStyle/>
-          <a:p>
-            <a:pPr algn="l" indent="0" marL="0">
+          <a:bodyPr wrap="none" lIns="0" tIns="0" rIns="0" bIns="0" rtlCol="0" anchor="t"/>
+          <a:lstStyle/>
+          <a:p>
+            <a:pPr algn="l" indent="0" marL="0">
+              <a:lnSpc>
+                <a:spcPts val="1650"/>
+              </a:lnSpc>
               <a:buNone/>
             </a:pPr>
             <a:r>
@@ -5693,30 +5683,11 @@
             </a:r>
             <a:endParaRPr lang="en-US" sz="1100" dirty="0"/>
           </a:p>
-        </p:txBody>
-      </p:sp>
-      <p:sp>
-        <p:nvSpPr>
-          <p:cNvPr id="114" name="'BIM 전환설계'가 대부분"/>
-          <p:cNvSpPr txBox="1"/>
-          <p:nvPr/>
-        </p:nvSpPr>
-        <p:spPr>
-          <a:xfrm>
-            <a:off x="4470400" y="2927747"/>
-            <a:ext cx="1363553" cy="165100"/>
-          </a:xfrm>
-          <a:prstGeom prst="rect">
-            <a:avLst/>
-          </a:prstGeom>
-          <a:noFill/>
-          <a:ln/>
-        </p:spPr>
-        <p:txBody>
-          <a:bodyPr wrap="none" lIns="0" tIns="0" rIns="0" bIns="0" rtlCol="0" anchor="ctr"/>
-          <a:lstStyle/>
-          <a:p>
-            <a:pPr algn="l" indent="0" marL="0">
+          <a:p>
+            <a:pPr algn="l" indent="0" marL="0">
+              <a:lnSpc>
+                <a:spcPts val="1650"/>
+              </a:lnSpc>
               <a:buNone/>
             </a:pPr>
             <a:r>
@@ -5731,6 +5702,9 @@
               <a:t>'BIM 전환설계'</a:t>
             </a:r>
             <a:pPr algn="l" indent="0" marL="0">
+              <a:lnSpc>
+                <a:spcPts val="1650"/>
+              </a:lnSpc>
               <a:buNone/>
             </a:pPr>
             <a:r>
@@ -5750,7 +5724,7 @@
       </p:sp>
       <p:sp>
         <p:nvSpPr>
-          <p:cNvPr id="115" name="설계 후반 투입 인력 증가·추가 비용"/>
+          <p:cNvPr id="113" name="설계 후반 투입 인력 증가·추가 비용"/>
           <p:cNvSpPr txBox="1"/>
           <p:nvPr/>
         </p:nvSpPr>
@@ -5789,7 +5763,7 @@
       </p:sp>
       <p:sp>
         <p:nvSpPr>
-          <p:cNvPr id="116" name="출처: 진상윤, 「BIM은 독일까? 득일까?」, 건축문화신문, 2015"/>
+          <p:cNvPr id="114" name="출처: 진상윤, 「BIM은 독일까? 득일까?」, 건축문화신문, 2015"/>
           <p:cNvSpPr txBox="1"/>
           <p:nvPr/>
         </p:nvSpPr>
@@ -5828,7 +5802,7 @@
       </p:sp>
       <p:sp>
         <p:nvSpPr>
-          <p:cNvPr id="117" name="기존 건축물"/>
+          <p:cNvPr id="115" name="기존 건축물"/>
           <p:cNvSpPr txBox="1"/>
           <p:nvPr/>
         </p:nvSpPr>
@@ -5867,7 +5841,7 @@
       </p:sp>
       <p:sp>
         <p:nvSpPr>
-          <p:cNvPr id="118" name="BIM 없이 2D 도면만 남아 있음"/>
+          <p:cNvPr id="116" name="BIM 없이 2D 도면만 남아 있음"/>
           <p:cNvSpPr txBox="1"/>
           <p:nvPr/>
         </p:nvSpPr>
@@ -5934,7 +5908,7 @@
       </p:sp>
       <p:sp>
         <p:nvSpPr>
-          <p:cNvPr id="119" name="2D 도면으로 3D BIM을 새로 구축해야 함"/>
+          <p:cNvPr id="117" name="2D 도면으로 3D BIM을 새로 구축해야 함"/>
           <p:cNvSpPr txBox="1"/>
           <p:nvPr/>
         </p:nvSpPr>
@@ -5973,7 +5947,7 @@
       </p:sp>
       <p:sp>
         <p:nvSpPr>
-          <p:cNvPr id="120" name="문제"/>
+          <p:cNvPr id="118" name="문제"/>
           <p:cNvSpPr txBox="1"/>
           <p:nvPr/>
         </p:nvSpPr>
@@ -6012,7 +5986,7 @@
       </p:sp>
       <p:sp>
         <p:nvSpPr>
-          <p:cNvPr id="121" name="사람이 도면을 보고 직접 모델링"/>
+          <p:cNvPr id="119" name="사람이 도면을 보고 직접 모델링"/>
           <p:cNvSpPr txBox="1"/>
           <p:nvPr/>
         </p:nvSpPr>
@@ -6051,7 +6025,7 @@
       </p:sp>
       <p:sp>
         <p:nvSpPr>
-          <p:cNvPr id="122" name="평면도 · 입면도"/>
+          <p:cNvPr id="120" name="평면도 · 입면도"/>
           <p:cNvSpPr txBox="1"/>
           <p:nvPr/>
         </p:nvSpPr>
@@ -6090,7 +6064,7 @@
       </p:sp>
       <p:sp>
         <p:nvSpPr>
-          <p:cNvPr id="123" name="도면 해석 · 직접 입력"/>
+          <p:cNvPr id="121" name="도면 해석 · 직접 입력"/>
           <p:cNvSpPr txBox="1"/>
           <p:nvPr/>
         </p:nvSpPr>
@@ -6129,7 +6103,7 @@
       </p:sp>
       <p:sp>
         <p:nvSpPr>
-          <p:cNvPr id="124" name="수작업 모델링 예시"/>
+          <p:cNvPr id="122" name="수작업 모델링 예시"/>
           <p:cNvSpPr txBox="1"/>
           <p:nvPr/>
         </p:nvSpPr>
@@ -6168,7 +6142,7 @@
       </p:sp>
       <p:sp>
         <p:nvSpPr>
-          <p:cNvPr id="125" name="1"/>
+          <p:cNvPr id="123" name="1"/>
           <p:cNvSpPr txBox="1"/>
           <p:nvPr/>
         </p:nvSpPr>
@@ -6207,7 +6181,7 @@
       </p:sp>
       <p:sp>
         <p:nvSpPr>
-          <p:cNvPr id="126" name="노동집약적 작업"/>
+          <p:cNvPr id="124" name="노동집약적 작업"/>
           <p:cNvSpPr txBox="1"/>
           <p:nvPr/>
         </p:nvSpPr>
@@ -6246,7 +6220,7 @@
       </p:sp>
       <p:sp>
         <p:nvSpPr>
-          <p:cNvPr id="127" name="도면을 한 장씩 보며 벽·창·문을 직접 입력"/>
+          <p:cNvPr id="125" name="도면을 한 장씩 보며 벽·창·문을 직접 입력"/>
           <p:cNvSpPr txBox="1"/>
           <p:nvPr/>
         </p:nvSpPr>
@@ -6285,7 +6259,7 @@
       </p:sp>
       <p:sp>
         <p:nvSpPr>
-          <p:cNvPr id="128" name="2"/>
+          <p:cNvPr id="126" name="2"/>
           <p:cNvSpPr txBox="1"/>
           <p:nvPr/>
         </p:nvSpPr>
@@ -6324,7 +6298,7 @@
       </p:sp>
       <p:sp>
         <p:nvSpPr>
-          <p:cNvPr id="129" name="긴 작업 시간 · 높은 비용"/>
+          <p:cNvPr id="127" name="긴 작업 시간 · 높은 비용"/>
           <p:cNvSpPr txBox="1"/>
           <p:nvPr/>
         </p:nvSpPr>
@@ -6363,7 +6337,7 @@
       </p:sp>
       <p:sp>
         <p:nvSpPr>
-          <p:cNvPr id="130" name="건물 규모에 비례해 모델링 시간과 비용 증가"/>
+          <p:cNvPr id="128" name="건물 규모에 비례해 모델링 시간과 비용 증가"/>
           <p:cNvSpPr txBox="1"/>
           <p:nvPr/>
         </p:nvSpPr>
@@ -6402,7 +6376,7 @@
       </p:sp>
       <p:sp>
         <p:nvSpPr>
-          <p:cNvPr id="131" name="3"/>
+          <p:cNvPr id="129" name="3"/>
           <p:cNvSpPr txBox="1"/>
           <p:nvPr/>
         </p:nvSpPr>
@@ -6441,7 +6415,7 @@
       </p:sp>
       <p:sp>
         <p:nvSpPr>
-          <p:cNvPr id="132" name="휴먼 에러 가능성"/>
+          <p:cNvPr id="130" name="휴먼 에러 가능성"/>
           <p:cNvSpPr txBox="1"/>
           <p:nvPr/>
         </p:nvSpPr>
@@ -6480,7 +6454,7 @@
       </p:sp>
       <p:sp>
         <p:nvSpPr>
-          <p:cNvPr id="133" name="도면 해석·입력 과정에서 누락과 오류 발생"/>
+          <p:cNvPr id="131" name="도면 해석·입력 과정에서 누락과 오류 발생"/>
           <p:cNvSpPr txBox="1"/>
           <p:nvPr/>
         </p:nvSpPr>
@@ -6519,7 +6493,7 @@
       </p:sp>
       <p:sp>
         <p:nvSpPr>
-          <p:cNvPr id="134" name="KEY MESSAGE"/>
+          <p:cNvPr id="132" name="KEY MESSAGE"/>
           <p:cNvSpPr txBox="1"/>
           <p:nvPr/>
         </p:nvSpPr>
@@ -6558,7 +6532,7 @@
       </p:sp>
       <p:sp>
         <p:nvSpPr>
-          <p:cNvPr id="135" name="2차원 도면에 기반한 3차원 BIM 모델 자동 생성 프로세스가 필요합니다"/>
+          <p:cNvPr id="133" name="2차원 도면에 기반한 3차원 BIM 모델 자동 생성 프로세스가 필요합니다"/>
           <p:cNvSpPr txBox="1"/>
           <p:nvPr/>
         </p:nvSpPr>
@@ -6625,7 +6599,7 @@
       </p:sp>
       <p:sp>
         <p:nvSpPr>
-          <p:cNvPr id="136" name="석사 연구 발표  ·  평면도와 입면도 객체 인식 및 정보 통합을 통한 "/>
+          <p:cNvPr id="134" name="석사 연구 발표  ·  평면도와 입면도 객체 인식 및 정보 통합을 통한 "/>
           <p:cNvSpPr txBox="1"/>
           <p:nvPr/>
         </p:nvSpPr>
@@ -6664,7 +6638,7 @@
       </p:sp>
       <p:sp>
         <p:nvSpPr>
-          <p:cNvPr id="137" name="01 / 05"/>
+          <p:cNvPr id="135" name="01 / 05"/>
           <p:cNvSpPr txBox="1"/>
           <p:nvPr/>
         </p:nvSpPr>
@@ -8861,14 +8835,14 @@
       </p:sp>
       <p:sp>
         <p:nvSpPr>
-          <p:cNvPr id="56" name="기존 연구의 세 가지 한계를"/>
+          <p:cNvPr id="56" name="기존 연구의 세 가지 한계를세 가지 연구 목표로 하나씩 해결합니다."/>
           <p:cNvSpPr txBox="1"/>
           <p:nvPr/>
         </p:nvSpPr>
         <p:spPr>
           <a:xfrm>
-            <a:off x="609600" y="666750"/>
-            <a:ext cx="3034840" cy="349250"/>
+            <a:off x="609600" y="653852"/>
+            <a:ext cx="4445826" cy="724297"/>
           </a:xfrm>
           <a:prstGeom prst="rect">
             <a:avLst/>
@@ -8877,10 +8851,13 @@
           <a:ln/>
         </p:spPr>
         <p:txBody>
-          <a:bodyPr wrap="none" lIns="0" tIns="0" rIns="0" bIns="0" rtlCol="0" anchor="ctr"/>
-          <a:lstStyle/>
-          <a:p>
-            <a:pPr algn="l" indent="0" marL="0">
+          <a:bodyPr wrap="none" lIns="0" tIns="0" rIns="0" bIns="0" rtlCol="0" anchor="t"/>
+          <a:lstStyle/>
+          <a:p>
+            <a:pPr algn="l" indent="0" marL="0">
+              <a:lnSpc>
+                <a:spcPts val="2852"/>
+              </a:lnSpc>
               <a:buNone/>
             </a:pPr>
             <a:r>
@@ -8896,30 +8873,11 @@
             </a:r>
             <a:endParaRPr lang="en-US" sz="2300" dirty="0"/>
           </a:p>
-        </p:txBody>
-      </p:sp>
-      <p:sp>
-        <p:nvSpPr>
-          <p:cNvPr id="57" name="세 가지 연구 목표로 하나씩 해결합니다."/>
-          <p:cNvSpPr txBox="1"/>
-          <p:nvPr/>
-        </p:nvSpPr>
-        <p:spPr>
-          <a:xfrm>
-            <a:off x="609600" y="1028898"/>
-            <a:ext cx="4445826" cy="349250"/>
-          </a:xfrm>
-          <a:prstGeom prst="rect">
-            <a:avLst/>
-          </a:prstGeom>
-          <a:noFill/>
-          <a:ln/>
-        </p:spPr>
-        <p:txBody>
-          <a:bodyPr wrap="none" lIns="0" tIns="0" rIns="0" bIns="0" rtlCol="0" anchor="ctr"/>
-          <a:lstStyle/>
-          <a:p>
-            <a:pPr algn="l" indent="0" marL="0">
+          <a:p>
+            <a:pPr algn="l" indent="0" marL="0">
+              <a:lnSpc>
+                <a:spcPts val="2852"/>
+              </a:lnSpc>
               <a:buNone/>
             </a:pPr>
             <a:r>
@@ -8934,6 +8892,9 @@
               <a:t>세 가지 연구 목표</a:t>
             </a:r>
             <a:pPr algn="l" indent="0" marL="0">
+              <a:lnSpc>
+                <a:spcPts val="2852"/>
+              </a:lnSpc>
               <a:buNone/>
             </a:pPr>
             <a:r>
@@ -8953,7 +8914,7 @@
       </p:sp>
       <p:sp>
         <p:nvSpPr>
-          <p:cNvPr id="58" name="01"/>
+          <p:cNvPr id="57" name="01"/>
           <p:cNvSpPr txBox="1"/>
           <p:nvPr/>
         </p:nvSpPr>
@@ -8992,7 +8953,7 @@
       </p:sp>
       <p:sp>
         <p:nvSpPr>
-          <p:cNvPr id="59" name="02"/>
+          <p:cNvPr id="58" name="02"/>
           <p:cNvSpPr txBox="1"/>
           <p:nvPr/>
         </p:nvSpPr>
@@ -9031,7 +8992,7 @@
       </p:sp>
       <p:sp>
         <p:nvSpPr>
-          <p:cNvPr id="60" name="03"/>
+          <p:cNvPr id="59" name="03"/>
           <p:cNvSpPr txBox="1"/>
           <p:nvPr/>
         </p:nvSpPr>
@@ -9070,7 +9031,7 @@
       </p:sp>
       <p:sp>
         <p:nvSpPr>
-          <p:cNvPr id="61" name="04"/>
+          <p:cNvPr id="60" name="04"/>
           <p:cNvSpPr txBox="1"/>
           <p:nvPr/>
         </p:nvSpPr>
@@ -9109,7 +9070,7 @@
       </p:sp>
       <p:sp>
         <p:nvSpPr>
-          <p:cNvPr id="62" name="05"/>
+          <p:cNvPr id="61" name="05"/>
           <p:cNvSpPr txBox="1"/>
           <p:nvPr/>
         </p:nvSpPr>
@@ -9148,7 +9109,7 @@
       </p:sp>
       <p:sp>
         <p:nvSpPr>
-          <p:cNvPr id="63" name="쟁점"/>
+          <p:cNvPr id="62" name="쟁점"/>
           <p:cNvSpPr txBox="1"/>
           <p:nvPr/>
         </p:nvSpPr>
@@ -9187,7 +9148,7 @@
       </p:sp>
       <p:sp>
         <p:nvSpPr>
-          <p:cNvPr id="64" name="기존 연구의 한계"/>
+          <p:cNvPr id="63" name="기존 연구의 한계"/>
           <p:cNvSpPr txBox="1"/>
           <p:nvPr/>
         </p:nvSpPr>
@@ -9226,7 +9187,7 @@
       </p:sp>
       <p:sp>
         <p:nvSpPr>
-          <p:cNvPr id="65" name="연구 목표"/>
+          <p:cNvPr id="64" name="연구 목표"/>
           <p:cNvSpPr txBox="1"/>
           <p:nvPr/>
         </p:nvSpPr>
@@ -9265,7 +9226,7 @@
       </p:sp>
       <p:sp>
         <p:nvSpPr>
-          <p:cNvPr id="66" name="높이 정보"/>
+          <p:cNvPr id="65" name="높이 정보"/>
           <p:cNvSpPr txBox="1"/>
           <p:nvPr/>
         </p:nvSpPr>
@@ -9304,7 +9265,7 @@
       </p:sp>
       <p:sp>
         <p:nvSpPr>
-          <p:cNvPr id="67" name="한계 1"/>
+          <p:cNvPr id="66" name="한계 1"/>
           <p:cNvSpPr txBox="1"/>
           <p:nvPr/>
         </p:nvSpPr>
@@ -9343,7 +9304,7 @@
       </p:sp>
       <p:sp>
         <p:nvSpPr>
-          <p:cNvPr id="68" name="평면도 한 장만 사용"/>
+          <p:cNvPr id="67" name="평면도 한 장만 사용"/>
           <p:cNvSpPr txBox="1"/>
           <p:nvPr/>
         </p:nvSpPr>
@@ -9382,7 +9343,7 @@
       </p:sp>
       <p:sp>
         <p:nvSpPr>
-          <p:cNvPr id="69" name="높이 정보를 알 수 없음 (수동 입력·고정값)"/>
+          <p:cNvPr id="68" name="높이 정보를 알 수 없음 (수동 입력·고정값)"/>
           <p:cNvSpPr txBox="1"/>
           <p:nvPr/>
         </p:nvSpPr>
@@ -9421,7 +9382,7 @@
       </p:sp>
       <p:sp>
         <p:nvSpPr>
-          <p:cNvPr id="70" name="목표 1"/>
+          <p:cNvPr id="69" name="목표 1"/>
           <p:cNvSpPr txBox="1"/>
           <p:nvPr/>
         </p:nvSpPr>
@@ -9460,7 +9421,7 @@
       </p:sp>
       <p:sp>
         <p:nvSpPr>
-          <p:cNvPr id="71" name="평면도와 입면도 정보를 통합해"/>
+          <p:cNvPr id="70" name="평면도와 입면도 정보를 통합해"/>
           <p:cNvSpPr txBox="1"/>
           <p:nvPr/>
         </p:nvSpPr>
@@ -9499,7 +9460,7 @@
       </p:sp>
       <p:sp>
         <p:nvSpPr>
-          <p:cNvPr id="72" name="완전한 3차원 BIM 생성"/>
+          <p:cNvPr id="71" name="완전한 3차원 BIM 생성"/>
           <p:cNvSpPr txBox="1"/>
           <p:nvPr/>
         </p:nvSpPr>
@@ -9538,7 +9499,7 @@
       </p:sp>
       <p:sp>
         <p:nvSpPr>
-          <p:cNvPr id="73" name="CAD 의존"/>
+          <p:cNvPr id="72" name="CAD 의존"/>
           <p:cNvSpPr txBox="1"/>
           <p:nvPr/>
         </p:nvSpPr>
@@ -9577,7 +9538,7 @@
       </p:sp>
       <p:sp>
         <p:nvSpPr>
-          <p:cNvPr id="74" name="한계 2"/>
+          <p:cNvPr id="73" name="한계 2"/>
           <p:cNvSpPr txBox="1"/>
           <p:nvPr/>
         </p:nvSpPr>
@@ -9616,7 +9577,7 @@
       </p:sp>
       <p:sp>
         <p:nvSpPr>
-          <p:cNvPr id="75" name="CAD 레이어·블록 같은 정보에 의존"/>
+          <p:cNvPr id="74" name="CAD 레이어·블록 같은 정보에 의존"/>
           <p:cNvSpPr txBox="1"/>
           <p:nvPr/>
         </p:nvSpPr>
@@ -9655,7 +9616,7 @@
       </p:sp>
       <p:sp>
         <p:nvSpPr>
-          <p:cNvPr id="76" name="이미지로만 남은 실제 도면에는 적용 불가"/>
+          <p:cNvPr id="75" name="이미지로만 남은 실제 도면에는 적용 불가"/>
           <p:cNvSpPr txBox="1"/>
           <p:nvPr/>
         </p:nvSpPr>
@@ -9694,7 +9655,7 @@
       </p:sp>
       <p:sp>
         <p:nvSpPr>
-          <p:cNvPr id="77" name="목표 2"/>
+          <p:cNvPr id="76" name="목표 2"/>
           <p:cNvSpPr txBox="1"/>
           <p:nvPr/>
         </p:nvSpPr>
@@ -9733,7 +9694,7 @@
       </p:sp>
       <p:sp>
         <p:nvSpPr>
-          <p:cNvPr id="78" name="CAD 정보 없이 이미지만으로"/>
+          <p:cNvPr id="77" name="CAD 정보 없이 이미지만으로"/>
           <p:cNvSpPr txBox="1"/>
           <p:nvPr/>
         </p:nvSpPr>
@@ -9772,7 +9733,7 @@
       </p:sp>
       <p:sp>
         <p:nvSpPr>
-          <p:cNvPr id="79" name="평면도·입면도 간 대응 객체 정의"/>
+          <p:cNvPr id="78" name="평면도·입면도 간 대응 객체 정의"/>
           <p:cNvSpPr txBox="1"/>
           <p:nvPr/>
         </p:nvSpPr>
@@ -9811,7 +9772,7 @@
       </p:sp>
       <p:sp>
         <p:nvSpPr>
-          <p:cNvPr id="80" name="치수 의존"/>
+          <p:cNvPr id="79" name="치수 의존"/>
           <p:cNvSpPr txBox="1"/>
           <p:nvPr/>
         </p:nvSpPr>
@@ -9850,7 +9811,7 @@
       </p:sp>
       <p:sp>
         <p:nvSpPr>
-          <p:cNvPr id="81" name="한계 3"/>
+          <p:cNvPr id="80" name="한계 3"/>
           <p:cNvSpPr txBox="1"/>
           <p:nvPr/>
         </p:nvSpPr>
@@ -9889,7 +9850,7 @@
       </p:sp>
       <p:sp>
         <p:nvSpPr>
-          <p:cNvPr id="82" name="치수 글자 인식(OCR)에 의존"/>
+          <p:cNvPr id="81" name="치수 글자 인식(OCR)에 의존"/>
           <p:cNvSpPr txBox="1"/>
           <p:nvPr/>
         </p:nvSpPr>
@@ -9928,7 +9889,7 @@
       </p:sp>
       <p:sp>
         <p:nvSpPr>
-          <p:cNvPr id="83" name="치수가 빠지거나 겹치면 부정확"/>
+          <p:cNvPr id="82" name="치수가 빠지거나 겹치면 부정확"/>
           <p:cNvSpPr txBox="1"/>
           <p:nvPr/>
         </p:nvSpPr>
@@ -9967,7 +9928,7 @@
       </p:sp>
       <p:sp>
         <p:nvSpPr>
-          <p:cNvPr id="84" name="목표 3"/>
+          <p:cNvPr id="83" name="목표 3"/>
           <p:cNvSpPr txBox="1"/>
           <p:nvPr/>
         </p:nvSpPr>
@@ -10006,7 +9967,7 @@
       </p:sp>
       <p:sp>
         <p:nvSpPr>
-          <p:cNvPr id="85" name="LMM(대형 멀티모달 모델)으로 축척을 인식해"/>
+          <p:cNvPr id="84" name="LMM(대형 멀티모달 모델)으로 축척을 인식해"/>
           <p:cNvSpPr txBox="1"/>
           <p:nvPr/>
         </p:nvSpPr>
@@ -10045,7 +10006,7 @@
       </p:sp>
       <p:sp>
         <p:nvSpPr>
-          <p:cNvPr id="86" name="안정적으로 치수 보정"/>
+          <p:cNvPr id="85" name="안정적으로 치수 보정"/>
           <p:cNvSpPr txBox="1"/>
           <p:nvPr/>
         </p:nvSpPr>
@@ -10084,7 +10045,7 @@
       </p:sp>
       <p:sp>
         <p:nvSpPr>
-          <p:cNvPr id="87" name="KEY MESSAGE"/>
+          <p:cNvPr id="86" name="KEY MESSAGE"/>
           <p:cNvSpPr txBox="1"/>
           <p:nvPr/>
         </p:nvSpPr>
@@ -10123,14 +10084,14 @@
       </p:sp>
       <p:sp>
         <p:nvSpPr>
-          <p:cNvPr id="88" name="딥러닝 기반 도면 객체 인식과 평면도·입면도 간 직접 매칭으로,"/>
+          <p:cNvPr id="87" name="딥러닝 기반 도면 객체 인식과 평면도·입면도 간 직접 매칭으로,정확한 3"/>
           <p:cNvSpPr txBox="1"/>
           <p:nvPr/>
         </p:nvSpPr>
         <p:spPr>
           <a:xfrm>
-            <a:off x="1854994" y="5755680"/>
-            <a:ext cx="4142615" cy="209550"/>
+            <a:off x="1854994" y="5725220"/>
+            <a:ext cx="4142615" cy="480020"/>
           </a:xfrm>
           <a:prstGeom prst="rect">
             <a:avLst/>
@@ -10139,10 +10100,13 @@
           <a:ln/>
         </p:spPr>
         <p:txBody>
-          <a:bodyPr wrap="none" lIns="0" tIns="0" rIns="0" bIns="0" rtlCol="0" anchor="ctr"/>
-          <a:lstStyle/>
-          <a:p>
-            <a:pPr algn="l" indent="0" marL="0">
+          <a:bodyPr wrap="none" lIns="0" tIns="0" rIns="0" bIns="0" rtlCol="0" anchor="t"/>
+          <a:lstStyle/>
+          <a:p>
+            <a:pPr algn="l" indent="0" marL="0">
+              <a:lnSpc>
+                <a:spcPts val="1890"/>
+              </a:lnSpc>
               <a:buNone/>
             </a:pPr>
             <a:r>
@@ -10158,30 +10122,11 @@
             </a:r>
             <a:endParaRPr lang="en-US" sz="1350" dirty="0"/>
           </a:p>
-        </p:txBody>
-      </p:sp>
-      <p:sp>
-        <p:nvSpPr>
-          <p:cNvPr id="89" name="정확한 3차원 정보를 가진 BIM 자동 생성 방법을 제안합니다."/>
-          <p:cNvSpPr txBox="1"/>
-          <p:nvPr/>
-        </p:nvSpPr>
-        <p:spPr>
-          <a:xfrm>
-            <a:off x="1854994" y="5995690"/>
-            <a:ext cx="4059845" cy="209550"/>
-          </a:xfrm>
-          <a:prstGeom prst="rect">
-            <a:avLst/>
-          </a:prstGeom>
-          <a:noFill/>
-          <a:ln/>
-        </p:spPr>
-        <p:txBody>
-          <a:bodyPr wrap="none" lIns="0" tIns="0" rIns="0" bIns="0" rtlCol="0" anchor="ctr"/>
-          <a:lstStyle/>
-          <a:p>
-            <a:pPr algn="l" indent="0" marL="0">
+          <a:p>
+            <a:pPr algn="l" indent="0" marL="0">
+              <a:lnSpc>
+                <a:spcPts val="1890"/>
+              </a:lnSpc>
               <a:buNone/>
             </a:pPr>
             <a:r>
@@ -10196,6 +10141,9 @@
               <a:t>정확한 3차원 정보를 가진 BIM 자동 생성 방법</a:t>
             </a:r>
             <a:pPr algn="l" indent="0" marL="0">
+              <a:lnSpc>
+                <a:spcPts val="1890"/>
+              </a:lnSpc>
               <a:buNone/>
             </a:pPr>
             <a:r>
@@ -10215,7 +10163,7 @@
       </p:sp>
       <p:sp>
         <p:nvSpPr>
-          <p:cNvPr id="90" name="석사 연구 발표  ·  평면도와 입면도 객체 인식 및 정보 통합을 통한 "/>
+          <p:cNvPr id="88" name="석사 연구 발표  ·  평면도와 입면도 객체 인식 및 정보 통합을 통한 "/>
           <p:cNvSpPr txBox="1"/>
           <p:nvPr/>
         </p:nvSpPr>
@@ -10254,7 +10202,7 @@
       </p:sp>
       <p:sp>
         <p:nvSpPr>
-          <p:cNvPr id="91" name="02 / 05"/>
+          <p:cNvPr id="89" name="02 / 05"/>
           <p:cNvSpPr txBox="1"/>
           <p:nvPr/>
         </p:nvSpPr>
@@ -11804,14 +11752,14 @@
       </p:sp>
       <p:sp>
         <p:nvSpPr>
-          <p:cNvPr id="45" name="도면 이미지만으로 객체 인식부터 BIM 생성까지"/>
+          <p:cNvPr id="45" name="도면 이미지만으로 객체 인식부터 BIM 생성까지전 과정을 자동화했습니다."/>
           <p:cNvSpPr txBox="1"/>
           <p:nvPr/>
         </p:nvSpPr>
         <p:spPr>
           <a:xfrm>
-            <a:off x="609600" y="666750"/>
-            <a:ext cx="5400681" cy="349250"/>
+            <a:off x="609600" y="653852"/>
+            <a:ext cx="5400681" cy="724297"/>
           </a:xfrm>
           <a:prstGeom prst="rect">
             <a:avLst/>
@@ -11820,10 +11768,13 @@
           <a:ln/>
         </p:spPr>
         <p:txBody>
-          <a:bodyPr wrap="none" lIns="0" tIns="0" rIns="0" bIns="0" rtlCol="0" anchor="ctr"/>
-          <a:lstStyle/>
-          <a:p>
-            <a:pPr algn="l" indent="0" marL="0">
+          <a:bodyPr wrap="none" lIns="0" tIns="0" rIns="0" bIns="0" rtlCol="0" anchor="t"/>
+          <a:lstStyle/>
+          <a:p>
+            <a:pPr algn="l" indent="0" marL="0">
+              <a:lnSpc>
+                <a:spcPts val="2852"/>
+              </a:lnSpc>
               <a:buNone/>
             </a:pPr>
             <a:r>
@@ -11839,30 +11790,11 @@
             </a:r>
             <a:endParaRPr lang="en-US" sz="2300" dirty="0"/>
           </a:p>
-        </p:txBody>
-      </p:sp>
-      <p:sp>
-        <p:nvSpPr>
-          <p:cNvPr id="46" name="전 과정을 자동화했습니다."/>
-          <p:cNvSpPr txBox="1"/>
-          <p:nvPr/>
-        </p:nvSpPr>
-        <p:spPr>
-          <a:xfrm>
-            <a:off x="609600" y="1028898"/>
-            <a:ext cx="2999186" cy="349250"/>
-          </a:xfrm>
-          <a:prstGeom prst="rect">
-            <a:avLst/>
-          </a:prstGeom>
-          <a:noFill/>
-          <a:ln/>
-        </p:spPr>
-        <p:txBody>
-          <a:bodyPr wrap="none" lIns="0" tIns="0" rIns="0" bIns="0" rtlCol="0" anchor="ctr"/>
-          <a:lstStyle/>
-          <a:p>
-            <a:pPr algn="l" indent="0" marL="0">
+          <a:p>
+            <a:pPr algn="l" indent="0" marL="0">
+              <a:lnSpc>
+                <a:spcPts val="2852"/>
+              </a:lnSpc>
               <a:buNone/>
             </a:pPr>
             <a:r>
@@ -11877,6 +11809,9 @@
               <a:t>전 과정을 자동화</a:t>
             </a:r>
             <a:pPr algn="l" indent="0" marL="0">
+              <a:lnSpc>
+                <a:spcPts val="2852"/>
+              </a:lnSpc>
               <a:buNone/>
             </a:pPr>
             <a:r>
@@ -11896,7 +11831,7 @@
       </p:sp>
       <p:sp>
         <p:nvSpPr>
-          <p:cNvPr id="47" name="01"/>
+          <p:cNvPr id="46" name="01"/>
           <p:cNvSpPr txBox="1"/>
           <p:nvPr/>
         </p:nvSpPr>
@@ -11935,7 +11870,7 @@
       </p:sp>
       <p:sp>
         <p:nvSpPr>
-          <p:cNvPr id="48" name="02"/>
+          <p:cNvPr id="47" name="02"/>
           <p:cNvSpPr txBox="1"/>
           <p:nvPr/>
         </p:nvSpPr>
@@ -11974,7 +11909,7 @@
       </p:sp>
       <p:sp>
         <p:nvSpPr>
-          <p:cNvPr id="49" name="03"/>
+          <p:cNvPr id="48" name="03"/>
           <p:cNvSpPr txBox="1"/>
           <p:nvPr/>
         </p:nvSpPr>
@@ -12013,7 +11948,7 @@
       </p:sp>
       <p:sp>
         <p:nvSpPr>
-          <p:cNvPr id="50" name="04"/>
+          <p:cNvPr id="49" name="04"/>
           <p:cNvSpPr txBox="1"/>
           <p:nvPr/>
         </p:nvSpPr>
@@ -12052,7 +11987,7 @@
       </p:sp>
       <p:sp>
         <p:nvSpPr>
-          <p:cNvPr id="51" name="05"/>
+          <p:cNvPr id="50" name="05"/>
           <p:cNvSpPr txBox="1"/>
           <p:nvPr/>
         </p:nvSpPr>
@@ -12091,7 +12026,7 @@
       </p:sp>
       <p:sp>
         <p:nvSpPr>
-          <p:cNvPr id="52" name="도면 해석"/>
+          <p:cNvPr id="51" name="도면 해석"/>
           <p:cNvSpPr txBox="1"/>
           <p:nvPr/>
         </p:nvSpPr>
@@ -12130,7 +12065,7 @@
       </p:sp>
       <p:sp>
         <p:nvSpPr>
-          <p:cNvPr id="53" name="3D 재구성"/>
+          <p:cNvPr id="52" name="3D 재구성"/>
           <p:cNvSpPr txBox="1"/>
           <p:nvPr/>
         </p:nvSpPr>
@@ -12169,7 +12104,7 @@
       </p:sp>
       <p:sp>
         <p:nvSpPr>
-          <p:cNvPr id="54" name="STEP 1"/>
+          <p:cNvPr id="53" name="STEP 1"/>
           <p:cNvSpPr txBox="1"/>
           <p:nvPr/>
         </p:nvSpPr>
@@ -12208,7 +12143,7 @@
       </p:sp>
       <p:sp>
         <p:nvSpPr>
-          <p:cNvPr id="55" name="도면 이미지 입력"/>
+          <p:cNvPr id="54" name="도면 이미지 입력"/>
           <p:cNvSpPr txBox="1"/>
           <p:nvPr/>
         </p:nvSpPr>
@@ -12247,7 +12182,7 @@
       </p:sp>
       <p:sp>
         <p:nvSpPr>
-          <p:cNvPr id="56" name="평면도·입면도 이미지만 입력"/>
+          <p:cNvPr id="55" name="평면도·입면도 이미지만 입력"/>
           <p:cNvSpPr txBox="1"/>
           <p:nvPr/>
         </p:nvSpPr>
@@ -12286,7 +12221,7 @@
       </p:sp>
       <p:sp>
         <p:nvSpPr>
-          <p:cNvPr id="57" name="평면도"/>
+          <p:cNvPr id="56" name="평면도"/>
           <p:cNvSpPr txBox="1"/>
           <p:nvPr/>
         </p:nvSpPr>
@@ -12325,7 +12260,7 @@
       </p:sp>
       <p:sp>
         <p:nvSpPr>
-          <p:cNvPr id="58" name="창·문의 평면 위치 X·Y"/>
+          <p:cNvPr id="57" name="창·문의 평면 위치 X·Y"/>
           <p:cNvSpPr txBox="1"/>
           <p:nvPr/>
         </p:nvSpPr>
@@ -12378,7 +12313,7 @@
       </p:sp>
       <p:sp>
         <p:nvSpPr>
-          <p:cNvPr id="59" name="입면도"/>
+          <p:cNvPr id="58" name="입면도"/>
           <p:cNvSpPr txBox="1"/>
           <p:nvPr/>
         </p:nvSpPr>
@@ -12417,7 +12352,7 @@
       </p:sp>
       <p:sp>
         <p:nvSpPr>
-          <p:cNvPr id="60" name="창·문이 놓인 높이 Z"/>
+          <p:cNvPr id="59" name="창·문이 놓인 높이 Z"/>
           <p:cNvSpPr txBox="1"/>
           <p:nvPr/>
         </p:nvSpPr>
@@ -12470,7 +12405,7 @@
       </p:sp>
       <p:sp>
         <p:nvSpPr>
-          <p:cNvPr id="61" name="입력 형식"/>
+          <p:cNvPr id="60" name="입력 형식"/>
           <p:cNvSpPr txBox="1"/>
           <p:nvPr/>
         </p:nvSpPr>
@@ -12509,7 +12444,7 @@
       </p:sp>
       <p:sp>
         <p:nvSpPr>
-          <p:cNvPr id="62" name="래스터 이미지"/>
+          <p:cNvPr id="61" name="래스터 이미지"/>
           <p:cNvSpPr txBox="1"/>
           <p:nvPr/>
         </p:nvSpPr>
@@ -12548,7 +12483,7 @@
       </p:sp>
       <p:sp>
         <p:nvSpPr>
-          <p:cNvPr id="63" name="(픽셀 기반)"/>
+          <p:cNvPr id="62" name="(픽셀 기반)"/>
           <p:cNvSpPr txBox="1"/>
           <p:nvPr/>
         </p:nvSpPr>
@@ -12587,7 +12522,7 @@
       </p:sp>
       <p:sp>
         <p:nvSpPr>
-          <p:cNvPr id="64" name="STEP 2"/>
+          <p:cNvPr id="63" name="STEP 2"/>
           <p:cNvSpPr txBox="1"/>
           <p:nvPr/>
         </p:nvSpPr>
@@ -12626,7 +12561,7 @@
       </p:sp>
       <p:sp>
         <p:nvSpPr>
-          <p:cNvPr id="65" name="객체 인식"/>
+          <p:cNvPr id="64" name="객체 인식"/>
           <p:cNvSpPr txBox="1"/>
           <p:nvPr/>
         </p:nvSpPr>
@@ -12665,7 +12600,7 @@
       </p:sp>
       <p:sp>
         <p:nvSpPr>
-          <p:cNvPr id="66" name="도면 속 벽·창문·문 인식"/>
+          <p:cNvPr id="65" name="도면 속 벽·창문·문 인식"/>
           <p:cNvSpPr txBox="1"/>
           <p:nvPr/>
         </p:nvSpPr>
@@ -12704,7 +12639,7 @@
       </p:sp>
       <p:sp>
         <p:nvSpPr>
-          <p:cNvPr id="67" name="평면도"/>
+          <p:cNvPr id="66" name="평면도"/>
           <p:cNvSpPr txBox="1"/>
           <p:nvPr/>
         </p:nvSpPr>
@@ -12743,14 +12678,14 @@
       </p:sp>
       <p:sp>
         <p:nvSpPr>
-          <p:cNvPr id="68" name="외벽 창·문을 동·서·남·북"/>
+          <p:cNvPr id="67" name="외벽 창·문을 동·서·남·북방향별로 정리"/>
           <p:cNvSpPr txBox="1"/>
           <p:nvPr/>
         </p:nvSpPr>
         <p:spPr>
           <a:xfrm>
-            <a:off x="4000500" y="4502547"/>
-            <a:ext cx="1134594" cy="146050"/>
+            <a:off x="4000500" y="4470797"/>
+            <a:ext cx="1134594" cy="355600"/>
           </a:xfrm>
           <a:prstGeom prst="rect">
             <a:avLst/>
@@ -12759,10 +12694,13 @@
           <a:ln/>
         </p:spPr>
         <p:txBody>
-          <a:bodyPr wrap="none" lIns="0" tIns="0" rIns="0" bIns="0" rtlCol="0" anchor="ctr"/>
-          <a:lstStyle/>
-          <a:p>
-            <a:pPr algn="l" indent="0" marL="0">
+          <a:bodyPr wrap="none" lIns="0" tIns="0" rIns="0" bIns="0" rtlCol="0" anchor="t"/>
+          <a:lstStyle/>
+          <a:p>
+            <a:pPr algn="l" indent="0" marL="0">
+              <a:lnSpc>
+                <a:spcPts val="1400"/>
+              </a:lnSpc>
               <a:buNone/>
             </a:pPr>
             <a:r>
@@ -12778,30 +12716,11 @@
             </a:r>
             <a:endParaRPr lang="en-US" sz="950" dirty="0"/>
           </a:p>
-        </p:txBody>
-      </p:sp>
-      <p:sp>
-        <p:nvSpPr>
-          <p:cNvPr id="69" name="방향별로 정리"/>
-          <p:cNvSpPr txBox="1"/>
-          <p:nvPr/>
-        </p:nvSpPr>
-        <p:spPr>
-          <a:xfrm>
-            <a:off x="4000500" y="4680347"/>
-            <a:ext cx="678954" cy="146050"/>
-          </a:xfrm>
-          <a:prstGeom prst="rect">
-            <a:avLst/>
-          </a:prstGeom>
-          <a:noFill/>
-          <a:ln/>
-        </p:spPr>
-        <p:txBody>
-          <a:bodyPr wrap="none" lIns="0" tIns="0" rIns="0" bIns="0" rtlCol="0" anchor="ctr"/>
-          <a:lstStyle/>
-          <a:p>
-            <a:pPr algn="l" indent="0" marL="0">
+          <a:p>
+            <a:pPr algn="l" indent="0" marL="0">
+              <a:lnSpc>
+                <a:spcPts val="1400"/>
+              </a:lnSpc>
               <a:buNone/>
             </a:pPr>
             <a:r>
@@ -12821,7 +12740,7 @@
       </p:sp>
       <p:sp>
         <p:nvSpPr>
-          <p:cNvPr id="70" name="입면도"/>
+          <p:cNvPr id="68" name="입면도"/>
           <p:cNvSpPr txBox="1"/>
           <p:nvPr/>
         </p:nvSpPr>
@@ -12860,14 +12779,14 @@
       </p:sp>
       <p:sp>
         <p:nvSpPr>
-          <p:cNvPr id="71" name="같은 층 창·문끼리 묶어"/>
+          <p:cNvPr id="69" name="같은 층 창·문끼리 묶어층 높이 파악"/>
           <p:cNvSpPr txBox="1"/>
           <p:nvPr/>
         </p:nvSpPr>
         <p:spPr>
           <a:xfrm>
-            <a:off x="4000500" y="4908947"/>
-            <a:ext cx="1072332" cy="146050"/>
+            <a:off x="4000500" y="4877197"/>
+            <a:ext cx="1072332" cy="355600"/>
           </a:xfrm>
           <a:prstGeom prst="rect">
             <a:avLst/>
@@ -12876,10 +12795,13 @@
           <a:ln/>
         </p:spPr>
         <p:txBody>
-          <a:bodyPr wrap="none" lIns="0" tIns="0" rIns="0" bIns="0" rtlCol="0" anchor="ctr"/>
-          <a:lstStyle/>
-          <a:p>
-            <a:pPr algn="l" indent="0" marL="0">
+          <a:bodyPr wrap="none" lIns="0" tIns="0" rIns="0" bIns="0" rtlCol="0" anchor="t"/>
+          <a:lstStyle/>
+          <a:p>
+            <a:pPr algn="l" indent="0" marL="0">
+              <a:lnSpc>
+                <a:spcPts val="1400"/>
+              </a:lnSpc>
               <a:buNone/>
             </a:pPr>
             <a:r>
@@ -12895,30 +12817,11 @@
             </a:r>
             <a:endParaRPr lang="en-US" sz="950" dirty="0"/>
           </a:p>
-        </p:txBody>
-      </p:sp>
-      <p:sp>
-        <p:nvSpPr>
-          <p:cNvPr id="72" name="층 높이 파악"/>
-          <p:cNvSpPr txBox="1"/>
-          <p:nvPr/>
-        </p:nvSpPr>
-        <p:spPr>
-          <a:xfrm>
-            <a:off x="4000500" y="5086747"/>
-            <a:ext cx="602456" cy="146050"/>
-          </a:xfrm>
-          <a:prstGeom prst="rect">
-            <a:avLst/>
-          </a:prstGeom>
-          <a:noFill/>
-          <a:ln/>
-        </p:spPr>
-        <p:txBody>
-          <a:bodyPr wrap="none" lIns="0" tIns="0" rIns="0" bIns="0" rtlCol="0" anchor="ctr"/>
-          <a:lstStyle/>
-          <a:p>
-            <a:pPr algn="l" indent="0" marL="0">
+          <a:p>
+            <a:pPr algn="l" indent="0" marL="0">
+              <a:lnSpc>
+                <a:spcPts val="1400"/>
+              </a:lnSpc>
               <a:buNone/>
             </a:pPr>
             <a:r>
@@ -12938,7 +12841,7 @@
       </p:sp>
       <p:sp>
         <p:nvSpPr>
-          <p:cNvPr id="73" name="핵심 기법"/>
+          <p:cNvPr id="70" name="핵심 기법"/>
           <p:cNvSpPr txBox="1"/>
           <p:nvPr/>
         </p:nvSpPr>
@@ -12977,7 +12880,7 @@
       </p:sp>
       <p:sp>
         <p:nvSpPr>
-          <p:cNvPr id="74" name="YOLO + SAHI"/>
+          <p:cNvPr id="71" name="YOLO + SAHI"/>
           <p:cNvSpPr txBox="1"/>
           <p:nvPr/>
         </p:nvSpPr>
@@ -13016,7 +12919,7 @@
       </p:sp>
       <p:sp>
         <p:nvSpPr>
-          <p:cNvPr id="75" name="(작은 객체 분할 추론)"/>
+          <p:cNvPr id="72" name="(작은 객체 분할 추론)"/>
           <p:cNvSpPr txBox="1"/>
           <p:nvPr/>
         </p:nvSpPr>
@@ -13055,7 +12958,7 @@
       </p:sp>
       <p:sp>
         <p:nvSpPr>
-          <p:cNvPr id="76" name="DBSCAN 층별 클러스터링"/>
+          <p:cNvPr id="73" name="DBSCAN 층별 클러스터링"/>
           <p:cNvSpPr txBox="1"/>
           <p:nvPr/>
         </p:nvSpPr>
@@ -13094,7 +12997,7 @@
       </p:sp>
       <p:sp>
         <p:nvSpPr>
-          <p:cNvPr id="77" name="STEP 3"/>
+          <p:cNvPr id="74" name="STEP 3"/>
           <p:cNvSpPr txBox="1"/>
           <p:nvPr/>
         </p:nvSpPr>
@@ -13133,7 +13036,7 @@
       </p:sp>
       <p:sp>
         <p:nvSpPr>
-          <p:cNvPr id="78" name="대응 객체 매칭"/>
+          <p:cNvPr id="75" name="대응 객체 매칭"/>
           <p:cNvSpPr txBox="1"/>
           <p:nvPr/>
         </p:nvSpPr>
@@ -13172,7 +13075,7 @@
       </p:sp>
       <p:sp>
         <p:nvSpPr>
-          <p:cNvPr id="79" name="평면도·입면도의 같은 객체끼리 짝짓기"/>
+          <p:cNvPr id="76" name="평면도·입면도의 같은 객체끼리 짝짓기"/>
           <p:cNvSpPr txBox="1"/>
           <p:nvPr/>
         </p:nvSpPr>
@@ -13211,7 +13114,7 @@
       </p:sp>
       <p:sp>
         <p:nvSpPr>
-          <p:cNvPr id="80" name="축척"/>
+          <p:cNvPr id="77" name="축척"/>
           <p:cNvSpPr txBox="1"/>
           <p:nvPr/>
         </p:nvSpPr>
@@ -13250,14 +13153,14 @@
       </p:sp>
       <p:sp>
         <p:nvSpPr>
-          <p:cNvPr id="81" name="LMM(GPT-4o)이 축척을 읽어"/>
+          <p:cNvPr id="78" name="LMM(GPT-4o)이 축척을 읽어픽셀 → 실제 길이 환산"/>
           <p:cNvSpPr txBox="1"/>
           <p:nvPr/>
         </p:nvSpPr>
         <p:spPr>
           <a:xfrm>
-            <a:off x="6819900" y="4502547"/>
-            <a:ext cx="1483765" cy="146050"/>
+            <a:off x="6819900" y="4470797"/>
+            <a:ext cx="1483765" cy="355600"/>
           </a:xfrm>
           <a:prstGeom prst="rect">
             <a:avLst/>
@@ -13266,10 +13169,13 @@
           <a:ln/>
         </p:spPr>
         <p:txBody>
-          <a:bodyPr wrap="none" lIns="0" tIns="0" rIns="0" bIns="0" rtlCol="0" anchor="ctr"/>
-          <a:lstStyle/>
-          <a:p>
-            <a:pPr algn="l" indent="0" marL="0">
+          <a:bodyPr wrap="none" lIns="0" tIns="0" rIns="0" bIns="0" rtlCol="0" anchor="t"/>
+          <a:lstStyle/>
+          <a:p>
+            <a:pPr algn="l" indent="0" marL="0">
+              <a:lnSpc>
+                <a:spcPts val="1400"/>
+              </a:lnSpc>
               <a:buNone/>
             </a:pPr>
             <a:r>
@@ -13285,30 +13191,11 @@
             </a:r>
             <a:endParaRPr lang="en-US" sz="950" dirty="0"/>
           </a:p>
-        </p:txBody>
-      </p:sp>
-      <p:sp>
-        <p:nvSpPr>
-          <p:cNvPr id="82" name="픽셀 → 실제 길이 환산"/>
-          <p:cNvSpPr txBox="1"/>
-          <p:nvPr/>
-        </p:nvSpPr>
-        <p:spPr>
-          <a:xfrm>
-            <a:off x="6819900" y="4680347"/>
-            <a:ext cx="1072017" cy="146050"/>
-          </a:xfrm>
-          <a:prstGeom prst="rect">
-            <a:avLst/>
-          </a:prstGeom>
-          <a:noFill/>
-          <a:ln/>
-        </p:spPr>
-        <p:txBody>
-          <a:bodyPr wrap="none" lIns="0" tIns="0" rIns="0" bIns="0" rtlCol="0" anchor="ctr"/>
-          <a:lstStyle/>
-          <a:p>
-            <a:pPr algn="l" indent="0" marL="0">
+          <a:p>
+            <a:pPr algn="l" indent="0" marL="0">
+              <a:lnSpc>
+                <a:spcPts val="1400"/>
+              </a:lnSpc>
               <a:buNone/>
             </a:pPr>
             <a:r>
@@ -13323,6 +13210,9 @@
               <a:t>픽셀 → 실제 길이</a:t>
             </a:r>
             <a:pPr algn="l" indent="0" marL="0">
+              <a:lnSpc>
+                <a:spcPts val="1400"/>
+              </a:lnSpc>
               <a:buNone/>
             </a:pPr>
             <a:r>
@@ -13342,7 +13232,7 @@
       </p:sp>
       <p:sp>
         <p:nvSpPr>
-          <p:cNvPr id="83" name="1 px = 33.88 mm"/>
+          <p:cNvPr id="79" name="1 px = 33.88 mm"/>
           <p:cNvSpPr txBox="1"/>
           <p:nvPr/>
         </p:nvSpPr>
@@ -13381,7 +13271,7 @@
       </p:sp>
       <p:sp>
         <p:nvSpPr>
-          <p:cNvPr id="84" name="예시"/>
+          <p:cNvPr id="80" name="예시"/>
           <p:cNvSpPr txBox="1"/>
           <p:nvPr/>
         </p:nvSpPr>
@@ -13420,7 +13310,7 @@
       </p:sp>
       <p:sp>
         <p:nvSpPr>
-          <p:cNvPr id="85" name="매칭"/>
+          <p:cNvPr id="81" name="매칭"/>
           <p:cNvSpPr txBox="1"/>
           <p:nvPr/>
         </p:nvSpPr>
@@ -13459,7 +13349,7 @@
       </p:sp>
       <p:sp>
         <p:nvSpPr>
-          <p:cNvPr id="86" name="X·Y + Z → 3차원 위치 확정"/>
+          <p:cNvPr id="82" name="X·Y + Z → 3차원 위치 확정"/>
           <p:cNvSpPr txBox="1"/>
           <p:nvPr/>
         </p:nvSpPr>
@@ -13512,7 +13402,7 @@
       </p:sp>
       <p:sp>
         <p:nvSpPr>
-          <p:cNvPr id="87" name="핵심 기법"/>
+          <p:cNvPr id="83" name="핵심 기법"/>
           <p:cNvSpPr txBox="1"/>
           <p:nvPr/>
         </p:nvSpPr>
@@ -13551,7 +13441,7 @@
       </p:sp>
       <p:sp>
         <p:nvSpPr>
-          <p:cNvPr id="88" name="LMM 기반 축척 보정"/>
+          <p:cNvPr id="84" name="LMM 기반 축척 보정"/>
           <p:cNvSpPr txBox="1"/>
           <p:nvPr/>
         </p:nvSpPr>
@@ -13590,7 +13480,7 @@
       </p:sp>
       <p:sp>
         <p:nvSpPr>
-          <p:cNvPr id="89" name="헝가리안 알고리즘"/>
+          <p:cNvPr id="85" name="헝가리안 알고리즘"/>
           <p:cNvSpPr txBox="1"/>
           <p:nvPr/>
         </p:nvSpPr>
@@ -13629,7 +13519,7 @@
       </p:sp>
       <p:sp>
         <p:nvSpPr>
-          <p:cNvPr id="90" name="(최적 1:1 매칭)"/>
+          <p:cNvPr id="86" name="(최적 1:1 매칭)"/>
           <p:cNvSpPr txBox="1"/>
           <p:nvPr/>
         </p:nvSpPr>
@@ -13668,7 +13558,7 @@
       </p:sp>
       <p:sp>
         <p:nvSpPr>
-          <p:cNvPr id="91" name="STEP 4"/>
+          <p:cNvPr id="87" name="STEP 4"/>
           <p:cNvSpPr txBox="1"/>
           <p:nvPr/>
         </p:nvSpPr>
@@ -13707,7 +13597,7 @@
       </p:sp>
       <p:sp>
         <p:nvSpPr>
-          <p:cNvPr id="92" name="BIM 자동 생성"/>
+          <p:cNvPr id="88" name="BIM 자동 생성"/>
           <p:cNvSpPr txBox="1"/>
           <p:nvPr/>
         </p:nvSpPr>
@@ -13746,7 +13636,7 @@
       </p:sp>
       <p:sp>
         <p:nvSpPr>
-          <p:cNvPr id="93" name="높이까지 갖춘 3D BIM 모델"/>
+          <p:cNvPr id="89" name="높이까지 갖춘 3D BIM 모델"/>
           <p:cNvSpPr txBox="1"/>
           <p:nvPr/>
         </p:nvSpPr>
@@ -13785,7 +13675,7 @@
       </p:sp>
       <p:sp>
         <p:nvSpPr>
-          <p:cNvPr id="94" name="벽체"/>
+          <p:cNvPr id="90" name="벽체"/>
           <p:cNvSpPr txBox="1"/>
           <p:nvPr/>
         </p:nvSpPr>
@@ -13824,14 +13714,14 @@
       </p:sp>
       <p:sp>
         <p:nvSpPr>
-          <p:cNvPr id="95" name="골격선(스켈레톤)으로"/>
+          <p:cNvPr id="91" name="골격선(스켈레톤)으로벽 중심선 추출"/>
           <p:cNvSpPr txBox="1"/>
           <p:nvPr/>
         </p:nvSpPr>
         <p:spPr>
           <a:xfrm>
-            <a:off x="9639300" y="4502547"/>
-            <a:ext cx="1044041" cy="146050"/>
+            <a:off x="9639300" y="4470797"/>
+            <a:ext cx="1044041" cy="355600"/>
           </a:xfrm>
           <a:prstGeom prst="rect">
             <a:avLst/>
@@ -13840,10 +13730,13 @@
           <a:ln/>
         </p:spPr>
         <p:txBody>
-          <a:bodyPr wrap="none" lIns="0" tIns="0" rIns="0" bIns="0" rtlCol="0" anchor="ctr"/>
-          <a:lstStyle/>
-          <a:p>
-            <a:pPr algn="l" indent="0" marL="0">
+          <a:bodyPr wrap="none" lIns="0" tIns="0" rIns="0" bIns="0" rtlCol="0" anchor="t"/>
+          <a:lstStyle/>
+          <a:p>
+            <a:pPr algn="l" indent="0" marL="0">
+              <a:lnSpc>
+                <a:spcPts val="1400"/>
+              </a:lnSpc>
               <a:buNone/>
             </a:pPr>
             <a:r>
@@ -13859,30 +13752,11 @@
             </a:r>
             <a:endParaRPr lang="en-US" sz="950" dirty="0"/>
           </a:p>
-        </p:txBody>
-      </p:sp>
-      <p:sp>
-        <p:nvSpPr>
-          <p:cNvPr id="96" name="벽 중심선 추출"/>
-          <p:cNvSpPr txBox="1"/>
-          <p:nvPr/>
-        </p:nvSpPr>
-        <p:spPr>
-          <a:xfrm>
-            <a:off x="9639300" y="4680347"/>
-            <a:ext cx="703163" cy="146050"/>
-          </a:xfrm>
-          <a:prstGeom prst="rect">
-            <a:avLst/>
-          </a:prstGeom>
-          <a:noFill/>
-          <a:ln/>
-        </p:spPr>
-        <p:txBody>
-          <a:bodyPr wrap="none" lIns="0" tIns="0" rIns="0" bIns="0" rtlCol="0" anchor="ctr"/>
-          <a:lstStyle/>
-          <a:p>
-            <a:pPr algn="l" indent="0" marL="0">
+          <a:p>
+            <a:pPr algn="l" indent="0" marL="0">
+              <a:lnSpc>
+                <a:spcPts val="1400"/>
+              </a:lnSpc>
               <a:buNone/>
             </a:pPr>
             <a:r>
@@ -13902,7 +13776,7 @@
       </p:sp>
       <p:sp>
         <p:nvSpPr>
-          <p:cNvPr id="97" name="창·문"/>
+          <p:cNvPr id="92" name="창·문"/>
           <p:cNvSpPr txBox="1"/>
           <p:nvPr/>
         </p:nvSpPr>
@@ -13941,14 +13815,14 @@
       </p:sp>
       <p:sp>
         <p:nvSpPr>
-          <p:cNvPr id="98" name="붙일 벽 결정(호스팅) 후"/>
+          <p:cNvPr id="93" name="붙일 벽 결정(호스팅) 후Revit API로 BIM 생성"/>
           <p:cNvSpPr txBox="1"/>
           <p:nvPr/>
         </p:nvSpPr>
         <p:spPr>
           <a:xfrm>
-            <a:off x="9639300" y="4908947"/>
-            <a:ext cx="1126180" cy="146050"/>
+            <a:off x="9639300" y="4877197"/>
+            <a:ext cx="1126180" cy="355600"/>
           </a:xfrm>
           <a:prstGeom prst="rect">
             <a:avLst/>
@@ -13957,10 +13831,13 @@
           <a:ln/>
         </p:spPr>
         <p:txBody>
-          <a:bodyPr wrap="none" lIns="0" tIns="0" rIns="0" bIns="0" rtlCol="0" anchor="ctr"/>
-          <a:lstStyle/>
-          <a:p>
-            <a:pPr algn="l" indent="0" marL="0">
+          <a:bodyPr wrap="none" lIns="0" tIns="0" rIns="0" bIns="0" rtlCol="0" anchor="t"/>
+          <a:lstStyle/>
+          <a:p>
+            <a:pPr algn="l" indent="0" marL="0">
+              <a:lnSpc>
+                <a:spcPts val="1400"/>
+              </a:lnSpc>
               <a:buNone/>
             </a:pPr>
             <a:r>
@@ -13976,30 +13853,11 @@
             </a:r>
             <a:endParaRPr lang="en-US" sz="950" dirty="0"/>
           </a:p>
-        </p:txBody>
-      </p:sp>
-      <p:sp>
-        <p:nvSpPr>
-          <p:cNvPr id="99" name="Revit API로 BIM 생성"/>
-          <p:cNvSpPr txBox="1"/>
-          <p:nvPr/>
-        </p:nvSpPr>
-        <p:spPr>
-          <a:xfrm>
-            <a:off x="9639300" y="5086747"/>
-            <a:ext cx="1092000" cy="146050"/>
-          </a:xfrm>
-          <a:prstGeom prst="rect">
-            <a:avLst/>
-          </a:prstGeom>
-          <a:noFill/>
-          <a:ln/>
-        </p:spPr>
-        <p:txBody>
-          <a:bodyPr wrap="none" lIns="0" tIns="0" rIns="0" bIns="0" rtlCol="0" anchor="ctr"/>
-          <a:lstStyle/>
-          <a:p>
-            <a:pPr algn="l" indent="0" marL="0">
+          <a:p>
+            <a:pPr algn="l" indent="0" marL="0">
+              <a:lnSpc>
+                <a:spcPts val="1400"/>
+              </a:lnSpc>
               <a:buNone/>
             </a:pPr>
             <a:r>
@@ -14019,7 +13877,7 @@
       </p:sp>
       <p:sp>
         <p:nvSpPr>
-          <p:cNvPr id="100" name="핵심 기법"/>
+          <p:cNvPr id="94" name="핵심 기법"/>
           <p:cNvSpPr txBox="1"/>
           <p:nvPr/>
         </p:nvSpPr>
@@ -14058,7 +13916,7 @@
       </p:sp>
       <p:sp>
         <p:nvSpPr>
-          <p:cNvPr id="101" name="스켈레톤 기반 벽체 추출"/>
+          <p:cNvPr id="95" name="스켈레톤 기반 벽체 추출"/>
           <p:cNvSpPr txBox="1"/>
           <p:nvPr/>
         </p:nvSpPr>
@@ -14097,7 +13955,7 @@
       </p:sp>
       <p:sp>
         <p:nvSpPr>
-          <p:cNvPr id="102" name="Revit API"/>
+          <p:cNvPr id="96" name="Revit API"/>
           <p:cNvSpPr txBox="1"/>
           <p:nvPr/>
         </p:nvSpPr>
@@ -14136,7 +13994,7 @@
       </p:sp>
       <p:sp>
         <p:nvSpPr>
-          <p:cNvPr id="103" name="석사 연구 발표  ·  평면도와 입면도 객체 인식 및 정보 통합을 통한 "/>
+          <p:cNvPr id="97" name="석사 연구 발표  ·  평면도와 입면도 객체 인식 및 정보 통합을 통한 "/>
           <p:cNvSpPr txBox="1"/>
           <p:nvPr/>
         </p:nvSpPr>
@@ -14175,7 +14033,7 @@
       </p:sp>
       <p:sp>
         <p:nvSpPr>
-          <p:cNvPr id="104" name="03 / 05"/>
+          <p:cNvPr id="98" name="03 / 05"/>
           <p:cNvSpPr txBox="1"/>
           <p:nvPr/>
         </p:nvSpPr>
@@ -17991,14 +17849,14 @@
       </p:sp>
       <p:sp>
         <p:nvSpPr>
-          <p:cNvPr id="93" name="도면 종류별 최적"/>
+          <p:cNvPr id="93" name="도면 종류별 최적학습·인식 전략 제안"/>
           <p:cNvSpPr txBox="1"/>
           <p:nvPr/>
         </p:nvSpPr>
         <p:spPr>
           <a:xfrm>
-            <a:off x="1473200" y="2204442"/>
-            <a:ext cx="1074120" cy="196850"/>
+            <a:off x="1473200" y="2173486"/>
+            <a:ext cx="1262378" cy="455612"/>
           </a:xfrm>
           <a:prstGeom prst="rect">
             <a:avLst/>
@@ -18007,10 +17865,13 @@
           <a:ln/>
         </p:spPr>
         <p:txBody>
-          <a:bodyPr wrap="none" lIns="0" tIns="0" rIns="0" bIns="0" rtlCol="0" anchor="ctr"/>
-          <a:lstStyle/>
-          <a:p>
-            <a:pPr algn="l" indent="0" marL="0">
+          <a:bodyPr wrap="none" lIns="0" tIns="0" rIns="0" bIns="0" rtlCol="0" anchor="t"/>
+          <a:lstStyle/>
+          <a:p>
+            <a:pPr algn="l" indent="0" marL="0">
+              <a:lnSpc>
+                <a:spcPts val="1794"/>
+              </a:lnSpc>
               <a:buNone/>
             </a:pPr>
             <a:r>
@@ -18026,30 +17887,11 @@
             </a:r>
             <a:endParaRPr lang="en-US" sz="1300" dirty="0"/>
           </a:p>
-        </p:txBody>
-      </p:sp>
-      <p:sp>
-        <p:nvSpPr>
-          <p:cNvPr id="94" name="학습·인식 전략 제안"/>
-          <p:cNvSpPr txBox="1"/>
-          <p:nvPr/>
-        </p:nvSpPr>
-        <p:spPr>
-          <a:xfrm>
-            <a:off x="1473200" y="2432248"/>
-            <a:ext cx="1262378" cy="196850"/>
-          </a:xfrm>
-          <a:prstGeom prst="rect">
-            <a:avLst/>
-          </a:prstGeom>
-          <a:noFill/>
-          <a:ln/>
-        </p:spPr>
-        <p:txBody>
-          <a:bodyPr wrap="none" lIns="0" tIns="0" rIns="0" bIns="0" rtlCol="0" anchor="ctr"/>
-          <a:lstStyle/>
-          <a:p>
-            <a:pPr algn="l" indent="0" marL="0">
+          <a:p>
+            <a:pPr algn="l" indent="0" marL="0">
+              <a:lnSpc>
+                <a:spcPts val="1794"/>
+              </a:lnSpc>
               <a:buNone/>
             </a:pPr>
             <a:r>
@@ -18069,7 +17911,7 @@
       </p:sp>
       <p:sp>
         <p:nvSpPr>
-          <p:cNvPr id="95" name="도면 객체 인식 mAP@0.5"/>
+          <p:cNvPr id="94" name="도면 객체 인식 mAP@0.5"/>
           <p:cNvSpPr txBox="1"/>
           <p:nvPr/>
         </p:nvSpPr>
@@ -18108,7 +17950,7 @@
       </p:sp>
       <p:sp>
         <p:nvSpPr>
-          <p:cNvPr id="96" name="·  학습 이미지 평면도 72,792장 · 입면도 16,992장"/>
+          <p:cNvPr id="95" name="·  학습 이미지 평면도 72,792장 · 입면도 16,992장"/>
           <p:cNvSpPr txBox="1"/>
           <p:nvPr/>
         </p:nvSpPr>
@@ -18147,7 +17989,7 @@
       </p:sp>
       <p:sp>
         <p:nvSpPr>
-          <p:cNvPr id="97" name="평면도"/>
+          <p:cNvPr id="96" name="평면도"/>
           <p:cNvSpPr txBox="1"/>
           <p:nvPr/>
         </p:nvSpPr>
@@ -18186,7 +18028,7 @@
       </p:sp>
       <p:sp>
         <p:nvSpPr>
-          <p:cNvPr id="98" name="Baseline 0.507"/>
+          <p:cNvPr id="97" name="Baseline 0.507"/>
           <p:cNvSpPr txBox="1"/>
           <p:nvPr/>
         </p:nvSpPr>
@@ -18239,7 +18081,7 @@
       </p:sp>
       <p:sp>
         <p:nvSpPr>
-          <p:cNvPr id="99" name="0.934"/>
+          <p:cNvPr id="98" name="0.934"/>
           <p:cNvSpPr txBox="1"/>
           <p:nvPr/>
         </p:nvSpPr>
@@ -18278,7 +18120,7 @@
       </p:sp>
       <p:sp>
         <p:nvSpPr>
-          <p:cNvPr id="100" name="+42.7%p"/>
+          <p:cNvPr id="99" name="+42.7%p"/>
           <p:cNvSpPr txBox="1"/>
           <p:nvPr/>
         </p:nvSpPr>
@@ -18317,7 +18159,7 @@
       </p:sp>
       <p:sp>
         <p:nvSpPr>
-          <p:cNvPr id="101" name="입면도"/>
+          <p:cNvPr id="100" name="입면도"/>
           <p:cNvSpPr txBox="1"/>
           <p:nvPr/>
         </p:nvSpPr>
@@ -18356,7 +18198,7 @@
       </p:sp>
       <p:sp>
         <p:nvSpPr>
-          <p:cNvPr id="102" name="Baseline 0.355"/>
+          <p:cNvPr id="101" name="Baseline 0.355"/>
           <p:cNvSpPr txBox="1"/>
           <p:nvPr/>
         </p:nvSpPr>
@@ -18409,7 +18251,7 @@
       </p:sp>
       <p:sp>
         <p:nvSpPr>
-          <p:cNvPr id="103" name="0.838"/>
+          <p:cNvPr id="102" name="0.838"/>
           <p:cNvSpPr txBox="1"/>
           <p:nvPr/>
         </p:nvSpPr>
@@ -18448,7 +18290,7 @@
       </p:sp>
       <p:sp>
         <p:nvSpPr>
-          <p:cNvPr id="104" name="+48.3%p"/>
+          <p:cNvPr id="103" name="+48.3%p"/>
           <p:cNvSpPr txBox="1"/>
           <p:nvPr/>
         </p:nvSpPr>
@@ -18487,7 +18329,7 @@
       </p:sp>
       <p:sp>
         <p:nvSpPr>
-          <p:cNvPr id="105" name="기여 2"/>
+          <p:cNvPr id="104" name="기여 2"/>
           <p:cNvSpPr txBox="1"/>
           <p:nvPr/>
         </p:nvSpPr>
@@ -18526,14 +18368,14 @@
       </p:sp>
       <p:sp>
         <p:nvSpPr>
-          <p:cNvPr id="106" name="CAD 정보 없이 평면도·입면도 간"/>
+          <p:cNvPr id="105" name="CAD 정보 없이 평면도·입면도 간객체 대응 관계 정의"/>
           <p:cNvSpPr txBox="1"/>
           <p:nvPr/>
         </p:nvSpPr>
         <p:spPr>
           <a:xfrm>
-            <a:off x="1473200" y="3728442"/>
-            <a:ext cx="2117425" cy="196850"/>
+            <a:off x="1473200" y="3697486"/>
+            <a:ext cx="2117425" cy="455612"/>
           </a:xfrm>
           <a:prstGeom prst="rect">
             <a:avLst/>
@@ -18542,10 +18384,13 @@
           <a:ln/>
         </p:spPr>
         <p:txBody>
-          <a:bodyPr wrap="none" lIns="0" tIns="0" rIns="0" bIns="0" rtlCol="0" anchor="ctr"/>
-          <a:lstStyle/>
-          <a:p>
-            <a:pPr algn="l" indent="0" marL="0">
+          <a:bodyPr wrap="none" lIns="0" tIns="0" rIns="0" bIns="0" rtlCol="0" anchor="t"/>
+          <a:lstStyle/>
+          <a:p>
+            <a:pPr algn="l" indent="0" marL="0">
+              <a:lnSpc>
+                <a:spcPts val="1794"/>
+              </a:lnSpc>
               <a:buNone/>
             </a:pPr>
             <a:r>
@@ -18561,30 +18406,11 @@
             </a:r>
             <a:endParaRPr lang="en-US" sz="1300" dirty="0"/>
           </a:p>
-        </p:txBody>
-      </p:sp>
-      <p:sp>
-        <p:nvSpPr>
-          <p:cNvPr id="107" name="객체 대응 관계 정의"/>
-          <p:cNvSpPr txBox="1"/>
-          <p:nvPr/>
-        </p:nvSpPr>
-        <p:spPr>
-          <a:xfrm>
-            <a:off x="1473200" y="3956248"/>
-            <a:ext cx="1250494" cy="196850"/>
-          </a:xfrm>
-          <a:prstGeom prst="rect">
-            <a:avLst/>
-          </a:prstGeom>
-          <a:noFill/>
-          <a:ln/>
-        </p:spPr>
-        <p:txBody>
-          <a:bodyPr wrap="none" lIns="0" tIns="0" rIns="0" bIns="0" rtlCol="0" anchor="ctr"/>
-          <a:lstStyle/>
-          <a:p>
-            <a:pPr algn="l" indent="0" marL="0">
+          <a:p>
+            <a:pPr algn="l" indent="0" marL="0">
+              <a:lnSpc>
+                <a:spcPts val="1794"/>
+              </a:lnSpc>
               <a:buNone/>
             </a:pPr>
             <a:r>
@@ -18604,7 +18430,7 @@
       </p:sp>
       <p:sp>
         <p:nvSpPr>
-          <p:cNvPr id="108" name="대응 객체 매칭 F1-score"/>
+          <p:cNvPr id="106" name="대응 객체 매칭 F1-score"/>
           <p:cNvSpPr txBox="1"/>
           <p:nvPr/>
         </p:nvSpPr>
@@ -18643,7 +18469,7 @@
       </p:sp>
       <p:sp>
         <p:nvSpPr>
-          <p:cNvPr id="109" name="·  8개 동 BIM, 개구부 3,458개"/>
+          <p:cNvPr id="107" name="·  8개 동 BIM, 개구부 3,458개"/>
           <p:cNvSpPr txBox="1"/>
           <p:nvPr/>
         </p:nvSpPr>
@@ -18682,7 +18508,7 @@
       </p:sp>
       <p:sp>
         <p:nvSpPr>
-          <p:cNvPr id="110" name="창문"/>
+          <p:cNvPr id="108" name="창문"/>
           <p:cNvSpPr txBox="1"/>
           <p:nvPr/>
         </p:nvSpPr>
@@ -18721,7 +18547,7 @@
       </p:sp>
       <p:sp>
         <p:nvSpPr>
-          <p:cNvPr id="111" name="3,410개"/>
+          <p:cNvPr id="109" name="3,410개"/>
           <p:cNvSpPr txBox="1"/>
           <p:nvPr/>
         </p:nvSpPr>
@@ -18774,7 +18600,7 @@
       </p:sp>
       <p:sp>
         <p:nvSpPr>
-          <p:cNvPr id="112" name="0.93"/>
+          <p:cNvPr id="110" name="0.93"/>
           <p:cNvSpPr txBox="1"/>
           <p:nvPr/>
         </p:nvSpPr>
@@ -18813,7 +18639,7 @@
       </p:sp>
       <p:sp>
         <p:nvSpPr>
-          <p:cNvPr id="113" name="문"/>
+          <p:cNvPr id="111" name="문"/>
           <p:cNvSpPr txBox="1"/>
           <p:nvPr/>
         </p:nvSpPr>
@@ -18852,7 +18678,7 @@
       </p:sp>
       <p:sp>
         <p:nvSpPr>
-          <p:cNvPr id="114" name="48개"/>
+          <p:cNvPr id="112" name="48개"/>
           <p:cNvSpPr txBox="1"/>
           <p:nvPr/>
         </p:nvSpPr>
@@ -18905,7 +18731,7 @@
       </p:sp>
       <p:sp>
         <p:nvSpPr>
-          <p:cNvPr id="115" name="0.95"/>
+          <p:cNvPr id="113" name="0.95"/>
           <p:cNvSpPr txBox="1"/>
           <p:nvPr/>
         </p:nvSpPr>
@@ -18944,7 +18770,7 @@
       </p:sp>
       <p:sp>
         <p:nvSpPr>
-          <p:cNvPr id="116" name="기여 3"/>
+          <p:cNvPr id="114" name="기여 3"/>
           <p:cNvSpPr txBox="1"/>
           <p:nvPr/>
         </p:nvSpPr>
@@ -18983,14 +18809,14 @@
       </p:sp>
       <p:sp>
         <p:nvSpPr>
-          <p:cNvPr id="117" name="LMM 기반 축척 인식으로 불완전한"/>
+          <p:cNvPr id="115" name="LMM 기반 축척 인식으로 불완전한도면에서도 안정적인 치수 보정"/>
           <p:cNvSpPr txBox="1"/>
           <p:nvPr/>
         </p:nvSpPr>
         <p:spPr>
           <a:xfrm>
-            <a:off x="1473200" y="5252442"/>
-            <a:ext cx="2247207" cy="196850"/>
+            <a:off x="1473200" y="5221486"/>
+            <a:ext cx="2247207" cy="455612"/>
           </a:xfrm>
           <a:prstGeom prst="rect">
             <a:avLst/>
@@ -18999,10 +18825,13 @@
           <a:ln/>
         </p:spPr>
         <p:txBody>
-          <a:bodyPr wrap="none" lIns="0" tIns="0" rIns="0" bIns="0" rtlCol="0" anchor="ctr"/>
-          <a:lstStyle/>
-          <a:p>
-            <a:pPr algn="l" indent="0" marL="0">
+          <a:bodyPr wrap="none" lIns="0" tIns="0" rIns="0" bIns="0" rtlCol="0" anchor="t"/>
+          <a:lstStyle/>
+          <a:p>
+            <a:pPr algn="l" indent="0" marL="0">
+              <a:lnSpc>
+                <a:spcPts val="1794"/>
+              </a:lnSpc>
               <a:buNone/>
             </a:pPr>
             <a:r>
@@ -19018,30 +18847,11 @@
             </a:r>
             <a:endParaRPr lang="en-US" sz="1300" dirty="0"/>
           </a:p>
-        </p:txBody>
-      </p:sp>
-      <p:sp>
-        <p:nvSpPr>
-          <p:cNvPr id="118" name="도면에서도 안정적인 치수 보정"/>
-          <p:cNvSpPr txBox="1"/>
-          <p:nvPr/>
-        </p:nvSpPr>
-        <p:spPr>
-          <a:xfrm>
-            <a:off x="1473200" y="5480248"/>
-            <a:ext cx="1971762" cy="196850"/>
-          </a:xfrm>
-          <a:prstGeom prst="rect">
-            <a:avLst/>
-          </a:prstGeom>
-          <a:noFill/>
-          <a:ln/>
-        </p:spPr>
-        <p:txBody>
-          <a:bodyPr wrap="none" lIns="0" tIns="0" rIns="0" bIns="0" rtlCol="0" anchor="ctr"/>
-          <a:lstStyle/>
-          <a:p>
-            <a:pPr algn="l" indent="0" marL="0">
+          <a:p>
+            <a:pPr algn="l" indent="0" marL="0">
+              <a:lnSpc>
+                <a:spcPts val="1794"/>
+              </a:lnSpc>
               <a:buNone/>
             </a:pPr>
             <a:r>
@@ -19061,7 +18871,7 @@
       </p:sp>
       <p:sp>
         <p:nvSpPr>
-          <p:cNvPr id="119" name="축척 인식 정확도"/>
+          <p:cNvPr id="116" name="축척 인식 정확도"/>
           <p:cNvSpPr txBox="1"/>
           <p:nvPr/>
         </p:nvSpPr>
@@ -19100,7 +18910,7 @@
       </p:sp>
       <p:sp>
         <p:nvSpPr>
-          <p:cNvPr id="120" name="·  Tesseract OCR 대비"/>
+          <p:cNvPr id="117" name="·  Tesseract OCR 대비"/>
           <p:cNvSpPr txBox="1"/>
           <p:nvPr/>
         </p:nvSpPr>
@@ -19139,7 +18949,7 @@
       </p:sp>
       <p:sp>
         <p:nvSpPr>
-          <p:cNvPr id="121" name="LMM(GPT-4o)"/>
+          <p:cNvPr id="118" name="LMM(GPT-4o)"/>
           <p:cNvSpPr txBox="1"/>
           <p:nvPr/>
         </p:nvSpPr>
@@ -19178,7 +18988,7 @@
       </p:sp>
       <p:sp>
         <p:nvSpPr>
-          <p:cNvPr id="122" name="0.707"/>
+          <p:cNvPr id="119" name="0.707"/>
           <p:cNvSpPr txBox="1"/>
           <p:nvPr/>
         </p:nvSpPr>
@@ -19217,7 +19027,7 @@
       </p:sp>
       <p:sp>
         <p:nvSpPr>
-          <p:cNvPr id="123" name="+33.8%p"/>
+          <p:cNvPr id="120" name="+33.8%p"/>
           <p:cNvSpPr txBox="1"/>
           <p:nvPr/>
         </p:nvSpPr>
@@ -19256,7 +19066,7 @@
       </p:sp>
       <p:sp>
         <p:nvSpPr>
-          <p:cNvPr id="124" name="Tesseract OCR"/>
+          <p:cNvPr id="121" name="Tesseract OCR"/>
           <p:cNvSpPr txBox="1"/>
           <p:nvPr/>
         </p:nvSpPr>
@@ -19295,7 +19105,7 @@
       </p:sp>
       <p:sp>
         <p:nvSpPr>
-          <p:cNvPr id="125" name="0.369"/>
+          <p:cNvPr id="122" name="0.369"/>
           <p:cNvSpPr txBox="1"/>
           <p:nvPr/>
         </p:nvSpPr>
@@ -19334,7 +19144,7 @@
       </p:sp>
       <p:sp>
         <p:nvSpPr>
-          <p:cNvPr id="126" name="mAP@0.5 객체를 맞게 찾아낸 정도  ·  F1-score 정밀도·재"/>
+          <p:cNvPr id="123" name="mAP@0.5 객체를 맞게 찾아낸 정도  ·  F1-score 정밀도·재"/>
           <p:cNvSpPr txBox="1"/>
           <p:nvPr/>
         </p:nvSpPr>
@@ -19443,7 +19253,7 @@
       </p:sp>
       <p:sp>
         <p:nvSpPr>
-          <p:cNvPr id="127" name="최종 결과"/>
+          <p:cNvPr id="124" name="최종 결과"/>
           <p:cNvSpPr txBox="1"/>
           <p:nvPr/>
         </p:nvSpPr>
@@ -19482,7 +19292,7 @@
       </p:sp>
       <p:sp>
         <p:nvSpPr>
-          <p:cNvPr id="128" name="최종 BIM 생성"/>
+          <p:cNvPr id="125" name="최종 BIM 생성"/>
           <p:cNvSpPr txBox="1"/>
           <p:nvPr/>
         </p:nvSpPr>
@@ -19521,7 +19331,7 @@
       </p:sp>
       <p:sp>
         <p:nvSpPr>
-          <p:cNvPr id="129" name="건물 1동 실증"/>
+          <p:cNvPr id="126" name="건물 1동 실증"/>
           <p:cNvSpPr txBox="1"/>
           <p:nvPr/>
         </p:nvSpPr>
@@ -19562,7 +19372,7 @@
       </p:sp>
       <p:sp>
         <p:nvSpPr>
-          <p:cNvPr id="130" name="379"/>
+          <p:cNvPr id="127" name="379"/>
           <p:cNvSpPr txBox="1"/>
           <p:nvPr/>
         </p:nvSpPr>
@@ -19601,7 +19411,7 @@
       </p:sp>
       <p:sp>
         <p:nvSpPr>
-          <p:cNvPr id="131" name="/ 406"/>
+          <p:cNvPr id="128" name="/ 406"/>
           <p:cNvSpPr txBox="1"/>
           <p:nvPr/>
         </p:nvSpPr>
@@ -19642,7 +19452,7 @@
       </p:sp>
       <p:sp>
         <p:nvSpPr>
-          <p:cNvPr id="132" name="406개 객체 중 379개 자동 생성"/>
+          <p:cNvPr id="129" name="406개 객체 중 379개 자동 생성"/>
           <p:cNvSpPr txBox="1"/>
           <p:nvPr/>
         </p:nvSpPr>
@@ -19683,7 +19493,7 @@
       </p:sp>
       <p:sp>
         <p:nvSpPr>
-          <p:cNvPr id="133" name="생성 완성도"/>
+          <p:cNvPr id="130" name="생성 완성도"/>
           <p:cNvSpPr txBox="1"/>
           <p:nvPr/>
         </p:nvSpPr>
@@ -19724,7 +19534,7 @@
       </p:sp>
       <p:sp>
         <p:nvSpPr>
-          <p:cNvPr id="134" name="93.3%"/>
+          <p:cNvPr id="131" name="93.3%"/>
           <p:cNvSpPr txBox="1"/>
           <p:nvPr/>
         </p:nvSpPr>
@@ -19763,7 +19573,7 @@
       </p:sp>
       <p:sp>
         <p:nvSpPr>
-          <p:cNvPr id="135" name="요소별 생성"/>
+          <p:cNvPr id="132" name="요소별 생성"/>
           <p:cNvSpPr txBox="1"/>
           <p:nvPr/>
         </p:nvSpPr>
@@ -19804,7 +19614,7 @@
       </p:sp>
       <p:sp>
         <p:nvSpPr>
-          <p:cNvPr id="136" name="벽"/>
+          <p:cNvPr id="133" name="벽"/>
           <p:cNvSpPr txBox="1"/>
           <p:nvPr/>
         </p:nvSpPr>
@@ -19845,7 +19655,7 @@
       </p:sp>
       <p:sp>
         <p:nvSpPr>
-          <p:cNvPr id="137" name="135 / 153"/>
+          <p:cNvPr id="134" name="135 / 153"/>
           <p:cNvSpPr txBox="1"/>
           <p:nvPr/>
         </p:nvSpPr>
@@ -19900,7 +19710,7 @@
       </p:sp>
       <p:sp>
         <p:nvSpPr>
-          <p:cNvPr id="138" name="문"/>
+          <p:cNvPr id="135" name="문"/>
           <p:cNvSpPr txBox="1"/>
           <p:nvPr/>
         </p:nvSpPr>
@@ -19941,7 +19751,7 @@
       </p:sp>
       <p:sp>
         <p:nvSpPr>
-          <p:cNvPr id="139" name="64 / 64"/>
+          <p:cNvPr id="136" name="64 / 64"/>
           <p:cNvSpPr txBox="1"/>
           <p:nvPr/>
         </p:nvSpPr>
@@ -19996,7 +19806,7 @@
       </p:sp>
       <p:sp>
         <p:nvSpPr>
-          <p:cNvPr id="140" name="창문"/>
+          <p:cNvPr id="137" name="창문"/>
           <p:cNvSpPr txBox="1"/>
           <p:nvPr/>
         </p:nvSpPr>
@@ -20037,7 +19847,7 @@
       </p:sp>
       <p:sp>
         <p:nvSpPr>
-          <p:cNvPr id="141" name="180 / 189"/>
+          <p:cNvPr id="138" name="180 / 189"/>
           <p:cNvSpPr txBox="1"/>
           <p:nvPr/>
         </p:nvSpPr>
@@ -20092,7 +19902,7 @@
       </p:sp>
       <p:sp>
         <p:nvSpPr>
-          <p:cNvPr id="142" name="자동 생성된 3D BIM"/>
+          <p:cNvPr id="139" name="자동 생성된 3D BIM"/>
           <p:cNvSpPr txBox="1"/>
           <p:nvPr/>
         </p:nvSpPr>
@@ -20133,7 +19943,7 @@
       </p:sp>
       <p:sp>
         <p:nvSpPr>
-          <p:cNvPr id="143" name="석사 연구 발표  ·  평면도와 입면도 객체 인식 및 정보 통합을 통한 "/>
+          <p:cNvPr id="140" name="석사 연구 발표  ·  평면도와 입면도 객체 인식 및 정보 통합을 통한 "/>
           <p:cNvSpPr txBox="1"/>
           <p:nvPr/>
         </p:nvSpPr>
@@ -20172,7 +19982,7 @@
       </p:sp>
       <p:sp>
         <p:nvSpPr>
-          <p:cNvPr id="144" name="04 / 05"/>
+          <p:cNvPr id="141" name="04 / 05"/>
           <p:cNvSpPr txBox="1"/>
           <p:nvPr/>
         </p:nvSpPr>
@@ -23235,14 +23045,14 @@
       </p:sp>
       <p:sp>
         <p:nvSpPr>
-          <p:cNvPr id="67" name="직무에서 마주할 세 가지 과제가"/>
+          <p:cNvPr id="67" name="직무에서 마주할 세 가지 과제가제 연구와 맞닿아 있습니다."/>
           <p:cNvSpPr txBox="1"/>
           <p:nvPr/>
         </p:nvSpPr>
         <p:spPr>
           <a:xfrm>
-            <a:off x="609600" y="666750"/>
-            <a:ext cx="3545239" cy="349250"/>
+            <a:off x="609600" y="653852"/>
+            <a:ext cx="3545239" cy="724297"/>
           </a:xfrm>
           <a:prstGeom prst="rect">
             <a:avLst/>
@@ -23251,10 +23061,13 @@
           <a:ln/>
         </p:spPr>
         <p:txBody>
-          <a:bodyPr wrap="none" lIns="0" tIns="0" rIns="0" bIns="0" rtlCol="0" anchor="ctr"/>
-          <a:lstStyle/>
-          <a:p>
-            <a:pPr algn="l" indent="0" marL="0">
+          <a:bodyPr wrap="none" lIns="0" tIns="0" rIns="0" bIns="0" rtlCol="0" anchor="t"/>
+          <a:lstStyle/>
+          <a:p>
+            <a:pPr algn="l" indent="0" marL="0">
+              <a:lnSpc>
+                <a:spcPts val="2852"/>
+              </a:lnSpc>
               <a:buNone/>
             </a:pPr>
             <a:r>
@@ -23270,30 +23083,11 @@
             </a:r>
             <a:endParaRPr lang="en-US" sz="2300" dirty="0"/>
           </a:p>
-        </p:txBody>
-      </p:sp>
-      <p:sp>
-        <p:nvSpPr>
-          <p:cNvPr id="68" name="제 연구와 맞닿아 있습니다."/>
-          <p:cNvSpPr txBox="1"/>
-          <p:nvPr/>
-        </p:nvSpPr>
-        <p:spPr>
-          <a:xfrm>
-            <a:off x="609600" y="1028898"/>
-            <a:ext cx="3055979" cy="349250"/>
-          </a:xfrm>
-          <a:prstGeom prst="rect">
-            <a:avLst/>
-          </a:prstGeom>
-          <a:noFill/>
-          <a:ln/>
-        </p:spPr>
-        <p:txBody>
-          <a:bodyPr wrap="none" lIns="0" tIns="0" rIns="0" bIns="0" rtlCol="0" anchor="ctr"/>
-          <a:lstStyle/>
-          <a:p>
-            <a:pPr algn="l" indent="0" marL="0">
+          <a:p>
+            <a:pPr algn="l" indent="0" marL="0">
+              <a:lnSpc>
+                <a:spcPts val="2852"/>
+              </a:lnSpc>
               <a:buNone/>
             </a:pPr>
             <a:r>
@@ -23308,6 +23102,9 @@
               <a:t>제 연구와 맞닿아</a:t>
             </a:r>
             <a:pPr algn="l" indent="0" marL="0">
+              <a:lnSpc>
+                <a:spcPts val="2852"/>
+              </a:lnSpc>
               <a:buNone/>
             </a:pPr>
             <a:r>
@@ -23327,7 +23124,7 @@
       </p:sp>
       <p:sp>
         <p:nvSpPr>
-          <p:cNvPr id="69" name="01"/>
+          <p:cNvPr id="68" name="01"/>
           <p:cNvSpPr txBox="1"/>
           <p:nvPr/>
         </p:nvSpPr>
@@ -23366,7 +23163,7 @@
       </p:sp>
       <p:sp>
         <p:nvSpPr>
-          <p:cNvPr id="70" name="02"/>
+          <p:cNvPr id="69" name="02"/>
           <p:cNvSpPr txBox="1"/>
           <p:nvPr/>
         </p:nvSpPr>
@@ -23405,7 +23202,7 @@
       </p:sp>
       <p:sp>
         <p:nvSpPr>
-          <p:cNvPr id="71" name="03"/>
+          <p:cNvPr id="70" name="03"/>
           <p:cNvSpPr txBox="1"/>
           <p:nvPr/>
         </p:nvSpPr>
@@ -23444,7 +23241,7 @@
       </p:sp>
       <p:sp>
         <p:nvSpPr>
-          <p:cNvPr id="72" name="04"/>
+          <p:cNvPr id="71" name="04"/>
           <p:cNvSpPr txBox="1"/>
           <p:nvPr/>
         </p:nvSpPr>
@@ -23483,7 +23280,7 @@
       </p:sp>
       <p:sp>
         <p:nvSpPr>
-          <p:cNvPr id="73" name="05"/>
+          <p:cNvPr id="72" name="05"/>
           <p:cNvSpPr txBox="1"/>
           <p:nvPr/>
         </p:nvSpPr>
@@ -23522,7 +23319,7 @@
       </p:sp>
       <p:sp>
         <p:nvSpPr>
-          <p:cNvPr id="74" name="직무 과제"/>
+          <p:cNvPr id="73" name="직무 과제"/>
           <p:cNvSpPr txBox="1"/>
           <p:nvPr/>
         </p:nvSpPr>
@@ -23561,7 +23358,7 @@
       </p:sp>
       <p:sp>
         <p:nvSpPr>
-          <p:cNvPr id="75" name="연구 접점"/>
+          <p:cNvPr id="74" name="연구 접점"/>
           <p:cNvSpPr txBox="1"/>
           <p:nvPr/>
         </p:nvSpPr>
@@ -23600,7 +23397,7 @@
       </p:sp>
       <p:sp>
         <p:nvSpPr>
-          <p:cNvPr id="76" name="과제 1"/>
+          <p:cNvPr id="75" name="과제 1"/>
           <p:cNvSpPr txBox="1"/>
           <p:nvPr/>
         </p:nvSpPr>
@@ -23639,7 +23436,7 @@
       </p:sp>
       <p:sp>
         <p:nvSpPr>
-          <p:cNvPr id="77" name="Virtual FAB 구축"/>
+          <p:cNvPr id="76" name="Virtual FAB 구축"/>
           <p:cNvSpPr txBox="1"/>
           <p:nvPr/>
         </p:nvSpPr>
@@ -23678,14 +23475,14 @@
       </p:sp>
       <p:sp>
         <p:nvSpPr>
-          <p:cNvPr id="78" name="여러 출처의 도면·모델 데이터를"/>
+          <p:cNvPr id="77" name="여러 출처의 도면·모델 데이터를하나로 통합"/>
           <p:cNvSpPr txBox="1"/>
           <p:nvPr/>
         </p:nvSpPr>
         <p:spPr>
           <a:xfrm>
-            <a:off x="3841750" y="2311797"/>
-            <a:ext cx="1748377" cy="165100"/>
+            <a:off x="3841750" y="2267347"/>
+            <a:ext cx="1748377" cy="419100"/>
           </a:xfrm>
           <a:prstGeom prst="rect">
             <a:avLst/>
@@ -23694,10 +23491,13 @@
           <a:ln/>
         </p:spPr>
         <p:txBody>
-          <a:bodyPr wrap="none" lIns="0" tIns="0" rIns="0" bIns="0" rtlCol="0" anchor="ctr"/>
-          <a:lstStyle/>
-          <a:p>
-            <a:pPr algn="l" indent="0" marL="0">
+          <a:bodyPr wrap="none" lIns="0" tIns="0" rIns="0" bIns="0" rtlCol="0" anchor="t"/>
+          <a:lstStyle/>
+          <a:p>
+            <a:pPr algn="l" indent="0" marL="0">
+              <a:lnSpc>
+                <a:spcPts val="1650"/>
+              </a:lnSpc>
               <a:buNone/>
             </a:pPr>
             <a:r>
@@ -23713,30 +23513,11 @@
             </a:r>
             <a:endParaRPr lang="en-US" sz="1100" dirty="0"/>
           </a:p>
-        </p:txBody>
-      </p:sp>
-      <p:sp>
-        <p:nvSpPr>
-          <p:cNvPr id="79" name="하나로 통합"/>
-          <p:cNvSpPr txBox="1"/>
-          <p:nvPr/>
-        </p:nvSpPr>
-        <p:spPr>
-          <a:xfrm>
-            <a:off x="3841750" y="2521347"/>
-            <a:ext cx="667643" cy="165100"/>
-          </a:xfrm>
-          <a:prstGeom prst="rect">
-            <a:avLst/>
-          </a:prstGeom>
-          <a:noFill/>
-          <a:ln/>
-        </p:spPr>
-        <p:txBody>
-          <a:bodyPr wrap="none" lIns="0" tIns="0" rIns="0" bIns="0" rtlCol="0" anchor="ctr"/>
-          <a:lstStyle/>
-          <a:p>
-            <a:pPr algn="l" indent="0" marL="0">
+          <a:p>
+            <a:pPr algn="l" indent="0" marL="0">
+              <a:lnSpc>
+                <a:spcPts val="1650"/>
+              </a:lnSpc>
               <a:buNone/>
             </a:pPr>
             <a:r>
@@ -23756,14 +23537,14 @@
       </p:sp>
       <p:sp>
         <p:nvSpPr>
-          <p:cNvPr id="80" name="서로 다른 도면의"/>
+          <p:cNvPr id="78" name="서로 다른 도면의불완전한 정보를 짝지어"/>
           <p:cNvSpPr txBox="1"/>
           <p:nvPr/>
         </p:nvSpPr>
         <p:spPr>
           <a:xfrm>
-            <a:off x="6604000" y="2303264"/>
-            <a:ext cx="959273" cy="177800"/>
+            <a:off x="6604000" y="2269331"/>
+            <a:ext cx="1344412" cy="423466"/>
           </a:xfrm>
           <a:prstGeom prst="rect">
             <a:avLst/>
@@ -23772,10 +23553,13 @@
           <a:ln/>
         </p:spPr>
         <p:txBody>
-          <a:bodyPr wrap="none" lIns="0" tIns="0" rIns="0" bIns="0" rtlCol="0" anchor="ctr"/>
-          <a:lstStyle/>
-          <a:p>
-            <a:pPr algn="l" indent="0" marL="0">
+          <a:bodyPr wrap="none" lIns="0" tIns="0" rIns="0" bIns="0" rtlCol="0" anchor="t"/>
+          <a:lstStyle/>
+          <a:p>
+            <a:pPr algn="l" indent="0" marL="0">
+              <a:lnSpc>
+                <a:spcPts val="1667"/>
+              </a:lnSpc>
               <a:buNone/>
             </a:pPr>
             <a:r>
@@ -23791,30 +23575,11 @@
             </a:r>
             <a:endParaRPr lang="en-US" sz="1150" dirty="0"/>
           </a:p>
-        </p:txBody>
-      </p:sp>
-      <p:sp>
-        <p:nvSpPr>
-          <p:cNvPr id="81" name="불완전한 정보를 짝지어"/>
-          <p:cNvSpPr txBox="1"/>
-          <p:nvPr/>
-        </p:nvSpPr>
-        <p:spPr>
-          <a:xfrm>
-            <a:off x="6604000" y="2514997"/>
-            <a:ext cx="1344412" cy="177800"/>
-          </a:xfrm>
-          <a:prstGeom prst="rect">
-            <a:avLst/>
-          </a:prstGeom>
-          <a:noFill/>
-          <a:ln/>
-        </p:spPr>
-        <p:txBody>
-          <a:bodyPr wrap="none" lIns="0" tIns="0" rIns="0" bIns="0" rtlCol="0" anchor="ctr"/>
-          <a:lstStyle/>
-          <a:p>
-            <a:pPr algn="l" indent="0" marL="0">
+          <a:p>
+            <a:pPr algn="l" indent="0" marL="0">
+              <a:lnSpc>
+                <a:spcPts val="1667"/>
+              </a:lnSpc>
               <a:buNone/>
             </a:pPr>
             <a:r>
@@ -23834,7 +23599,7 @@
       </p:sp>
       <p:sp>
         <p:nvSpPr>
-          <p:cNvPr id="82" name="하나의 3D 모델로 통합"/>
+          <p:cNvPr id="79" name="하나의 3D 모델로 통합"/>
           <p:cNvSpPr txBox="1"/>
           <p:nvPr/>
         </p:nvSpPr>
@@ -23873,7 +23638,7 @@
       </p:sp>
       <p:sp>
         <p:nvSpPr>
-          <p:cNvPr id="83" name="과제 2"/>
+          <p:cNvPr id="80" name="과제 2"/>
           <p:cNvSpPr txBox="1"/>
           <p:nvPr/>
         </p:nvSpPr>
@@ -23912,7 +23677,7 @@
       </p:sp>
       <p:sp>
         <p:nvSpPr>
-          <p:cNvPr id="84" name="기존 시설의 디지털 전환"/>
+          <p:cNvPr id="81" name="기존 시설의 디지털 전환"/>
           <p:cNvSpPr txBox="1"/>
           <p:nvPr/>
         </p:nvSpPr>
@@ -23951,14 +23716,14 @@
       </p:sp>
       <p:sp>
         <p:nvSpPr>
-          <p:cNvPr id="85" name="이미지 도면만 남은"/>
+          <p:cNvPr id="82" name="이미지 도면만 남은기존 시설이 많음"/>
           <p:cNvSpPr txBox="1"/>
           <p:nvPr/>
         </p:nvSpPr>
         <p:spPr>
           <a:xfrm>
-            <a:off x="3841750" y="3480197"/>
-            <a:ext cx="1059186" cy="165100"/>
+            <a:off x="3841750" y="3435747"/>
+            <a:ext cx="1059186" cy="419100"/>
           </a:xfrm>
           <a:prstGeom prst="rect">
             <a:avLst/>
@@ -23967,10 +23732,13 @@
           <a:ln/>
         </p:spPr>
         <p:txBody>
-          <a:bodyPr wrap="none" lIns="0" tIns="0" rIns="0" bIns="0" rtlCol="0" anchor="ctr"/>
-          <a:lstStyle/>
-          <a:p>
-            <a:pPr algn="l" indent="0" marL="0">
+          <a:bodyPr wrap="none" lIns="0" tIns="0" rIns="0" bIns="0" rtlCol="0" anchor="t"/>
+          <a:lstStyle/>
+          <a:p>
+            <a:pPr algn="l" indent="0" marL="0">
+              <a:lnSpc>
+                <a:spcPts val="1650"/>
+              </a:lnSpc>
               <a:buNone/>
             </a:pPr>
             <a:r>
@@ -23986,30 +23754,11 @@
             </a:r>
             <a:endParaRPr lang="en-US" sz="1100" dirty="0"/>
           </a:p>
-        </p:txBody>
-      </p:sp>
-      <p:sp>
-        <p:nvSpPr>
-          <p:cNvPr id="86" name="기존 시설이 많음"/>
-          <p:cNvSpPr txBox="1"/>
-          <p:nvPr/>
-        </p:nvSpPr>
-        <p:spPr>
-          <a:xfrm>
-            <a:off x="3841750" y="3689747"/>
-            <a:ext cx="934873" cy="165100"/>
-          </a:xfrm>
-          <a:prstGeom prst="rect">
-            <a:avLst/>
-          </a:prstGeom>
-          <a:noFill/>
-          <a:ln/>
-        </p:spPr>
-        <p:txBody>
-          <a:bodyPr wrap="none" lIns="0" tIns="0" rIns="0" bIns="0" rtlCol="0" anchor="ctr"/>
-          <a:lstStyle/>
-          <a:p>
-            <a:pPr algn="l" indent="0" marL="0">
+          <a:p>
+            <a:pPr algn="l" indent="0" marL="0">
+              <a:lnSpc>
+                <a:spcPts val="1650"/>
+              </a:lnSpc>
               <a:buNone/>
             </a:pPr>
             <a:r>
@@ -24029,14 +23778,14 @@
       </p:sp>
       <p:sp>
         <p:nvSpPr>
-          <p:cNvPr id="87" name="CAD 정보 없이"/>
+          <p:cNvPr id="83" name="CAD 정보 없이이미지 도면에서 BIM 생성"/>
           <p:cNvSpPr txBox="1"/>
           <p:nvPr/>
         </p:nvSpPr>
         <p:spPr>
           <a:xfrm>
-            <a:off x="6604000" y="3471664"/>
-            <a:ext cx="888107" cy="177800"/>
+            <a:off x="6604000" y="3437731"/>
+            <a:ext cx="1506377" cy="423466"/>
           </a:xfrm>
           <a:prstGeom prst="rect">
             <a:avLst/>
@@ -24045,10 +23794,13 @@
           <a:ln/>
         </p:spPr>
         <p:txBody>
-          <a:bodyPr wrap="none" lIns="0" tIns="0" rIns="0" bIns="0" rtlCol="0" anchor="ctr"/>
-          <a:lstStyle/>
-          <a:p>
-            <a:pPr algn="l" indent="0" marL="0">
+          <a:bodyPr wrap="none" lIns="0" tIns="0" rIns="0" bIns="0" rtlCol="0" anchor="t"/>
+          <a:lstStyle/>
+          <a:p>
+            <a:pPr algn="l" indent="0" marL="0">
+              <a:lnSpc>
+                <a:spcPts val="1667"/>
+              </a:lnSpc>
               <a:buNone/>
             </a:pPr>
             <a:r>
@@ -24064,30 +23816,11 @@
             </a:r>
             <a:endParaRPr lang="en-US" sz="1150" dirty="0"/>
           </a:p>
-        </p:txBody>
-      </p:sp>
-      <p:sp>
-        <p:nvSpPr>
-          <p:cNvPr id="88" name="이미지 도면에서 BIM 생성"/>
-          <p:cNvSpPr txBox="1"/>
-          <p:nvPr/>
-        </p:nvSpPr>
-        <p:spPr>
-          <a:xfrm>
-            <a:off x="6604000" y="3683397"/>
-            <a:ext cx="1506377" cy="177800"/>
-          </a:xfrm>
-          <a:prstGeom prst="rect">
-            <a:avLst/>
-          </a:prstGeom>
-          <a:noFill/>
-          <a:ln/>
-        </p:spPr>
-        <p:txBody>
-          <a:bodyPr wrap="none" lIns="0" tIns="0" rIns="0" bIns="0" rtlCol="0" anchor="ctr"/>
-          <a:lstStyle/>
-          <a:p>
-            <a:pPr algn="l" indent="0" marL="0">
+          <a:p>
+            <a:pPr algn="l" indent="0" marL="0">
+              <a:lnSpc>
+                <a:spcPts val="1667"/>
+              </a:lnSpc>
               <a:buNone/>
             </a:pPr>
             <a:r>
@@ -24107,7 +23840,7 @@
       </p:sp>
       <p:sp>
         <p:nvSpPr>
-          <p:cNvPr id="89" name="디지털 전환 기간 단축"/>
+          <p:cNvPr id="84" name="디지털 전환 기간 단축"/>
           <p:cNvSpPr txBox="1"/>
           <p:nvPr/>
         </p:nvSpPr>
@@ -24146,7 +23879,7 @@
       </p:sp>
       <p:sp>
         <p:nvSpPr>
-          <p:cNvPr id="90" name="과제 3"/>
+          <p:cNvPr id="85" name="과제 3"/>
           <p:cNvSpPr txBox="1"/>
           <p:nvPr/>
         </p:nvSpPr>
@@ -24185,7 +23918,7 @@
       </p:sp>
       <p:sp>
         <p:nvSpPr>
-          <p:cNvPr id="91" name="5D(물량·원가) 관리"/>
+          <p:cNvPr id="86" name="5D(물량·원가) 관리"/>
           <p:cNvSpPr txBox="1"/>
           <p:nvPr/>
         </p:nvSpPr>
@@ -24224,14 +23957,14 @@
       </p:sp>
       <p:sp>
         <p:nvSpPr>
-          <p:cNvPr id="92" name="BIM 데이터가 정확해야"/>
+          <p:cNvPr id="87" name="BIM 데이터가 정확해야물량·원가 관리가 의미 있음"/>
           <p:cNvSpPr txBox="1"/>
           <p:nvPr/>
         </p:nvSpPr>
         <p:spPr>
           <a:xfrm>
-            <a:off x="3841750" y="4648597"/>
-            <a:ext cx="1305498" cy="165100"/>
+            <a:off x="3841750" y="4604147"/>
+            <a:ext cx="1499856" cy="419100"/>
           </a:xfrm>
           <a:prstGeom prst="rect">
             <a:avLst/>
@@ -24240,10 +23973,13 @@
           <a:ln/>
         </p:spPr>
         <p:txBody>
-          <a:bodyPr wrap="none" lIns="0" tIns="0" rIns="0" bIns="0" rtlCol="0" anchor="ctr"/>
-          <a:lstStyle/>
-          <a:p>
-            <a:pPr algn="l" indent="0" marL="0">
+          <a:bodyPr wrap="none" lIns="0" tIns="0" rIns="0" bIns="0" rtlCol="0" anchor="t"/>
+          <a:lstStyle/>
+          <a:p>
+            <a:pPr algn="l" indent="0" marL="0">
+              <a:lnSpc>
+                <a:spcPts val="1650"/>
+              </a:lnSpc>
               <a:buNone/>
             </a:pPr>
             <a:r>
@@ -24259,30 +23995,11 @@
             </a:r>
             <a:endParaRPr lang="en-US" sz="1100" dirty="0"/>
           </a:p>
-        </p:txBody>
-      </p:sp>
-      <p:sp>
-        <p:nvSpPr>
-          <p:cNvPr id="93" name="물량·원가 관리가 의미 있음"/>
-          <p:cNvSpPr txBox="1"/>
-          <p:nvPr/>
-        </p:nvSpPr>
-        <p:spPr>
-          <a:xfrm>
-            <a:off x="3841750" y="4858147"/>
-            <a:ext cx="1499856" cy="165100"/>
-          </a:xfrm>
-          <a:prstGeom prst="rect">
-            <a:avLst/>
-          </a:prstGeom>
-          <a:noFill/>
-          <a:ln/>
-        </p:spPr>
-        <p:txBody>
-          <a:bodyPr wrap="none" lIns="0" tIns="0" rIns="0" bIns="0" rtlCol="0" anchor="ctr"/>
-          <a:lstStyle/>
-          <a:p>
-            <a:pPr algn="l" indent="0" marL="0">
+          <a:p>
+            <a:pPr algn="l" indent="0" marL="0">
+              <a:lnSpc>
+                <a:spcPts val="1650"/>
+              </a:lnSpc>
               <a:buNone/>
             </a:pPr>
             <a:r>
@@ -24302,14 +24019,14 @@
       </p:sp>
       <p:sp>
         <p:nvSpPr>
-          <p:cNvPr id="94" name="축척 보정·생성 완성도"/>
+          <p:cNvPr id="88" name="축척 보정·생성 완성도검증 경험"/>
           <p:cNvSpPr txBox="1"/>
           <p:nvPr/>
         </p:nvSpPr>
         <p:spPr>
           <a:xfrm>
-            <a:off x="6604000" y="4640064"/>
-            <a:ext cx="1254280" cy="177800"/>
+            <a:off x="6604000" y="4606131"/>
+            <a:ext cx="1254280" cy="423466"/>
           </a:xfrm>
           <a:prstGeom prst="rect">
             <a:avLst/>
@@ -24318,10 +24035,13 @@
           <a:ln/>
         </p:spPr>
         <p:txBody>
-          <a:bodyPr wrap="none" lIns="0" tIns="0" rIns="0" bIns="0" rtlCol="0" anchor="ctr"/>
-          <a:lstStyle/>
-          <a:p>
-            <a:pPr algn="l" indent="0" marL="0">
+          <a:bodyPr wrap="none" lIns="0" tIns="0" rIns="0" bIns="0" rtlCol="0" anchor="t"/>
+          <a:lstStyle/>
+          <a:p>
+            <a:pPr algn="l" indent="0" marL="0">
+              <a:lnSpc>
+                <a:spcPts val="1667"/>
+              </a:lnSpc>
               <a:buNone/>
             </a:pPr>
             <a:r>
@@ -24337,30 +24057,11 @@
             </a:r>
             <a:endParaRPr lang="en-US" sz="1150" dirty="0"/>
           </a:p>
-        </p:txBody>
-      </p:sp>
-      <p:sp>
-        <p:nvSpPr>
-          <p:cNvPr id="95" name="검증 경험"/>
-          <p:cNvSpPr txBox="1"/>
-          <p:nvPr/>
-        </p:nvSpPr>
-        <p:spPr>
-          <a:xfrm>
-            <a:off x="6604000" y="4851797"/>
-            <a:ext cx="563860" cy="177800"/>
-          </a:xfrm>
-          <a:prstGeom prst="rect">
-            <a:avLst/>
-          </a:prstGeom>
-          <a:noFill/>
-          <a:ln/>
-        </p:spPr>
-        <p:txBody>
-          <a:bodyPr wrap="none" lIns="0" tIns="0" rIns="0" bIns="0" rtlCol="0" anchor="ctr"/>
-          <a:lstStyle/>
-          <a:p>
-            <a:pPr algn="l" indent="0" marL="0">
+          <a:p>
+            <a:pPr algn="l" indent="0" marL="0">
+              <a:lnSpc>
+                <a:spcPts val="1667"/>
+              </a:lnSpc>
               <a:buNone/>
             </a:pPr>
             <a:r>
@@ -24380,14 +24081,14 @@
       </p:sp>
       <p:sp>
         <p:nvSpPr>
-          <p:cNvPr id="96" name="모델 데이터 품질 검증에"/>
+          <p:cNvPr id="89" name="모델 데이터 품질 검증에바로 활용"/>
           <p:cNvSpPr txBox="1"/>
           <p:nvPr/>
         </p:nvSpPr>
         <p:spPr>
           <a:xfrm>
-            <a:off x="8978900" y="4620716"/>
-            <a:ext cx="1538980" cy="196850"/>
+            <a:off x="8978900" y="4586486"/>
+            <a:ext cx="1538980" cy="462161"/>
           </a:xfrm>
           <a:prstGeom prst="rect">
             <a:avLst/>
@@ -24396,10 +24097,13 @@
           <a:ln/>
         </p:spPr>
         <p:txBody>
-          <a:bodyPr wrap="none" lIns="0" tIns="0" rIns="0" bIns="0" rtlCol="0" anchor="ctr"/>
-          <a:lstStyle/>
-          <a:p>
-            <a:pPr algn="l" indent="0" marL="0">
+          <a:bodyPr wrap="none" lIns="0" tIns="0" rIns="0" bIns="0" rtlCol="0" anchor="t"/>
+          <a:lstStyle/>
+          <a:p>
+            <a:pPr algn="l" indent="0" marL="0">
+              <a:lnSpc>
+                <a:spcPts val="1820"/>
+              </a:lnSpc>
               <a:buNone/>
             </a:pPr>
             <a:r>
@@ -24415,30 +24119,11 @@
             </a:r>
             <a:endParaRPr lang="en-US" sz="1300" dirty="0"/>
           </a:p>
-        </p:txBody>
-      </p:sp>
-      <p:sp>
-        <p:nvSpPr>
-          <p:cNvPr id="97" name="바로 활용"/>
-          <p:cNvSpPr txBox="1"/>
-          <p:nvPr/>
-        </p:nvSpPr>
-        <p:spPr>
-          <a:xfrm>
-            <a:off x="8978900" y="4851797"/>
-            <a:ext cx="625475" cy="196850"/>
-          </a:xfrm>
-          <a:prstGeom prst="rect">
-            <a:avLst/>
-          </a:prstGeom>
-          <a:noFill/>
-          <a:ln/>
-        </p:spPr>
-        <p:txBody>
-          <a:bodyPr wrap="none" lIns="0" tIns="0" rIns="0" bIns="0" rtlCol="0" anchor="ctr"/>
-          <a:lstStyle/>
-          <a:p>
-            <a:pPr algn="l" indent="0" marL="0">
+          <a:p>
+            <a:pPr algn="l" indent="0" marL="0">
+              <a:lnSpc>
+                <a:spcPts val="1820"/>
+              </a:lnSpc>
               <a:buNone/>
             </a:pPr>
             <a:r>
@@ -24458,7 +24143,7 @@
       </p:sp>
       <p:sp>
         <p:nvSpPr>
-          <p:cNvPr id="98" name="KEY MESSAGE"/>
+          <p:cNvPr id="90" name="KEY MESSAGE"/>
           <p:cNvSpPr txBox="1"/>
           <p:nvPr/>
         </p:nvSpPr>
@@ -24497,14 +24182,14 @@
       </p:sp>
       <p:sp>
         <p:nvSpPr>
-          <p:cNvPr id="99" name="도면 속 불완전한 정보를 정확한 3D 데이터로 잇는 경험으로,"/>
+          <p:cNvPr id="91" name="도면 속 불완전한 정보를 정확한 3D 데이터로 잇는 경험으로,SK하이닉스"/>
           <p:cNvSpPr txBox="1"/>
           <p:nvPr/>
         </p:nvSpPr>
         <p:spPr>
           <a:xfrm>
-            <a:off x="1854994" y="5755680"/>
-            <a:ext cx="4027136" cy="209550"/>
+            <a:off x="1854994" y="5725220"/>
+            <a:ext cx="4027136" cy="480020"/>
           </a:xfrm>
           <a:prstGeom prst="rect">
             <a:avLst/>
@@ -24513,10 +24198,13 @@
           <a:ln/>
         </p:spPr>
         <p:txBody>
-          <a:bodyPr wrap="none" lIns="0" tIns="0" rIns="0" bIns="0" rtlCol="0" anchor="ctr"/>
-          <a:lstStyle/>
-          <a:p>
-            <a:pPr algn="l" indent="0" marL="0">
+          <a:bodyPr wrap="none" lIns="0" tIns="0" rIns="0" bIns="0" rtlCol="0" anchor="t"/>
+          <a:lstStyle/>
+          <a:p>
+            <a:pPr algn="l" indent="0" marL="0">
+              <a:lnSpc>
+                <a:spcPts val="1890"/>
+              </a:lnSpc>
               <a:buNone/>
             </a:pPr>
             <a:r>
@@ -24531,6 +24219,9 @@
               <a:t>도면 속 불완전한 정보를 </a:t>
             </a:r>
             <a:pPr algn="l" indent="0" marL="0">
+              <a:lnSpc>
+                <a:spcPts val="1890"/>
+              </a:lnSpc>
               <a:buNone/>
             </a:pPr>
             <a:r>
@@ -24545,6 +24236,9 @@
               <a:t>정확한 3D 데이터</a:t>
             </a:r>
             <a:pPr algn="l" indent="0" marL="0">
+              <a:lnSpc>
+                <a:spcPts val="1890"/>
+              </a:lnSpc>
               <a:buNone/>
             </a:pPr>
             <a:r>
@@ -24560,30 +24254,11 @@
             </a:r>
             <a:endParaRPr lang="en-US" sz="1350" dirty="0"/>
           </a:p>
-        </p:txBody>
-      </p:sp>
-      <p:sp>
-        <p:nvSpPr>
-          <p:cNvPr id="100" name="SK하이닉스 Virtual FAB의 데이터 품질을 높이겠습니다."/>
-          <p:cNvSpPr txBox="1"/>
-          <p:nvPr/>
-        </p:nvSpPr>
-        <p:spPr>
-          <a:xfrm>
-            <a:off x="1854994" y="5995690"/>
-            <a:ext cx="3852025" cy="209550"/>
-          </a:xfrm>
-          <a:prstGeom prst="rect">
-            <a:avLst/>
-          </a:prstGeom>
-          <a:noFill/>
-          <a:ln/>
-        </p:spPr>
-        <p:txBody>
-          <a:bodyPr wrap="none" lIns="0" tIns="0" rIns="0" bIns="0" rtlCol="0" anchor="ctr"/>
-          <a:lstStyle/>
-          <a:p>
-            <a:pPr algn="l" indent="0" marL="0">
+          <a:p>
+            <a:pPr algn="l" indent="0" marL="0">
+              <a:lnSpc>
+                <a:spcPts val="1890"/>
+              </a:lnSpc>
               <a:buNone/>
             </a:pPr>
             <a:r>
@@ -24603,7 +24278,7 @@
       </p:sp>
       <p:sp>
         <p:nvSpPr>
-          <p:cNvPr id="101" name="감사합니다"/>
+          <p:cNvPr id="92" name="감사합니다"/>
           <p:cNvSpPr txBox="1"/>
           <p:nvPr/>
         </p:nvSpPr>
@@ -24642,7 +24317,7 @@
       </p:sp>
       <p:sp>
         <p:nvSpPr>
-          <p:cNvPr id="102" name="· Q&amp;A"/>
+          <p:cNvPr id="93" name="· Q&amp;A"/>
           <p:cNvSpPr txBox="1"/>
           <p:nvPr/>
         </p:nvSpPr>
@@ -24681,7 +24356,7 @@
       </p:sp>
       <p:sp>
         <p:nvSpPr>
-          <p:cNvPr id="103" name="Automation in Construction · Vol. 187 · "/>
+          <p:cNvPr id="94" name="Automation in Construction · Vol. 187 · "/>
           <p:cNvSpPr txBox="1"/>
           <p:nvPr/>
         </p:nvSpPr>
@@ -24734,7 +24409,7 @@
       </p:sp>
       <p:sp>
         <p:nvSpPr>
-          <p:cNvPr id="104" name="석사 연구 발표  ·  평면도와 입면도 객체 인식 및 정보 통합을 통한 "/>
+          <p:cNvPr id="95" name="석사 연구 발표  ·  평면도와 입면도 객체 인식 및 정보 통합을 통한 "/>
           <p:cNvSpPr txBox="1"/>
           <p:nvPr/>
         </p:nvSpPr>
@@ -24773,7 +24448,7 @@
       </p:sp>
       <p:sp>
         <p:nvSpPr>
-          <p:cNvPr id="105" name="05 / 05"/>
+          <p:cNvPr id="96" name="05 / 05"/>
           <p:cNvSpPr txBox="1"/>
           <p:nvPr/>
         </p:nvSpPr>

--- a/skh-pt/pptx/deck5.pptx
+++ b/skh-pt/pptx/deck5.pptx
@@ -4666,15 +4666,7 @@
               </a:rPr>
               <a:t>BIM 전면 도입이 추진되지만, BIM은 여전히</a:t>
             </a:r>
-            <a:endParaRPr lang="en-US" sz="2300" dirty="0"/>
-          </a:p>
-          <a:p>
-            <a:pPr algn="l" indent="0" marL="0">
-              <a:lnSpc>
-                <a:spcPts val="2852"/>
-              </a:lnSpc>
-              <a:buNone/>
-            </a:pPr>
+            <a:br/>
             <a:r>
               <a:rPr lang="ko-KR" altLang="en-US" sz="2300" spc="-92" kern="0" dirty="0">
                 <a:solidFill>
@@ -4686,12 +4678,6 @@
               </a:rPr>
               <a:t>사람이 2D 도면을 보고 직접</a:t>
             </a:r>
-            <a:pPr algn="l" indent="0" marL="0">
-              <a:lnSpc>
-                <a:spcPts val="2852"/>
-              </a:lnSpc>
-              <a:buNone/>
-            </a:pPr>
             <a:r>
               <a:rPr lang="ko-KR" altLang="en-US" sz="2300" spc="-92" kern="0" dirty="0">
                 <a:solidFill>
@@ -5681,15 +5667,7 @@
               </a:rPr>
               <a:t>2D 도면을 먼저 그린 뒤 BIM으로 옮기는</a:t>
             </a:r>
-            <a:endParaRPr lang="en-US" sz="1100" dirty="0"/>
-          </a:p>
-          <a:p>
-            <a:pPr algn="l" indent="0" marL="0">
-              <a:lnSpc>
-                <a:spcPts val="1650"/>
-              </a:lnSpc>
-              <a:buNone/>
-            </a:pPr>
+            <a:br/>
             <a:r>
               <a:rPr lang="ko-KR" altLang="en-US" sz="1100" spc="-28" kern="0" dirty="0">
                 <a:solidFill>
@@ -5701,12 +5679,6 @@
               </a:rPr>
               <a:t>'BIM 전환설계'</a:t>
             </a:r>
-            <a:pPr algn="l" indent="0" marL="0">
-              <a:lnSpc>
-                <a:spcPts val="1650"/>
-              </a:lnSpc>
-              <a:buNone/>
-            </a:pPr>
             <a:r>
               <a:rPr lang="ko-KR" altLang="en-US" sz="1100" spc="-28" kern="0" dirty="0">
                 <a:solidFill>
@@ -5874,25 +5846,370 @@
               </a:rPr>
               <a:t>BIM 없이 </a:t>
             </a:r>
+            <a:r>
+              <a:rPr lang="ko-KR" altLang="en-US" sz="1100" spc="-28" kern="0" dirty="0">
+                <a:solidFill>
+                  <a:srgbClr val="141820"/>
+                </a:solidFill>
+                <a:latin typeface="Pretendard ExtraBold" pitchFamily="34" charset="0"/>
+                <a:ea typeface="Pretendard ExtraBold" pitchFamily="34" charset="-127"/>
+                <a:cs typeface="Pretendard ExtraBold" pitchFamily="34" charset="-120"/>
+              </a:rPr>
+              <a:t>2D 도면만</a:t>
+            </a:r>
+            <a:r>
+              <a:rPr lang="ko-KR" altLang="en-US" sz="1100" spc="-28" kern="0" dirty="0">
+                <a:solidFill>
+                  <a:srgbClr val="3F4654"/>
+                </a:solidFill>
+                <a:latin typeface="Pretendard Medium" pitchFamily="34" charset="0"/>
+                <a:ea typeface="Pretendard Medium" pitchFamily="34" charset="-127"/>
+                <a:cs typeface="Pretendard Medium" pitchFamily="34" charset="-120"/>
+              </a:rPr>
+              <a:t> 남아 있음</a:t>
+            </a:r>
+            <a:endParaRPr lang="en-US" sz="1100" dirty="0"/>
+          </a:p>
+        </p:txBody>
+      </p:sp>
+      <p:sp>
+        <p:nvSpPr>
+          <p:cNvPr id="117" name="2D 도면으로 3D BIM을 새로 구축해야 함"/>
+          <p:cNvSpPr txBox="1"/>
+          <p:nvPr/>
+        </p:nvSpPr>
+        <p:spPr>
+          <a:xfrm>
+            <a:off x="4775200" y="5077222"/>
+            <a:ext cx="2078617" cy="152400"/>
+          </a:xfrm>
+          <a:prstGeom prst="rect">
+            <a:avLst/>
+          </a:prstGeom>
+          <a:noFill/>
+          <a:ln/>
+        </p:spPr>
+        <p:txBody>
+          <a:bodyPr wrap="none" lIns="0" tIns="0" rIns="0" bIns="0" rtlCol="0" anchor="ctr"/>
+          <a:lstStyle/>
+          <a:p>
             <a:pPr algn="l" indent="0" marL="0">
               <a:buNone/>
             </a:pPr>
             <a:r>
-              <a:rPr lang="ko-KR" altLang="en-US" sz="1100" spc="-28" kern="0" dirty="0">
-                <a:solidFill>
-                  <a:srgbClr val="141820"/>
+              <a:rPr lang="ko-KR" altLang="en-US" sz="1000" b="1" spc="-30" kern="0" dirty="0">
+                <a:solidFill>
+                  <a:srgbClr val="102A4C"/>
+                </a:solidFill>
+                <a:latin typeface="Pretendard" pitchFamily="34" charset="0"/>
+                <a:ea typeface="Pretendard" pitchFamily="34" charset="-127"/>
+                <a:cs typeface="Pretendard" pitchFamily="34" charset="-120"/>
+              </a:rPr>
+              <a:t>2D 도면으로 3D BIM을 새로 구축해야 함</a:t>
+            </a:r>
+            <a:endParaRPr lang="en-US" sz="1000" dirty="0"/>
+          </a:p>
+        </p:txBody>
+      </p:sp>
+      <p:sp>
+        <p:nvSpPr>
+          <p:cNvPr id="118" name="문제"/>
+          <p:cNvSpPr txBox="1"/>
+          <p:nvPr/>
+        </p:nvSpPr>
+        <p:spPr>
+          <a:xfrm>
+            <a:off x="8032750" y="1674713"/>
+            <a:ext cx="233164" cy="127000"/>
+          </a:xfrm>
+          <a:prstGeom prst="rect">
+            <a:avLst/>
+          </a:prstGeom>
+          <a:noFill/>
+          <a:ln/>
+        </p:spPr>
+        <p:txBody>
+          <a:bodyPr wrap="none" lIns="0" tIns="0" rIns="0" bIns="0" rtlCol="0" anchor="ctr"/>
+          <a:lstStyle/>
+          <a:p>
+            <a:pPr algn="l" indent="0" marL="0">
+              <a:buNone/>
+            </a:pPr>
+            <a:r>
+              <a:rPr lang="ko-KR" altLang="en-US" sz="850" b="1" spc="-17" kern="0" dirty="0">
+                <a:solidFill>
+                  <a:srgbClr val="FFFFFF"/>
+                </a:solidFill>
+                <a:latin typeface="Pretendard" pitchFamily="34" charset="0"/>
+                <a:ea typeface="Pretendard" pitchFamily="34" charset="-127"/>
+                <a:cs typeface="Pretendard" pitchFamily="34" charset="-120"/>
+              </a:rPr>
+              <a:t>문제</a:t>
+            </a:r>
+            <a:endParaRPr lang="en-US" sz="850" dirty="0"/>
+          </a:p>
+        </p:txBody>
+      </p:sp>
+      <p:sp>
+        <p:nvSpPr>
+          <p:cNvPr id="119" name="사람이 도면을 보고 직접 모델링"/>
+          <p:cNvSpPr txBox="1"/>
+          <p:nvPr/>
+        </p:nvSpPr>
+        <p:spPr>
+          <a:xfrm>
+            <a:off x="8424664" y="1641277"/>
+            <a:ext cx="2018774" cy="196850"/>
+          </a:xfrm>
+          <a:prstGeom prst="rect">
+            <a:avLst/>
+          </a:prstGeom>
+          <a:noFill/>
+          <a:ln/>
+        </p:spPr>
+        <p:txBody>
+          <a:bodyPr wrap="none" lIns="0" tIns="0" rIns="0" bIns="0" rtlCol="0" anchor="ctr"/>
+          <a:lstStyle/>
+          <a:p>
+            <a:pPr algn="l" indent="0" marL="0">
+              <a:buNone/>
+            </a:pPr>
+            <a:r>
+              <a:rPr lang="ko-KR" altLang="en-US" sz="1300" spc="-46" kern="0" dirty="0">
+                <a:solidFill>
+                  <a:srgbClr val="102A4C"/>
                 </a:solidFill>
                 <a:latin typeface="Pretendard ExtraBold" pitchFamily="34" charset="0"/>
                 <a:ea typeface="Pretendard ExtraBold" pitchFamily="34" charset="-127"/>
                 <a:cs typeface="Pretendard ExtraBold" pitchFamily="34" charset="-120"/>
               </a:rPr>
-              <a:t>2D 도면만</a:t>
-            </a:r>
+              <a:t>사람이 도면을 보고 직접 모델링</a:t>
+            </a:r>
+            <a:endParaRPr lang="en-US" sz="1300" dirty="0"/>
+          </a:p>
+        </p:txBody>
+      </p:sp>
+      <p:sp>
+        <p:nvSpPr>
+          <p:cNvPr id="120" name="평면도 · 입면도"/>
+          <p:cNvSpPr txBox="1"/>
+          <p:nvPr/>
+        </p:nvSpPr>
+        <p:spPr>
+          <a:xfrm>
+            <a:off x="8259316" y="3073797"/>
+            <a:ext cx="677168" cy="127000"/>
+          </a:xfrm>
+          <a:prstGeom prst="rect">
+            <a:avLst/>
+          </a:prstGeom>
+          <a:noFill/>
+          <a:ln/>
+        </p:spPr>
+        <p:txBody>
+          <a:bodyPr wrap="none" lIns="0" tIns="0" rIns="0" bIns="0" rtlCol="0" anchor="ctr"/>
+          <a:lstStyle/>
+          <a:p>
             <a:pPr algn="l" indent="0" marL="0">
               <a:buNone/>
             </a:pPr>
             <a:r>
-              <a:rPr lang="ko-KR" altLang="en-US" sz="1100" spc="-28" kern="0" dirty="0">
+              <a:rPr lang="ko-KR" altLang="en-US" sz="850" b="1" spc="-12" kern="0" dirty="0">
+                <a:solidFill>
+                  <a:srgbClr val="3F4654"/>
+                </a:solidFill>
+                <a:latin typeface="Pretendard" pitchFamily="34" charset="0"/>
+                <a:ea typeface="Pretendard" pitchFamily="34" charset="-127"/>
+                <a:cs typeface="Pretendard" pitchFamily="34" charset="-120"/>
+              </a:rPr>
+              <a:t>평면도 · 입면도</a:t>
+            </a:r>
+            <a:endParaRPr lang="en-US" sz="850" dirty="0"/>
+          </a:p>
+        </p:txBody>
+      </p:sp>
+      <p:sp>
+        <p:nvSpPr>
+          <p:cNvPr id="121" name="도면 해석 · 직접 입력"/>
+          <p:cNvSpPr txBox="1"/>
+          <p:nvPr/>
+        </p:nvSpPr>
+        <p:spPr>
+          <a:xfrm>
+            <a:off x="9319915" y="3073797"/>
+            <a:ext cx="905951" cy="127000"/>
+          </a:xfrm>
+          <a:prstGeom prst="rect">
+            <a:avLst/>
+          </a:prstGeom>
+          <a:noFill/>
+          <a:ln/>
+        </p:spPr>
+        <p:txBody>
+          <a:bodyPr wrap="none" lIns="0" tIns="0" rIns="0" bIns="0" rtlCol="0" anchor="ctr"/>
+          <a:lstStyle/>
+          <a:p>
+            <a:pPr algn="l" indent="0" marL="0">
+              <a:buNone/>
+            </a:pPr>
+            <a:r>
+              <a:rPr lang="ko-KR" altLang="en-US" sz="850" spc="-12" kern="0" dirty="0">
+                <a:solidFill>
+                  <a:srgbClr val="102A4C"/>
+                </a:solidFill>
+                <a:latin typeface="Pretendard ExtraBold" pitchFamily="34" charset="0"/>
+                <a:ea typeface="Pretendard ExtraBold" pitchFamily="34" charset="-127"/>
+                <a:cs typeface="Pretendard ExtraBold" pitchFamily="34" charset="-120"/>
+              </a:rPr>
+              <a:t>도면 해석 · 직접 입력</a:t>
+            </a:r>
+            <a:endParaRPr lang="en-US" sz="850" dirty="0"/>
+          </a:p>
+        </p:txBody>
+      </p:sp>
+      <p:sp>
+        <p:nvSpPr>
+          <p:cNvPr id="122" name="수작업 모델링 예시"/>
+          <p:cNvSpPr txBox="1"/>
+          <p:nvPr/>
+        </p:nvSpPr>
+        <p:spPr>
+          <a:xfrm>
+            <a:off x="10512475" y="3073797"/>
+            <a:ext cx="831751" cy="127000"/>
+          </a:xfrm>
+          <a:prstGeom prst="rect">
+            <a:avLst/>
+          </a:prstGeom>
+          <a:noFill/>
+          <a:ln/>
+        </p:spPr>
+        <p:txBody>
+          <a:bodyPr wrap="none" lIns="0" tIns="0" rIns="0" bIns="0" rtlCol="0" anchor="ctr"/>
+          <a:lstStyle/>
+          <a:p>
+            <a:pPr algn="l" indent="0" marL="0">
+              <a:buNone/>
+            </a:pPr>
+            <a:r>
+              <a:rPr lang="ko-KR" altLang="en-US" sz="850" b="1" spc="-12" kern="0" dirty="0">
+                <a:solidFill>
+                  <a:srgbClr val="3F4654"/>
+                </a:solidFill>
+                <a:latin typeface="Pretendard" pitchFamily="34" charset="0"/>
+                <a:ea typeface="Pretendard" pitchFamily="34" charset="-127"/>
+                <a:cs typeface="Pretendard" pitchFamily="34" charset="-120"/>
+              </a:rPr>
+              <a:t>수작업 모델링 예시</a:t>
+            </a:r>
+            <a:endParaRPr lang="en-US" sz="850" dirty="0"/>
+          </a:p>
+        </p:txBody>
+      </p:sp>
+      <p:sp>
+        <p:nvSpPr>
+          <p:cNvPr id="123" name="1"/>
+          <p:cNvSpPr txBox="1"/>
+          <p:nvPr/>
+        </p:nvSpPr>
+        <p:spPr>
+          <a:xfrm>
+            <a:off x="8228409" y="3546574"/>
+            <a:ext cx="103981" cy="133350"/>
+          </a:xfrm>
+          <a:prstGeom prst="rect">
+            <a:avLst/>
+          </a:prstGeom>
+          <a:noFill/>
+          <a:ln/>
+        </p:spPr>
+        <p:txBody>
+          <a:bodyPr wrap="none" lIns="0" tIns="0" rIns="0" bIns="0" rtlCol="0" anchor="ctr"/>
+          <a:lstStyle/>
+          <a:p>
+            <a:pPr algn="l" indent="0" marL="0">
+              <a:buNone/>
+            </a:pPr>
+            <a:r>
+              <a:rPr lang="ko-KR" altLang="en-US" sz="900" spc="-12" kern="0" dirty="0">
+                <a:solidFill>
+                  <a:srgbClr val="FFFFFF"/>
+                </a:solidFill>
+                <a:latin typeface="Pretendard ExtraBold" pitchFamily="34" charset="0"/>
+                <a:ea typeface="Pretendard ExtraBold" pitchFamily="34" charset="-127"/>
+                <a:cs typeface="Pretendard ExtraBold" pitchFamily="34" charset="-120"/>
+              </a:rPr>
+              <a:t>1</a:t>
+            </a:r>
+            <a:endParaRPr lang="en-US" sz="900" dirty="0"/>
+          </a:p>
+        </p:txBody>
+      </p:sp>
+      <p:sp>
+        <p:nvSpPr>
+          <p:cNvPr id="124" name="노동집약적 작업"/>
+          <p:cNvSpPr txBox="1"/>
+          <p:nvPr/>
+        </p:nvSpPr>
+        <p:spPr>
+          <a:xfrm>
+            <a:off x="8483600" y="3524052"/>
+            <a:ext cx="968212" cy="184150"/>
+          </a:xfrm>
+          <a:prstGeom prst="rect">
+            <a:avLst/>
+          </a:prstGeom>
+          <a:noFill/>
+          <a:ln/>
+        </p:spPr>
+        <p:txBody>
+          <a:bodyPr wrap="none" lIns="0" tIns="0" rIns="0" bIns="0" rtlCol="0" anchor="ctr"/>
+          <a:lstStyle/>
+          <a:p>
+            <a:pPr algn="l" indent="0" marL="0">
+              <a:buNone/>
+            </a:pPr>
+            <a:r>
+              <a:rPr lang="ko-KR" altLang="en-US" sz="1200" spc="-42" kern="0" dirty="0">
+                <a:solidFill>
+                  <a:srgbClr val="102A4C"/>
+                </a:solidFill>
+                <a:latin typeface="Pretendard ExtraBold" pitchFamily="34" charset="0"/>
+                <a:ea typeface="Pretendard ExtraBold" pitchFamily="34" charset="-127"/>
+                <a:cs typeface="Pretendard ExtraBold" pitchFamily="34" charset="-120"/>
+              </a:rPr>
+              <a:t>노동집약적 작업</a:t>
+            </a:r>
+            <a:endParaRPr lang="en-US" sz="1200" dirty="0"/>
+          </a:p>
+        </p:txBody>
+      </p:sp>
+      <p:sp>
+        <p:nvSpPr>
+          <p:cNvPr id="125" name="도면을 한 장씩 보며 벽·창·문을 직접 입력"/>
+          <p:cNvSpPr txBox="1"/>
+          <p:nvPr/>
+        </p:nvSpPr>
+        <p:spPr>
+          <a:xfrm>
+            <a:off x="8483600" y="3769122"/>
+            <a:ext cx="2151501" cy="158750"/>
+          </a:xfrm>
+          <a:prstGeom prst="rect">
+            <a:avLst/>
+          </a:prstGeom>
+          <a:noFill/>
+          <a:ln/>
+        </p:spPr>
+        <p:txBody>
+          <a:bodyPr wrap="none" lIns="0" tIns="0" rIns="0" bIns="0" rtlCol="0" anchor="ctr"/>
+          <a:lstStyle/>
+          <a:p>
+            <a:pPr algn="l" indent="0" marL="0">
+              <a:buNone/>
+            </a:pPr>
+            <a:r>
+              <a:rPr lang="ko-KR" altLang="en-US" sz="1050" spc="-26" kern="0" dirty="0">
                 <a:solidFill>
                   <a:srgbClr val="3F4654"/>
                 </a:solidFill>
@@ -5900,22 +6217,22 @@
                 <a:ea typeface="Pretendard Medium" pitchFamily="34" charset="-127"/>
                 <a:cs typeface="Pretendard Medium" pitchFamily="34" charset="-120"/>
               </a:rPr>
-              <a:t> 남아 있음</a:t>
-            </a:r>
-            <a:endParaRPr lang="en-US" sz="1100" dirty="0"/>
-          </a:p>
-        </p:txBody>
-      </p:sp>
-      <p:sp>
-        <p:nvSpPr>
-          <p:cNvPr id="117" name="2D 도면으로 3D BIM을 새로 구축해야 함"/>
+              <a:t>도면을 한 장씩 보며 벽·창·문을 직접 입력</a:t>
+            </a:r>
+            <a:endParaRPr lang="en-US" sz="1050" dirty="0"/>
+          </a:p>
+        </p:txBody>
+      </p:sp>
+      <p:sp>
+        <p:nvSpPr>
+          <p:cNvPr id="126" name="2"/>
           <p:cNvSpPr txBox="1"/>
           <p:nvPr/>
         </p:nvSpPr>
         <p:spPr>
           <a:xfrm>
-            <a:off x="4775200" y="5077222"/>
-            <a:ext cx="2078617" cy="152400"/>
+            <a:off x="8220373" y="4228802"/>
+            <a:ext cx="119955" cy="133350"/>
           </a:xfrm>
           <a:prstGeom prst="rect">
             <a:avLst/>
@@ -5931,30 +6248,325 @@
               <a:buNone/>
             </a:pPr>
             <a:r>
-              <a:rPr lang="ko-KR" altLang="en-US" sz="1000" b="1" spc="-30" kern="0" dirty="0">
+              <a:rPr lang="ko-KR" altLang="en-US" sz="900" spc="-12" kern="0" dirty="0">
+                <a:solidFill>
+                  <a:srgbClr val="FFFFFF"/>
+                </a:solidFill>
+                <a:latin typeface="Pretendard ExtraBold" pitchFamily="34" charset="0"/>
+                <a:ea typeface="Pretendard ExtraBold" pitchFamily="34" charset="-127"/>
+                <a:cs typeface="Pretendard ExtraBold" pitchFamily="34" charset="-120"/>
+              </a:rPr>
+              <a:t>2</a:t>
+            </a:r>
+            <a:endParaRPr lang="en-US" sz="900" dirty="0"/>
+          </a:p>
+        </p:txBody>
+      </p:sp>
+      <p:sp>
+        <p:nvSpPr>
+          <p:cNvPr id="127" name="긴 작업 시간 · 높은 비용"/>
+          <p:cNvSpPr txBox="1"/>
+          <p:nvPr/>
+        </p:nvSpPr>
+        <p:spPr>
+          <a:xfrm>
+            <a:off x="8483600" y="4206280"/>
+            <a:ext cx="1399627" cy="184150"/>
+          </a:xfrm>
+          <a:prstGeom prst="rect">
+            <a:avLst/>
+          </a:prstGeom>
+          <a:noFill/>
+          <a:ln/>
+        </p:spPr>
+        <p:txBody>
+          <a:bodyPr wrap="none" lIns="0" tIns="0" rIns="0" bIns="0" rtlCol="0" anchor="ctr"/>
+          <a:lstStyle/>
+          <a:p>
+            <a:pPr algn="l" indent="0" marL="0">
+              <a:buNone/>
+            </a:pPr>
+            <a:r>
+              <a:rPr lang="ko-KR" altLang="en-US" sz="1200" spc="-42" kern="0" dirty="0">
                 <a:solidFill>
                   <a:srgbClr val="102A4C"/>
+                </a:solidFill>
+                <a:latin typeface="Pretendard ExtraBold" pitchFamily="34" charset="0"/>
+                <a:ea typeface="Pretendard ExtraBold" pitchFamily="34" charset="-127"/>
+                <a:cs typeface="Pretendard ExtraBold" pitchFamily="34" charset="-120"/>
+              </a:rPr>
+              <a:t>긴 작업 시간 · 높은 비용</a:t>
+            </a:r>
+            <a:endParaRPr lang="en-US" sz="1200" dirty="0"/>
+          </a:p>
+        </p:txBody>
+      </p:sp>
+      <p:sp>
+        <p:nvSpPr>
+          <p:cNvPr id="128" name="건물 규모에 비례해 모델링 시간과 비용 증가"/>
+          <p:cNvSpPr txBox="1"/>
+          <p:nvPr/>
+        </p:nvSpPr>
+        <p:spPr>
+          <a:xfrm>
+            <a:off x="8483600" y="4451350"/>
+            <a:ext cx="2321248" cy="158750"/>
+          </a:xfrm>
+          <a:prstGeom prst="rect">
+            <a:avLst/>
+          </a:prstGeom>
+          <a:noFill/>
+          <a:ln/>
+        </p:spPr>
+        <p:txBody>
+          <a:bodyPr wrap="none" lIns="0" tIns="0" rIns="0" bIns="0" rtlCol="0" anchor="ctr"/>
+          <a:lstStyle/>
+          <a:p>
+            <a:pPr algn="l" indent="0" marL="0">
+              <a:buNone/>
+            </a:pPr>
+            <a:r>
+              <a:rPr lang="ko-KR" altLang="en-US" sz="1050" spc="-26" kern="0" dirty="0">
+                <a:solidFill>
+                  <a:srgbClr val="3F4654"/>
+                </a:solidFill>
+                <a:latin typeface="Pretendard Medium" pitchFamily="34" charset="0"/>
+                <a:ea typeface="Pretendard Medium" pitchFamily="34" charset="-127"/>
+                <a:cs typeface="Pretendard Medium" pitchFamily="34" charset="-120"/>
+              </a:rPr>
+              <a:t>건물 규모에 비례해 모델링 시간과 비용 증가</a:t>
+            </a:r>
+            <a:endParaRPr lang="en-US" sz="1050" dirty="0"/>
+          </a:p>
+        </p:txBody>
+      </p:sp>
+      <p:sp>
+        <p:nvSpPr>
+          <p:cNvPr id="129" name="3"/>
+          <p:cNvSpPr txBox="1"/>
+          <p:nvPr/>
+        </p:nvSpPr>
+        <p:spPr>
+          <a:xfrm>
+            <a:off x="8218785" y="4911030"/>
+            <a:ext cx="123230" cy="133350"/>
+          </a:xfrm>
+          <a:prstGeom prst="rect">
+            <a:avLst/>
+          </a:prstGeom>
+          <a:noFill/>
+          <a:ln/>
+        </p:spPr>
+        <p:txBody>
+          <a:bodyPr wrap="none" lIns="0" tIns="0" rIns="0" bIns="0" rtlCol="0" anchor="ctr"/>
+          <a:lstStyle/>
+          <a:p>
+            <a:pPr algn="l" indent="0" marL="0">
+              <a:buNone/>
+            </a:pPr>
+            <a:r>
+              <a:rPr lang="ko-KR" altLang="en-US" sz="900" spc="-12" kern="0" dirty="0">
+                <a:solidFill>
+                  <a:srgbClr val="FFFFFF"/>
+                </a:solidFill>
+                <a:latin typeface="Pretendard ExtraBold" pitchFamily="34" charset="0"/>
+                <a:ea typeface="Pretendard ExtraBold" pitchFamily="34" charset="-127"/>
+                <a:cs typeface="Pretendard ExtraBold" pitchFamily="34" charset="-120"/>
+              </a:rPr>
+              <a:t>3</a:t>
+            </a:r>
+            <a:endParaRPr lang="en-US" sz="900" dirty="0"/>
+          </a:p>
+        </p:txBody>
+      </p:sp>
+      <p:sp>
+        <p:nvSpPr>
+          <p:cNvPr id="130" name="휴먼 에러 가능성"/>
+          <p:cNvSpPr txBox="1"/>
+          <p:nvPr/>
+        </p:nvSpPr>
+        <p:spPr>
+          <a:xfrm>
+            <a:off x="8483600" y="4888508"/>
+            <a:ext cx="998712" cy="184150"/>
+          </a:xfrm>
+          <a:prstGeom prst="rect">
+            <a:avLst/>
+          </a:prstGeom>
+          <a:noFill/>
+          <a:ln/>
+        </p:spPr>
+        <p:txBody>
+          <a:bodyPr wrap="none" lIns="0" tIns="0" rIns="0" bIns="0" rtlCol="0" anchor="ctr"/>
+          <a:lstStyle/>
+          <a:p>
+            <a:pPr algn="l" indent="0" marL="0">
+              <a:buNone/>
+            </a:pPr>
+            <a:r>
+              <a:rPr lang="ko-KR" altLang="en-US" sz="1200" spc="-42" kern="0" dirty="0">
+                <a:solidFill>
+                  <a:srgbClr val="102A4C"/>
+                </a:solidFill>
+                <a:latin typeface="Pretendard ExtraBold" pitchFamily="34" charset="0"/>
+                <a:ea typeface="Pretendard ExtraBold" pitchFamily="34" charset="-127"/>
+                <a:cs typeface="Pretendard ExtraBold" pitchFamily="34" charset="-120"/>
+              </a:rPr>
+              <a:t>휴먼 에러 가능성</a:t>
+            </a:r>
+            <a:endParaRPr lang="en-US" sz="1200" dirty="0"/>
+          </a:p>
+        </p:txBody>
+      </p:sp>
+      <p:sp>
+        <p:nvSpPr>
+          <p:cNvPr id="131" name="도면 해석·입력 과정에서 누락과 오류 발생"/>
+          <p:cNvSpPr txBox="1"/>
+          <p:nvPr/>
+        </p:nvSpPr>
+        <p:spPr>
+          <a:xfrm>
+            <a:off x="8483600" y="5133578"/>
+            <a:ext cx="2205349" cy="158750"/>
+          </a:xfrm>
+          <a:prstGeom prst="rect">
+            <a:avLst/>
+          </a:prstGeom>
+          <a:noFill/>
+          <a:ln/>
+        </p:spPr>
+        <p:txBody>
+          <a:bodyPr wrap="none" lIns="0" tIns="0" rIns="0" bIns="0" rtlCol="0" anchor="ctr"/>
+          <a:lstStyle/>
+          <a:p>
+            <a:pPr algn="l" indent="0" marL="0">
+              <a:buNone/>
+            </a:pPr>
+            <a:r>
+              <a:rPr lang="ko-KR" altLang="en-US" sz="1050" spc="-26" kern="0" dirty="0">
+                <a:solidFill>
+                  <a:srgbClr val="3F4654"/>
+                </a:solidFill>
+                <a:latin typeface="Pretendard Medium" pitchFamily="34" charset="0"/>
+                <a:ea typeface="Pretendard Medium" pitchFamily="34" charset="-127"/>
+                <a:cs typeface="Pretendard Medium" pitchFamily="34" charset="-120"/>
+              </a:rPr>
+              <a:t>도면 해석·입력 과정에서 누락과 오류 발생</a:t>
+            </a:r>
+            <a:endParaRPr lang="en-US" sz="1050" dirty="0"/>
+          </a:p>
+        </p:txBody>
+      </p:sp>
+      <p:sp>
+        <p:nvSpPr>
+          <p:cNvPr id="132" name="KEY MESSAGE"/>
+          <p:cNvSpPr txBox="1"/>
+          <p:nvPr/>
+        </p:nvSpPr>
+        <p:spPr>
+          <a:xfrm>
+            <a:off x="863600" y="5982891"/>
+            <a:ext cx="864394" cy="114300"/>
+          </a:xfrm>
+          <a:prstGeom prst="rect">
+            <a:avLst/>
+          </a:prstGeom>
+          <a:noFill/>
+          <a:ln/>
+        </p:spPr>
+        <p:txBody>
+          <a:bodyPr wrap="none" lIns="0" tIns="0" rIns="0" bIns="0" rtlCol="0" anchor="ctr"/>
+          <a:lstStyle/>
+          <a:p>
+            <a:pPr algn="l" indent="0" marL="0">
+              <a:buNone/>
+            </a:pPr>
+            <a:r>
+              <a:rPr lang="ko-KR" altLang="en-US" sz="750" spc="105" kern="0" dirty="0">
+                <a:solidFill>
+                  <a:srgbClr val="FF8FA3"/>
+                </a:solidFill>
+                <a:latin typeface="Pretendard ExtraBold" pitchFamily="34" charset="0"/>
+                <a:ea typeface="Pretendard ExtraBold" pitchFamily="34" charset="-127"/>
+                <a:cs typeface="Pretendard ExtraBold" pitchFamily="34" charset="-120"/>
+              </a:rPr>
+              <a:t>KEY MESSAGE</a:t>
+            </a:r>
+            <a:endParaRPr lang="en-US" sz="750" dirty="0"/>
+          </a:p>
+        </p:txBody>
+      </p:sp>
+      <p:sp>
+        <p:nvSpPr>
+          <p:cNvPr id="133" name="2차원 도면에 기반한 3차원 BIM 모델 자동 생성 프로세스가 필요합니다"/>
+          <p:cNvSpPr txBox="1"/>
+          <p:nvPr/>
+        </p:nvSpPr>
+        <p:spPr>
+          <a:xfrm>
+            <a:off x="1854994" y="5938242"/>
+            <a:ext cx="4802779" cy="209550"/>
+          </a:xfrm>
+          <a:prstGeom prst="rect">
+            <a:avLst/>
+          </a:prstGeom>
+          <a:noFill/>
+          <a:ln/>
+        </p:spPr>
+        <p:txBody>
+          <a:bodyPr wrap="none" lIns="0" tIns="0" rIns="0" bIns="0" rtlCol="0" anchor="ctr"/>
+          <a:lstStyle/>
+          <a:p>
+            <a:pPr algn="l" indent="0" marL="0">
+              <a:buNone/>
+            </a:pPr>
+            <a:r>
+              <a:rPr lang="ko-KR" altLang="en-US" sz="1350" b="1" spc="-47" kern="0" dirty="0">
+                <a:solidFill>
+                  <a:srgbClr val="FFFFFF"/>
                 </a:solidFill>
                 <a:latin typeface="Pretendard" pitchFamily="34" charset="0"/>
                 <a:ea typeface="Pretendard" pitchFamily="34" charset="-127"/>
                 <a:cs typeface="Pretendard" pitchFamily="34" charset="-120"/>
               </a:rPr>
-              <a:t>2D 도면으로 3D BIM을 새로 구축해야 함</a:t>
-            </a:r>
-            <a:endParaRPr lang="en-US" sz="1000" dirty="0"/>
-          </a:p>
-        </p:txBody>
-      </p:sp>
-      <p:sp>
-        <p:nvSpPr>
-          <p:cNvPr id="118" name="문제"/>
+              <a:t>2차원 도면에 기반한 </a:t>
+            </a:r>
+            <a:r>
+              <a:rPr lang="ko-KR" altLang="en-US" sz="1350" b="1" spc="-47" kern="0" dirty="0">
+                <a:solidFill>
+                  <a:srgbClr val="FFB3C1"/>
+                </a:solidFill>
+                <a:latin typeface="Pretendard" pitchFamily="34" charset="0"/>
+                <a:ea typeface="Pretendard" pitchFamily="34" charset="-127"/>
+                <a:cs typeface="Pretendard" pitchFamily="34" charset="-120"/>
+              </a:rPr>
+              <a:t>3차원 BIM 모델 자동 생성 프로세스</a:t>
+            </a:r>
+            <a:r>
+              <a:rPr lang="ko-KR" altLang="en-US" sz="1350" b="1" spc="-47" kern="0" dirty="0">
+                <a:solidFill>
+                  <a:srgbClr val="FFFFFF"/>
+                </a:solidFill>
+                <a:latin typeface="Pretendard" pitchFamily="34" charset="0"/>
+                <a:ea typeface="Pretendard" pitchFamily="34" charset="-127"/>
+                <a:cs typeface="Pretendard" pitchFamily="34" charset="-120"/>
+              </a:rPr>
+              <a:t>가 필요합니다.</a:t>
+            </a:r>
+            <a:endParaRPr lang="en-US" sz="1350" dirty="0"/>
+          </a:p>
+        </p:txBody>
+      </p:sp>
+      <p:sp>
+        <p:nvSpPr>
+          <p:cNvPr id="134" name="석사 연구 발표  ·  평면도와 입면도 객체 인식 및 정보 통합을 통한 "/>
           <p:cNvSpPr txBox="1"/>
           <p:nvPr/>
         </p:nvSpPr>
         <p:spPr>
           <a:xfrm>
-            <a:off x="8032750" y="1674713"/>
-            <a:ext cx="233164" cy="127000"/>
+            <a:off x="609600" y="6472238"/>
+            <a:ext cx="5145113" cy="114300"/>
           </a:xfrm>
           <a:prstGeom prst="rect">
             <a:avLst/>
@@ -5970,30 +6582,30 @@
               <a:buNone/>
             </a:pPr>
             <a:r>
-              <a:rPr lang="ko-KR" altLang="en-US" sz="850" b="1" spc="-17" kern="0" dirty="0">
-                <a:solidFill>
-                  <a:srgbClr val="FFFFFF"/>
-                </a:solidFill>
-                <a:latin typeface="Pretendard" pitchFamily="34" charset="0"/>
-                <a:ea typeface="Pretendard" pitchFamily="34" charset="-127"/>
-                <a:cs typeface="Pretendard" pitchFamily="34" charset="-120"/>
-              </a:rPr>
-              <a:t>문제</a:t>
-            </a:r>
-            <a:endParaRPr lang="en-US" sz="850" dirty="0"/>
-          </a:p>
-        </p:txBody>
-      </p:sp>
-      <p:sp>
-        <p:nvSpPr>
-          <p:cNvPr id="119" name="사람이 도면을 보고 직접 모델링"/>
+              <a:rPr lang="ko-KR" altLang="en-US" sz="750" spc="-12" kern="0" dirty="0">
+                <a:solidFill>
+                  <a:srgbClr val="737C8B"/>
+                </a:solidFill>
+                <a:latin typeface="Pretendard Medium" pitchFamily="34" charset="0"/>
+                <a:ea typeface="Pretendard Medium" pitchFamily="34" charset="-127"/>
+                <a:cs typeface="Pretendard Medium" pitchFamily="34" charset="-120"/>
+              </a:rPr>
+              <a:t>석사 연구 발표  ·  평면도와 입면도 객체 인식 및 정보 통합을 통한 3D BIM 자동 생성 연구  ·  Utility 기술(건축, BIM/5D) 지원자 ○○○</a:t>
+            </a:r>
+            <a:endParaRPr lang="en-US" sz="750" dirty="0"/>
+          </a:p>
+        </p:txBody>
+      </p:sp>
+      <p:sp>
+        <p:nvSpPr>
+          <p:cNvPr id="135" name="01 / 05"/>
           <p:cNvSpPr txBox="1"/>
           <p:nvPr/>
         </p:nvSpPr>
         <p:spPr>
           <a:xfrm>
-            <a:off x="8424664" y="1641277"/>
-            <a:ext cx="2018774" cy="196850"/>
+            <a:off x="11232852" y="6472238"/>
+            <a:ext cx="400348" cy="114300"/>
           </a:xfrm>
           <a:prstGeom prst="rect">
             <a:avLst/>
@@ -6009,7 +6621,7 @@
               <a:buNone/>
             </a:pPr>
             <a:r>
-              <a:rPr lang="ko-KR" altLang="en-US" sz="1300" spc="-46" kern="0" dirty="0">
+              <a:rPr lang="ko-KR" altLang="en-US" sz="750" spc="45" kern="0" dirty="0">
                 <a:solidFill>
                   <a:srgbClr val="102A4C"/>
                 </a:solidFill>
@@ -6017,663 +6629,8 @@
                 <a:ea typeface="Pretendard ExtraBold" pitchFamily="34" charset="-127"/>
                 <a:cs typeface="Pretendard ExtraBold" pitchFamily="34" charset="-120"/>
               </a:rPr>
-              <a:t>사람이 도면을 보고 직접 모델링</a:t>
-            </a:r>
-            <a:endParaRPr lang="en-US" sz="1300" dirty="0"/>
-          </a:p>
-        </p:txBody>
-      </p:sp>
-      <p:sp>
-        <p:nvSpPr>
-          <p:cNvPr id="120" name="평면도 · 입면도"/>
-          <p:cNvSpPr txBox="1"/>
-          <p:nvPr/>
-        </p:nvSpPr>
-        <p:spPr>
-          <a:xfrm>
-            <a:off x="8259316" y="3073797"/>
-            <a:ext cx="677168" cy="127000"/>
-          </a:xfrm>
-          <a:prstGeom prst="rect">
-            <a:avLst/>
-          </a:prstGeom>
-          <a:noFill/>
-          <a:ln/>
-        </p:spPr>
-        <p:txBody>
-          <a:bodyPr wrap="none" lIns="0" tIns="0" rIns="0" bIns="0" rtlCol="0" anchor="ctr"/>
-          <a:lstStyle/>
-          <a:p>
-            <a:pPr algn="l" indent="0" marL="0">
-              <a:buNone/>
-            </a:pPr>
-            <a:r>
-              <a:rPr lang="ko-KR" altLang="en-US" sz="850" b="1" spc="-12" kern="0" dirty="0">
-                <a:solidFill>
-                  <a:srgbClr val="3F4654"/>
-                </a:solidFill>
-                <a:latin typeface="Pretendard" pitchFamily="34" charset="0"/>
-                <a:ea typeface="Pretendard" pitchFamily="34" charset="-127"/>
-                <a:cs typeface="Pretendard" pitchFamily="34" charset="-120"/>
-              </a:rPr>
-              <a:t>평면도 · 입면도</a:t>
-            </a:r>
-            <a:endParaRPr lang="en-US" sz="850" dirty="0"/>
-          </a:p>
-        </p:txBody>
-      </p:sp>
-      <p:sp>
-        <p:nvSpPr>
-          <p:cNvPr id="121" name="도면 해석 · 직접 입력"/>
-          <p:cNvSpPr txBox="1"/>
-          <p:nvPr/>
-        </p:nvSpPr>
-        <p:spPr>
-          <a:xfrm>
-            <a:off x="9319915" y="3073797"/>
-            <a:ext cx="905951" cy="127000"/>
-          </a:xfrm>
-          <a:prstGeom prst="rect">
-            <a:avLst/>
-          </a:prstGeom>
-          <a:noFill/>
-          <a:ln/>
-        </p:spPr>
-        <p:txBody>
-          <a:bodyPr wrap="none" lIns="0" tIns="0" rIns="0" bIns="0" rtlCol="0" anchor="ctr"/>
-          <a:lstStyle/>
-          <a:p>
-            <a:pPr algn="l" indent="0" marL="0">
-              <a:buNone/>
-            </a:pPr>
-            <a:r>
-              <a:rPr lang="ko-KR" altLang="en-US" sz="850" spc="-12" kern="0" dirty="0">
-                <a:solidFill>
-                  <a:srgbClr val="102A4C"/>
-                </a:solidFill>
-                <a:latin typeface="Pretendard ExtraBold" pitchFamily="34" charset="0"/>
-                <a:ea typeface="Pretendard ExtraBold" pitchFamily="34" charset="-127"/>
-                <a:cs typeface="Pretendard ExtraBold" pitchFamily="34" charset="-120"/>
-              </a:rPr>
-              <a:t>도면 해석 · 직접 입력</a:t>
-            </a:r>
-            <a:endParaRPr lang="en-US" sz="850" dirty="0"/>
-          </a:p>
-        </p:txBody>
-      </p:sp>
-      <p:sp>
-        <p:nvSpPr>
-          <p:cNvPr id="122" name="수작업 모델링 예시"/>
-          <p:cNvSpPr txBox="1"/>
-          <p:nvPr/>
-        </p:nvSpPr>
-        <p:spPr>
-          <a:xfrm>
-            <a:off x="10512475" y="3073797"/>
-            <a:ext cx="831751" cy="127000"/>
-          </a:xfrm>
-          <a:prstGeom prst="rect">
-            <a:avLst/>
-          </a:prstGeom>
-          <a:noFill/>
-          <a:ln/>
-        </p:spPr>
-        <p:txBody>
-          <a:bodyPr wrap="none" lIns="0" tIns="0" rIns="0" bIns="0" rtlCol="0" anchor="ctr"/>
-          <a:lstStyle/>
-          <a:p>
-            <a:pPr algn="l" indent="0" marL="0">
-              <a:buNone/>
-            </a:pPr>
-            <a:r>
-              <a:rPr lang="ko-KR" altLang="en-US" sz="850" b="1" spc="-12" kern="0" dirty="0">
-                <a:solidFill>
-                  <a:srgbClr val="3F4654"/>
-                </a:solidFill>
-                <a:latin typeface="Pretendard" pitchFamily="34" charset="0"/>
-                <a:ea typeface="Pretendard" pitchFamily="34" charset="-127"/>
-                <a:cs typeface="Pretendard" pitchFamily="34" charset="-120"/>
-              </a:rPr>
-              <a:t>수작업 모델링 예시</a:t>
-            </a:r>
-            <a:endParaRPr lang="en-US" sz="850" dirty="0"/>
-          </a:p>
-        </p:txBody>
-      </p:sp>
-      <p:sp>
-        <p:nvSpPr>
-          <p:cNvPr id="123" name="1"/>
-          <p:cNvSpPr txBox="1"/>
-          <p:nvPr/>
-        </p:nvSpPr>
-        <p:spPr>
-          <a:xfrm>
-            <a:off x="8228409" y="3546574"/>
-            <a:ext cx="103981" cy="133350"/>
-          </a:xfrm>
-          <a:prstGeom prst="rect">
-            <a:avLst/>
-          </a:prstGeom>
-          <a:noFill/>
-          <a:ln/>
-        </p:spPr>
-        <p:txBody>
-          <a:bodyPr wrap="none" lIns="0" tIns="0" rIns="0" bIns="0" rtlCol="0" anchor="ctr"/>
-          <a:lstStyle/>
-          <a:p>
-            <a:pPr algn="l" indent="0" marL="0">
-              <a:buNone/>
-            </a:pPr>
-            <a:r>
-              <a:rPr lang="ko-KR" altLang="en-US" sz="900" spc="-12" kern="0" dirty="0">
-                <a:solidFill>
-                  <a:srgbClr val="FFFFFF"/>
-                </a:solidFill>
-                <a:latin typeface="Pretendard ExtraBold" pitchFamily="34" charset="0"/>
-                <a:ea typeface="Pretendard ExtraBold" pitchFamily="34" charset="-127"/>
-                <a:cs typeface="Pretendard ExtraBold" pitchFamily="34" charset="-120"/>
-              </a:rPr>
-              <a:t>1</a:t>
-            </a:r>
-            <a:endParaRPr lang="en-US" sz="900" dirty="0"/>
-          </a:p>
-        </p:txBody>
-      </p:sp>
-      <p:sp>
-        <p:nvSpPr>
-          <p:cNvPr id="124" name="노동집약적 작업"/>
-          <p:cNvSpPr txBox="1"/>
-          <p:nvPr/>
-        </p:nvSpPr>
-        <p:spPr>
-          <a:xfrm>
-            <a:off x="8483600" y="3524052"/>
-            <a:ext cx="968212" cy="184150"/>
-          </a:xfrm>
-          <a:prstGeom prst="rect">
-            <a:avLst/>
-          </a:prstGeom>
-          <a:noFill/>
-          <a:ln/>
-        </p:spPr>
-        <p:txBody>
-          <a:bodyPr wrap="none" lIns="0" tIns="0" rIns="0" bIns="0" rtlCol="0" anchor="ctr"/>
-          <a:lstStyle/>
-          <a:p>
-            <a:pPr algn="l" indent="0" marL="0">
-              <a:buNone/>
-            </a:pPr>
-            <a:r>
-              <a:rPr lang="ko-KR" altLang="en-US" sz="1200" spc="-42" kern="0" dirty="0">
-                <a:solidFill>
-                  <a:srgbClr val="102A4C"/>
-                </a:solidFill>
-                <a:latin typeface="Pretendard ExtraBold" pitchFamily="34" charset="0"/>
-                <a:ea typeface="Pretendard ExtraBold" pitchFamily="34" charset="-127"/>
-                <a:cs typeface="Pretendard ExtraBold" pitchFamily="34" charset="-120"/>
-              </a:rPr>
-              <a:t>노동집약적 작업</a:t>
-            </a:r>
-            <a:endParaRPr lang="en-US" sz="1200" dirty="0"/>
-          </a:p>
-        </p:txBody>
-      </p:sp>
-      <p:sp>
-        <p:nvSpPr>
-          <p:cNvPr id="125" name="도면을 한 장씩 보며 벽·창·문을 직접 입력"/>
-          <p:cNvSpPr txBox="1"/>
-          <p:nvPr/>
-        </p:nvSpPr>
-        <p:spPr>
-          <a:xfrm>
-            <a:off x="8483600" y="3769122"/>
-            <a:ext cx="2151501" cy="158750"/>
-          </a:xfrm>
-          <a:prstGeom prst="rect">
-            <a:avLst/>
-          </a:prstGeom>
-          <a:noFill/>
-          <a:ln/>
-        </p:spPr>
-        <p:txBody>
-          <a:bodyPr wrap="none" lIns="0" tIns="0" rIns="0" bIns="0" rtlCol="0" anchor="ctr"/>
-          <a:lstStyle/>
-          <a:p>
-            <a:pPr algn="l" indent="0" marL="0">
-              <a:buNone/>
-            </a:pPr>
-            <a:r>
-              <a:rPr lang="ko-KR" altLang="en-US" sz="1050" spc="-26" kern="0" dirty="0">
-                <a:solidFill>
-                  <a:srgbClr val="3F4654"/>
-                </a:solidFill>
-                <a:latin typeface="Pretendard Medium" pitchFamily="34" charset="0"/>
-                <a:ea typeface="Pretendard Medium" pitchFamily="34" charset="-127"/>
-                <a:cs typeface="Pretendard Medium" pitchFamily="34" charset="-120"/>
-              </a:rPr>
-              <a:t>도면을 한 장씩 보며 벽·창·문을 직접 입력</a:t>
-            </a:r>
-            <a:endParaRPr lang="en-US" sz="1050" dirty="0"/>
-          </a:p>
-        </p:txBody>
-      </p:sp>
-      <p:sp>
-        <p:nvSpPr>
-          <p:cNvPr id="126" name="2"/>
-          <p:cNvSpPr txBox="1"/>
-          <p:nvPr/>
-        </p:nvSpPr>
-        <p:spPr>
-          <a:xfrm>
-            <a:off x="8220373" y="4228802"/>
-            <a:ext cx="119955" cy="133350"/>
-          </a:xfrm>
-          <a:prstGeom prst="rect">
-            <a:avLst/>
-          </a:prstGeom>
-          <a:noFill/>
-          <a:ln/>
-        </p:spPr>
-        <p:txBody>
-          <a:bodyPr wrap="none" lIns="0" tIns="0" rIns="0" bIns="0" rtlCol="0" anchor="ctr"/>
-          <a:lstStyle/>
-          <a:p>
-            <a:pPr algn="l" indent="0" marL="0">
-              <a:buNone/>
-            </a:pPr>
-            <a:r>
-              <a:rPr lang="ko-KR" altLang="en-US" sz="900" spc="-12" kern="0" dirty="0">
-                <a:solidFill>
-                  <a:srgbClr val="FFFFFF"/>
-                </a:solidFill>
-                <a:latin typeface="Pretendard ExtraBold" pitchFamily="34" charset="0"/>
-                <a:ea typeface="Pretendard ExtraBold" pitchFamily="34" charset="-127"/>
-                <a:cs typeface="Pretendard ExtraBold" pitchFamily="34" charset="-120"/>
-              </a:rPr>
-              <a:t>2</a:t>
-            </a:r>
-            <a:endParaRPr lang="en-US" sz="900" dirty="0"/>
-          </a:p>
-        </p:txBody>
-      </p:sp>
-      <p:sp>
-        <p:nvSpPr>
-          <p:cNvPr id="127" name="긴 작업 시간 · 높은 비용"/>
-          <p:cNvSpPr txBox="1"/>
-          <p:nvPr/>
-        </p:nvSpPr>
-        <p:spPr>
-          <a:xfrm>
-            <a:off x="8483600" y="4206280"/>
-            <a:ext cx="1399627" cy="184150"/>
-          </a:xfrm>
-          <a:prstGeom prst="rect">
-            <a:avLst/>
-          </a:prstGeom>
-          <a:noFill/>
-          <a:ln/>
-        </p:spPr>
-        <p:txBody>
-          <a:bodyPr wrap="none" lIns="0" tIns="0" rIns="0" bIns="0" rtlCol="0" anchor="ctr"/>
-          <a:lstStyle/>
-          <a:p>
-            <a:pPr algn="l" indent="0" marL="0">
-              <a:buNone/>
-            </a:pPr>
-            <a:r>
-              <a:rPr lang="ko-KR" altLang="en-US" sz="1200" spc="-42" kern="0" dirty="0">
-                <a:solidFill>
-                  <a:srgbClr val="102A4C"/>
-                </a:solidFill>
-                <a:latin typeface="Pretendard ExtraBold" pitchFamily="34" charset="0"/>
-                <a:ea typeface="Pretendard ExtraBold" pitchFamily="34" charset="-127"/>
-                <a:cs typeface="Pretendard ExtraBold" pitchFamily="34" charset="-120"/>
-              </a:rPr>
-              <a:t>긴 작업 시간 · 높은 비용</a:t>
-            </a:r>
-            <a:endParaRPr lang="en-US" sz="1200" dirty="0"/>
-          </a:p>
-        </p:txBody>
-      </p:sp>
-      <p:sp>
-        <p:nvSpPr>
-          <p:cNvPr id="128" name="건물 규모에 비례해 모델링 시간과 비용 증가"/>
-          <p:cNvSpPr txBox="1"/>
-          <p:nvPr/>
-        </p:nvSpPr>
-        <p:spPr>
-          <a:xfrm>
-            <a:off x="8483600" y="4451350"/>
-            <a:ext cx="2321248" cy="158750"/>
-          </a:xfrm>
-          <a:prstGeom prst="rect">
-            <a:avLst/>
-          </a:prstGeom>
-          <a:noFill/>
-          <a:ln/>
-        </p:spPr>
-        <p:txBody>
-          <a:bodyPr wrap="none" lIns="0" tIns="0" rIns="0" bIns="0" rtlCol="0" anchor="ctr"/>
-          <a:lstStyle/>
-          <a:p>
-            <a:pPr algn="l" indent="0" marL="0">
-              <a:buNone/>
-            </a:pPr>
-            <a:r>
-              <a:rPr lang="ko-KR" altLang="en-US" sz="1050" spc="-26" kern="0" dirty="0">
-                <a:solidFill>
-                  <a:srgbClr val="3F4654"/>
-                </a:solidFill>
-                <a:latin typeface="Pretendard Medium" pitchFamily="34" charset="0"/>
-                <a:ea typeface="Pretendard Medium" pitchFamily="34" charset="-127"/>
-                <a:cs typeface="Pretendard Medium" pitchFamily="34" charset="-120"/>
-              </a:rPr>
-              <a:t>건물 규모에 비례해 모델링 시간과 비용 증가</a:t>
-            </a:r>
-            <a:endParaRPr lang="en-US" sz="1050" dirty="0"/>
-          </a:p>
-        </p:txBody>
-      </p:sp>
-      <p:sp>
-        <p:nvSpPr>
-          <p:cNvPr id="129" name="3"/>
-          <p:cNvSpPr txBox="1"/>
-          <p:nvPr/>
-        </p:nvSpPr>
-        <p:spPr>
-          <a:xfrm>
-            <a:off x="8218785" y="4911030"/>
-            <a:ext cx="123230" cy="133350"/>
-          </a:xfrm>
-          <a:prstGeom prst="rect">
-            <a:avLst/>
-          </a:prstGeom>
-          <a:noFill/>
-          <a:ln/>
-        </p:spPr>
-        <p:txBody>
-          <a:bodyPr wrap="none" lIns="0" tIns="0" rIns="0" bIns="0" rtlCol="0" anchor="ctr"/>
-          <a:lstStyle/>
-          <a:p>
-            <a:pPr algn="l" indent="0" marL="0">
-              <a:buNone/>
-            </a:pPr>
-            <a:r>
-              <a:rPr lang="ko-KR" altLang="en-US" sz="900" spc="-12" kern="0" dirty="0">
-                <a:solidFill>
-                  <a:srgbClr val="FFFFFF"/>
-                </a:solidFill>
-                <a:latin typeface="Pretendard ExtraBold" pitchFamily="34" charset="0"/>
-                <a:ea typeface="Pretendard ExtraBold" pitchFamily="34" charset="-127"/>
-                <a:cs typeface="Pretendard ExtraBold" pitchFamily="34" charset="-120"/>
-              </a:rPr>
-              <a:t>3</a:t>
-            </a:r>
-            <a:endParaRPr lang="en-US" sz="900" dirty="0"/>
-          </a:p>
-        </p:txBody>
-      </p:sp>
-      <p:sp>
-        <p:nvSpPr>
-          <p:cNvPr id="130" name="휴먼 에러 가능성"/>
-          <p:cNvSpPr txBox="1"/>
-          <p:nvPr/>
-        </p:nvSpPr>
-        <p:spPr>
-          <a:xfrm>
-            <a:off x="8483600" y="4888508"/>
-            <a:ext cx="998712" cy="184150"/>
-          </a:xfrm>
-          <a:prstGeom prst="rect">
-            <a:avLst/>
-          </a:prstGeom>
-          <a:noFill/>
-          <a:ln/>
-        </p:spPr>
-        <p:txBody>
-          <a:bodyPr wrap="none" lIns="0" tIns="0" rIns="0" bIns="0" rtlCol="0" anchor="ctr"/>
-          <a:lstStyle/>
-          <a:p>
-            <a:pPr algn="l" indent="0" marL="0">
-              <a:buNone/>
-            </a:pPr>
-            <a:r>
-              <a:rPr lang="ko-KR" altLang="en-US" sz="1200" spc="-42" kern="0" dirty="0">
-                <a:solidFill>
-                  <a:srgbClr val="102A4C"/>
-                </a:solidFill>
-                <a:latin typeface="Pretendard ExtraBold" pitchFamily="34" charset="0"/>
-                <a:ea typeface="Pretendard ExtraBold" pitchFamily="34" charset="-127"/>
-                <a:cs typeface="Pretendard ExtraBold" pitchFamily="34" charset="-120"/>
-              </a:rPr>
-              <a:t>휴먼 에러 가능성</a:t>
-            </a:r>
-            <a:endParaRPr lang="en-US" sz="1200" dirty="0"/>
-          </a:p>
-        </p:txBody>
-      </p:sp>
-      <p:sp>
-        <p:nvSpPr>
-          <p:cNvPr id="131" name="도면 해석·입력 과정에서 누락과 오류 발생"/>
-          <p:cNvSpPr txBox="1"/>
-          <p:nvPr/>
-        </p:nvSpPr>
-        <p:spPr>
-          <a:xfrm>
-            <a:off x="8483600" y="5133578"/>
-            <a:ext cx="2205349" cy="158750"/>
-          </a:xfrm>
-          <a:prstGeom prst="rect">
-            <a:avLst/>
-          </a:prstGeom>
-          <a:noFill/>
-          <a:ln/>
-        </p:spPr>
-        <p:txBody>
-          <a:bodyPr wrap="none" lIns="0" tIns="0" rIns="0" bIns="0" rtlCol="0" anchor="ctr"/>
-          <a:lstStyle/>
-          <a:p>
-            <a:pPr algn="l" indent="0" marL="0">
-              <a:buNone/>
-            </a:pPr>
-            <a:r>
-              <a:rPr lang="ko-KR" altLang="en-US" sz="1050" spc="-26" kern="0" dirty="0">
-                <a:solidFill>
-                  <a:srgbClr val="3F4654"/>
-                </a:solidFill>
-                <a:latin typeface="Pretendard Medium" pitchFamily="34" charset="0"/>
-                <a:ea typeface="Pretendard Medium" pitchFamily="34" charset="-127"/>
-                <a:cs typeface="Pretendard Medium" pitchFamily="34" charset="-120"/>
-              </a:rPr>
-              <a:t>도면 해석·입력 과정에서 누락과 오류 발생</a:t>
-            </a:r>
-            <a:endParaRPr lang="en-US" sz="1050" dirty="0"/>
-          </a:p>
-        </p:txBody>
-      </p:sp>
-      <p:sp>
-        <p:nvSpPr>
-          <p:cNvPr id="132" name="KEY MESSAGE"/>
-          <p:cNvSpPr txBox="1"/>
-          <p:nvPr/>
-        </p:nvSpPr>
-        <p:spPr>
-          <a:xfrm>
-            <a:off x="863600" y="5982891"/>
-            <a:ext cx="864394" cy="114300"/>
-          </a:xfrm>
-          <a:prstGeom prst="rect">
-            <a:avLst/>
-          </a:prstGeom>
-          <a:noFill/>
-          <a:ln/>
-        </p:spPr>
-        <p:txBody>
-          <a:bodyPr wrap="none" lIns="0" tIns="0" rIns="0" bIns="0" rtlCol="0" anchor="ctr"/>
-          <a:lstStyle/>
-          <a:p>
-            <a:pPr algn="l" indent="0" marL="0">
-              <a:buNone/>
-            </a:pPr>
-            <a:r>
-              <a:rPr lang="ko-KR" altLang="en-US" sz="750" spc="105" kern="0" dirty="0">
-                <a:solidFill>
-                  <a:srgbClr val="FF8FA3"/>
-                </a:solidFill>
-                <a:latin typeface="Pretendard ExtraBold" pitchFamily="34" charset="0"/>
-                <a:ea typeface="Pretendard ExtraBold" pitchFamily="34" charset="-127"/>
-                <a:cs typeface="Pretendard ExtraBold" pitchFamily="34" charset="-120"/>
-              </a:rPr>
-              <a:t>KEY MESSAGE</a:t>
-            </a:r>
-            <a:endParaRPr lang="en-US" sz="750" dirty="0"/>
-          </a:p>
-        </p:txBody>
-      </p:sp>
-      <p:sp>
-        <p:nvSpPr>
-          <p:cNvPr id="133" name="2차원 도면에 기반한 3차원 BIM 모델 자동 생성 프로세스가 필요합니다"/>
-          <p:cNvSpPr txBox="1"/>
-          <p:nvPr/>
-        </p:nvSpPr>
-        <p:spPr>
-          <a:xfrm>
-            <a:off x="1854994" y="5938242"/>
-            <a:ext cx="4802779" cy="209550"/>
-          </a:xfrm>
-          <a:prstGeom prst="rect">
-            <a:avLst/>
-          </a:prstGeom>
-          <a:noFill/>
-          <a:ln/>
-        </p:spPr>
-        <p:txBody>
-          <a:bodyPr wrap="none" lIns="0" tIns="0" rIns="0" bIns="0" rtlCol="0" anchor="ctr"/>
-          <a:lstStyle/>
-          <a:p>
-            <a:pPr algn="l" indent="0" marL="0">
-              <a:buNone/>
-            </a:pPr>
-            <a:r>
-              <a:rPr lang="ko-KR" altLang="en-US" sz="1350" b="1" spc="-47" kern="0" dirty="0">
-                <a:solidFill>
-                  <a:srgbClr val="FFFFFF"/>
-                </a:solidFill>
-                <a:latin typeface="Pretendard" pitchFamily="34" charset="0"/>
-                <a:ea typeface="Pretendard" pitchFamily="34" charset="-127"/>
-                <a:cs typeface="Pretendard" pitchFamily="34" charset="-120"/>
-              </a:rPr>
-              <a:t>2차원 도면에 기반한 </a:t>
-            </a:r>
-            <a:pPr algn="l" indent="0" marL="0">
-              <a:buNone/>
-            </a:pPr>
-            <a:r>
-              <a:rPr lang="ko-KR" altLang="en-US" sz="1350" b="1" spc="-47" kern="0" dirty="0">
-                <a:solidFill>
-                  <a:srgbClr val="FFB3C1"/>
-                </a:solidFill>
-                <a:latin typeface="Pretendard" pitchFamily="34" charset="0"/>
-                <a:ea typeface="Pretendard" pitchFamily="34" charset="-127"/>
-                <a:cs typeface="Pretendard" pitchFamily="34" charset="-120"/>
-              </a:rPr>
-              <a:t>3차원 BIM 모델 자동 생성 프로세스</a:t>
-            </a:r>
-            <a:pPr algn="l" indent="0" marL="0">
-              <a:buNone/>
-            </a:pPr>
-            <a:r>
-              <a:rPr lang="ko-KR" altLang="en-US" sz="1350" b="1" spc="-47" kern="0" dirty="0">
-                <a:solidFill>
-                  <a:srgbClr val="FFFFFF"/>
-                </a:solidFill>
-                <a:latin typeface="Pretendard" pitchFamily="34" charset="0"/>
-                <a:ea typeface="Pretendard" pitchFamily="34" charset="-127"/>
-                <a:cs typeface="Pretendard" pitchFamily="34" charset="-120"/>
-              </a:rPr>
-              <a:t>가 필요합니다.</a:t>
-            </a:r>
-            <a:endParaRPr lang="en-US" sz="1350" dirty="0"/>
-          </a:p>
-        </p:txBody>
-      </p:sp>
-      <p:sp>
-        <p:nvSpPr>
-          <p:cNvPr id="134" name="석사 연구 발표  ·  평면도와 입면도 객체 인식 및 정보 통합을 통한 "/>
-          <p:cNvSpPr txBox="1"/>
-          <p:nvPr/>
-        </p:nvSpPr>
-        <p:spPr>
-          <a:xfrm>
-            <a:off x="609600" y="6472238"/>
-            <a:ext cx="5145113" cy="114300"/>
-          </a:xfrm>
-          <a:prstGeom prst="rect">
-            <a:avLst/>
-          </a:prstGeom>
-          <a:noFill/>
-          <a:ln/>
-        </p:spPr>
-        <p:txBody>
-          <a:bodyPr wrap="none" lIns="0" tIns="0" rIns="0" bIns="0" rtlCol="0" anchor="ctr"/>
-          <a:lstStyle/>
-          <a:p>
-            <a:pPr algn="l" indent="0" marL="0">
-              <a:buNone/>
-            </a:pPr>
-            <a:r>
-              <a:rPr lang="ko-KR" altLang="en-US" sz="750" spc="-12" kern="0" dirty="0">
-                <a:solidFill>
-                  <a:srgbClr val="737C8B"/>
-                </a:solidFill>
-                <a:latin typeface="Pretendard Medium" pitchFamily="34" charset="0"/>
-                <a:ea typeface="Pretendard Medium" pitchFamily="34" charset="-127"/>
-                <a:cs typeface="Pretendard Medium" pitchFamily="34" charset="-120"/>
-              </a:rPr>
-              <a:t>석사 연구 발표  ·  평면도와 입면도 객체 인식 및 정보 통합을 통한 3D BIM 자동 생성 연구  ·  Utility 기술(건축, BIM/5D) 지원자 ○○○</a:t>
-            </a:r>
-            <a:endParaRPr lang="en-US" sz="750" dirty="0"/>
-          </a:p>
-        </p:txBody>
-      </p:sp>
-      <p:sp>
-        <p:nvSpPr>
-          <p:cNvPr id="135" name="01 / 05"/>
-          <p:cNvSpPr txBox="1"/>
-          <p:nvPr/>
-        </p:nvSpPr>
-        <p:spPr>
-          <a:xfrm>
-            <a:off x="11232852" y="6472238"/>
-            <a:ext cx="400348" cy="114300"/>
-          </a:xfrm>
-          <a:prstGeom prst="rect">
-            <a:avLst/>
-          </a:prstGeom>
-          <a:noFill/>
-          <a:ln/>
-        </p:spPr>
-        <p:txBody>
-          <a:bodyPr wrap="none" lIns="0" tIns="0" rIns="0" bIns="0" rtlCol="0" anchor="ctr"/>
-          <a:lstStyle/>
-          <a:p>
-            <a:pPr algn="l" indent="0" marL="0">
-              <a:buNone/>
-            </a:pPr>
-            <a:r>
-              <a:rPr lang="ko-KR" altLang="en-US" sz="750" spc="45" kern="0" dirty="0">
-                <a:solidFill>
-                  <a:srgbClr val="102A4C"/>
-                </a:solidFill>
-                <a:latin typeface="Pretendard ExtraBold" pitchFamily="34" charset="0"/>
-                <a:ea typeface="Pretendard ExtraBold" pitchFamily="34" charset="-127"/>
-                <a:cs typeface="Pretendard ExtraBold" pitchFamily="34" charset="-120"/>
-              </a:rPr>
               <a:t>01</a:t>
             </a:r>
-            <a:pPr algn="l" indent="0" marL="0">
-              <a:buNone/>
-            </a:pPr>
             <a:r>
               <a:rPr lang="ko-KR" altLang="en-US" sz="750" spc="45" kern="0" dirty="0">
                 <a:solidFill>
@@ -8871,15 +8828,7 @@
               </a:rPr>
               <a:t>기존 연구의 세 가지 한계를</a:t>
             </a:r>
-            <a:endParaRPr lang="en-US" sz="2300" dirty="0"/>
-          </a:p>
-          <a:p>
-            <a:pPr algn="l" indent="0" marL="0">
-              <a:lnSpc>
-                <a:spcPts val="2852"/>
-              </a:lnSpc>
-              <a:buNone/>
-            </a:pPr>
+            <a:br/>
             <a:r>
               <a:rPr lang="ko-KR" altLang="en-US" sz="2300" spc="-92" kern="0" dirty="0">
                 <a:solidFill>
@@ -8891,12 +8840,6 @@
               </a:rPr>
               <a:t>세 가지 연구 목표</a:t>
             </a:r>
-            <a:pPr algn="l" indent="0" marL="0">
-              <a:lnSpc>
-                <a:spcPts val="2852"/>
-              </a:lnSpc>
-              <a:buNone/>
-            </a:pPr>
             <a:r>
               <a:rPr lang="ko-KR" altLang="en-US" sz="2300" spc="-92" kern="0" dirty="0">
                 <a:solidFill>
@@ -10120,15 +10063,7 @@
               </a:rPr>
               <a:t>딥러닝 기반 도면 객체 인식과 평면도·입면도 간 직접 매칭으로,</a:t>
             </a:r>
-            <a:endParaRPr lang="en-US" sz="1350" dirty="0"/>
-          </a:p>
-          <a:p>
-            <a:pPr algn="l" indent="0" marL="0">
-              <a:lnSpc>
-                <a:spcPts val="1890"/>
-              </a:lnSpc>
-              <a:buNone/>
-            </a:pPr>
+            <a:br/>
             <a:r>
               <a:rPr lang="ko-KR" altLang="en-US" sz="1350" b="1" spc="-47" kern="0" dirty="0">
                 <a:solidFill>
@@ -10140,12 +10075,6 @@
               </a:rPr>
               <a:t>정확한 3차원 정보를 가진 BIM 자동 생성 방법</a:t>
             </a:r>
-            <a:pPr algn="l" indent="0" marL="0">
-              <a:lnSpc>
-                <a:spcPts val="1890"/>
-              </a:lnSpc>
-              <a:buNone/>
-            </a:pPr>
             <a:r>
               <a:rPr lang="ko-KR" altLang="en-US" sz="1350" b="1" spc="-47" kern="0" dirty="0">
                 <a:solidFill>
@@ -10235,9 +10164,6 @@
               </a:rPr>
               <a:t>02</a:t>
             </a:r>
-            <a:pPr algn="l" indent="0" marL="0">
-              <a:buNone/>
-            </a:pPr>
             <a:r>
               <a:rPr lang="ko-KR" altLang="en-US" sz="750" spc="45" kern="0" dirty="0">
                 <a:solidFill>
@@ -11788,15 +11714,7 @@
               </a:rPr>
               <a:t>도면 이미지만으로 객체 인식부터 BIM 생성까지</a:t>
             </a:r>
-            <a:endParaRPr lang="en-US" sz="2300" dirty="0"/>
-          </a:p>
-          <a:p>
-            <a:pPr algn="l" indent="0" marL="0">
-              <a:lnSpc>
-                <a:spcPts val="2852"/>
-              </a:lnSpc>
-              <a:buNone/>
-            </a:pPr>
+            <a:br/>
             <a:r>
               <a:rPr lang="ko-KR" altLang="en-US" sz="2300" spc="-92" kern="0" dirty="0">
                 <a:solidFill>
@@ -11808,12 +11726,6 @@
               </a:rPr>
               <a:t>전 과정을 자동화</a:t>
             </a:r>
-            <a:pPr algn="l" indent="0" marL="0">
-              <a:lnSpc>
-                <a:spcPts val="2852"/>
-              </a:lnSpc>
-              <a:buNone/>
-            </a:pPr>
             <a:r>
               <a:rPr lang="ko-KR" altLang="en-US" sz="2300" spc="-92" kern="0" dirty="0">
                 <a:solidFill>
@@ -12293,34 +12205,70 @@
               </a:rPr>
               <a:t>창·문의 평면 위치 </a:t>
             </a:r>
+            <a:r>
+              <a:rPr lang="ko-KR" altLang="en-US" sz="950" b="1" spc="-28" kern="0" dirty="0">
+                <a:solidFill>
+                  <a:srgbClr val="141820"/>
+                </a:solidFill>
+                <a:latin typeface="Pretendard" pitchFamily="34" charset="0"/>
+                <a:ea typeface="Pretendard" pitchFamily="34" charset="-127"/>
+                <a:cs typeface="Pretendard" pitchFamily="34" charset="-120"/>
+              </a:rPr>
+              <a:t>X·Y</a:t>
+            </a:r>
+            <a:endParaRPr lang="en-US" sz="950" dirty="0"/>
+          </a:p>
+        </p:txBody>
+      </p:sp>
+      <p:sp>
+        <p:nvSpPr>
+          <p:cNvPr id="58" name="입면도"/>
+          <p:cNvSpPr txBox="1"/>
+          <p:nvPr/>
+        </p:nvSpPr>
+        <p:spPr>
+          <a:xfrm>
+            <a:off x="787400" y="4743847"/>
+            <a:ext cx="311249" cy="120650"/>
+          </a:xfrm>
+          <a:prstGeom prst="rect">
+            <a:avLst/>
+          </a:prstGeom>
+          <a:noFill/>
+          <a:ln/>
+        </p:spPr>
+        <p:txBody>
+          <a:bodyPr wrap="none" lIns="0" tIns="0" rIns="0" bIns="0" rtlCol="0" anchor="ctr"/>
+          <a:lstStyle/>
+          <a:p>
             <a:pPr algn="l" indent="0" marL="0">
               <a:buNone/>
             </a:pPr>
             <a:r>
-              <a:rPr lang="ko-KR" altLang="en-US" sz="950" b="1" spc="-28" kern="0" dirty="0">
-                <a:solidFill>
-                  <a:srgbClr val="141820"/>
-                </a:solidFill>
-                <a:latin typeface="Pretendard" pitchFamily="34" charset="0"/>
-                <a:ea typeface="Pretendard" pitchFamily="34" charset="-127"/>
-                <a:cs typeface="Pretendard" pitchFamily="34" charset="-120"/>
-              </a:rPr>
-              <a:t>X·Y</a:t>
-            </a:r>
-            <a:endParaRPr lang="en-US" sz="950" dirty="0"/>
-          </a:p>
-        </p:txBody>
-      </p:sp>
-      <p:sp>
-        <p:nvSpPr>
-          <p:cNvPr id="58" name="입면도"/>
+              <a:rPr lang="ko-KR" altLang="en-US" sz="800" spc="-8" kern="0" dirty="0">
+                <a:solidFill>
+                  <a:srgbClr val="2B4A78"/>
+                </a:solidFill>
+                <a:latin typeface="Pretendard ExtraBold" pitchFamily="34" charset="0"/>
+                <a:ea typeface="Pretendard ExtraBold" pitchFamily="34" charset="-127"/>
+                <a:cs typeface="Pretendard ExtraBold" pitchFamily="34" charset="-120"/>
+              </a:rPr>
+              <a:t>입면도</a:t>
+            </a:r>
+            <a:endParaRPr lang="en-US" sz="800" dirty="0"/>
+          </a:p>
+        </p:txBody>
+      </p:sp>
+      <p:sp>
+        <p:nvSpPr>
+          <p:cNvPr id="59" name="창·문이 놓인 높이 Z"/>
           <p:cNvSpPr txBox="1"/>
           <p:nvPr/>
         </p:nvSpPr>
         <p:spPr>
           <a:xfrm>
-            <a:off x="787400" y="4743847"/>
-            <a:ext cx="311249" cy="120650"/>
+            <a:off x="1181100" y="4731147"/>
+            <a:ext cx="937081" cy="146050"/>
           </a:xfrm>
           <a:prstGeom prst="rect">
             <a:avLst/>
@@ -12336,45 +12284,6 @@
               <a:buNone/>
             </a:pPr>
             <a:r>
-              <a:rPr lang="ko-KR" altLang="en-US" sz="800" spc="-8" kern="0" dirty="0">
-                <a:solidFill>
-                  <a:srgbClr val="2B4A78"/>
-                </a:solidFill>
-                <a:latin typeface="Pretendard ExtraBold" pitchFamily="34" charset="0"/>
-                <a:ea typeface="Pretendard ExtraBold" pitchFamily="34" charset="-127"/>
-                <a:cs typeface="Pretendard ExtraBold" pitchFamily="34" charset="-120"/>
-              </a:rPr>
-              <a:t>입면도</a:t>
-            </a:r>
-            <a:endParaRPr lang="en-US" sz="800" dirty="0"/>
-          </a:p>
-        </p:txBody>
-      </p:sp>
-      <p:sp>
-        <p:nvSpPr>
-          <p:cNvPr id="59" name="창·문이 놓인 높이 Z"/>
-          <p:cNvSpPr txBox="1"/>
-          <p:nvPr/>
-        </p:nvSpPr>
-        <p:spPr>
-          <a:xfrm>
-            <a:off x="1181100" y="4731147"/>
-            <a:ext cx="937081" cy="146050"/>
-          </a:xfrm>
-          <a:prstGeom prst="rect">
-            <a:avLst/>
-          </a:prstGeom>
-          <a:noFill/>
-          <a:ln/>
-        </p:spPr>
-        <p:txBody>
-          <a:bodyPr wrap="none" lIns="0" tIns="0" rIns="0" bIns="0" rtlCol="0" anchor="ctr"/>
-          <a:lstStyle/>
-          <a:p>
-            <a:pPr algn="l" indent="0" marL="0">
-              <a:buNone/>
-            </a:pPr>
-            <a:r>
               <a:rPr lang="ko-KR" altLang="en-US" sz="950" spc="-28" kern="0" dirty="0">
                 <a:solidFill>
                   <a:srgbClr val="3F4654"/>
@@ -12385,9 +12294,6 @@
               </a:rPr>
               <a:t>창·문이 놓인 높이 </a:t>
             </a:r>
-            <a:pPr algn="l" indent="0" marL="0">
-              <a:buNone/>
-            </a:pPr>
             <a:r>
               <a:rPr lang="ko-KR" altLang="en-US" sz="950" b="1" spc="-28" kern="0" dirty="0">
                 <a:solidFill>
@@ -12714,8 +12620,81 @@
               </a:rPr>
               <a:t>외벽 창·문을 동·서·남·북</a:t>
             </a:r>
+            <a:br/>
+            <a:r>
+              <a:rPr lang="ko-KR" altLang="en-US" sz="950" b="1" spc="-28" kern="0" dirty="0">
+                <a:solidFill>
+                  <a:srgbClr val="141820"/>
+                </a:solidFill>
+                <a:latin typeface="Pretendard" pitchFamily="34" charset="0"/>
+                <a:ea typeface="Pretendard" pitchFamily="34" charset="-127"/>
+                <a:cs typeface="Pretendard" pitchFamily="34" charset="-120"/>
+              </a:rPr>
+              <a:t>방향별로 정리</a:t>
+            </a:r>
             <a:endParaRPr lang="en-US" sz="950" dirty="0"/>
           </a:p>
+        </p:txBody>
+      </p:sp>
+      <p:sp>
+        <p:nvSpPr>
+          <p:cNvPr id="68" name="입면도"/>
+          <p:cNvSpPr txBox="1"/>
+          <p:nvPr/>
+        </p:nvSpPr>
+        <p:spPr>
+          <a:xfrm>
+            <a:off x="3606800" y="4921647"/>
+            <a:ext cx="311249" cy="120650"/>
+          </a:xfrm>
+          <a:prstGeom prst="rect">
+            <a:avLst/>
+          </a:prstGeom>
+          <a:noFill/>
+          <a:ln/>
+        </p:spPr>
+        <p:txBody>
+          <a:bodyPr wrap="none" lIns="0" tIns="0" rIns="0" bIns="0" rtlCol="0" anchor="ctr"/>
+          <a:lstStyle/>
+          <a:p>
+            <a:pPr algn="l" indent="0" marL="0">
+              <a:buNone/>
+            </a:pPr>
+            <a:r>
+              <a:rPr lang="ko-KR" altLang="en-US" sz="800" spc="-8" kern="0" dirty="0">
+                <a:solidFill>
+                  <a:srgbClr val="2B4A78"/>
+                </a:solidFill>
+                <a:latin typeface="Pretendard ExtraBold" pitchFamily="34" charset="0"/>
+                <a:ea typeface="Pretendard ExtraBold" pitchFamily="34" charset="-127"/>
+                <a:cs typeface="Pretendard ExtraBold" pitchFamily="34" charset="-120"/>
+              </a:rPr>
+              <a:t>입면도</a:t>
+            </a:r>
+            <a:endParaRPr lang="en-US" sz="800" dirty="0"/>
+          </a:p>
+        </p:txBody>
+      </p:sp>
+      <p:sp>
+        <p:nvSpPr>
+          <p:cNvPr id="69" name="같은 층 창·문끼리 묶어층 높이 파악"/>
+          <p:cNvSpPr txBox="1"/>
+          <p:nvPr/>
+        </p:nvSpPr>
+        <p:spPr>
+          <a:xfrm>
+            <a:off x="4000500" y="4877197"/>
+            <a:ext cx="1072332" cy="355600"/>
+          </a:xfrm>
+          <a:prstGeom prst="rect">
+            <a:avLst/>
+          </a:prstGeom>
+          <a:noFill/>
+          <a:ln/>
+        </p:spPr>
+        <p:txBody>
+          <a:bodyPr wrap="none" lIns="0" tIns="0" rIns="0" bIns="0" rtlCol="0" anchor="t"/>
+          <a:lstStyle/>
           <a:p>
             <a:pPr algn="l" indent="0" marL="0">
               <a:lnSpc>
@@ -12724,6 +12703,18 @@
               <a:buNone/>
             </a:pPr>
             <a:r>
+              <a:rPr lang="ko-KR" altLang="en-US" sz="950" spc="-28" kern="0" dirty="0">
+                <a:solidFill>
+                  <a:srgbClr val="3F4654"/>
+                </a:solidFill>
+                <a:latin typeface="Pretendard Medium" pitchFamily="34" charset="0"/>
+                <a:ea typeface="Pretendard Medium" pitchFamily="34" charset="-127"/>
+                <a:cs typeface="Pretendard Medium" pitchFamily="34" charset="-120"/>
+              </a:rPr>
+              <a:t>같은 층 창·문끼리 묶어</a:t>
+            </a:r>
+            <a:br/>
+            <a:r>
               <a:rPr lang="ko-KR" altLang="en-US" sz="950" b="1" spc="-28" kern="0" dirty="0">
                 <a:solidFill>
                   <a:srgbClr val="141820"/>
@@ -12732,7 +12723,7 @@
                 <a:ea typeface="Pretendard" pitchFamily="34" charset="-127"/>
                 <a:cs typeface="Pretendard" pitchFamily="34" charset="-120"/>
               </a:rPr>
-              <a:t>방향별로 정리</a:t>
+              <a:t>층 높이 파악</a:t>
             </a:r>
             <a:endParaRPr lang="en-US" sz="950" dirty="0"/>
           </a:p>
@@ -12740,14 +12731,14 @@
       </p:sp>
       <p:sp>
         <p:nvSpPr>
-          <p:cNvPr id="68" name="입면도"/>
+          <p:cNvPr id="70" name="핵심 기법"/>
           <p:cNvSpPr txBox="1"/>
           <p:nvPr/>
         </p:nvSpPr>
         <p:spPr>
           <a:xfrm>
-            <a:off x="3606800" y="4921647"/>
-            <a:ext cx="311249" cy="120650"/>
+            <a:off x="3606800" y="5435997"/>
+            <a:ext cx="445790" cy="120650"/>
           </a:xfrm>
           <a:prstGeom prst="rect">
             <a:avLst/>
@@ -12763,7 +12754,163 @@
               <a:buNone/>
             </a:pPr>
             <a:r>
-              <a:rPr lang="ko-KR" altLang="en-US" sz="800" spc="-8" kern="0" dirty="0">
+              <a:rPr lang="ko-KR" altLang="en-US" sz="800" b="1" spc="32" kern="0" dirty="0">
+                <a:solidFill>
+                  <a:srgbClr val="737C8B"/>
+                </a:solidFill>
+                <a:latin typeface="Pretendard" pitchFamily="34" charset="0"/>
+                <a:ea typeface="Pretendard" pitchFamily="34" charset="-127"/>
+                <a:cs typeface="Pretendard" pitchFamily="34" charset="-120"/>
+              </a:rPr>
+              <a:t>핵심 기법</a:t>
+            </a:r>
+            <a:endParaRPr lang="en-US" sz="800" dirty="0"/>
+          </a:p>
+        </p:txBody>
+      </p:sp>
+      <p:sp>
+        <p:nvSpPr>
+          <p:cNvPr id="71" name="YOLO + SAHI"/>
+          <p:cNvSpPr txBox="1"/>
+          <p:nvPr/>
+        </p:nvSpPr>
+        <p:spPr>
+          <a:xfrm>
+            <a:off x="3714750" y="5653286"/>
+            <a:ext cx="761206" cy="146050"/>
+          </a:xfrm>
+          <a:prstGeom prst="rect">
+            <a:avLst/>
+          </a:prstGeom>
+          <a:noFill/>
+          <a:ln/>
+        </p:spPr>
+        <p:txBody>
+          <a:bodyPr wrap="none" lIns="0" tIns="0" rIns="0" bIns="0" rtlCol="0" anchor="ctr"/>
+          <a:lstStyle/>
+          <a:p>
+            <a:pPr algn="l" indent="0" marL="0">
+              <a:buNone/>
+            </a:pPr>
+            <a:r>
+              <a:rPr lang="ko-KR" altLang="en-US" sz="950" b="1" spc="-19" kern="0" dirty="0">
+                <a:solidFill>
+                  <a:srgbClr val="102A4C"/>
+                </a:solidFill>
+                <a:latin typeface="Pretendard" pitchFamily="34" charset="0"/>
+                <a:ea typeface="Pretendard" pitchFamily="34" charset="-127"/>
+                <a:cs typeface="Pretendard" pitchFamily="34" charset="-120"/>
+              </a:rPr>
+              <a:t>YOLO + SAHI</a:t>
+            </a:r>
+            <a:endParaRPr lang="en-US" sz="950" dirty="0"/>
+          </a:p>
+        </p:txBody>
+      </p:sp>
+      <p:sp>
+        <p:nvSpPr>
+          <p:cNvPr id="72" name="(작은 객체 분할 추론)"/>
+          <p:cNvSpPr txBox="1"/>
+          <p:nvPr/>
+        </p:nvSpPr>
+        <p:spPr>
+          <a:xfrm>
+            <a:off x="4450556" y="5653286"/>
+            <a:ext cx="1036153" cy="146050"/>
+          </a:xfrm>
+          <a:prstGeom prst="rect">
+            <a:avLst/>
+          </a:prstGeom>
+          <a:noFill/>
+          <a:ln/>
+        </p:spPr>
+        <p:txBody>
+          <a:bodyPr wrap="none" lIns="0" tIns="0" rIns="0" bIns="0" rtlCol="0" anchor="ctr"/>
+          <a:lstStyle/>
+          <a:p>
+            <a:pPr algn="l" indent="0" marL="0">
+              <a:buNone/>
+            </a:pPr>
+            <a:r>
+              <a:rPr lang="ko-KR" altLang="en-US" sz="950" spc="-19" kern="0" dirty="0">
+                <a:solidFill>
+                  <a:srgbClr val="3F4654"/>
+                </a:solidFill>
+                <a:latin typeface="Pretendard Medium" pitchFamily="34" charset="0"/>
+                <a:ea typeface="Pretendard Medium" pitchFamily="34" charset="-127"/>
+                <a:cs typeface="Pretendard Medium" pitchFamily="34" charset="-120"/>
+              </a:rPr>
+              <a:t>(작은 객체 분할 추론)</a:t>
+            </a:r>
+            <a:endParaRPr lang="en-US" sz="950" dirty="0"/>
+          </a:p>
+        </p:txBody>
+      </p:sp>
+      <p:sp>
+        <p:nvSpPr>
+          <p:cNvPr id="73" name="DBSCAN 층별 클러스터링"/>
+          <p:cNvSpPr txBox="1"/>
+          <p:nvPr/>
+        </p:nvSpPr>
+        <p:spPr>
+          <a:xfrm>
+            <a:off x="3714750" y="5958086"/>
+            <a:ext cx="1319381" cy="146050"/>
+          </a:xfrm>
+          <a:prstGeom prst="rect">
+            <a:avLst/>
+          </a:prstGeom>
+          <a:noFill/>
+          <a:ln/>
+        </p:spPr>
+        <p:txBody>
+          <a:bodyPr wrap="none" lIns="0" tIns="0" rIns="0" bIns="0" rtlCol="0" anchor="ctr"/>
+          <a:lstStyle/>
+          <a:p>
+            <a:pPr algn="l" indent="0" marL="0">
+              <a:buNone/>
+            </a:pPr>
+            <a:r>
+              <a:rPr lang="ko-KR" altLang="en-US" sz="950" b="1" spc="-19" kern="0" dirty="0">
+                <a:solidFill>
+                  <a:srgbClr val="102A4C"/>
+                </a:solidFill>
+                <a:latin typeface="Pretendard" pitchFamily="34" charset="0"/>
+                <a:ea typeface="Pretendard" pitchFamily="34" charset="-127"/>
+                <a:cs typeface="Pretendard" pitchFamily="34" charset="-120"/>
+              </a:rPr>
+              <a:t>DBSCAN 층별 클러스터링</a:t>
+            </a:r>
+            <a:endParaRPr lang="en-US" sz="950" dirty="0"/>
+          </a:p>
+        </p:txBody>
+      </p:sp>
+      <p:sp>
+        <p:nvSpPr>
+          <p:cNvPr id="74" name="STEP 3"/>
+          <p:cNvSpPr txBox="1"/>
+          <p:nvPr/>
+        </p:nvSpPr>
+        <p:spPr>
+          <a:xfrm>
+            <a:off x="6426200" y="3797697"/>
+            <a:ext cx="468114" cy="120650"/>
+          </a:xfrm>
+          <a:prstGeom prst="rect">
+            <a:avLst/>
+          </a:prstGeom>
+          <a:noFill/>
+          <a:ln/>
+        </p:spPr>
+        <p:txBody>
+          <a:bodyPr wrap="none" lIns="0" tIns="0" rIns="0" bIns="0" rtlCol="0" anchor="ctr"/>
+          <a:lstStyle/>
+          <a:p>
+            <a:pPr algn="l" indent="0" marL="0">
+              <a:buNone/>
+            </a:pPr>
+            <a:r>
+              <a:rPr lang="ko-KR" altLang="en-US" sz="800" spc="96" kern="0" dirty="0">
                 <a:solidFill>
                   <a:srgbClr val="2B4A78"/>
                 </a:solidFill>
@@ -12771,7 +12918,7 @@
                 <a:ea typeface="Pretendard ExtraBold" pitchFamily="34" charset="-127"/>
                 <a:cs typeface="Pretendard ExtraBold" pitchFamily="34" charset="-120"/>
               </a:rPr>
-              <a:t>입면도</a:t>
+              <a:t>STEP 3</a:t>
             </a:r>
             <a:endParaRPr lang="en-US" sz="800" dirty="0"/>
           </a:p>
@@ -12779,14 +12926,131 @@
       </p:sp>
       <p:sp>
         <p:nvSpPr>
-          <p:cNvPr id="69" name="같은 층 창·문끼리 묶어층 높이 파악"/>
+          <p:cNvPr id="75" name="대응 객체 매칭"/>
           <p:cNvSpPr txBox="1"/>
           <p:nvPr/>
         </p:nvSpPr>
         <p:spPr>
           <a:xfrm>
-            <a:off x="4000500" y="4877197"/>
-            <a:ext cx="1072332" cy="355600"/>
+            <a:off x="6426200" y="3950097"/>
+            <a:ext cx="1008914" cy="215900"/>
+          </a:xfrm>
+          <a:prstGeom prst="rect">
+            <a:avLst/>
+          </a:prstGeom>
+          <a:noFill/>
+          <a:ln/>
+        </p:spPr>
+        <p:txBody>
+          <a:bodyPr wrap="none" lIns="0" tIns="0" rIns="0" bIns="0" rtlCol="0" anchor="ctr"/>
+          <a:lstStyle/>
+          <a:p>
+            <a:pPr algn="l" indent="0" marL="0">
+              <a:buNone/>
+            </a:pPr>
+            <a:r>
+              <a:rPr lang="ko-KR" altLang="en-US" sz="1400" spc="-49" kern="0" dirty="0">
+                <a:solidFill>
+                  <a:srgbClr val="102A4C"/>
+                </a:solidFill>
+                <a:latin typeface="Pretendard ExtraBold" pitchFamily="34" charset="0"/>
+                <a:ea typeface="Pretendard ExtraBold" pitchFamily="34" charset="-127"/>
+                <a:cs typeface="Pretendard ExtraBold" pitchFamily="34" charset="-120"/>
+              </a:rPr>
+              <a:t>대응 객체 매칭</a:t>
+            </a:r>
+            <a:endParaRPr lang="en-US" sz="1400" dirty="0"/>
+          </a:p>
+        </p:txBody>
+      </p:sp>
+      <p:sp>
+        <p:nvSpPr>
+          <p:cNvPr id="76" name="평면도·입면도의 같은 객체끼리 짝짓기"/>
+          <p:cNvSpPr txBox="1"/>
+          <p:nvPr/>
+        </p:nvSpPr>
+        <p:spPr>
+          <a:xfrm>
+            <a:off x="6426200" y="4235847"/>
+            <a:ext cx="1830516" cy="146050"/>
+          </a:xfrm>
+          <a:prstGeom prst="rect">
+            <a:avLst/>
+          </a:prstGeom>
+          <a:noFill/>
+          <a:ln/>
+        </p:spPr>
+        <p:txBody>
+          <a:bodyPr wrap="none" lIns="0" tIns="0" rIns="0" bIns="0" rtlCol="0" anchor="ctr"/>
+          <a:lstStyle/>
+          <a:p>
+            <a:pPr algn="l" indent="0" marL="0">
+              <a:buNone/>
+            </a:pPr>
+            <a:r>
+              <a:rPr lang="ko-KR" altLang="en-US" sz="950" spc="-24" kern="0" dirty="0">
+                <a:solidFill>
+                  <a:srgbClr val="2B4A78"/>
+                </a:solidFill>
+                <a:latin typeface="Pretendard SemiBold" pitchFamily="34" charset="0"/>
+                <a:ea typeface="Pretendard SemiBold" pitchFamily="34" charset="-127"/>
+                <a:cs typeface="Pretendard SemiBold" pitchFamily="34" charset="-120"/>
+              </a:rPr>
+              <a:t>평면도·입면도의 같은 객체끼리 짝짓기</a:t>
+            </a:r>
+            <a:endParaRPr lang="en-US" sz="950" dirty="0"/>
+          </a:p>
+        </p:txBody>
+      </p:sp>
+      <p:sp>
+        <p:nvSpPr>
+          <p:cNvPr id="77" name="축척"/>
+          <p:cNvSpPr txBox="1"/>
+          <p:nvPr/>
+        </p:nvSpPr>
+        <p:spPr>
+          <a:xfrm>
+            <a:off x="6426200" y="4515247"/>
+            <a:ext cx="224433" cy="120650"/>
+          </a:xfrm>
+          <a:prstGeom prst="rect">
+            <a:avLst/>
+          </a:prstGeom>
+          <a:noFill/>
+          <a:ln/>
+        </p:spPr>
+        <p:txBody>
+          <a:bodyPr wrap="none" lIns="0" tIns="0" rIns="0" bIns="0" rtlCol="0" anchor="ctr"/>
+          <a:lstStyle/>
+          <a:p>
+            <a:pPr algn="l" indent="0" marL="0">
+              <a:buNone/>
+            </a:pPr>
+            <a:r>
+              <a:rPr lang="ko-KR" altLang="en-US" sz="800" spc="-8" kern="0" dirty="0">
+                <a:solidFill>
+                  <a:srgbClr val="2B4A78"/>
+                </a:solidFill>
+                <a:latin typeface="Pretendard ExtraBold" pitchFamily="34" charset="0"/>
+                <a:ea typeface="Pretendard ExtraBold" pitchFamily="34" charset="-127"/>
+                <a:cs typeface="Pretendard ExtraBold" pitchFamily="34" charset="-120"/>
+              </a:rPr>
+              <a:t>축척</a:t>
+            </a:r>
+            <a:endParaRPr lang="en-US" sz="800" dirty="0"/>
+          </a:p>
+        </p:txBody>
+      </p:sp>
+      <p:sp>
+        <p:nvSpPr>
+          <p:cNvPr id="78" name="LMM(GPT-4o)이 축척을 읽어픽셀 → 실제 길이 환산"/>
+          <p:cNvSpPr txBox="1"/>
+          <p:nvPr/>
+        </p:nvSpPr>
+        <p:spPr>
+          <a:xfrm>
+            <a:off x="6819900" y="4470797"/>
+            <a:ext cx="1483765" cy="355600"/>
           </a:xfrm>
           <a:prstGeom prst="rect">
             <a:avLst/>
@@ -12813,10 +13077,506 @@
                 <a:ea typeface="Pretendard Medium" pitchFamily="34" charset="-127"/>
                 <a:cs typeface="Pretendard Medium" pitchFamily="34" charset="-120"/>
               </a:rPr>
-              <a:t>같은 층 창·문끼리 묶어</a:t>
+              <a:t>LMM(GPT-4o)이 축척을 읽어</a:t>
+            </a:r>
+            <a:br/>
+            <a:r>
+              <a:rPr lang="ko-KR" altLang="en-US" sz="950" b="1" spc="-28" kern="0" dirty="0">
+                <a:solidFill>
+                  <a:srgbClr val="141820"/>
+                </a:solidFill>
+                <a:latin typeface="Pretendard" pitchFamily="34" charset="0"/>
+                <a:ea typeface="Pretendard" pitchFamily="34" charset="-127"/>
+                <a:cs typeface="Pretendard" pitchFamily="34" charset="-120"/>
+              </a:rPr>
+              <a:t>픽셀 → 실제 길이</a:t>
+            </a:r>
+            <a:r>
+              <a:rPr lang="ko-KR" altLang="en-US" sz="950" spc="-28" kern="0" dirty="0">
+                <a:solidFill>
+                  <a:srgbClr val="3F4654"/>
+                </a:solidFill>
+                <a:latin typeface="Pretendard Medium" pitchFamily="34" charset="0"/>
+                <a:ea typeface="Pretendard Medium" pitchFamily="34" charset="-127"/>
+                <a:cs typeface="Pretendard Medium" pitchFamily="34" charset="-120"/>
+              </a:rPr>
+              <a:t> 환산</a:t>
             </a:r>
             <a:endParaRPr lang="en-US" sz="950" dirty="0"/>
           </a:p>
+        </p:txBody>
+      </p:sp>
+      <p:sp>
+        <p:nvSpPr>
+          <p:cNvPr id="79" name="1 px = 33.88 mm 예시"/>
+          <p:cNvSpPr txBox="1"/>
+          <p:nvPr/>
+        </p:nvSpPr>
+        <p:spPr>
+          <a:xfrm>
+            <a:off x="6819900" y="4858147"/>
+            <a:ext cx="1187916" cy="146050"/>
+          </a:xfrm>
+          <a:prstGeom prst="rect">
+            <a:avLst/>
+          </a:prstGeom>
+          <a:noFill/>
+          <a:ln/>
+        </p:spPr>
+        <p:txBody>
+          <a:bodyPr wrap="none" lIns="0" tIns="0" rIns="0" bIns="0" rtlCol="0" anchor="ctr"/>
+          <a:lstStyle/>
+          <a:p>
+            <a:pPr algn="l" indent="0" marL="0">
+              <a:buNone/>
+            </a:pPr>
+            <a:r>
+              <a:rPr lang="ko-KR" altLang="en-US" sz="950" b="1" spc="-10" kern="0" dirty="0">
+                <a:solidFill>
+                  <a:srgbClr val="102A4C"/>
+                </a:solidFill>
+                <a:latin typeface="Pretendard" pitchFamily="34" charset="0"/>
+                <a:ea typeface="Pretendard" pitchFamily="34" charset="-127"/>
+                <a:cs typeface="Pretendard" pitchFamily="34" charset="-120"/>
+              </a:rPr>
+              <a:t>1 px = 33.88 mm </a:t>
+            </a:r>
+            <a:r>
+              <a:rPr lang="ko-KR" altLang="en-US" sz="800" spc="-28" kern="0" dirty="0">
+                <a:solidFill>
+                  <a:srgbClr val="737C8B"/>
+                </a:solidFill>
+                <a:latin typeface="Pretendard SemiBold" pitchFamily="34" charset="0"/>
+                <a:ea typeface="Pretendard SemiBold" pitchFamily="34" charset="-127"/>
+                <a:cs typeface="Pretendard SemiBold" pitchFamily="34" charset="-120"/>
+              </a:rPr>
+              <a:t>예시</a:t>
+            </a:r>
+            <a:endParaRPr lang="en-US" sz="950" dirty="0"/>
+          </a:p>
+        </p:txBody>
+      </p:sp>
+      <p:sp>
+        <p:nvSpPr>
+          <p:cNvPr id="80" name="매칭"/>
+          <p:cNvSpPr txBox="1"/>
+          <p:nvPr/>
+        </p:nvSpPr>
+        <p:spPr>
+          <a:xfrm>
+            <a:off x="6426200" y="5105797"/>
+            <a:ext cx="224433" cy="120650"/>
+          </a:xfrm>
+          <a:prstGeom prst="rect">
+            <a:avLst/>
+          </a:prstGeom>
+          <a:noFill/>
+          <a:ln/>
+        </p:spPr>
+        <p:txBody>
+          <a:bodyPr wrap="none" lIns="0" tIns="0" rIns="0" bIns="0" rtlCol="0" anchor="ctr"/>
+          <a:lstStyle/>
+          <a:p>
+            <a:pPr algn="l" indent="0" marL="0">
+              <a:buNone/>
+            </a:pPr>
+            <a:r>
+              <a:rPr lang="ko-KR" altLang="en-US" sz="800" spc="-8" kern="0" dirty="0">
+                <a:solidFill>
+                  <a:srgbClr val="2B4A78"/>
+                </a:solidFill>
+                <a:latin typeface="Pretendard ExtraBold" pitchFamily="34" charset="0"/>
+                <a:ea typeface="Pretendard ExtraBold" pitchFamily="34" charset="-127"/>
+                <a:cs typeface="Pretendard ExtraBold" pitchFamily="34" charset="-120"/>
+              </a:rPr>
+              <a:t>매칭</a:t>
+            </a:r>
+            <a:endParaRPr lang="en-US" sz="800" dirty="0"/>
+          </a:p>
+        </p:txBody>
+      </p:sp>
+      <p:sp>
+        <p:nvSpPr>
+          <p:cNvPr id="81" name="X·Y + Z → 3차원 위치 확정"/>
+          <p:cNvSpPr txBox="1"/>
+          <p:nvPr/>
+        </p:nvSpPr>
+        <p:spPr>
+          <a:xfrm>
+            <a:off x="6819900" y="5093097"/>
+            <a:ext cx="1319066" cy="146050"/>
+          </a:xfrm>
+          <a:prstGeom prst="rect">
+            <a:avLst/>
+          </a:prstGeom>
+          <a:noFill/>
+          <a:ln/>
+        </p:spPr>
+        <p:txBody>
+          <a:bodyPr wrap="none" lIns="0" tIns="0" rIns="0" bIns="0" rtlCol="0" anchor="ctr"/>
+          <a:lstStyle/>
+          <a:p>
+            <a:pPr algn="l" indent="0" marL="0">
+              <a:buNone/>
+            </a:pPr>
+            <a:r>
+              <a:rPr lang="ko-KR" altLang="en-US" sz="950" spc="-28" kern="0" dirty="0">
+                <a:solidFill>
+                  <a:srgbClr val="3F4654"/>
+                </a:solidFill>
+                <a:latin typeface="Pretendard Medium" pitchFamily="34" charset="0"/>
+                <a:ea typeface="Pretendard Medium" pitchFamily="34" charset="-127"/>
+                <a:cs typeface="Pretendard Medium" pitchFamily="34" charset="-120"/>
+              </a:rPr>
+              <a:t>X·Y + Z → </a:t>
+            </a:r>
+            <a:r>
+              <a:rPr lang="ko-KR" altLang="en-US" sz="950" b="1" spc="-28" kern="0" dirty="0">
+                <a:solidFill>
+                  <a:srgbClr val="141820"/>
+                </a:solidFill>
+                <a:latin typeface="Pretendard" pitchFamily="34" charset="0"/>
+                <a:ea typeface="Pretendard" pitchFamily="34" charset="-127"/>
+                <a:cs typeface="Pretendard" pitchFamily="34" charset="-120"/>
+              </a:rPr>
+              <a:t>3차원 위치 확정</a:t>
+            </a:r>
+            <a:endParaRPr lang="en-US" sz="950" dirty="0"/>
+          </a:p>
+        </p:txBody>
+      </p:sp>
+      <p:sp>
+        <p:nvSpPr>
+          <p:cNvPr id="82" name="핵심 기법"/>
+          <p:cNvSpPr txBox="1"/>
+          <p:nvPr/>
+        </p:nvSpPr>
+        <p:spPr>
+          <a:xfrm>
+            <a:off x="6426200" y="5435997"/>
+            <a:ext cx="445790" cy="120650"/>
+          </a:xfrm>
+          <a:prstGeom prst="rect">
+            <a:avLst/>
+          </a:prstGeom>
+          <a:noFill/>
+          <a:ln/>
+        </p:spPr>
+        <p:txBody>
+          <a:bodyPr wrap="none" lIns="0" tIns="0" rIns="0" bIns="0" rtlCol="0" anchor="ctr"/>
+          <a:lstStyle/>
+          <a:p>
+            <a:pPr algn="l" indent="0" marL="0">
+              <a:buNone/>
+            </a:pPr>
+            <a:r>
+              <a:rPr lang="ko-KR" altLang="en-US" sz="800" b="1" spc="32" kern="0" dirty="0">
+                <a:solidFill>
+                  <a:srgbClr val="737C8B"/>
+                </a:solidFill>
+                <a:latin typeface="Pretendard" pitchFamily="34" charset="0"/>
+                <a:ea typeface="Pretendard" pitchFamily="34" charset="-127"/>
+                <a:cs typeface="Pretendard" pitchFamily="34" charset="-120"/>
+              </a:rPr>
+              <a:t>핵심 기법</a:t>
+            </a:r>
+            <a:endParaRPr lang="en-US" sz="800" dirty="0"/>
+          </a:p>
+        </p:txBody>
+      </p:sp>
+      <p:sp>
+        <p:nvSpPr>
+          <p:cNvPr id="83" name="LMM 기반 축척 보정"/>
+          <p:cNvSpPr txBox="1"/>
+          <p:nvPr/>
+        </p:nvSpPr>
+        <p:spPr>
+          <a:xfrm>
+            <a:off x="6534150" y="5653286"/>
+            <a:ext cx="1016591" cy="146050"/>
+          </a:xfrm>
+          <a:prstGeom prst="rect">
+            <a:avLst/>
+          </a:prstGeom>
+          <a:noFill/>
+          <a:ln/>
+        </p:spPr>
+        <p:txBody>
+          <a:bodyPr wrap="none" lIns="0" tIns="0" rIns="0" bIns="0" rtlCol="0" anchor="ctr"/>
+          <a:lstStyle/>
+          <a:p>
+            <a:pPr algn="l" indent="0" marL="0">
+              <a:buNone/>
+            </a:pPr>
+            <a:r>
+              <a:rPr lang="ko-KR" altLang="en-US" sz="950" b="1" spc="-19" kern="0" dirty="0">
+                <a:solidFill>
+                  <a:srgbClr val="102A4C"/>
+                </a:solidFill>
+                <a:latin typeface="Pretendard" pitchFamily="34" charset="0"/>
+                <a:ea typeface="Pretendard" pitchFamily="34" charset="-127"/>
+                <a:cs typeface="Pretendard" pitchFamily="34" charset="-120"/>
+              </a:rPr>
+              <a:t>LMM 기반 축척 보정</a:t>
+            </a:r>
+            <a:endParaRPr lang="en-US" sz="950" dirty="0"/>
+          </a:p>
+        </p:txBody>
+      </p:sp>
+      <p:sp>
+        <p:nvSpPr>
+          <p:cNvPr id="84" name="헝가리안 알고리즘"/>
+          <p:cNvSpPr txBox="1"/>
+          <p:nvPr/>
+        </p:nvSpPr>
+        <p:spPr>
+          <a:xfrm>
+            <a:off x="6534150" y="5958086"/>
+            <a:ext cx="891084" cy="146050"/>
+          </a:xfrm>
+          <a:prstGeom prst="rect">
+            <a:avLst/>
+          </a:prstGeom>
+          <a:noFill/>
+          <a:ln/>
+        </p:spPr>
+        <p:txBody>
+          <a:bodyPr wrap="none" lIns="0" tIns="0" rIns="0" bIns="0" rtlCol="0" anchor="ctr"/>
+          <a:lstStyle/>
+          <a:p>
+            <a:pPr algn="l" indent="0" marL="0">
+              <a:buNone/>
+            </a:pPr>
+            <a:r>
+              <a:rPr lang="ko-KR" altLang="en-US" sz="950" b="1" spc="-19" kern="0" dirty="0">
+                <a:solidFill>
+                  <a:srgbClr val="102A4C"/>
+                </a:solidFill>
+                <a:latin typeface="Pretendard" pitchFamily="34" charset="0"/>
+                <a:ea typeface="Pretendard" pitchFamily="34" charset="-127"/>
+                <a:cs typeface="Pretendard" pitchFamily="34" charset="-120"/>
+              </a:rPr>
+              <a:t>헝가리안 알고리즘</a:t>
+            </a:r>
+            <a:endParaRPr lang="en-US" sz="950" dirty="0"/>
+          </a:p>
+        </p:txBody>
+      </p:sp>
+      <p:sp>
+        <p:nvSpPr>
+          <p:cNvPr id="85" name="(최적 1:1 매칭)"/>
+          <p:cNvSpPr txBox="1"/>
+          <p:nvPr/>
+        </p:nvSpPr>
+        <p:spPr>
+          <a:xfrm>
+            <a:off x="7399834" y="5958086"/>
+            <a:ext cx="726480" cy="146050"/>
+          </a:xfrm>
+          <a:prstGeom prst="rect">
+            <a:avLst/>
+          </a:prstGeom>
+          <a:noFill/>
+          <a:ln/>
+        </p:spPr>
+        <p:txBody>
+          <a:bodyPr wrap="none" lIns="0" tIns="0" rIns="0" bIns="0" rtlCol="0" anchor="ctr"/>
+          <a:lstStyle/>
+          <a:p>
+            <a:pPr algn="l" indent="0" marL="0">
+              <a:buNone/>
+            </a:pPr>
+            <a:r>
+              <a:rPr lang="ko-KR" altLang="en-US" sz="950" spc="-19" kern="0" dirty="0">
+                <a:solidFill>
+                  <a:srgbClr val="3F4654"/>
+                </a:solidFill>
+                <a:latin typeface="Pretendard Medium" pitchFamily="34" charset="0"/>
+                <a:ea typeface="Pretendard Medium" pitchFamily="34" charset="-127"/>
+                <a:cs typeface="Pretendard Medium" pitchFamily="34" charset="-120"/>
+              </a:rPr>
+              <a:t>(최적 1:1 매칭)</a:t>
+            </a:r>
+            <a:endParaRPr lang="en-US" sz="950" dirty="0"/>
+          </a:p>
+        </p:txBody>
+      </p:sp>
+      <p:sp>
+        <p:nvSpPr>
+          <p:cNvPr id="86" name="STEP 4"/>
+          <p:cNvSpPr txBox="1"/>
+          <p:nvPr/>
+        </p:nvSpPr>
+        <p:spPr>
+          <a:xfrm>
+            <a:off x="9245600" y="3797697"/>
+            <a:ext cx="470297" cy="120650"/>
+          </a:xfrm>
+          <a:prstGeom prst="rect">
+            <a:avLst/>
+          </a:prstGeom>
+          <a:noFill/>
+          <a:ln/>
+        </p:spPr>
+        <p:txBody>
+          <a:bodyPr wrap="none" lIns="0" tIns="0" rIns="0" bIns="0" rtlCol="0" anchor="ctr"/>
+          <a:lstStyle/>
+          <a:p>
+            <a:pPr algn="l" indent="0" marL="0">
+              <a:buNone/>
+            </a:pPr>
+            <a:r>
+              <a:rPr lang="ko-KR" altLang="en-US" sz="800" spc="96" kern="0" dirty="0">
+                <a:solidFill>
+                  <a:srgbClr val="2B4A78"/>
+                </a:solidFill>
+                <a:latin typeface="Pretendard ExtraBold" pitchFamily="34" charset="0"/>
+                <a:ea typeface="Pretendard ExtraBold" pitchFamily="34" charset="-127"/>
+                <a:cs typeface="Pretendard ExtraBold" pitchFamily="34" charset="-120"/>
+              </a:rPr>
+              <a:t>STEP 4</a:t>
+            </a:r>
+            <a:endParaRPr lang="en-US" sz="800" dirty="0"/>
+          </a:p>
+        </p:txBody>
+      </p:sp>
+      <p:sp>
+        <p:nvSpPr>
+          <p:cNvPr id="87" name="BIM 자동 생성"/>
+          <p:cNvSpPr txBox="1"/>
+          <p:nvPr/>
+        </p:nvSpPr>
+        <p:spPr>
+          <a:xfrm>
+            <a:off x="9245600" y="3950097"/>
+            <a:ext cx="1017222" cy="215900"/>
+          </a:xfrm>
+          <a:prstGeom prst="rect">
+            <a:avLst/>
+          </a:prstGeom>
+          <a:noFill/>
+          <a:ln/>
+        </p:spPr>
+        <p:txBody>
+          <a:bodyPr wrap="none" lIns="0" tIns="0" rIns="0" bIns="0" rtlCol="0" anchor="ctr"/>
+          <a:lstStyle/>
+          <a:p>
+            <a:pPr algn="l" indent="0" marL="0">
+              <a:buNone/>
+            </a:pPr>
+            <a:r>
+              <a:rPr lang="ko-KR" altLang="en-US" sz="1400" spc="-49" kern="0" dirty="0">
+                <a:solidFill>
+                  <a:srgbClr val="102A4C"/>
+                </a:solidFill>
+                <a:latin typeface="Pretendard ExtraBold" pitchFamily="34" charset="0"/>
+                <a:ea typeface="Pretendard ExtraBold" pitchFamily="34" charset="-127"/>
+                <a:cs typeface="Pretendard ExtraBold" pitchFamily="34" charset="-120"/>
+              </a:rPr>
+              <a:t>BIM 자동 생성</a:t>
+            </a:r>
+            <a:endParaRPr lang="en-US" sz="1400" dirty="0"/>
+          </a:p>
+        </p:txBody>
+      </p:sp>
+      <p:sp>
+        <p:nvSpPr>
+          <p:cNvPr id="88" name="높이까지 갖춘 3D BIM 모델"/>
+          <p:cNvSpPr txBox="1"/>
+          <p:nvPr/>
+        </p:nvSpPr>
+        <p:spPr>
+          <a:xfrm>
+            <a:off x="9245600" y="4235847"/>
+            <a:ext cx="1346410" cy="146050"/>
+          </a:xfrm>
+          <a:prstGeom prst="rect">
+            <a:avLst/>
+          </a:prstGeom>
+          <a:noFill/>
+          <a:ln/>
+        </p:spPr>
+        <p:txBody>
+          <a:bodyPr wrap="none" lIns="0" tIns="0" rIns="0" bIns="0" rtlCol="0" anchor="ctr"/>
+          <a:lstStyle/>
+          <a:p>
+            <a:pPr algn="l" indent="0" marL="0">
+              <a:buNone/>
+            </a:pPr>
+            <a:r>
+              <a:rPr lang="ko-KR" altLang="en-US" sz="950" spc="-24" kern="0" dirty="0">
+                <a:solidFill>
+                  <a:srgbClr val="2B4A78"/>
+                </a:solidFill>
+                <a:latin typeface="Pretendard SemiBold" pitchFamily="34" charset="0"/>
+                <a:ea typeface="Pretendard SemiBold" pitchFamily="34" charset="-127"/>
+                <a:cs typeface="Pretendard SemiBold" pitchFamily="34" charset="-120"/>
+              </a:rPr>
+              <a:t>높이까지 갖춘 3D BIM 모델</a:t>
+            </a:r>
+            <a:endParaRPr lang="en-US" sz="950" dirty="0"/>
+          </a:p>
+        </p:txBody>
+      </p:sp>
+      <p:sp>
+        <p:nvSpPr>
+          <p:cNvPr id="89" name="벽체"/>
+          <p:cNvSpPr txBox="1"/>
+          <p:nvPr/>
+        </p:nvSpPr>
+        <p:spPr>
+          <a:xfrm>
+            <a:off x="9245600" y="4515247"/>
+            <a:ext cx="224433" cy="120650"/>
+          </a:xfrm>
+          <a:prstGeom prst="rect">
+            <a:avLst/>
+          </a:prstGeom>
+          <a:noFill/>
+          <a:ln/>
+        </p:spPr>
+        <p:txBody>
+          <a:bodyPr wrap="none" lIns="0" tIns="0" rIns="0" bIns="0" rtlCol="0" anchor="ctr"/>
+          <a:lstStyle/>
+          <a:p>
+            <a:pPr algn="l" indent="0" marL="0">
+              <a:buNone/>
+            </a:pPr>
+            <a:r>
+              <a:rPr lang="ko-KR" altLang="en-US" sz="800" spc="-8" kern="0" dirty="0">
+                <a:solidFill>
+                  <a:srgbClr val="2B4A78"/>
+                </a:solidFill>
+                <a:latin typeface="Pretendard ExtraBold" pitchFamily="34" charset="0"/>
+                <a:ea typeface="Pretendard ExtraBold" pitchFamily="34" charset="-127"/>
+                <a:cs typeface="Pretendard ExtraBold" pitchFamily="34" charset="-120"/>
+              </a:rPr>
+              <a:t>벽체</a:t>
+            </a:r>
+            <a:endParaRPr lang="en-US" sz="800" dirty="0"/>
+          </a:p>
+        </p:txBody>
+      </p:sp>
+      <p:sp>
+        <p:nvSpPr>
+          <p:cNvPr id="90" name="골격선(스켈레톤)으로벽 중심선 추출"/>
+          <p:cNvSpPr txBox="1"/>
+          <p:nvPr/>
+        </p:nvSpPr>
+        <p:spPr>
+          <a:xfrm>
+            <a:off x="9639300" y="4470797"/>
+            <a:ext cx="1044041" cy="355600"/>
+          </a:xfrm>
+          <a:prstGeom prst="rect">
+            <a:avLst/>
+          </a:prstGeom>
+          <a:noFill/>
+          <a:ln/>
+        </p:spPr>
+        <p:txBody>
+          <a:bodyPr wrap="none" lIns="0" tIns="0" rIns="0" bIns="0" rtlCol="0" anchor="t"/>
+          <a:lstStyle/>
           <a:p>
             <a:pPr algn="l" indent="0" marL="0">
               <a:lnSpc>
@@ -12825,6 +13585,18 @@
               <a:buNone/>
             </a:pPr>
             <a:r>
+              <a:rPr lang="ko-KR" altLang="en-US" sz="950" spc="-28" kern="0" dirty="0">
+                <a:solidFill>
+                  <a:srgbClr val="3F4654"/>
+                </a:solidFill>
+                <a:latin typeface="Pretendard Medium" pitchFamily="34" charset="0"/>
+                <a:ea typeface="Pretendard Medium" pitchFamily="34" charset="-127"/>
+                <a:cs typeface="Pretendard Medium" pitchFamily="34" charset="-120"/>
+              </a:rPr>
+              <a:t>골격선(스켈레톤)으로</a:t>
+            </a:r>
+            <a:br/>
+            <a:r>
               <a:rPr lang="ko-KR" altLang="en-US" sz="950" b="1" spc="-28" kern="0" dirty="0">
                 <a:solidFill>
                   <a:srgbClr val="141820"/>
@@ -12833,7 +13605,7 @@
                 <a:ea typeface="Pretendard" pitchFamily="34" charset="-127"/>
                 <a:cs typeface="Pretendard" pitchFamily="34" charset="-120"/>
               </a:rPr>
-              <a:t>층 높이 파악</a:t>
+              <a:t>벽 중심선 추출</a:t>
             </a:r>
             <a:endParaRPr lang="en-US" sz="950" dirty="0"/>
           </a:p>
@@ -12841,14 +13613,14 @@
       </p:sp>
       <p:sp>
         <p:nvSpPr>
-          <p:cNvPr id="70" name="핵심 기법"/>
+          <p:cNvPr id="91" name="창·문"/>
           <p:cNvSpPr txBox="1"/>
           <p:nvPr/>
         </p:nvSpPr>
         <p:spPr>
           <a:xfrm>
-            <a:off x="3606800" y="5435997"/>
-            <a:ext cx="445790" cy="120650"/>
+            <a:off x="9245600" y="4921647"/>
+            <a:ext cx="253107" cy="120650"/>
           </a:xfrm>
           <a:prstGeom prst="rect">
             <a:avLst/>
@@ -12864,163 +13636,7 @@
               <a:buNone/>
             </a:pPr>
             <a:r>
-              <a:rPr lang="ko-KR" altLang="en-US" sz="800" b="1" spc="32" kern="0" dirty="0">
-                <a:solidFill>
-                  <a:srgbClr val="737C8B"/>
-                </a:solidFill>
-                <a:latin typeface="Pretendard" pitchFamily="34" charset="0"/>
-                <a:ea typeface="Pretendard" pitchFamily="34" charset="-127"/>
-                <a:cs typeface="Pretendard" pitchFamily="34" charset="-120"/>
-              </a:rPr>
-              <a:t>핵심 기법</a:t>
-            </a:r>
-            <a:endParaRPr lang="en-US" sz="800" dirty="0"/>
-          </a:p>
-        </p:txBody>
-      </p:sp>
-      <p:sp>
-        <p:nvSpPr>
-          <p:cNvPr id="71" name="YOLO + SAHI"/>
-          <p:cNvSpPr txBox="1"/>
-          <p:nvPr/>
-        </p:nvSpPr>
-        <p:spPr>
-          <a:xfrm>
-            <a:off x="3714750" y="5653286"/>
-            <a:ext cx="761206" cy="146050"/>
-          </a:xfrm>
-          <a:prstGeom prst="rect">
-            <a:avLst/>
-          </a:prstGeom>
-          <a:noFill/>
-          <a:ln/>
-        </p:spPr>
-        <p:txBody>
-          <a:bodyPr wrap="none" lIns="0" tIns="0" rIns="0" bIns="0" rtlCol="0" anchor="ctr"/>
-          <a:lstStyle/>
-          <a:p>
-            <a:pPr algn="l" indent="0" marL="0">
-              <a:buNone/>
-            </a:pPr>
-            <a:r>
-              <a:rPr lang="ko-KR" altLang="en-US" sz="950" b="1" spc="-19" kern="0" dirty="0">
-                <a:solidFill>
-                  <a:srgbClr val="102A4C"/>
-                </a:solidFill>
-                <a:latin typeface="Pretendard" pitchFamily="34" charset="0"/>
-                <a:ea typeface="Pretendard" pitchFamily="34" charset="-127"/>
-                <a:cs typeface="Pretendard" pitchFamily="34" charset="-120"/>
-              </a:rPr>
-              <a:t>YOLO + SAHI</a:t>
-            </a:r>
-            <a:endParaRPr lang="en-US" sz="950" dirty="0"/>
-          </a:p>
-        </p:txBody>
-      </p:sp>
-      <p:sp>
-        <p:nvSpPr>
-          <p:cNvPr id="72" name="(작은 객체 분할 추론)"/>
-          <p:cNvSpPr txBox="1"/>
-          <p:nvPr/>
-        </p:nvSpPr>
-        <p:spPr>
-          <a:xfrm>
-            <a:off x="4450556" y="5653286"/>
-            <a:ext cx="1036153" cy="146050"/>
-          </a:xfrm>
-          <a:prstGeom prst="rect">
-            <a:avLst/>
-          </a:prstGeom>
-          <a:noFill/>
-          <a:ln/>
-        </p:spPr>
-        <p:txBody>
-          <a:bodyPr wrap="none" lIns="0" tIns="0" rIns="0" bIns="0" rtlCol="0" anchor="ctr"/>
-          <a:lstStyle/>
-          <a:p>
-            <a:pPr algn="l" indent="0" marL="0">
-              <a:buNone/>
-            </a:pPr>
-            <a:r>
-              <a:rPr lang="ko-KR" altLang="en-US" sz="950" spc="-19" kern="0" dirty="0">
-                <a:solidFill>
-                  <a:srgbClr val="3F4654"/>
-                </a:solidFill>
-                <a:latin typeface="Pretendard Medium" pitchFamily="34" charset="0"/>
-                <a:ea typeface="Pretendard Medium" pitchFamily="34" charset="-127"/>
-                <a:cs typeface="Pretendard Medium" pitchFamily="34" charset="-120"/>
-              </a:rPr>
-              <a:t>(작은 객체 분할 추론)</a:t>
-            </a:r>
-            <a:endParaRPr lang="en-US" sz="950" dirty="0"/>
-          </a:p>
-        </p:txBody>
-      </p:sp>
-      <p:sp>
-        <p:nvSpPr>
-          <p:cNvPr id="73" name="DBSCAN 층별 클러스터링"/>
-          <p:cNvSpPr txBox="1"/>
-          <p:nvPr/>
-        </p:nvSpPr>
-        <p:spPr>
-          <a:xfrm>
-            <a:off x="3714750" y="5958086"/>
-            <a:ext cx="1319381" cy="146050"/>
-          </a:xfrm>
-          <a:prstGeom prst="rect">
-            <a:avLst/>
-          </a:prstGeom>
-          <a:noFill/>
-          <a:ln/>
-        </p:spPr>
-        <p:txBody>
-          <a:bodyPr wrap="none" lIns="0" tIns="0" rIns="0" bIns="0" rtlCol="0" anchor="ctr"/>
-          <a:lstStyle/>
-          <a:p>
-            <a:pPr algn="l" indent="0" marL="0">
-              <a:buNone/>
-            </a:pPr>
-            <a:r>
-              <a:rPr lang="ko-KR" altLang="en-US" sz="950" b="1" spc="-19" kern="0" dirty="0">
-                <a:solidFill>
-                  <a:srgbClr val="102A4C"/>
-                </a:solidFill>
-                <a:latin typeface="Pretendard" pitchFamily="34" charset="0"/>
-                <a:ea typeface="Pretendard" pitchFamily="34" charset="-127"/>
-                <a:cs typeface="Pretendard" pitchFamily="34" charset="-120"/>
-              </a:rPr>
-              <a:t>DBSCAN 층별 클러스터링</a:t>
-            </a:r>
-            <a:endParaRPr lang="en-US" sz="950" dirty="0"/>
-          </a:p>
-        </p:txBody>
-      </p:sp>
-      <p:sp>
-        <p:nvSpPr>
-          <p:cNvPr id="74" name="STEP 3"/>
-          <p:cNvSpPr txBox="1"/>
-          <p:nvPr/>
-        </p:nvSpPr>
-        <p:spPr>
-          <a:xfrm>
-            <a:off x="6426200" y="3797697"/>
-            <a:ext cx="468114" cy="120650"/>
-          </a:xfrm>
-          <a:prstGeom prst="rect">
-            <a:avLst/>
-          </a:prstGeom>
-          <a:noFill/>
-          <a:ln/>
-        </p:spPr>
-        <p:txBody>
-          <a:bodyPr wrap="none" lIns="0" tIns="0" rIns="0" bIns="0" rtlCol="0" anchor="ctr"/>
-          <a:lstStyle/>
-          <a:p>
-            <a:pPr algn="l" indent="0" marL="0">
-              <a:buNone/>
-            </a:pPr>
-            <a:r>
-              <a:rPr lang="ko-KR" altLang="en-US" sz="800" spc="96" kern="0" dirty="0">
+              <a:rPr lang="ko-KR" altLang="en-US" sz="800" spc="-8" kern="0" dirty="0">
                 <a:solidFill>
                   <a:srgbClr val="2B4A78"/>
                 </a:solidFill>
@@ -13028,7 +13644,7 @@
                 <a:ea typeface="Pretendard ExtraBold" pitchFamily="34" charset="-127"/>
                 <a:cs typeface="Pretendard ExtraBold" pitchFamily="34" charset="-120"/>
               </a:rPr>
-              <a:t>STEP 3</a:t>
+              <a:t>창·문</a:t>
             </a:r>
             <a:endParaRPr lang="en-US" sz="800" dirty="0"/>
           </a:p>
@@ -13036,131 +13652,14 @@
       </p:sp>
       <p:sp>
         <p:nvSpPr>
-          <p:cNvPr id="75" name="대응 객체 매칭"/>
+          <p:cNvPr id="92" name="붙일 벽 결정(호스팅) 후Revit API로 BIM 생성"/>
           <p:cNvSpPr txBox="1"/>
           <p:nvPr/>
         </p:nvSpPr>
         <p:spPr>
           <a:xfrm>
-            <a:off x="6426200" y="3950097"/>
-            <a:ext cx="1008914" cy="215900"/>
-          </a:xfrm>
-          <a:prstGeom prst="rect">
-            <a:avLst/>
-          </a:prstGeom>
-          <a:noFill/>
-          <a:ln/>
-        </p:spPr>
-        <p:txBody>
-          <a:bodyPr wrap="none" lIns="0" tIns="0" rIns="0" bIns="0" rtlCol="0" anchor="ctr"/>
-          <a:lstStyle/>
-          <a:p>
-            <a:pPr algn="l" indent="0" marL="0">
-              <a:buNone/>
-            </a:pPr>
-            <a:r>
-              <a:rPr lang="ko-KR" altLang="en-US" sz="1400" spc="-49" kern="0" dirty="0">
-                <a:solidFill>
-                  <a:srgbClr val="102A4C"/>
-                </a:solidFill>
-                <a:latin typeface="Pretendard ExtraBold" pitchFamily="34" charset="0"/>
-                <a:ea typeface="Pretendard ExtraBold" pitchFamily="34" charset="-127"/>
-                <a:cs typeface="Pretendard ExtraBold" pitchFamily="34" charset="-120"/>
-              </a:rPr>
-              <a:t>대응 객체 매칭</a:t>
-            </a:r>
-            <a:endParaRPr lang="en-US" sz="1400" dirty="0"/>
-          </a:p>
-        </p:txBody>
-      </p:sp>
-      <p:sp>
-        <p:nvSpPr>
-          <p:cNvPr id="76" name="평면도·입면도의 같은 객체끼리 짝짓기"/>
-          <p:cNvSpPr txBox="1"/>
-          <p:nvPr/>
-        </p:nvSpPr>
-        <p:spPr>
-          <a:xfrm>
-            <a:off x="6426200" y="4235847"/>
-            <a:ext cx="1830516" cy="146050"/>
-          </a:xfrm>
-          <a:prstGeom prst="rect">
-            <a:avLst/>
-          </a:prstGeom>
-          <a:noFill/>
-          <a:ln/>
-        </p:spPr>
-        <p:txBody>
-          <a:bodyPr wrap="none" lIns="0" tIns="0" rIns="0" bIns="0" rtlCol="0" anchor="ctr"/>
-          <a:lstStyle/>
-          <a:p>
-            <a:pPr algn="l" indent="0" marL="0">
-              <a:buNone/>
-            </a:pPr>
-            <a:r>
-              <a:rPr lang="ko-KR" altLang="en-US" sz="950" spc="-24" kern="0" dirty="0">
-                <a:solidFill>
-                  <a:srgbClr val="2B4A78"/>
-                </a:solidFill>
-                <a:latin typeface="Pretendard SemiBold" pitchFamily="34" charset="0"/>
-                <a:ea typeface="Pretendard SemiBold" pitchFamily="34" charset="-127"/>
-                <a:cs typeface="Pretendard SemiBold" pitchFamily="34" charset="-120"/>
-              </a:rPr>
-              <a:t>평면도·입면도의 같은 객체끼리 짝짓기</a:t>
-            </a:r>
-            <a:endParaRPr lang="en-US" sz="950" dirty="0"/>
-          </a:p>
-        </p:txBody>
-      </p:sp>
-      <p:sp>
-        <p:nvSpPr>
-          <p:cNvPr id="77" name="축척"/>
-          <p:cNvSpPr txBox="1"/>
-          <p:nvPr/>
-        </p:nvSpPr>
-        <p:spPr>
-          <a:xfrm>
-            <a:off x="6426200" y="4515247"/>
-            <a:ext cx="224433" cy="120650"/>
-          </a:xfrm>
-          <a:prstGeom prst="rect">
-            <a:avLst/>
-          </a:prstGeom>
-          <a:noFill/>
-          <a:ln/>
-        </p:spPr>
-        <p:txBody>
-          <a:bodyPr wrap="none" lIns="0" tIns="0" rIns="0" bIns="0" rtlCol="0" anchor="ctr"/>
-          <a:lstStyle/>
-          <a:p>
-            <a:pPr algn="l" indent="0" marL="0">
-              <a:buNone/>
-            </a:pPr>
-            <a:r>
-              <a:rPr lang="ko-KR" altLang="en-US" sz="800" spc="-8" kern="0" dirty="0">
-                <a:solidFill>
-                  <a:srgbClr val="2B4A78"/>
-                </a:solidFill>
-                <a:latin typeface="Pretendard ExtraBold" pitchFamily="34" charset="0"/>
-                <a:ea typeface="Pretendard ExtraBold" pitchFamily="34" charset="-127"/>
-                <a:cs typeface="Pretendard ExtraBold" pitchFamily="34" charset="-120"/>
-              </a:rPr>
-              <a:t>축척</a:t>
-            </a:r>
-            <a:endParaRPr lang="en-US" sz="800" dirty="0"/>
-          </a:p>
-        </p:txBody>
-      </p:sp>
-      <p:sp>
-        <p:nvSpPr>
-          <p:cNvPr id="78" name="LMM(GPT-4o)이 축척을 읽어픽셀 → 실제 길이 환산"/>
-          <p:cNvSpPr txBox="1"/>
-          <p:nvPr/>
-        </p:nvSpPr>
-        <p:spPr>
-          <a:xfrm>
-            <a:off x="6819900" y="4470797"/>
-            <a:ext cx="1483765" cy="355600"/>
+            <a:off x="9639300" y="4877197"/>
+            <a:ext cx="1126180" cy="355600"/>
           </a:xfrm>
           <a:prstGeom prst="rect">
             <a:avLst/>
@@ -13187,17 +13686,9 @@
                 <a:ea typeface="Pretendard Medium" pitchFamily="34" charset="-127"/>
                 <a:cs typeface="Pretendard Medium" pitchFamily="34" charset="-120"/>
               </a:rPr>
-              <a:t>LMM(GPT-4o)이 축척을 읽어</a:t>
-            </a:r>
-            <a:endParaRPr lang="en-US" sz="950" dirty="0"/>
-          </a:p>
-          <a:p>
-            <a:pPr algn="l" indent="0" marL="0">
-              <a:lnSpc>
-                <a:spcPts val="1400"/>
-              </a:lnSpc>
-              <a:buNone/>
-            </a:pPr>
+              <a:t>붙일 벽 결정(호스팅) 후</a:t>
+            </a:r>
+            <a:br/>
             <a:r>
               <a:rPr lang="ko-KR" altLang="en-US" sz="950" b="1" spc="-28" kern="0" dirty="0">
                 <a:solidFill>
@@ -13207,39 +13698,178 @@
                 <a:ea typeface="Pretendard" pitchFamily="34" charset="-127"/>
                 <a:cs typeface="Pretendard" pitchFamily="34" charset="-120"/>
               </a:rPr>
-              <a:t>픽셀 → 실제 길이</a:t>
-            </a:r>
+              <a:t>Revit API로 BIM 생성</a:t>
+            </a:r>
+            <a:endParaRPr lang="en-US" sz="950" dirty="0"/>
+          </a:p>
+        </p:txBody>
+      </p:sp>
+      <p:sp>
+        <p:nvSpPr>
+          <p:cNvPr id="93" name="핵심 기법"/>
+          <p:cNvSpPr txBox="1"/>
+          <p:nvPr/>
+        </p:nvSpPr>
+        <p:spPr>
+          <a:xfrm>
+            <a:off x="9245600" y="5435997"/>
+            <a:ext cx="445790" cy="120650"/>
+          </a:xfrm>
+          <a:prstGeom prst="rect">
+            <a:avLst/>
+          </a:prstGeom>
+          <a:noFill/>
+          <a:ln/>
+        </p:spPr>
+        <p:txBody>
+          <a:bodyPr wrap="none" lIns="0" tIns="0" rIns="0" bIns="0" rtlCol="0" anchor="ctr"/>
+          <a:lstStyle/>
+          <a:p>
             <a:pPr algn="l" indent="0" marL="0">
-              <a:lnSpc>
-                <a:spcPts val="1400"/>
-              </a:lnSpc>
               <a:buNone/>
             </a:pPr>
             <a:r>
-              <a:rPr lang="ko-KR" altLang="en-US" sz="950" spc="-28" kern="0" dirty="0">
-                <a:solidFill>
-                  <a:srgbClr val="3F4654"/>
+              <a:rPr lang="ko-KR" altLang="en-US" sz="800" b="1" spc="32" kern="0" dirty="0">
+                <a:solidFill>
+                  <a:srgbClr val="737C8B"/>
+                </a:solidFill>
+                <a:latin typeface="Pretendard" pitchFamily="34" charset="0"/>
+                <a:ea typeface="Pretendard" pitchFamily="34" charset="-127"/>
+                <a:cs typeface="Pretendard" pitchFamily="34" charset="-120"/>
+              </a:rPr>
+              <a:t>핵심 기법</a:t>
+            </a:r>
+            <a:endParaRPr lang="en-US" sz="800" dirty="0"/>
+          </a:p>
+        </p:txBody>
+      </p:sp>
+      <p:sp>
+        <p:nvSpPr>
+          <p:cNvPr id="94" name="스켈레톤 기반 벽체 추출"/>
+          <p:cNvSpPr txBox="1"/>
+          <p:nvPr/>
+        </p:nvSpPr>
+        <p:spPr>
+          <a:xfrm>
+            <a:off x="9353550" y="5653286"/>
+            <a:ext cx="1160466" cy="146050"/>
+          </a:xfrm>
+          <a:prstGeom prst="rect">
+            <a:avLst/>
+          </a:prstGeom>
+          <a:noFill/>
+          <a:ln/>
+        </p:spPr>
+        <p:txBody>
+          <a:bodyPr wrap="none" lIns="0" tIns="0" rIns="0" bIns="0" rtlCol="0" anchor="ctr"/>
+          <a:lstStyle/>
+          <a:p>
+            <a:pPr algn="l" indent="0" marL="0">
+              <a:buNone/>
+            </a:pPr>
+            <a:r>
+              <a:rPr lang="ko-KR" altLang="en-US" sz="950" b="1" spc="-19" kern="0" dirty="0">
+                <a:solidFill>
+                  <a:srgbClr val="102A4C"/>
+                </a:solidFill>
+                <a:latin typeface="Pretendard" pitchFamily="34" charset="0"/>
+                <a:ea typeface="Pretendard" pitchFamily="34" charset="-127"/>
+                <a:cs typeface="Pretendard" pitchFamily="34" charset="-120"/>
+              </a:rPr>
+              <a:t>스켈레톤 기반 벽체 추출</a:t>
+            </a:r>
+            <a:endParaRPr lang="en-US" sz="950" dirty="0"/>
+          </a:p>
+        </p:txBody>
+      </p:sp>
+      <p:sp>
+        <p:nvSpPr>
+          <p:cNvPr id="95" name="Revit API"/>
+          <p:cNvSpPr txBox="1"/>
+          <p:nvPr/>
+        </p:nvSpPr>
+        <p:spPr>
+          <a:xfrm>
+            <a:off x="9353550" y="5958086"/>
+            <a:ext cx="536972" cy="146050"/>
+          </a:xfrm>
+          <a:prstGeom prst="rect">
+            <a:avLst/>
+          </a:prstGeom>
+          <a:noFill/>
+          <a:ln/>
+        </p:spPr>
+        <p:txBody>
+          <a:bodyPr wrap="none" lIns="0" tIns="0" rIns="0" bIns="0" rtlCol="0" anchor="ctr"/>
+          <a:lstStyle/>
+          <a:p>
+            <a:pPr algn="l" indent="0" marL="0">
+              <a:buNone/>
+            </a:pPr>
+            <a:r>
+              <a:rPr lang="ko-KR" altLang="en-US" sz="950" b="1" spc="-19" kern="0" dirty="0">
+                <a:solidFill>
+                  <a:srgbClr val="102A4C"/>
+                </a:solidFill>
+                <a:latin typeface="Pretendard" pitchFamily="34" charset="0"/>
+                <a:ea typeface="Pretendard" pitchFamily="34" charset="-127"/>
+                <a:cs typeface="Pretendard" pitchFamily="34" charset="-120"/>
+              </a:rPr>
+              <a:t>Revit API</a:t>
+            </a:r>
+            <a:endParaRPr lang="en-US" sz="950" dirty="0"/>
+          </a:p>
+        </p:txBody>
+      </p:sp>
+      <p:sp>
+        <p:nvSpPr>
+          <p:cNvPr id="96" name="석사 연구 발표  ·  평면도와 입면도 객체 인식 및 정보 통합을 통한 "/>
+          <p:cNvSpPr txBox="1"/>
+          <p:nvPr/>
+        </p:nvSpPr>
+        <p:spPr>
+          <a:xfrm>
+            <a:off x="609600" y="6472238"/>
+            <a:ext cx="5145113" cy="114300"/>
+          </a:xfrm>
+          <a:prstGeom prst="rect">
+            <a:avLst/>
+          </a:prstGeom>
+          <a:noFill/>
+          <a:ln/>
+        </p:spPr>
+        <p:txBody>
+          <a:bodyPr wrap="none" lIns="0" tIns="0" rIns="0" bIns="0" rtlCol="0" anchor="ctr"/>
+          <a:lstStyle/>
+          <a:p>
+            <a:pPr algn="l" indent="0" marL="0">
+              <a:buNone/>
+            </a:pPr>
+            <a:r>
+              <a:rPr lang="ko-KR" altLang="en-US" sz="750" spc="-12" kern="0" dirty="0">
+                <a:solidFill>
+                  <a:srgbClr val="737C8B"/>
                 </a:solidFill>
                 <a:latin typeface="Pretendard Medium" pitchFamily="34" charset="0"/>
                 <a:ea typeface="Pretendard Medium" pitchFamily="34" charset="-127"/>
                 <a:cs typeface="Pretendard Medium" pitchFamily="34" charset="-120"/>
               </a:rPr>
-              <a:t> 환산</a:t>
-            </a:r>
-            <a:endParaRPr lang="en-US" sz="950" dirty="0"/>
-          </a:p>
-        </p:txBody>
-      </p:sp>
-      <p:sp>
-        <p:nvSpPr>
-          <p:cNvPr id="79" name="1 px = 33.88 mm"/>
+              <a:t>석사 연구 발표  ·  평면도와 입면도 객체 인식 및 정보 통합을 통한 3D BIM 자동 생성 연구  ·  Utility 기술(건축, BIM/5D) 지원자 ○○○</a:t>
+            </a:r>
+            <a:endParaRPr lang="en-US" sz="750" dirty="0"/>
+          </a:p>
+        </p:txBody>
+      </p:sp>
+      <p:sp>
+        <p:nvSpPr>
+          <p:cNvPr id="97" name="03 / 05"/>
           <p:cNvSpPr txBox="1"/>
           <p:nvPr/>
         </p:nvSpPr>
         <p:spPr>
           <a:xfrm>
-            <a:off x="6819900" y="4858147"/>
-            <a:ext cx="968948" cy="146050"/>
+            <a:off x="11216779" y="6472238"/>
+            <a:ext cx="416421" cy="114300"/>
           </a:xfrm>
           <a:prstGeom prst="rect">
             <a:avLst/>
@@ -13255,820 +13885,16 @@
               <a:buNone/>
             </a:pPr>
             <a:r>
-              <a:rPr lang="ko-KR" altLang="en-US" sz="950" b="1" spc="-28" kern="0" dirty="0">
+              <a:rPr lang="ko-KR" altLang="en-US" sz="750" spc="45" kern="0" dirty="0">
                 <a:solidFill>
                   <a:srgbClr val="102A4C"/>
-                </a:solidFill>
-                <a:latin typeface="Pretendard" pitchFamily="34" charset="0"/>
-                <a:ea typeface="Pretendard" pitchFamily="34" charset="-127"/>
-                <a:cs typeface="Pretendard" pitchFamily="34" charset="-120"/>
-              </a:rPr>
-              <a:t>1 px = 33.88 mm</a:t>
-            </a:r>
-            <a:endParaRPr lang="en-US" sz="950" dirty="0"/>
-          </a:p>
-        </p:txBody>
-      </p:sp>
-      <p:sp>
-        <p:nvSpPr>
-          <p:cNvPr id="80" name="예시"/>
-          <p:cNvSpPr txBox="1"/>
-          <p:nvPr/>
-        </p:nvSpPr>
-        <p:spPr>
-          <a:xfrm>
-            <a:off x="7772102" y="4877197"/>
-            <a:ext cx="219273" cy="120650"/>
-          </a:xfrm>
-          <a:prstGeom prst="rect">
-            <a:avLst/>
-          </a:prstGeom>
-          <a:noFill/>
-          <a:ln/>
-        </p:spPr>
-        <p:txBody>
-          <a:bodyPr wrap="none" lIns="0" tIns="0" rIns="0" bIns="0" rtlCol="0" anchor="ctr"/>
-          <a:lstStyle/>
-          <a:p>
-            <a:pPr algn="l" indent="0" marL="0">
-              <a:buNone/>
-            </a:pPr>
-            <a:r>
-              <a:rPr lang="ko-KR" altLang="en-US" sz="800" spc="-28" kern="0" dirty="0">
-                <a:solidFill>
-                  <a:srgbClr val="737C8B"/>
-                </a:solidFill>
-                <a:latin typeface="Pretendard SemiBold" pitchFamily="34" charset="0"/>
-                <a:ea typeface="Pretendard SemiBold" pitchFamily="34" charset="-127"/>
-                <a:cs typeface="Pretendard SemiBold" pitchFamily="34" charset="-120"/>
-              </a:rPr>
-              <a:t>예시</a:t>
-            </a:r>
-            <a:endParaRPr lang="en-US" sz="800" dirty="0"/>
-          </a:p>
-        </p:txBody>
-      </p:sp>
-      <p:sp>
-        <p:nvSpPr>
-          <p:cNvPr id="81" name="매칭"/>
-          <p:cNvSpPr txBox="1"/>
-          <p:nvPr/>
-        </p:nvSpPr>
-        <p:spPr>
-          <a:xfrm>
-            <a:off x="6426200" y="5105797"/>
-            <a:ext cx="224433" cy="120650"/>
-          </a:xfrm>
-          <a:prstGeom prst="rect">
-            <a:avLst/>
-          </a:prstGeom>
-          <a:noFill/>
-          <a:ln/>
-        </p:spPr>
-        <p:txBody>
-          <a:bodyPr wrap="none" lIns="0" tIns="0" rIns="0" bIns="0" rtlCol="0" anchor="ctr"/>
-          <a:lstStyle/>
-          <a:p>
-            <a:pPr algn="l" indent="0" marL="0">
-              <a:buNone/>
-            </a:pPr>
-            <a:r>
-              <a:rPr lang="ko-KR" altLang="en-US" sz="800" spc="-8" kern="0" dirty="0">
-                <a:solidFill>
-                  <a:srgbClr val="2B4A78"/>
                 </a:solidFill>
                 <a:latin typeface="Pretendard ExtraBold" pitchFamily="34" charset="0"/>
                 <a:ea typeface="Pretendard ExtraBold" pitchFamily="34" charset="-127"/>
                 <a:cs typeface="Pretendard ExtraBold" pitchFamily="34" charset="-120"/>
               </a:rPr>
-              <a:t>매칭</a:t>
-            </a:r>
-            <a:endParaRPr lang="en-US" sz="800" dirty="0"/>
-          </a:p>
-        </p:txBody>
-      </p:sp>
-      <p:sp>
-        <p:nvSpPr>
-          <p:cNvPr id="82" name="X·Y + Z → 3차원 위치 확정"/>
-          <p:cNvSpPr txBox="1"/>
-          <p:nvPr/>
-        </p:nvSpPr>
-        <p:spPr>
-          <a:xfrm>
-            <a:off x="6819900" y="5093097"/>
-            <a:ext cx="1319066" cy="146050"/>
-          </a:xfrm>
-          <a:prstGeom prst="rect">
-            <a:avLst/>
-          </a:prstGeom>
-          <a:noFill/>
-          <a:ln/>
-        </p:spPr>
-        <p:txBody>
-          <a:bodyPr wrap="none" lIns="0" tIns="0" rIns="0" bIns="0" rtlCol="0" anchor="ctr"/>
-          <a:lstStyle/>
-          <a:p>
-            <a:pPr algn="l" indent="0" marL="0">
-              <a:buNone/>
-            </a:pPr>
-            <a:r>
-              <a:rPr lang="ko-KR" altLang="en-US" sz="950" spc="-28" kern="0" dirty="0">
-                <a:solidFill>
-                  <a:srgbClr val="3F4654"/>
-                </a:solidFill>
-                <a:latin typeface="Pretendard Medium" pitchFamily="34" charset="0"/>
-                <a:ea typeface="Pretendard Medium" pitchFamily="34" charset="-127"/>
-                <a:cs typeface="Pretendard Medium" pitchFamily="34" charset="-120"/>
-              </a:rPr>
-              <a:t>X·Y + Z → </a:t>
-            </a:r>
-            <a:pPr algn="l" indent="0" marL="0">
-              <a:buNone/>
-            </a:pPr>
-            <a:r>
-              <a:rPr lang="ko-KR" altLang="en-US" sz="950" b="1" spc="-28" kern="0" dirty="0">
-                <a:solidFill>
-                  <a:srgbClr val="141820"/>
-                </a:solidFill>
-                <a:latin typeface="Pretendard" pitchFamily="34" charset="0"/>
-                <a:ea typeface="Pretendard" pitchFamily="34" charset="-127"/>
-                <a:cs typeface="Pretendard" pitchFamily="34" charset="-120"/>
-              </a:rPr>
-              <a:t>3차원 위치 확정</a:t>
-            </a:r>
-            <a:endParaRPr lang="en-US" sz="950" dirty="0"/>
-          </a:p>
-        </p:txBody>
-      </p:sp>
-      <p:sp>
-        <p:nvSpPr>
-          <p:cNvPr id="83" name="핵심 기법"/>
-          <p:cNvSpPr txBox="1"/>
-          <p:nvPr/>
-        </p:nvSpPr>
-        <p:spPr>
-          <a:xfrm>
-            <a:off x="6426200" y="5435997"/>
-            <a:ext cx="445790" cy="120650"/>
-          </a:xfrm>
-          <a:prstGeom prst="rect">
-            <a:avLst/>
-          </a:prstGeom>
-          <a:noFill/>
-          <a:ln/>
-        </p:spPr>
-        <p:txBody>
-          <a:bodyPr wrap="none" lIns="0" tIns="0" rIns="0" bIns="0" rtlCol="0" anchor="ctr"/>
-          <a:lstStyle/>
-          <a:p>
-            <a:pPr algn="l" indent="0" marL="0">
-              <a:buNone/>
-            </a:pPr>
-            <a:r>
-              <a:rPr lang="ko-KR" altLang="en-US" sz="800" b="1" spc="32" kern="0" dirty="0">
-                <a:solidFill>
-                  <a:srgbClr val="737C8B"/>
-                </a:solidFill>
-                <a:latin typeface="Pretendard" pitchFamily="34" charset="0"/>
-                <a:ea typeface="Pretendard" pitchFamily="34" charset="-127"/>
-                <a:cs typeface="Pretendard" pitchFamily="34" charset="-120"/>
-              </a:rPr>
-              <a:t>핵심 기법</a:t>
-            </a:r>
-            <a:endParaRPr lang="en-US" sz="800" dirty="0"/>
-          </a:p>
-        </p:txBody>
-      </p:sp>
-      <p:sp>
-        <p:nvSpPr>
-          <p:cNvPr id="84" name="LMM 기반 축척 보정"/>
-          <p:cNvSpPr txBox="1"/>
-          <p:nvPr/>
-        </p:nvSpPr>
-        <p:spPr>
-          <a:xfrm>
-            <a:off x="6534150" y="5653286"/>
-            <a:ext cx="1016591" cy="146050"/>
-          </a:xfrm>
-          <a:prstGeom prst="rect">
-            <a:avLst/>
-          </a:prstGeom>
-          <a:noFill/>
-          <a:ln/>
-        </p:spPr>
-        <p:txBody>
-          <a:bodyPr wrap="none" lIns="0" tIns="0" rIns="0" bIns="0" rtlCol="0" anchor="ctr"/>
-          <a:lstStyle/>
-          <a:p>
-            <a:pPr algn="l" indent="0" marL="0">
-              <a:buNone/>
-            </a:pPr>
-            <a:r>
-              <a:rPr lang="ko-KR" altLang="en-US" sz="950" b="1" spc="-19" kern="0" dirty="0">
-                <a:solidFill>
-                  <a:srgbClr val="102A4C"/>
-                </a:solidFill>
-                <a:latin typeface="Pretendard" pitchFamily="34" charset="0"/>
-                <a:ea typeface="Pretendard" pitchFamily="34" charset="-127"/>
-                <a:cs typeface="Pretendard" pitchFamily="34" charset="-120"/>
-              </a:rPr>
-              <a:t>LMM 기반 축척 보정</a:t>
-            </a:r>
-            <a:endParaRPr lang="en-US" sz="950" dirty="0"/>
-          </a:p>
-        </p:txBody>
-      </p:sp>
-      <p:sp>
-        <p:nvSpPr>
-          <p:cNvPr id="85" name="헝가리안 알고리즘"/>
-          <p:cNvSpPr txBox="1"/>
-          <p:nvPr/>
-        </p:nvSpPr>
-        <p:spPr>
-          <a:xfrm>
-            <a:off x="6534150" y="5958086"/>
-            <a:ext cx="891084" cy="146050"/>
-          </a:xfrm>
-          <a:prstGeom prst="rect">
-            <a:avLst/>
-          </a:prstGeom>
-          <a:noFill/>
-          <a:ln/>
-        </p:spPr>
-        <p:txBody>
-          <a:bodyPr wrap="none" lIns="0" tIns="0" rIns="0" bIns="0" rtlCol="0" anchor="ctr"/>
-          <a:lstStyle/>
-          <a:p>
-            <a:pPr algn="l" indent="0" marL="0">
-              <a:buNone/>
-            </a:pPr>
-            <a:r>
-              <a:rPr lang="ko-KR" altLang="en-US" sz="950" b="1" spc="-19" kern="0" dirty="0">
-                <a:solidFill>
-                  <a:srgbClr val="102A4C"/>
-                </a:solidFill>
-                <a:latin typeface="Pretendard" pitchFamily="34" charset="0"/>
-                <a:ea typeface="Pretendard" pitchFamily="34" charset="-127"/>
-                <a:cs typeface="Pretendard" pitchFamily="34" charset="-120"/>
-              </a:rPr>
-              <a:t>헝가리안 알고리즘</a:t>
-            </a:r>
-            <a:endParaRPr lang="en-US" sz="950" dirty="0"/>
-          </a:p>
-        </p:txBody>
-      </p:sp>
-      <p:sp>
-        <p:nvSpPr>
-          <p:cNvPr id="86" name="(최적 1:1 매칭)"/>
-          <p:cNvSpPr txBox="1"/>
-          <p:nvPr/>
-        </p:nvSpPr>
-        <p:spPr>
-          <a:xfrm>
-            <a:off x="7399834" y="5958086"/>
-            <a:ext cx="726480" cy="146050"/>
-          </a:xfrm>
-          <a:prstGeom prst="rect">
-            <a:avLst/>
-          </a:prstGeom>
-          <a:noFill/>
-          <a:ln/>
-        </p:spPr>
-        <p:txBody>
-          <a:bodyPr wrap="none" lIns="0" tIns="0" rIns="0" bIns="0" rtlCol="0" anchor="ctr"/>
-          <a:lstStyle/>
-          <a:p>
-            <a:pPr algn="l" indent="0" marL="0">
-              <a:buNone/>
-            </a:pPr>
-            <a:r>
-              <a:rPr lang="ko-KR" altLang="en-US" sz="950" spc="-19" kern="0" dirty="0">
-                <a:solidFill>
-                  <a:srgbClr val="3F4654"/>
-                </a:solidFill>
-                <a:latin typeface="Pretendard Medium" pitchFamily="34" charset="0"/>
-                <a:ea typeface="Pretendard Medium" pitchFamily="34" charset="-127"/>
-                <a:cs typeface="Pretendard Medium" pitchFamily="34" charset="-120"/>
-              </a:rPr>
-              <a:t>(최적 1:1 매칭)</a:t>
-            </a:r>
-            <a:endParaRPr lang="en-US" sz="950" dirty="0"/>
-          </a:p>
-        </p:txBody>
-      </p:sp>
-      <p:sp>
-        <p:nvSpPr>
-          <p:cNvPr id="87" name="STEP 4"/>
-          <p:cNvSpPr txBox="1"/>
-          <p:nvPr/>
-        </p:nvSpPr>
-        <p:spPr>
-          <a:xfrm>
-            <a:off x="9245600" y="3797697"/>
-            <a:ext cx="470297" cy="120650"/>
-          </a:xfrm>
-          <a:prstGeom prst="rect">
-            <a:avLst/>
-          </a:prstGeom>
-          <a:noFill/>
-          <a:ln/>
-        </p:spPr>
-        <p:txBody>
-          <a:bodyPr wrap="none" lIns="0" tIns="0" rIns="0" bIns="0" rtlCol="0" anchor="ctr"/>
-          <a:lstStyle/>
-          <a:p>
-            <a:pPr algn="l" indent="0" marL="0">
-              <a:buNone/>
-            </a:pPr>
-            <a:r>
-              <a:rPr lang="ko-KR" altLang="en-US" sz="800" spc="96" kern="0" dirty="0">
-                <a:solidFill>
-                  <a:srgbClr val="2B4A78"/>
-                </a:solidFill>
-                <a:latin typeface="Pretendard ExtraBold" pitchFamily="34" charset="0"/>
-                <a:ea typeface="Pretendard ExtraBold" pitchFamily="34" charset="-127"/>
-                <a:cs typeface="Pretendard ExtraBold" pitchFamily="34" charset="-120"/>
-              </a:rPr>
-              <a:t>STEP 4</a:t>
-            </a:r>
-            <a:endParaRPr lang="en-US" sz="800" dirty="0"/>
-          </a:p>
-        </p:txBody>
-      </p:sp>
-      <p:sp>
-        <p:nvSpPr>
-          <p:cNvPr id="88" name="BIM 자동 생성"/>
-          <p:cNvSpPr txBox="1"/>
-          <p:nvPr/>
-        </p:nvSpPr>
-        <p:spPr>
-          <a:xfrm>
-            <a:off x="9245600" y="3950097"/>
-            <a:ext cx="1017222" cy="215900"/>
-          </a:xfrm>
-          <a:prstGeom prst="rect">
-            <a:avLst/>
-          </a:prstGeom>
-          <a:noFill/>
-          <a:ln/>
-        </p:spPr>
-        <p:txBody>
-          <a:bodyPr wrap="none" lIns="0" tIns="0" rIns="0" bIns="0" rtlCol="0" anchor="ctr"/>
-          <a:lstStyle/>
-          <a:p>
-            <a:pPr algn="l" indent="0" marL="0">
-              <a:buNone/>
-            </a:pPr>
-            <a:r>
-              <a:rPr lang="ko-KR" altLang="en-US" sz="1400" spc="-49" kern="0" dirty="0">
-                <a:solidFill>
-                  <a:srgbClr val="102A4C"/>
-                </a:solidFill>
-                <a:latin typeface="Pretendard ExtraBold" pitchFamily="34" charset="0"/>
-                <a:ea typeface="Pretendard ExtraBold" pitchFamily="34" charset="-127"/>
-                <a:cs typeface="Pretendard ExtraBold" pitchFamily="34" charset="-120"/>
-              </a:rPr>
-              <a:t>BIM 자동 생성</a:t>
-            </a:r>
-            <a:endParaRPr lang="en-US" sz="1400" dirty="0"/>
-          </a:p>
-        </p:txBody>
-      </p:sp>
-      <p:sp>
-        <p:nvSpPr>
-          <p:cNvPr id="89" name="높이까지 갖춘 3D BIM 모델"/>
-          <p:cNvSpPr txBox="1"/>
-          <p:nvPr/>
-        </p:nvSpPr>
-        <p:spPr>
-          <a:xfrm>
-            <a:off x="9245600" y="4235847"/>
-            <a:ext cx="1346410" cy="146050"/>
-          </a:xfrm>
-          <a:prstGeom prst="rect">
-            <a:avLst/>
-          </a:prstGeom>
-          <a:noFill/>
-          <a:ln/>
-        </p:spPr>
-        <p:txBody>
-          <a:bodyPr wrap="none" lIns="0" tIns="0" rIns="0" bIns="0" rtlCol="0" anchor="ctr"/>
-          <a:lstStyle/>
-          <a:p>
-            <a:pPr algn="l" indent="0" marL="0">
-              <a:buNone/>
-            </a:pPr>
-            <a:r>
-              <a:rPr lang="ko-KR" altLang="en-US" sz="950" spc="-24" kern="0" dirty="0">
-                <a:solidFill>
-                  <a:srgbClr val="2B4A78"/>
-                </a:solidFill>
-                <a:latin typeface="Pretendard SemiBold" pitchFamily="34" charset="0"/>
-                <a:ea typeface="Pretendard SemiBold" pitchFamily="34" charset="-127"/>
-                <a:cs typeface="Pretendard SemiBold" pitchFamily="34" charset="-120"/>
-              </a:rPr>
-              <a:t>높이까지 갖춘 3D BIM 모델</a:t>
-            </a:r>
-            <a:endParaRPr lang="en-US" sz="950" dirty="0"/>
-          </a:p>
-        </p:txBody>
-      </p:sp>
-      <p:sp>
-        <p:nvSpPr>
-          <p:cNvPr id="90" name="벽체"/>
-          <p:cNvSpPr txBox="1"/>
-          <p:nvPr/>
-        </p:nvSpPr>
-        <p:spPr>
-          <a:xfrm>
-            <a:off x="9245600" y="4515247"/>
-            <a:ext cx="224433" cy="120650"/>
-          </a:xfrm>
-          <a:prstGeom prst="rect">
-            <a:avLst/>
-          </a:prstGeom>
-          <a:noFill/>
-          <a:ln/>
-        </p:spPr>
-        <p:txBody>
-          <a:bodyPr wrap="none" lIns="0" tIns="0" rIns="0" bIns="0" rtlCol="0" anchor="ctr"/>
-          <a:lstStyle/>
-          <a:p>
-            <a:pPr algn="l" indent="0" marL="0">
-              <a:buNone/>
-            </a:pPr>
-            <a:r>
-              <a:rPr lang="ko-KR" altLang="en-US" sz="800" spc="-8" kern="0" dirty="0">
-                <a:solidFill>
-                  <a:srgbClr val="2B4A78"/>
-                </a:solidFill>
-                <a:latin typeface="Pretendard ExtraBold" pitchFamily="34" charset="0"/>
-                <a:ea typeface="Pretendard ExtraBold" pitchFamily="34" charset="-127"/>
-                <a:cs typeface="Pretendard ExtraBold" pitchFamily="34" charset="-120"/>
-              </a:rPr>
-              <a:t>벽체</a:t>
-            </a:r>
-            <a:endParaRPr lang="en-US" sz="800" dirty="0"/>
-          </a:p>
-        </p:txBody>
-      </p:sp>
-      <p:sp>
-        <p:nvSpPr>
-          <p:cNvPr id="91" name="골격선(스켈레톤)으로벽 중심선 추출"/>
-          <p:cNvSpPr txBox="1"/>
-          <p:nvPr/>
-        </p:nvSpPr>
-        <p:spPr>
-          <a:xfrm>
-            <a:off x="9639300" y="4470797"/>
-            <a:ext cx="1044041" cy="355600"/>
-          </a:xfrm>
-          <a:prstGeom prst="rect">
-            <a:avLst/>
-          </a:prstGeom>
-          <a:noFill/>
-          <a:ln/>
-        </p:spPr>
-        <p:txBody>
-          <a:bodyPr wrap="none" lIns="0" tIns="0" rIns="0" bIns="0" rtlCol="0" anchor="t"/>
-          <a:lstStyle/>
-          <a:p>
-            <a:pPr algn="l" indent="0" marL="0">
-              <a:lnSpc>
-                <a:spcPts val="1400"/>
-              </a:lnSpc>
-              <a:buNone/>
-            </a:pPr>
-            <a:r>
-              <a:rPr lang="ko-KR" altLang="en-US" sz="950" spc="-28" kern="0" dirty="0">
-                <a:solidFill>
-                  <a:srgbClr val="3F4654"/>
-                </a:solidFill>
-                <a:latin typeface="Pretendard Medium" pitchFamily="34" charset="0"/>
-                <a:ea typeface="Pretendard Medium" pitchFamily="34" charset="-127"/>
-                <a:cs typeface="Pretendard Medium" pitchFamily="34" charset="-120"/>
-              </a:rPr>
-              <a:t>골격선(스켈레톤)으로</a:t>
-            </a:r>
-            <a:endParaRPr lang="en-US" sz="950" dirty="0"/>
-          </a:p>
-          <a:p>
-            <a:pPr algn="l" indent="0" marL="0">
-              <a:lnSpc>
-                <a:spcPts val="1400"/>
-              </a:lnSpc>
-              <a:buNone/>
-            </a:pPr>
-            <a:r>
-              <a:rPr lang="ko-KR" altLang="en-US" sz="950" b="1" spc="-28" kern="0" dirty="0">
-                <a:solidFill>
-                  <a:srgbClr val="141820"/>
-                </a:solidFill>
-                <a:latin typeface="Pretendard" pitchFamily="34" charset="0"/>
-                <a:ea typeface="Pretendard" pitchFamily="34" charset="-127"/>
-                <a:cs typeface="Pretendard" pitchFamily="34" charset="-120"/>
-              </a:rPr>
-              <a:t>벽 중심선 추출</a:t>
-            </a:r>
-            <a:endParaRPr lang="en-US" sz="950" dirty="0"/>
-          </a:p>
-        </p:txBody>
-      </p:sp>
-      <p:sp>
-        <p:nvSpPr>
-          <p:cNvPr id="92" name="창·문"/>
-          <p:cNvSpPr txBox="1"/>
-          <p:nvPr/>
-        </p:nvSpPr>
-        <p:spPr>
-          <a:xfrm>
-            <a:off x="9245600" y="4921647"/>
-            <a:ext cx="253107" cy="120650"/>
-          </a:xfrm>
-          <a:prstGeom prst="rect">
-            <a:avLst/>
-          </a:prstGeom>
-          <a:noFill/>
-          <a:ln/>
-        </p:spPr>
-        <p:txBody>
-          <a:bodyPr wrap="none" lIns="0" tIns="0" rIns="0" bIns="0" rtlCol="0" anchor="ctr"/>
-          <a:lstStyle/>
-          <a:p>
-            <a:pPr algn="l" indent="0" marL="0">
-              <a:buNone/>
-            </a:pPr>
-            <a:r>
-              <a:rPr lang="ko-KR" altLang="en-US" sz="800" spc="-8" kern="0" dirty="0">
-                <a:solidFill>
-                  <a:srgbClr val="2B4A78"/>
-                </a:solidFill>
-                <a:latin typeface="Pretendard ExtraBold" pitchFamily="34" charset="0"/>
-                <a:ea typeface="Pretendard ExtraBold" pitchFamily="34" charset="-127"/>
-                <a:cs typeface="Pretendard ExtraBold" pitchFamily="34" charset="-120"/>
-              </a:rPr>
-              <a:t>창·문</a:t>
-            </a:r>
-            <a:endParaRPr lang="en-US" sz="800" dirty="0"/>
-          </a:p>
-        </p:txBody>
-      </p:sp>
-      <p:sp>
-        <p:nvSpPr>
-          <p:cNvPr id="93" name="붙일 벽 결정(호스팅) 후Revit API로 BIM 생성"/>
-          <p:cNvSpPr txBox="1"/>
-          <p:nvPr/>
-        </p:nvSpPr>
-        <p:spPr>
-          <a:xfrm>
-            <a:off x="9639300" y="4877197"/>
-            <a:ext cx="1126180" cy="355600"/>
-          </a:xfrm>
-          <a:prstGeom prst="rect">
-            <a:avLst/>
-          </a:prstGeom>
-          <a:noFill/>
-          <a:ln/>
-        </p:spPr>
-        <p:txBody>
-          <a:bodyPr wrap="none" lIns="0" tIns="0" rIns="0" bIns="0" rtlCol="0" anchor="t"/>
-          <a:lstStyle/>
-          <a:p>
-            <a:pPr algn="l" indent="0" marL="0">
-              <a:lnSpc>
-                <a:spcPts val="1400"/>
-              </a:lnSpc>
-              <a:buNone/>
-            </a:pPr>
-            <a:r>
-              <a:rPr lang="ko-KR" altLang="en-US" sz="950" spc="-28" kern="0" dirty="0">
-                <a:solidFill>
-                  <a:srgbClr val="3F4654"/>
-                </a:solidFill>
-                <a:latin typeface="Pretendard Medium" pitchFamily="34" charset="0"/>
-                <a:ea typeface="Pretendard Medium" pitchFamily="34" charset="-127"/>
-                <a:cs typeface="Pretendard Medium" pitchFamily="34" charset="-120"/>
-              </a:rPr>
-              <a:t>붙일 벽 결정(호스팅) 후</a:t>
-            </a:r>
-            <a:endParaRPr lang="en-US" sz="950" dirty="0"/>
-          </a:p>
-          <a:p>
-            <a:pPr algn="l" indent="0" marL="0">
-              <a:lnSpc>
-                <a:spcPts val="1400"/>
-              </a:lnSpc>
-              <a:buNone/>
-            </a:pPr>
-            <a:r>
-              <a:rPr lang="ko-KR" altLang="en-US" sz="950" b="1" spc="-28" kern="0" dirty="0">
-                <a:solidFill>
-                  <a:srgbClr val="141820"/>
-                </a:solidFill>
-                <a:latin typeface="Pretendard" pitchFamily="34" charset="0"/>
-                <a:ea typeface="Pretendard" pitchFamily="34" charset="-127"/>
-                <a:cs typeface="Pretendard" pitchFamily="34" charset="-120"/>
-              </a:rPr>
-              <a:t>Revit API로 BIM 생성</a:t>
-            </a:r>
-            <a:endParaRPr lang="en-US" sz="950" dirty="0"/>
-          </a:p>
-        </p:txBody>
-      </p:sp>
-      <p:sp>
-        <p:nvSpPr>
-          <p:cNvPr id="94" name="핵심 기법"/>
-          <p:cNvSpPr txBox="1"/>
-          <p:nvPr/>
-        </p:nvSpPr>
-        <p:spPr>
-          <a:xfrm>
-            <a:off x="9245600" y="5435997"/>
-            <a:ext cx="445790" cy="120650"/>
-          </a:xfrm>
-          <a:prstGeom prst="rect">
-            <a:avLst/>
-          </a:prstGeom>
-          <a:noFill/>
-          <a:ln/>
-        </p:spPr>
-        <p:txBody>
-          <a:bodyPr wrap="none" lIns="0" tIns="0" rIns="0" bIns="0" rtlCol="0" anchor="ctr"/>
-          <a:lstStyle/>
-          <a:p>
-            <a:pPr algn="l" indent="0" marL="0">
-              <a:buNone/>
-            </a:pPr>
-            <a:r>
-              <a:rPr lang="ko-KR" altLang="en-US" sz="800" b="1" spc="32" kern="0" dirty="0">
-                <a:solidFill>
-                  <a:srgbClr val="737C8B"/>
-                </a:solidFill>
-                <a:latin typeface="Pretendard" pitchFamily="34" charset="0"/>
-                <a:ea typeface="Pretendard" pitchFamily="34" charset="-127"/>
-                <a:cs typeface="Pretendard" pitchFamily="34" charset="-120"/>
-              </a:rPr>
-              <a:t>핵심 기법</a:t>
-            </a:r>
-            <a:endParaRPr lang="en-US" sz="800" dirty="0"/>
-          </a:p>
-        </p:txBody>
-      </p:sp>
-      <p:sp>
-        <p:nvSpPr>
-          <p:cNvPr id="95" name="스켈레톤 기반 벽체 추출"/>
-          <p:cNvSpPr txBox="1"/>
-          <p:nvPr/>
-        </p:nvSpPr>
-        <p:spPr>
-          <a:xfrm>
-            <a:off x="9353550" y="5653286"/>
-            <a:ext cx="1160466" cy="146050"/>
-          </a:xfrm>
-          <a:prstGeom prst="rect">
-            <a:avLst/>
-          </a:prstGeom>
-          <a:noFill/>
-          <a:ln/>
-        </p:spPr>
-        <p:txBody>
-          <a:bodyPr wrap="none" lIns="0" tIns="0" rIns="0" bIns="0" rtlCol="0" anchor="ctr"/>
-          <a:lstStyle/>
-          <a:p>
-            <a:pPr algn="l" indent="0" marL="0">
-              <a:buNone/>
-            </a:pPr>
-            <a:r>
-              <a:rPr lang="ko-KR" altLang="en-US" sz="950" b="1" spc="-19" kern="0" dirty="0">
-                <a:solidFill>
-                  <a:srgbClr val="102A4C"/>
-                </a:solidFill>
-                <a:latin typeface="Pretendard" pitchFamily="34" charset="0"/>
-                <a:ea typeface="Pretendard" pitchFamily="34" charset="-127"/>
-                <a:cs typeface="Pretendard" pitchFamily="34" charset="-120"/>
-              </a:rPr>
-              <a:t>스켈레톤 기반 벽체 추출</a:t>
-            </a:r>
-            <a:endParaRPr lang="en-US" sz="950" dirty="0"/>
-          </a:p>
-        </p:txBody>
-      </p:sp>
-      <p:sp>
-        <p:nvSpPr>
-          <p:cNvPr id="96" name="Revit API"/>
-          <p:cNvSpPr txBox="1"/>
-          <p:nvPr/>
-        </p:nvSpPr>
-        <p:spPr>
-          <a:xfrm>
-            <a:off x="9353550" y="5958086"/>
-            <a:ext cx="536972" cy="146050"/>
-          </a:xfrm>
-          <a:prstGeom prst="rect">
-            <a:avLst/>
-          </a:prstGeom>
-          <a:noFill/>
-          <a:ln/>
-        </p:spPr>
-        <p:txBody>
-          <a:bodyPr wrap="none" lIns="0" tIns="0" rIns="0" bIns="0" rtlCol="0" anchor="ctr"/>
-          <a:lstStyle/>
-          <a:p>
-            <a:pPr algn="l" indent="0" marL="0">
-              <a:buNone/>
-            </a:pPr>
-            <a:r>
-              <a:rPr lang="ko-KR" altLang="en-US" sz="950" b="1" spc="-19" kern="0" dirty="0">
-                <a:solidFill>
-                  <a:srgbClr val="102A4C"/>
-                </a:solidFill>
-                <a:latin typeface="Pretendard" pitchFamily="34" charset="0"/>
-                <a:ea typeface="Pretendard" pitchFamily="34" charset="-127"/>
-                <a:cs typeface="Pretendard" pitchFamily="34" charset="-120"/>
-              </a:rPr>
-              <a:t>Revit API</a:t>
-            </a:r>
-            <a:endParaRPr lang="en-US" sz="950" dirty="0"/>
-          </a:p>
-        </p:txBody>
-      </p:sp>
-      <p:sp>
-        <p:nvSpPr>
-          <p:cNvPr id="97" name="석사 연구 발표  ·  평면도와 입면도 객체 인식 및 정보 통합을 통한 "/>
-          <p:cNvSpPr txBox="1"/>
-          <p:nvPr/>
-        </p:nvSpPr>
-        <p:spPr>
-          <a:xfrm>
-            <a:off x="609600" y="6472238"/>
-            <a:ext cx="5145113" cy="114300"/>
-          </a:xfrm>
-          <a:prstGeom prst="rect">
-            <a:avLst/>
-          </a:prstGeom>
-          <a:noFill/>
-          <a:ln/>
-        </p:spPr>
-        <p:txBody>
-          <a:bodyPr wrap="none" lIns="0" tIns="0" rIns="0" bIns="0" rtlCol="0" anchor="ctr"/>
-          <a:lstStyle/>
-          <a:p>
-            <a:pPr algn="l" indent="0" marL="0">
-              <a:buNone/>
-            </a:pPr>
-            <a:r>
-              <a:rPr lang="ko-KR" altLang="en-US" sz="750" spc="-12" kern="0" dirty="0">
-                <a:solidFill>
-                  <a:srgbClr val="737C8B"/>
-                </a:solidFill>
-                <a:latin typeface="Pretendard Medium" pitchFamily="34" charset="0"/>
-                <a:ea typeface="Pretendard Medium" pitchFamily="34" charset="-127"/>
-                <a:cs typeface="Pretendard Medium" pitchFamily="34" charset="-120"/>
-              </a:rPr>
-              <a:t>석사 연구 발표  ·  평면도와 입면도 객체 인식 및 정보 통합을 통한 3D BIM 자동 생성 연구  ·  Utility 기술(건축, BIM/5D) 지원자 ○○○</a:t>
-            </a:r>
-            <a:endParaRPr lang="en-US" sz="750" dirty="0"/>
-          </a:p>
-        </p:txBody>
-      </p:sp>
-      <p:sp>
-        <p:nvSpPr>
-          <p:cNvPr id="98" name="03 / 05"/>
-          <p:cNvSpPr txBox="1"/>
-          <p:nvPr/>
-        </p:nvSpPr>
-        <p:spPr>
-          <a:xfrm>
-            <a:off x="11216779" y="6472238"/>
-            <a:ext cx="416421" cy="114300"/>
-          </a:xfrm>
-          <a:prstGeom prst="rect">
-            <a:avLst/>
-          </a:prstGeom>
-          <a:noFill/>
-          <a:ln/>
-        </p:spPr>
-        <p:txBody>
-          <a:bodyPr wrap="none" lIns="0" tIns="0" rIns="0" bIns="0" rtlCol="0" anchor="ctr"/>
-          <a:lstStyle/>
-          <a:p>
-            <a:pPr algn="l" indent="0" marL="0">
-              <a:buNone/>
-            </a:pPr>
-            <a:r>
-              <a:rPr lang="ko-KR" altLang="en-US" sz="750" spc="45" kern="0" dirty="0">
-                <a:solidFill>
-                  <a:srgbClr val="102A4C"/>
-                </a:solidFill>
-                <a:latin typeface="Pretendard ExtraBold" pitchFamily="34" charset="0"/>
-                <a:ea typeface="Pretendard ExtraBold" pitchFamily="34" charset="-127"/>
-                <a:cs typeface="Pretendard ExtraBold" pitchFamily="34" charset="-120"/>
-              </a:rPr>
               <a:t>03</a:t>
             </a:r>
-            <a:pPr algn="l" indent="0" marL="0">
-              <a:buNone/>
-            </a:pPr>
             <a:r>
               <a:rPr lang="ko-KR" altLang="en-US" sz="750" spc="45" kern="0" dirty="0">
                 <a:solidFill>
@@ -17425,9 +17251,6 @@
               </a:rPr>
               <a:t>세 가지 기여가 모두 </a:t>
             </a:r>
-            <a:pPr algn="l" indent="0" marL="0">
-              <a:buNone/>
-            </a:pPr>
             <a:r>
               <a:rPr lang="ko-KR" altLang="en-US" sz="2300" spc="-92" kern="0" dirty="0">
                 <a:solidFill>
@@ -17439,9 +17262,6 @@
               </a:rPr>
               <a:t>수치로</a:t>
             </a:r>
-            <a:pPr algn="l" indent="0" marL="0">
-              <a:buNone/>
-            </a:pPr>
             <a:r>
               <a:rPr lang="ko-KR" altLang="en-US" sz="2300" spc="-92" kern="0" dirty="0">
                 <a:solidFill>
@@ -17885,8 +17705,493 @@
               </a:rPr>
               <a:t>도면 종류별 최적</a:t>
             </a:r>
+            <a:br/>
+            <a:r>
+              <a:rPr lang="ko-KR" altLang="en-US" sz="1300" spc="-52" kern="0" dirty="0">
+                <a:solidFill>
+                  <a:srgbClr val="102A4C"/>
+                </a:solidFill>
+                <a:latin typeface="Pretendard ExtraBold" pitchFamily="34" charset="0"/>
+                <a:ea typeface="Pretendard ExtraBold" pitchFamily="34" charset="-127"/>
+                <a:cs typeface="Pretendard ExtraBold" pitchFamily="34" charset="-120"/>
+              </a:rPr>
+              <a:t>학습·인식 전략 제안</a:t>
+            </a:r>
             <a:endParaRPr lang="en-US" sz="1300" dirty="0"/>
           </a:p>
+        </p:txBody>
+      </p:sp>
+      <p:sp>
+        <p:nvSpPr>
+          <p:cNvPr id="94" name="도면 객체 인식 mAP@0.5"/>
+          <p:cNvSpPr txBox="1"/>
+          <p:nvPr/>
+        </p:nvSpPr>
+        <p:spPr>
+          <a:xfrm>
+            <a:off x="4381500" y="1813123"/>
+            <a:ext cx="1311283" cy="146050"/>
+          </a:xfrm>
+          <a:prstGeom prst="rect">
+            <a:avLst/>
+          </a:prstGeom>
+          <a:noFill/>
+          <a:ln/>
+        </p:spPr>
+        <p:txBody>
+          <a:bodyPr wrap="none" lIns="0" tIns="0" rIns="0" bIns="0" rtlCol="0" anchor="ctr"/>
+          <a:lstStyle/>
+          <a:p>
+            <a:pPr algn="l" indent="0" marL="0">
+              <a:buNone/>
+            </a:pPr>
+            <a:r>
+              <a:rPr lang="ko-KR" altLang="en-US" sz="950" spc="-19" kern="0" dirty="0">
+                <a:solidFill>
+                  <a:srgbClr val="102A4C"/>
+                </a:solidFill>
+                <a:latin typeface="Pretendard ExtraBold" pitchFamily="34" charset="0"/>
+                <a:ea typeface="Pretendard ExtraBold" pitchFamily="34" charset="-127"/>
+                <a:cs typeface="Pretendard ExtraBold" pitchFamily="34" charset="-120"/>
+              </a:rPr>
+              <a:t>도면 객체 인식 mAP@0.5</a:t>
+            </a:r>
+            <a:endParaRPr lang="en-US" sz="950" dirty="0"/>
+          </a:p>
+        </p:txBody>
+      </p:sp>
+      <p:sp>
+        <p:nvSpPr>
+          <p:cNvPr id="95" name="·  학습 이미지 평면도 72,792장 · 입면도 16,992장"/>
+          <p:cNvSpPr txBox="1"/>
+          <p:nvPr/>
+        </p:nvSpPr>
+        <p:spPr>
+          <a:xfrm>
+            <a:off x="5669359" y="1813123"/>
+            <a:ext cx="2480163" cy="146050"/>
+          </a:xfrm>
+          <a:prstGeom prst="rect">
+            <a:avLst/>
+          </a:prstGeom>
+          <a:noFill/>
+          <a:ln/>
+        </p:spPr>
+        <p:txBody>
+          <a:bodyPr wrap="none" lIns="0" tIns="0" rIns="0" bIns="0" rtlCol="0" anchor="ctr"/>
+          <a:lstStyle/>
+          <a:p>
+            <a:pPr algn="l" indent="0" marL="0">
+              <a:buNone/>
+            </a:pPr>
+            <a:r>
+              <a:rPr lang="ko-KR" altLang="en-US" sz="950" spc="-19" kern="0" dirty="0">
+                <a:solidFill>
+                  <a:srgbClr val="737C8B"/>
+                </a:solidFill>
+                <a:latin typeface="Pretendard SemiBold" pitchFamily="34" charset="0"/>
+                <a:ea typeface="Pretendard SemiBold" pitchFamily="34" charset="-127"/>
+                <a:cs typeface="Pretendard SemiBold" pitchFamily="34" charset="-120"/>
+              </a:rPr>
+              <a:t>·  학습 이미지 평면도 72,792장 · 입면도 16,992장</a:t>
+            </a:r>
+            <a:endParaRPr lang="en-US" sz="950" dirty="0"/>
+          </a:p>
+        </p:txBody>
+      </p:sp>
+      <p:sp>
+        <p:nvSpPr>
+          <p:cNvPr id="96" name="평면도"/>
+          <p:cNvSpPr txBox="1"/>
+          <p:nvPr/>
+        </p:nvSpPr>
+        <p:spPr>
+          <a:xfrm>
+            <a:off x="4381500" y="2092523"/>
+            <a:ext cx="359073" cy="146050"/>
+          </a:xfrm>
+          <a:prstGeom prst="rect">
+            <a:avLst/>
+          </a:prstGeom>
+          <a:noFill/>
+          <a:ln/>
+        </p:spPr>
+        <p:txBody>
+          <a:bodyPr wrap="none" lIns="0" tIns="0" rIns="0" bIns="0" rtlCol="0" anchor="ctr"/>
+          <a:lstStyle/>
+          <a:p>
+            <a:pPr algn="l" indent="0" marL="0">
+              <a:buNone/>
+            </a:pPr>
+            <a:r>
+              <a:rPr lang="ko-KR" altLang="en-US" sz="950" b="1" spc="-12" kern="0" dirty="0">
+                <a:solidFill>
+                  <a:srgbClr val="3F4654"/>
+                </a:solidFill>
+                <a:latin typeface="Pretendard" pitchFamily="34" charset="0"/>
+                <a:ea typeface="Pretendard" pitchFamily="34" charset="-127"/>
+                <a:cs typeface="Pretendard" pitchFamily="34" charset="-120"/>
+              </a:rPr>
+              <a:t>평면도</a:t>
+            </a:r>
+            <a:endParaRPr lang="en-US" sz="950" dirty="0"/>
+          </a:p>
+        </p:txBody>
+      </p:sp>
+      <p:sp>
+        <p:nvSpPr>
+          <p:cNvPr id="97" name="Baseline 0.507"/>
+          <p:cNvSpPr txBox="1"/>
+          <p:nvPr/>
+        </p:nvSpPr>
+        <p:spPr>
+          <a:xfrm>
+            <a:off x="5484416" y="2111573"/>
+            <a:ext cx="738584" cy="120650"/>
+          </a:xfrm>
+          <a:prstGeom prst="rect">
+            <a:avLst/>
+          </a:prstGeom>
+          <a:noFill/>
+          <a:ln/>
+        </p:spPr>
+        <p:txBody>
+          <a:bodyPr wrap="none" lIns="0" tIns="0" rIns="0" bIns="0" rtlCol="0" anchor="ctr"/>
+          <a:lstStyle/>
+          <a:p>
+            <a:pPr algn="l" indent="0" marL="0">
+              <a:buNone/>
+            </a:pPr>
+            <a:r>
+              <a:rPr lang="ko-KR" altLang="en-US" sz="800" spc="-16" kern="0" dirty="0">
+                <a:solidFill>
+                  <a:srgbClr val="737C8B"/>
+                </a:solidFill>
+                <a:latin typeface="Pretendard SemiBold" pitchFamily="34" charset="0"/>
+                <a:ea typeface="Pretendard SemiBold" pitchFamily="34" charset="-127"/>
+                <a:cs typeface="Pretendard SemiBold" pitchFamily="34" charset="-120"/>
+              </a:rPr>
+              <a:t>Baseline </a:t>
+            </a:r>
+            <a:r>
+              <a:rPr lang="ko-KR" altLang="en-US" sz="800" b="1" spc="8" kern="0" dirty="0">
+                <a:solidFill>
+                  <a:srgbClr val="3F4654"/>
+                </a:solidFill>
+                <a:latin typeface="Pretendard" pitchFamily="34" charset="0"/>
+                <a:ea typeface="Pretendard" pitchFamily="34" charset="-127"/>
+                <a:cs typeface="Pretendard" pitchFamily="34" charset="-120"/>
+              </a:rPr>
+              <a:t>0.507</a:t>
+            </a:r>
+            <a:endParaRPr lang="en-US" sz="800" dirty="0"/>
+          </a:p>
+        </p:txBody>
+      </p:sp>
+      <p:sp>
+        <p:nvSpPr>
+          <p:cNvPr id="98" name="0.934"/>
+          <p:cNvSpPr txBox="1"/>
+          <p:nvPr/>
+        </p:nvSpPr>
+        <p:spPr>
+          <a:xfrm>
+            <a:off x="4381500" y="2238573"/>
+            <a:ext cx="1116294" cy="450850"/>
+          </a:xfrm>
+          <a:prstGeom prst="rect">
+            <a:avLst/>
+          </a:prstGeom>
+          <a:noFill/>
+          <a:ln/>
+        </p:spPr>
+        <p:txBody>
+          <a:bodyPr wrap="none" lIns="0" tIns="0" rIns="0" bIns="0" rtlCol="0" anchor="ctr"/>
+          <a:lstStyle/>
+          <a:p>
+            <a:pPr algn="l" indent="0" marL="0">
+              <a:buNone/>
+            </a:pPr>
+            <a:r>
+              <a:rPr lang="ko-KR" altLang="en-US" sz="3000" spc="-80" kern="0" dirty="0">
+                <a:solidFill>
+                  <a:srgbClr val="102A4C"/>
+                </a:solidFill>
+                <a:latin typeface="Pretendard ExtraBold" pitchFamily="34" charset="0"/>
+                <a:ea typeface="Pretendard ExtraBold" pitchFamily="34" charset="-127"/>
+                <a:cs typeface="Pretendard ExtraBold" pitchFamily="34" charset="-120"/>
+              </a:rPr>
+              <a:t>0.934</a:t>
+            </a:r>
+            <a:endParaRPr lang="en-US" sz="3000" dirty="0"/>
+          </a:p>
+        </p:txBody>
+      </p:sp>
+      <p:sp>
+        <p:nvSpPr>
+          <p:cNvPr id="99" name="+42.7%p"/>
+          <p:cNvSpPr txBox="1"/>
+          <p:nvPr/>
+        </p:nvSpPr>
+        <p:spPr>
+          <a:xfrm>
+            <a:off x="5561608" y="2397026"/>
+            <a:ext cx="543520" cy="133350"/>
+          </a:xfrm>
+          <a:prstGeom prst="rect">
+            <a:avLst/>
+          </a:prstGeom>
+          <a:noFill/>
+          <a:ln/>
+        </p:spPr>
+        <p:txBody>
+          <a:bodyPr wrap="none" lIns="0" tIns="0" rIns="0" bIns="0" rtlCol="0" anchor="ctr"/>
+          <a:lstStyle/>
+          <a:p>
+            <a:pPr algn="l" indent="0" marL="0">
+              <a:buNone/>
+            </a:pPr>
+            <a:r>
+              <a:rPr lang="ko-KR" altLang="en-US" sz="900" spc="-12" kern="0" dirty="0">
+                <a:solidFill>
+                  <a:srgbClr val="EA002C"/>
+                </a:solidFill>
+                <a:latin typeface="Pretendard ExtraBold" pitchFamily="34" charset="0"/>
+                <a:ea typeface="Pretendard ExtraBold" pitchFamily="34" charset="-127"/>
+                <a:cs typeface="Pretendard ExtraBold" pitchFamily="34" charset="-120"/>
+              </a:rPr>
+              <a:t>+42.7%p</a:t>
+            </a:r>
+            <a:endParaRPr lang="en-US" sz="900" dirty="0"/>
+          </a:p>
+        </p:txBody>
+      </p:sp>
+      <p:sp>
+        <p:nvSpPr>
+          <p:cNvPr id="100" name="입면도"/>
+          <p:cNvSpPr txBox="1"/>
+          <p:nvPr/>
+        </p:nvSpPr>
+        <p:spPr>
+          <a:xfrm>
+            <a:off x="6375400" y="2092523"/>
+            <a:ext cx="359073" cy="146050"/>
+          </a:xfrm>
+          <a:prstGeom prst="rect">
+            <a:avLst/>
+          </a:prstGeom>
+          <a:noFill/>
+          <a:ln/>
+        </p:spPr>
+        <p:txBody>
+          <a:bodyPr wrap="none" lIns="0" tIns="0" rIns="0" bIns="0" rtlCol="0" anchor="ctr"/>
+          <a:lstStyle/>
+          <a:p>
+            <a:pPr algn="l" indent="0" marL="0">
+              <a:buNone/>
+            </a:pPr>
+            <a:r>
+              <a:rPr lang="ko-KR" altLang="en-US" sz="950" b="1" spc="-12" kern="0" dirty="0">
+                <a:solidFill>
+                  <a:srgbClr val="3F4654"/>
+                </a:solidFill>
+                <a:latin typeface="Pretendard" pitchFamily="34" charset="0"/>
+                <a:ea typeface="Pretendard" pitchFamily="34" charset="-127"/>
+                <a:cs typeface="Pretendard" pitchFamily="34" charset="-120"/>
+              </a:rPr>
+              <a:t>입면도</a:t>
+            </a:r>
+            <a:endParaRPr lang="en-US" sz="950" dirty="0"/>
+          </a:p>
+        </p:txBody>
+      </p:sp>
+      <p:sp>
+        <p:nvSpPr>
+          <p:cNvPr id="101" name="Baseline 0.355"/>
+          <p:cNvSpPr txBox="1"/>
+          <p:nvPr/>
+        </p:nvSpPr>
+        <p:spPr>
+          <a:xfrm>
+            <a:off x="7478316" y="2111573"/>
+            <a:ext cx="738584" cy="120650"/>
+          </a:xfrm>
+          <a:prstGeom prst="rect">
+            <a:avLst/>
+          </a:prstGeom>
+          <a:noFill/>
+          <a:ln/>
+        </p:spPr>
+        <p:txBody>
+          <a:bodyPr wrap="none" lIns="0" tIns="0" rIns="0" bIns="0" rtlCol="0" anchor="ctr"/>
+          <a:lstStyle/>
+          <a:p>
+            <a:pPr algn="l" indent="0" marL="0">
+              <a:buNone/>
+            </a:pPr>
+            <a:r>
+              <a:rPr lang="ko-KR" altLang="en-US" sz="800" spc="-16" kern="0" dirty="0">
+                <a:solidFill>
+                  <a:srgbClr val="737C8B"/>
+                </a:solidFill>
+                <a:latin typeface="Pretendard SemiBold" pitchFamily="34" charset="0"/>
+                <a:ea typeface="Pretendard SemiBold" pitchFamily="34" charset="-127"/>
+                <a:cs typeface="Pretendard SemiBold" pitchFamily="34" charset="-120"/>
+              </a:rPr>
+              <a:t>Baseline </a:t>
+            </a:r>
+            <a:r>
+              <a:rPr lang="ko-KR" altLang="en-US" sz="800" b="1" spc="2" kern="0" dirty="0">
+                <a:solidFill>
+                  <a:srgbClr val="3F4654"/>
+                </a:solidFill>
+                <a:latin typeface="Pretendard" pitchFamily="34" charset="0"/>
+                <a:ea typeface="Pretendard" pitchFamily="34" charset="-127"/>
+                <a:cs typeface="Pretendard" pitchFamily="34" charset="-120"/>
+              </a:rPr>
+              <a:t>0.355</a:t>
+            </a:r>
+            <a:endParaRPr lang="en-US" sz="800" dirty="0"/>
+          </a:p>
+        </p:txBody>
+      </p:sp>
+      <p:sp>
+        <p:nvSpPr>
+          <p:cNvPr id="102" name="0.838"/>
+          <p:cNvSpPr txBox="1"/>
+          <p:nvPr/>
+        </p:nvSpPr>
+        <p:spPr>
+          <a:xfrm>
+            <a:off x="6375400" y="2238573"/>
+            <a:ext cx="1116294" cy="450850"/>
+          </a:xfrm>
+          <a:prstGeom prst="rect">
+            <a:avLst/>
+          </a:prstGeom>
+          <a:noFill/>
+          <a:ln/>
+        </p:spPr>
+        <p:txBody>
+          <a:bodyPr wrap="none" lIns="0" tIns="0" rIns="0" bIns="0" rtlCol="0" anchor="ctr"/>
+          <a:lstStyle/>
+          <a:p>
+            <a:pPr algn="l" indent="0" marL="0">
+              <a:buNone/>
+            </a:pPr>
+            <a:r>
+              <a:rPr lang="ko-KR" altLang="en-US" sz="3000" spc="-64" kern="0" dirty="0">
+                <a:solidFill>
+                  <a:srgbClr val="102A4C"/>
+                </a:solidFill>
+                <a:latin typeface="Pretendard ExtraBold" pitchFamily="34" charset="0"/>
+                <a:ea typeface="Pretendard ExtraBold" pitchFamily="34" charset="-127"/>
+                <a:cs typeface="Pretendard ExtraBold" pitchFamily="34" charset="-120"/>
+              </a:rPr>
+              <a:t>0.838</a:t>
+            </a:r>
+            <a:endParaRPr lang="en-US" sz="3000" dirty="0"/>
+          </a:p>
+        </p:txBody>
+      </p:sp>
+      <p:sp>
+        <p:nvSpPr>
+          <p:cNvPr id="103" name="+48.3%p"/>
+          <p:cNvSpPr txBox="1"/>
+          <p:nvPr/>
+        </p:nvSpPr>
+        <p:spPr>
+          <a:xfrm>
+            <a:off x="7555508" y="2397026"/>
+            <a:ext cx="553641" cy="133350"/>
+          </a:xfrm>
+          <a:prstGeom prst="rect">
+            <a:avLst/>
+          </a:prstGeom>
+          <a:noFill/>
+          <a:ln/>
+        </p:spPr>
+        <p:txBody>
+          <a:bodyPr wrap="none" lIns="0" tIns="0" rIns="0" bIns="0" rtlCol="0" anchor="ctr"/>
+          <a:lstStyle/>
+          <a:p>
+            <a:pPr algn="l" indent="0" marL="0">
+              <a:buNone/>
+            </a:pPr>
+            <a:r>
+              <a:rPr lang="ko-KR" altLang="en-US" sz="900" spc="-12" kern="0" dirty="0">
+                <a:solidFill>
+                  <a:srgbClr val="EA002C"/>
+                </a:solidFill>
+                <a:latin typeface="Pretendard ExtraBold" pitchFamily="34" charset="0"/>
+                <a:ea typeface="Pretendard ExtraBold" pitchFamily="34" charset="-127"/>
+                <a:cs typeface="Pretendard ExtraBold" pitchFamily="34" charset="-120"/>
+              </a:rPr>
+              <a:t>+48.3%p</a:t>
+            </a:r>
+            <a:endParaRPr lang="en-US" sz="900" dirty="0"/>
+          </a:p>
+        </p:txBody>
+      </p:sp>
+      <p:sp>
+        <p:nvSpPr>
+          <p:cNvPr id="104" name="기여 2"/>
+          <p:cNvSpPr txBox="1"/>
+          <p:nvPr/>
+        </p:nvSpPr>
+        <p:spPr>
+          <a:xfrm>
+            <a:off x="1473200" y="3499842"/>
+            <a:ext cx="328216" cy="120650"/>
+          </a:xfrm>
+          <a:prstGeom prst="rect">
+            <a:avLst/>
+          </a:prstGeom>
+          <a:noFill/>
+          <a:ln/>
+        </p:spPr>
+        <p:txBody>
+          <a:bodyPr wrap="none" lIns="0" tIns="0" rIns="0" bIns="0" rtlCol="0" anchor="ctr"/>
+          <a:lstStyle/>
+          <a:p>
+            <a:pPr algn="l" indent="0" marL="0">
+              <a:buNone/>
+            </a:pPr>
+            <a:r>
+              <a:rPr lang="ko-KR" altLang="en-US" sz="800" spc="32" kern="0" dirty="0">
+                <a:solidFill>
+                  <a:srgbClr val="EA002C"/>
+                </a:solidFill>
+                <a:latin typeface="Pretendard ExtraBold" pitchFamily="34" charset="0"/>
+                <a:ea typeface="Pretendard ExtraBold" pitchFamily="34" charset="-127"/>
+                <a:cs typeface="Pretendard ExtraBold" pitchFamily="34" charset="-120"/>
+              </a:rPr>
+              <a:t>기여 2</a:t>
+            </a:r>
+            <a:endParaRPr lang="en-US" sz="800" dirty="0"/>
+          </a:p>
+        </p:txBody>
+      </p:sp>
+      <p:sp>
+        <p:nvSpPr>
+          <p:cNvPr id="105" name="CAD 정보 없이 평면도·입면도 간객체 대응 관계 정의"/>
+          <p:cNvSpPr txBox="1"/>
+          <p:nvPr/>
+        </p:nvSpPr>
+        <p:spPr>
+          <a:xfrm>
+            <a:off x="1473200" y="3697486"/>
+            <a:ext cx="2117425" cy="455612"/>
+          </a:xfrm>
+          <a:prstGeom prst="rect">
+            <a:avLst/>
+          </a:prstGeom>
+          <a:noFill/>
+          <a:ln/>
+        </p:spPr>
+        <p:txBody>
+          <a:bodyPr wrap="none" lIns="0" tIns="0" rIns="0" bIns="0" rtlCol="0" anchor="t"/>
+          <a:lstStyle/>
           <a:p>
             <a:pPr algn="l" indent="0" marL="0">
               <a:lnSpc>
@@ -17903,7 +18208,19 @@
                 <a:ea typeface="Pretendard ExtraBold" pitchFamily="34" charset="-127"/>
                 <a:cs typeface="Pretendard ExtraBold" pitchFamily="34" charset="-120"/>
               </a:rPr>
-              <a:t>학습·인식 전략 제안</a:t>
+              <a:t>CAD 정보 없이 평면도·입면도 간</a:t>
+            </a:r>
+            <a:br/>
+            <a:r>
+              <a:rPr lang="ko-KR" altLang="en-US" sz="1300" spc="-52" kern="0" dirty="0">
+                <a:solidFill>
+                  <a:srgbClr val="102A4C"/>
+                </a:solidFill>
+                <a:latin typeface="Pretendard ExtraBold" pitchFamily="34" charset="0"/>
+                <a:ea typeface="Pretendard ExtraBold" pitchFamily="34" charset="-127"/>
+                <a:cs typeface="Pretendard ExtraBold" pitchFamily="34" charset="-120"/>
+              </a:rPr>
+              <a:t>객체 대응 관계 정의</a:t>
             </a:r>
             <a:endParaRPr lang="en-US" sz="1300" dirty="0"/>
           </a:p>
@@ -17911,14 +18228,14 @@
       </p:sp>
       <p:sp>
         <p:nvSpPr>
-          <p:cNvPr id="94" name="도면 객체 인식 mAP@0.5"/>
+          <p:cNvPr id="106" name="대응 객체 매칭 F1-score"/>
           <p:cNvSpPr txBox="1"/>
           <p:nvPr/>
         </p:nvSpPr>
         <p:spPr>
           <a:xfrm>
-            <a:off x="4381500" y="1813123"/>
-            <a:ext cx="1311283" cy="146050"/>
+            <a:off x="4381500" y="3337123"/>
+            <a:ext cx="1241659" cy="146050"/>
           </a:xfrm>
           <a:prstGeom prst="rect">
             <a:avLst/>
@@ -17942,7 +18259,7 @@
                 <a:ea typeface="Pretendard ExtraBold" pitchFamily="34" charset="-127"/>
                 <a:cs typeface="Pretendard ExtraBold" pitchFamily="34" charset="-120"/>
               </a:rPr>
-              <a:t>도면 객체 인식 mAP@0.5</a:t>
+              <a:t>대응 객체 매칭 F1-score</a:t>
             </a:r>
             <a:endParaRPr lang="en-US" sz="950" dirty="0"/>
           </a:p>
@@ -17950,14 +18267,14 @@
       </p:sp>
       <p:sp>
         <p:nvSpPr>
-          <p:cNvPr id="95" name="·  학습 이미지 평면도 72,792장 · 입면도 16,992장"/>
+          <p:cNvPr id="107" name="·  8개 동 BIM, 개구부 3,458개"/>
           <p:cNvSpPr txBox="1"/>
           <p:nvPr/>
         </p:nvSpPr>
         <p:spPr>
           <a:xfrm>
-            <a:off x="5669359" y="1813123"/>
-            <a:ext cx="2480163" cy="146050"/>
+            <a:off x="5603677" y="3337123"/>
+            <a:ext cx="1515737" cy="146050"/>
           </a:xfrm>
           <a:prstGeom prst="rect">
             <a:avLst/>
@@ -17981,7 +18298,7 @@
                 <a:ea typeface="Pretendard SemiBold" pitchFamily="34" charset="-127"/>
                 <a:cs typeface="Pretendard SemiBold" pitchFamily="34" charset="-120"/>
               </a:rPr>
-              <a:t>·  학습 이미지 평면도 72,792장 · 입면도 16,992장</a:t>
+              <a:t>·  8개 동 BIM, 개구부 3,458개</a:t>
             </a:r>
             <a:endParaRPr lang="en-US" sz="950" dirty="0"/>
           </a:p>
@@ -17989,14 +18306,14 @@
       </p:sp>
       <p:sp>
         <p:nvSpPr>
-          <p:cNvPr id="96" name="평면도"/>
+          <p:cNvPr id="108" name="창문"/>
           <p:cNvSpPr txBox="1"/>
           <p:nvPr/>
         </p:nvSpPr>
         <p:spPr>
           <a:xfrm>
-            <a:off x="4381500" y="2092523"/>
-            <a:ext cx="359073" cy="146050"/>
+            <a:off x="4381500" y="3616523"/>
+            <a:ext cx="256381" cy="146050"/>
           </a:xfrm>
           <a:prstGeom prst="rect">
             <a:avLst/>
@@ -18020,7 +18337,7 @@
                 <a:ea typeface="Pretendard" pitchFamily="34" charset="-127"/>
                 <a:cs typeface="Pretendard" pitchFamily="34" charset="-120"/>
               </a:rPr>
-              <a:t>평면도</a:t>
+              <a:t>창문</a:t>
             </a:r>
             <a:endParaRPr lang="en-US" sz="950" dirty="0"/>
           </a:p>
@@ -18028,14 +18345,14 @@
       </p:sp>
       <p:sp>
         <p:nvSpPr>
-          <p:cNvPr id="97" name="Baseline 0.507"/>
+          <p:cNvPr id="109" name="3,410개"/>
           <p:cNvSpPr txBox="1"/>
           <p:nvPr/>
         </p:nvSpPr>
         <p:spPr>
           <a:xfrm>
-            <a:off x="5484416" y="2111573"/>
-            <a:ext cx="738584" cy="120650"/>
+            <a:off x="5801916" y="3635573"/>
+            <a:ext cx="421084" cy="120650"/>
           </a:xfrm>
           <a:prstGeom prst="rect">
             <a:avLst/>
@@ -18051,6 +18368,17 @@
               <a:buNone/>
             </a:pPr>
             <a:r>
+              <a:rPr lang="ko-KR" altLang="en-US" sz="800" b="1" spc="19" kern="0" dirty="0">
+                <a:solidFill>
+                  <a:srgbClr val="3F4654"/>
+                </a:solidFill>
+                <a:latin typeface="Pretendard" pitchFamily="34" charset="0"/>
+                <a:ea typeface="Pretendard" pitchFamily="34" charset="-127"/>
+                <a:cs typeface="Pretendard" pitchFamily="34" charset="-120"/>
+              </a:rPr>
+              <a:t>3,410</a:t>
+            </a:r>
+            <a:r>
               <a:rPr lang="ko-KR" altLang="en-US" sz="800" spc="-16" kern="0" dirty="0">
                 <a:solidFill>
                   <a:srgbClr val="737C8B"/>
@@ -18059,13 +18387,77 @@
                 <a:ea typeface="Pretendard SemiBold" pitchFamily="34" charset="-127"/>
                 <a:cs typeface="Pretendard SemiBold" pitchFamily="34" charset="-120"/>
               </a:rPr>
-              <a:t>Baseline </a:t>
-            </a:r>
+              <a:t>개</a:t>
+            </a:r>
+            <a:endParaRPr lang="en-US" sz="800" dirty="0"/>
+          </a:p>
+        </p:txBody>
+      </p:sp>
+      <p:sp>
+        <p:nvSpPr>
+          <p:cNvPr id="110" name="0.93"/>
+          <p:cNvSpPr txBox="1"/>
+          <p:nvPr/>
+        </p:nvSpPr>
+        <p:spPr>
+          <a:xfrm>
+            <a:off x="4381500" y="3762573"/>
+            <a:ext cx="864592" cy="450850"/>
+          </a:xfrm>
+          <a:prstGeom prst="rect">
+            <a:avLst/>
+          </a:prstGeom>
+          <a:noFill/>
+          <a:ln/>
+        </p:spPr>
+        <p:txBody>
+          <a:bodyPr wrap="none" lIns="0" tIns="0" rIns="0" bIns="0" rtlCol="0" anchor="ctr"/>
+          <a:lstStyle/>
+          <a:p>
             <a:pPr algn="l" indent="0" marL="0">
               <a:buNone/>
             </a:pPr>
             <a:r>
-              <a:rPr lang="ko-KR" altLang="en-US" sz="800" b="1" spc="-16" kern="0" dirty="0">
+              <a:rPr lang="ko-KR" altLang="en-US" sz="3000" spc="-70" kern="0" dirty="0">
+                <a:solidFill>
+                  <a:srgbClr val="102A4C"/>
+                </a:solidFill>
+                <a:latin typeface="Pretendard ExtraBold" pitchFamily="34" charset="0"/>
+                <a:ea typeface="Pretendard ExtraBold" pitchFamily="34" charset="-127"/>
+                <a:cs typeface="Pretendard ExtraBold" pitchFamily="34" charset="-120"/>
+              </a:rPr>
+              <a:t>0.93</a:t>
+            </a:r>
+            <a:endParaRPr lang="en-US" sz="3000" dirty="0"/>
+          </a:p>
+        </p:txBody>
+      </p:sp>
+      <p:sp>
+        <p:nvSpPr>
+          <p:cNvPr id="111" name="문"/>
+          <p:cNvSpPr txBox="1"/>
+          <p:nvPr/>
+        </p:nvSpPr>
+        <p:spPr>
+          <a:xfrm>
+            <a:off x="6375400" y="3616523"/>
+            <a:ext cx="153591" cy="146050"/>
+          </a:xfrm>
+          <a:prstGeom prst="rect">
+            <a:avLst/>
+          </a:prstGeom>
+          <a:noFill/>
+          <a:ln/>
+        </p:spPr>
+        <p:txBody>
+          <a:bodyPr wrap="none" lIns="0" tIns="0" rIns="0" bIns="0" rtlCol="0" anchor="ctr"/>
+          <a:lstStyle/>
+          <a:p>
+            <a:pPr algn="l" indent="0" marL="0">
+              <a:buNone/>
+            </a:pPr>
+            <a:r>
+              <a:rPr lang="ko-KR" altLang="en-US" sz="950" b="1" spc="-12" kern="0" dirty="0">
                 <a:solidFill>
                   <a:srgbClr val="3F4654"/>
                 </a:solidFill>
@@ -18073,22 +18465,22 @@
                 <a:ea typeface="Pretendard" pitchFamily="34" charset="-127"/>
                 <a:cs typeface="Pretendard" pitchFamily="34" charset="-120"/>
               </a:rPr>
-              <a:t>0.507</a:t>
-            </a:r>
-            <a:endParaRPr lang="en-US" sz="800" dirty="0"/>
-          </a:p>
-        </p:txBody>
-      </p:sp>
-      <p:sp>
-        <p:nvSpPr>
-          <p:cNvPr id="98" name="0.934"/>
+              <a:t>문</a:t>
+            </a:r>
+            <a:endParaRPr lang="en-US" sz="950" dirty="0"/>
+          </a:p>
+        </p:txBody>
+      </p:sp>
+      <p:sp>
+        <p:nvSpPr>
+          <p:cNvPr id="112" name="48개"/>
           <p:cNvSpPr txBox="1"/>
           <p:nvPr/>
         </p:nvSpPr>
         <p:spPr>
           <a:xfrm>
-            <a:off x="4381500" y="2238573"/>
-            <a:ext cx="1116294" cy="450850"/>
+            <a:off x="7951291" y="3635573"/>
+            <a:ext cx="265609" cy="120650"/>
           </a:xfrm>
           <a:prstGeom prst="rect">
             <a:avLst/>
@@ -18104,7 +18496,57 @@
               <a:buNone/>
             </a:pPr>
             <a:r>
-              <a:rPr lang="ko-KR" altLang="en-US" sz="3000" spc="-120" kern="0" dirty="0">
+              <a:rPr lang="ko-KR" altLang="en-US" sz="800" b="1" spc="-13" kern="0" dirty="0">
+                <a:solidFill>
+                  <a:srgbClr val="3F4654"/>
+                </a:solidFill>
+                <a:latin typeface="Pretendard" pitchFamily="34" charset="0"/>
+                <a:ea typeface="Pretendard" pitchFamily="34" charset="-127"/>
+                <a:cs typeface="Pretendard" pitchFamily="34" charset="-120"/>
+              </a:rPr>
+              <a:t>48</a:t>
+            </a:r>
+            <a:r>
+              <a:rPr lang="ko-KR" altLang="en-US" sz="800" spc="-16" kern="0" dirty="0">
+                <a:solidFill>
+                  <a:srgbClr val="737C8B"/>
+                </a:solidFill>
+                <a:latin typeface="Pretendard SemiBold" pitchFamily="34" charset="0"/>
+                <a:ea typeface="Pretendard SemiBold" pitchFamily="34" charset="-127"/>
+                <a:cs typeface="Pretendard SemiBold" pitchFamily="34" charset="-120"/>
+              </a:rPr>
+              <a:t>개</a:t>
+            </a:r>
+            <a:endParaRPr lang="en-US" sz="800" dirty="0"/>
+          </a:p>
+        </p:txBody>
+      </p:sp>
+      <p:sp>
+        <p:nvSpPr>
+          <p:cNvPr id="113" name="0.95"/>
+          <p:cNvSpPr txBox="1"/>
+          <p:nvPr/>
+        </p:nvSpPr>
+        <p:spPr>
+          <a:xfrm>
+            <a:off x="6375400" y="3762573"/>
+            <a:ext cx="864592" cy="450850"/>
+          </a:xfrm>
+          <a:prstGeom prst="rect">
+            <a:avLst/>
+          </a:prstGeom>
+          <a:noFill/>
+          <a:ln/>
+        </p:spPr>
+        <p:txBody>
+          <a:bodyPr wrap="none" lIns="0" tIns="0" rIns="0" bIns="0" rtlCol="0" anchor="ctr"/>
+          <a:lstStyle/>
+          <a:p>
+            <a:pPr algn="l" indent="0" marL="0">
+              <a:buNone/>
+            </a:pPr>
+            <a:r>
+              <a:rPr lang="ko-KR" altLang="en-US" sz="3000" spc="-63" kern="0" dirty="0">
                 <a:solidFill>
                   <a:srgbClr val="102A4C"/>
                 </a:solidFill>
@@ -18112,7 +18554,7 @@
                 <a:ea typeface="Pretendard ExtraBold" pitchFamily="34" charset="-127"/>
                 <a:cs typeface="Pretendard ExtraBold" pitchFamily="34" charset="-120"/>
               </a:rPr>
-              <a:t>0.934</a:t>
+              <a:t>0.95</a:t>
             </a:r>
             <a:endParaRPr lang="en-US" sz="3000" dirty="0"/>
           </a:p>
@@ -18120,14 +18562,14 @@
       </p:sp>
       <p:sp>
         <p:nvSpPr>
-          <p:cNvPr id="99" name="+42.7%p"/>
+          <p:cNvPr id="114" name="기여 3"/>
           <p:cNvSpPr txBox="1"/>
           <p:nvPr/>
         </p:nvSpPr>
         <p:spPr>
           <a:xfrm>
-            <a:off x="5561608" y="2397026"/>
-            <a:ext cx="543520" cy="133350"/>
+            <a:off x="1473200" y="5023842"/>
+            <a:ext cx="331093" cy="120650"/>
           </a:xfrm>
           <a:prstGeom prst="rect">
             <a:avLst/>
@@ -18143,7 +18585,7 @@
               <a:buNone/>
             </a:pPr>
             <a:r>
-              <a:rPr lang="ko-KR" altLang="en-US" sz="900" spc="-12" kern="0" dirty="0">
+              <a:rPr lang="ko-KR" altLang="en-US" sz="800" spc="32" kern="0" dirty="0">
                 <a:solidFill>
                   <a:srgbClr val="EA002C"/>
                 </a:solidFill>
@@ -18151,231 +18593,22 @@
                 <a:ea typeface="Pretendard ExtraBold" pitchFamily="34" charset="-127"/>
                 <a:cs typeface="Pretendard ExtraBold" pitchFamily="34" charset="-120"/>
               </a:rPr>
-              <a:t>+42.7%p</a:t>
-            </a:r>
-            <a:endParaRPr lang="en-US" sz="900" dirty="0"/>
-          </a:p>
-        </p:txBody>
-      </p:sp>
-      <p:sp>
-        <p:nvSpPr>
-          <p:cNvPr id="100" name="입면도"/>
+              <a:t>기여 3</a:t>
+            </a:r>
+            <a:endParaRPr lang="en-US" sz="800" dirty="0"/>
+          </a:p>
+        </p:txBody>
+      </p:sp>
+      <p:sp>
+        <p:nvSpPr>
+          <p:cNvPr id="115" name="LMM 기반 축척 인식으로 불완전한도면에서도 안정적인 치수 보정"/>
           <p:cNvSpPr txBox="1"/>
           <p:nvPr/>
         </p:nvSpPr>
         <p:spPr>
           <a:xfrm>
-            <a:off x="6375400" y="2092523"/>
-            <a:ext cx="359073" cy="146050"/>
-          </a:xfrm>
-          <a:prstGeom prst="rect">
-            <a:avLst/>
-          </a:prstGeom>
-          <a:noFill/>
-          <a:ln/>
-        </p:spPr>
-        <p:txBody>
-          <a:bodyPr wrap="none" lIns="0" tIns="0" rIns="0" bIns="0" rtlCol="0" anchor="ctr"/>
-          <a:lstStyle/>
-          <a:p>
-            <a:pPr algn="l" indent="0" marL="0">
-              <a:buNone/>
-            </a:pPr>
-            <a:r>
-              <a:rPr lang="ko-KR" altLang="en-US" sz="950" b="1" spc="-12" kern="0" dirty="0">
-                <a:solidFill>
-                  <a:srgbClr val="3F4654"/>
-                </a:solidFill>
-                <a:latin typeface="Pretendard" pitchFamily="34" charset="0"/>
-                <a:ea typeface="Pretendard" pitchFamily="34" charset="-127"/>
-                <a:cs typeface="Pretendard" pitchFamily="34" charset="-120"/>
-              </a:rPr>
-              <a:t>입면도</a:t>
-            </a:r>
-            <a:endParaRPr lang="en-US" sz="950" dirty="0"/>
-          </a:p>
-        </p:txBody>
-      </p:sp>
-      <p:sp>
-        <p:nvSpPr>
-          <p:cNvPr id="101" name="Baseline 0.355"/>
-          <p:cNvSpPr txBox="1"/>
-          <p:nvPr/>
-        </p:nvSpPr>
-        <p:spPr>
-          <a:xfrm>
-            <a:off x="7478316" y="2111573"/>
-            <a:ext cx="738584" cy="120650"/>
-          </a:xfrm>
-          <a:prstGeom prst="rect">
-            <a:avLst/>
-          </a:prstGeom>
-          <a:noFill/>
-          <a:ln/>
-        </p:spPr>
-        <p:txBody>
-          <a:bodyPr wrap="none" lIns="0" tIns="0" rIns="0" bIns="0" rtlCol="0" anchor="ctr"/>
-          <a:lstStyle/>
-          <a:p>
-            <a:pPr algn="l" indent="0" marL="0">
-              <a:buNone/>
-            </a:pPr>
-            <a:r>
-              <a:rPr lang="ko-KR" altLang="en-US" sz="800" spc="-16" kern="0" dirty="0">
-                <a:solidFill>
-                  <a:srgbClr val="737C8B"/>
-                </a:solidFill>
-                <a:latin typeface="Pretendard SemiBold" pitchFamily="34" charset="0"/>
-                <a:ea typeface="Pretendard SemiBold" pitchFamily="34" charset="-127"/>
-                <a:cs typeface="Pretendard SemiBold" pitchFamily="34" charset="-120"/>
-              </a:rPr>
-              <a:t>Baseline </a:t>
-            </a:r>
-            <a:pPr algn="l" indent="0" marL="0">
-              <a:buNone/>
-            </a:pPr>
-            <a:r>
-              <a:rPr lang="ko-KR" altLang="en-US" sz="800" b="1" spc="-16" kern="0" dirty="0">
-                <a:solidFill>
-                  <a:srgbClr val="3F4654"/>
-                </a:solidFill>
-                <a:latin typeface="Pretendard" pitchFamily="34" charset="0"/>
-                <a:ea typeface="Pretendard" pitchFamily="34" charset="-127"/>
-                <a:cs typeface="Pretendard" pitchFamily="34" charset="-120"/>
-              </a:rPr>
-              <a:t>0.355</a:t>
-            </a:r>
-            <a:endParaRPr lang="en-US" sz="800" dirty="0"/>
-          </a:p>
-        </p:txBody>
-      </p:sp>
-      <p:sp>
-        <p:nvSpPr>
-          <p:cNvPr id="102" name="0.838"/>
-          <p:cNvSpPr txBox="1"/>
-          <p:nvPr/>
-        </p:nvSpPr>
-        <p:spPr>
-          <a:xfrm>
-            <a:off x="6375400" y="2238573"/>
-            <a:ext cx="1116294" cy="450850"/>
-          </a:xfrm>
-          <a:prstGeom prst="rect">
-            <a:avLst/>
-          </a:prstGeom>
-          <a:noFill/>
-          <a:ln/>
-        </p:spPr>
-        <p:txBody>
-          <a:bodyPr wrap="none" lIns="0" tIns="0" rIns="0" bIns="0" rtlCol="0" anchor="ctr"/>
-          <a:lstStyle/>
-          <a:p>
-            <a:pPr algn="l" indent="0" marL="0">
-              <a:buNone/>
-            </a:pPr>
-            <a:r>
-              <a:rPr lang="ko-KR" altLang="en-US" sz="3000" spc="-120" kern="0" dirty="0">
-                <a:solidFill>
-                  <a:srgbClr val="102A4C"/>
-                </a:solidFill>
-                <a:latin typeface="Pretendard ExtraBold" pitchFamily="34" charset="0"/>
-                <a:ea typeface="Pretendard ExtraBold" pitchFamily="34" charset="-127"/>
-                <a:cs typeface="Pretendard ExtraBold" pitchFamily="34" charset="-120"/>
-              </a:rPr>
-              <a:t>0.838</a:t>
-            </a:r>
-            <a:endParaRPr lang="en-US" sz="3000" dirty="0"/>
-          </a:p>
-        </p:txBody>
-      </p:sp>
-      <p:sp>
-        <p:nvSpPr>
-          <p:cNvPr id="103" name="+48.3%p"/>
-          <p:cNvSpPr txBox="1"/>
-          <p:nvPr/>
-        </p:nvSpPr>
-        <p:spPr>
-          <a:xfrm>
-            <a:off x="7555508" y="2397026"/>
-            <a:ext cx="553641" cy="133350"/>
-          </a:xfrm>
-          <a:prstGeom prst="rect">
-            <a:avLst/>
-          </a:prstGeom>
-          <a:noFill/>
-          <a:ln/>
-        </p:spPr>
-        <p:txBody>
-          <a:bodyPr wrap="none" lIns="0" tIns="0" rIns="0" bIns="0" rtlCol="0" anchor="ctr"/>
-          <a:lstStyle/>
-          <a:p>
-            <a:pPr algn="l" indent="0" marL="0">
-              <a:buNone/>
-            </a:pPr>
-            <a:r>
-              <a:rPr lang="ko-KR" altLang="en-US" sz="900" spc="-12" kern="0" dirty="0">
-                <a:solidFill>
-                  <a:srgbClr val="EA002C"/>
-                </a:solidFill>
-                <a:latin typeface="Pretendard ExtraBold" pitchFamily="34" charset="0"/>
-                <a:ea typeface="Pretendard ExtraBold" pitchFamily="34" charset="-127"/>
-                <a:cs typeface="Pretendard ExtraBold" pitchFamily="34" charset="-120"/>
-              </a:rPr>
-              <a:t>+48.3%p</a:t>
-            </a:r>
-            <a:endParaRPr lang="en-US" sz="900" dirty="0"/>
-          </a:p>
-        </p:txBody>
-      </p:sp>
-      <p:sp>
-        <p:nvSpPr>
-          <p:cNvPr id="104" name="기여 2"/>
-          <p:cNvSpPr txBox="1"/>
-          <p:nvPr/>
-        </p:nvSpPr>
-        <p:spPr>
-          <a:xfrm>
-            <a:off x="1473200" y="3499842"/>
-            <a:ext cx="328216" cy="120650"/>
-          </a:xfrm>
-          <a:prstGeom prst="rect">
-            <a:avLst/>
-          </a:prstGeom>
-          <a:noFill/>
-          <a:ln/>
-        </p:spPr>
-        <p:txBody>
-          <a:bodyPr wrap="none" lIns="0" tIns="0" rIns="0" bIns="0" rtlCol="0" anchor="ctr"/>
-          <a:lstStyle/>
-          <a:p>
-            <a:pPr algn="l" indent="0" marL="0">
-              <a:buNone/>
-            </a:pPr>
-            <a:r>
-              <a:rPr lang="ko-KR" altLang="en-US" sz="800" spc="32" kern="0" dirty="0">
-                <a:solidFill>
-                  <a:srgbClr val="EA002C"/>
-                </a:solidFill>
-                <a:latin typeface="Pretendard ExtraBold" pitchFamily="34" charset="0"/>
-                <a:ea typeface="Pretendard ExtraBold" pitchFamily="34" charset="-127"/>
-                <a:cs typeface="Pretendard ExtraBold" pitchFamily="34" charset="-120"/>
-              </a:rPr>
-              <a:t>기여 2</a:t>
-            </a:r>
-            <a:endParaRPr lang="en-US" sz="800" dirty="0"/>
-          </a:p>
-        </p:txBody>
-      </p:sp>
-      <p:sp>
-        <p:nvSpPr>
-          <p:cNvPr id="105" name="CAD 정보 없이 평면도·입면도 간객체 대응 관계 정의"/>
-          <p:cNvSpPr txBox="1"/>
-          <p:nvPr/>
-        </p:nvSpPr>
-        <p:spPr>
-          <a:xfrm>
-            <a:off x="1473200" y="3697486"/>
-            <a:ext cx="2117425" cy="455612"/>
+            <a:off x="1473200" y="5221486"/>
+            <a:ext cx="2247207" cy="455612"/>
           </a:xfrm>
           <a:prstGeom prst="rect">
             <a:avLst/>
@@ -18402,17 +18635,9 @@
                 <a:ea typeface="Pretendard ExtraBold" pitchFamily="34" charset="-127"/>
                 <a:cs typeface="Pretendard ExtraBold" pitchFamily="34" charset="-120"/>
               </a:rPr>
-              <a:t>CAD 정보 없이 평면도·입면도 간</a:t>
-            </a:r>
-            <a:endParaRPr lang="en-US" sz="1300" dirty="0"/>
-          </a:p>
-          <a:p>
-            <a:pPr algn="l" indent="0" marL="0">
-              <a:lnSpc>
-                <a:spcPts val="1794"/>
-              </a:lnSpc>
-              <a:buNone/>
-            </a:pPr>
+              <a:t>LMM 기반 축척 인식으로 불완전한</a:t>
+            </a:r>
+            <a:br/>
             <a:r>
               <a:rPr lang="ko-KR" altLang="en-US" sz="1300" spc="-52" kern="0" dirty="0">
                 <a:solidFill>
@@ -18422,7 +18647,7 @@
                 <a:ea typeface="Pretendard ExtraBold" pitchFamily="34" charset="-127"/>
                 <a:cs typeface="Pretendard ExtraBold" pitchFamily="34" charset="-120"/>
               </a:rPr>
-              <a:t>객체 대응 관계 정의</a:t>
+              <a:t>도면에서도 안정적인 치수 보정</a:t>
             </a:r>
             <a:endParaRPr lang="en-US" sz="1300" dirty="0"/>
           </a:p>
@@ -18430,14 +18655,14 @@
       </p:sp>
       <p:sp>
         <p:nvSpPr>
-          <p:cNvPr id="106" name="대응 객체 매칭 F1-score"/>
+          <p:cNvPr id="116" name="축척 인식 정확도"/>
           <p:cNvSpPr txBox="1"/>
           <p:nvPr/>
         </p:nvSpPr>
         <p:spPr>
           <a:xfrm>
-            <a:off x="4381500" y="3337123"/>
-            <a:ext cx="1241659" cy="146050"/>
+            <a:off x="4381500" y="4861123"/>
+            <a:ext cx="812998" cy="146050"/>
           </a:xfrm>
           <a:prstGeom prst="rect">
             <a:avLst/>
@@ -18461,7 +18686,7 @@
                 <a:ea typeface="Pretendard ExtraBold" pitchFamily="34" charset="-127"/>
                 <a:cs typeface="Pretendard ExtraBold" pitchFamily="34" charset="-120"/>
               </a:rPr>
-              <a:t>대응 객체 매칭 F1-score</a:t>
+              <a:t>축척 인식 정확도</a:t>
             </a:r>
             <a:endParaRPr lang="en-US" sz="950" dirty="0"/>
           </a:p>
@@ -18469,14 +18694,14 @@
       </p:sp>
       <p:sp>
         <p:nvSpPr>
-          <p:cNvPr id="107" name="·  8개 동 BIM, 개구부 3,458개"/>
+          <p:cNvPr id="117" name="·  Tesseract OCR 대비"/>
           <p:cNvSpPr txBox="1"/>
           <p:nvPr/>
         </p:nvSpPr>
         <p:spPr>
           <a:xfrm>
-            <a:off x="5603677" y="3337123"/>
-            <a:ext cx="1515737" cy="146050"/>
+            <a:off x="5194498" y="4861123"/>
+            <a:ext cx="1179292" cy="146050"/>
           </a:xfrm>
           <a:prstGeom prst="rect">
             <a:avLst/>
@@ -18500,7 +18725,7 @@
                 <a:ea typeface="Pretendard SemiBold" pitchFamily="34" charset="-127"/>
                 <a:cs typeface="Pretendard SemiBold" pitchFamily="34" charset="-120"/>
               </a:rPr>
-              <a:t>·  8개 동 BIM, 개구부 3,458개</a:t>
+              <a:t>·  Tesseract OCR 대비</a:t>
             </a:r>
             <a:endParaRPr lang="en-US" sz="950" dirty="0"/>
           </a:p>
@@ -18508,14 +18733,14 @@
       </p:sp>
       <p:sp>
         <p:nvSpPr>
-          <p:cNvPr id="108" name="창문"/>
+          <p:cNvPr id="118" name="LMM(GPT-4o)"/>
           <p:cNvSpPr txBox="1"/>
           <p:nvPr/>
         </p:nvSpPr>
         <p:spPr>
           <a:xfrm>
-            <a:off x="4381500" y="3616523"/>
-            <a:ext cx="256381" cy="146050"/>
+            <a:off x="4381500" y="5140523"/>
+            <a:ext cx="845245" cy="146050"/>
           </a:xfrm>
           <a:prstGeom prst="rect">
             <a:avLst/>
@@ -18539,7 +18764,7 @@
                 <a:ea typeface="Pretendard" pitchFamily="34" charset="-127"/>
                 <a:cs typeface="Pretendard" pitchFamily="34" charset="-120"/>
               </a:rPr>
-              <a:t>창문</a:t>
+              <a:t>LMM(GPT-4o)</a:t>
             </a:r>
             <a:endParaRPr lang="en-US" sz="950" dirty="0"/>
           </a:p>
@@ -18547,14 +18772,14 @@
       </p:sp>
       <p:sp>
         <p:nvSpPr>
-          <p:cNvPr id="109" name="3,410개"/>
+          <p:cNvPr id="119" name="0.707"/>
           <p:cNvSpPr txBox="1"/>
           <p:nvPr/>
         </p:nvSpPr>
         <p:spPr>
           <a:xfrm>
-            <a:off x="5801916" y="3635573"/>
-            <a:ext cx="421084" cy="120650"/>
+            <a:off x="4381500" y="5286573"/>
+            <a:ext cx="1116294" cy="450850"/>
           </a:xfrm>
           <a:prstGeom prst="rect">
             <a:avLst/>
@@ -18570,21 +18795,174 @@
               <a:buNone/>
             </a:pPr>
             <a:r>
-              <a:rPr lang="ko-KR" altLang="en-US" sz="800" b="1" spc="-16" kern="0" dirty="0">
-                <a:solidFill>
-                  <a:srgbClr val="3F4654"/>
+              <a:rPr lang="ko-KR" altLang="en-US" sz="3000" spc="21" kern="0" dirty="0">
+                <a:solidFill>
+                  <a:srgbClr val="102A4C"/>
+                </a:solidFill>
+                <a:latin typeface="Pretendard ExtraBold" pitchFamily="34" charset="0"/>
+                <a:ea typeface="Pretendard ExtraBold" pitchFamily="34" charset="-127"/>
+                <a:cs typeface="Pretendard ExtraBold" pitchFamily="34" charset="-120"/>
+              </a:rPr>
+              <a:t>0.707</a:t>
+            </a:r>
+            <a:endParaRPr lang="en-US" sz="3000" dirty="0"/>
+          </a:p>
+        </p:txBody>
+      </p:sp>
+      <p:sp>
+        <p:nvSpPr>
+          <p:cNvPr id="120" name="+33.8%p"/>
+          <p:cNvSpPr txBox="1"/>
+          <p:nvPr/>
+        </p:nvSpPr>
+        <p:spPr>
+          <a:xfrm>
+            <a:off x="5561608" y="5445026"/>
+            <a:ext cx="549771" cy="133350"/>
+          </a:xfrm>
+          <a:prstGeom prst="rect">
+            <a:avLst/>
+          </a:prstGeom>
+          <a:noFill/>
+          <a:ln/>
+        </p:spPr>
+        <p:txBody>
+          <a:bodyPr wrap="none" lIns="0" tIns="0" rIns="0" bIns="0" rtlCol="0" anchor="ctr"/>
+          <a:lstStyle/>
+          <a:p>
+            <a:pPr algn="l" indent="0" marL="0">
+              <a:buNone/>
+            </a:pPr>
+            <a:r>
+              <a:rPr lang="ko-KR" altLang="en-US" sz="900" spc="-12" kern="0" dirty="0">
+                <a:solidFill>
+                  <a:srgbClr val="EA002C"/>
+                </a:solidFill>
+                <a:latin typeface="Pretendard ExtraBold" pitchFamily="34" charset="0"/>
+                <a:ea typeface="Pretendard ExtraBold" pitchFamily="34" charset="-127"/>
+                <a:cs typeface="Pretendard ExtraBold" pitchFamily="34" charset="-120"/>
+              </a:rPr>
+              <a:t>+33.8%p</a:t>
+            </a:r>
+            <a:endParaRPr lang="en-US" sz="900" dirty="0"/>
+          </a:p>
+        </p:txBody>
+      </p:sp>
+      <p:sp>
+        <p:nvSpPr>
+          <p:cNvPr id="121" name="Tesseract OCR"/>
+          <p:cNvSpPr txBox="1"/>
+          <p:nvPr/>
+        </p:nvSpPr>
+        <p:spPr>
+          <a:xfrm>
+            <a:off x="6375400" y="5140523"/>
+            <a:ext cx="875209" cy="146050"/>
+          </a:xfrm>
+          <a:prstGeom prst="rect">
+            <a:avLst/>
+          </a:prstGeom>
+          <a:noFill/>
+          <a:ln/>
+        </p:spPr>
+        <p:txBody>
+          <a:bodyPr wrap="none" lIns="0" tIns="0" rIns="0" bIns="0" rtlCol="0" anchor="ctr"/>
+          <a:lstStyle/>
+          <a:p>
+            <a:pPr algn="l" indent="0" marL="0">
+              <a:buNone/>
+            </a:pPr>
+            <a:r>
+              <a:rPr lang="ko-KR" altLang="en-US" sz="950" b="1" spc="-12" kern="0" dirty="0">
+                <a:solidFill>
+                  <a:srgbClr val="737C8B"/>
                 </a:solidFill>
                 <a:latin typeface="Pretendard" pitchFamily="34" charset="0"/>
                 <a:ea typeface="Pretendard" pitchFamily="34" charset="-127"/>
                 <a:cs typeface="Pretendard" pitchFamily="34" charset="-120"/>
               </a:rPr>
-              <a:t>3,410</a:t>
-            </a:r>
+              <a:t>Tesseract OCR</a:t>
+            </a:r>
+            <a:endParaRPr lang="en-US" sz="950" dirty="0"/>
+          </a:p>
+        </p:txBody>
+      </p:sp>
+      <p:sp>
+        <p:nvSpPr>
+          <p:cNvPr id="122" name="0.369"/>
+          <p:cNvSpPr txBox="1"/>
+          <p:nvPr/>
+        </p:nvSpPr>
+        <p:spPr>
+          <a:xfrm>
+            <a:off x="6375400" y="5356423"/>
+            <a:ext cx="893266" cy="368300"/>
+          </a:xfrm>
+          <a:prstGeom prst="rect">
+            <a:avLst/>
+          </a:prstGeom>
+          <a:noFill/>
+          <a:ln/>
+        </p:spPr>
+        <p:txBody>
+          <a:bodyPr wrap="none" lIns="0" tIns="0" rIns="0" bIns="0" rtlCol="0" anchor="ctr"/>
+          <a:lstStyle/>
+          <a:p>
             <a:pPr algn="l" indent="0" marL="0">
               <a:buNone/>
             </a:pPr>
             <a:r>
-              <a:rPr lang="ko-KR" altLang="en-US" sz="800" spc="-16" kern="0" dirty="0">
+              <a:rPr lang="ko-KR" altLang="en-US" sz="2400" spc="-54" kern="0" dirty="0">
+                <a:solidFill>
+                  <a:srgbClr val="737C8B"/>
+                </a:solidFill>
+                <a:latin typeface="Pretendard ExtraBold" pitchFamily="34" charset="0"/>
+                <a:ea typeface="Pretendard ExtraBold" pitchFamily="34" charset="-127"/>
+                <a:cs typeface="Pretendard ExtraBold" pitchFamily="34" charset="-120"/>
+              </a:rPr>
+              <a:t>0.369</a:t>
+            </a:r>
+            <a:endParaRPr lang="en-US" sz="2400" dirty="0"/>
+          </a:p>
+        </p:txBody>
+      </p:sp>
+      <p:sp>
+        <p:nvSpPr>
+          <p:cNvPr id="123" name="mAP@0.5 객체를 맞게 찾아낸 정도  ·  F1-score 정밀도·재"/>
+          <p:cNvSpPr txBox="1"/>
+          <p:nvPr/>
+        </p:nvSpPr>
+        <p:spPr>
+          <a:xfrm>
+            <a:off x="609600" y="6197798"/>
+            <a:ext cx="6665793" cy="120650"/>
+          </a:xfrm>
+          <a:prstGeom prst="rect">
+            <a:avLst/>
+          </a:prstGeom>
+          <a:noFill/>
+          <a:ln/>
+        </p:spPr>
+        <p:txBody>
+          <a:bodyPr wrap="none" lIns="0" tIns="0" rIns="0" bIns="0" rtlCol="0" anchor="ctr"/>
+          <a:lstStyle/>
+          <a:p>
+            <a:pPr algn="l" indent="0" marL="0">
+              <a:buNone/>
+            </a:pPr>
+            <a:r>
+              <a:rPr lang="ko-KR" altLang="en-US" sz="800" b="1" spc="-12" kern="0" dirty="0">
+                <a:solidFill>
+                  <a:srgbClr val="3F4654"/>
+                </a:solidFill>
+                <a:latin typeface="Pretendard" pitchFamily="34" charset="0"/>
+                <a:ea typeface="Pretendard" pitchFamily="34" charset="-127"/>
+                <a:cs typeface="Pretendard" pitchFamily="34" charset="-120"/>
+              </a:rPr>
+              <a:t>mAP@0.5</a:t>
+            </a:r>
+            <a:r>
+              <a:rPr lang="ko-KR" altLang="en-US" sz="800" spc="-12" kern="0" dirty="0">
                 <a:solidFill>
                   <a:srgbClr val="737C8B"/>
                 </a:solidFill>
@@ -18592,7 +18970,51 @@
                 <a:ea typeface="Pretendard SemiBold" pitchFamily="34" charset="-127"/>
                 <a:cs typeface="Pretendard SemiBold" pitchFamily="34" charset="-120"/>
               </a:rPr>
-              <a:t>개</a:t>
+              <a:t> 객체를 맞게 찾아낸 정도  ·  </a:t>
+            </a:r>
+            <a:r>
+              <a:rPr lang="ko-KR" altLang="en-US" sz="800" b="1" spc="-12" kern="0" dirty="0">
+                <a:solidFill>
+                  <a:srgbClr val="3F4654"/>
+                </a:solidFill>
+                <a:latin typeface="Pretendard" pitchFamily="34" charset="0"/>
+                <a:ea typeface="Pretendard" pitchFamily="34" charset="-127"/>
+                <a:cs typeface="Pretendard" pitchFamily="34" charset="-120"/>
+              </a:rPr>
+              <a:t>F1-score</a:t>
+            </a:r>
+            <a:r>
+              <a:rPr lang="ko-KR" altLang="en-US" sz="800" spc="-12" kern="0" dirty="0">
+                <a:solidFill>
+                  <a:srgbClr val="737C8B"/>
+                </a:solidFill>
+                <a:latin typeface="Pretendard SemiBold" pitchFamily="34" charset="0"/>
+                <a:ea typeface="Pretendard SemiBold" pitchFamily="34" charset="-127"/>
+                <a:cs typeface="Pretendard SemiBold" pitchFamily="34" charset="-120"/>
+              </a:rPr>
+              <a:t> 정밀도·재현율의 조화평균 (모두 1에 가까울수록 좋음)  ·  </a:t>
+            </a:r>
+            <a:r>
+              <a:rPr lang="ko-KR" altLang="en-US" sz="800" b="1" spc="-12" kern="0" dirty="0">
+                <a:solidFill>
+                  <a:srgbClr val="3F4654"/>
+                </a:solidFill>
+                <a:latin typeface="Pretendard" pitchFamily="34" charset="0"/>
+                <a:ea typeface="Pretendard" pitchFamily="34" charset="-127"/>
+                <a:cs typeface="Pretendard" pitchFamily="34" charset="-120"/>
+              </a:rPr>
+              <a:t>LMM</a:t>
+            </a:r>
+            <a:r>
+              <a:rPr lang="ko-KR" altLang="en-US" sz="800" spc="-12" kern="0" dirty="0">
+                <a:solidFill>
+                  <a:srgbClr val="737C8B"/>
+                </a:solidFill>
+                <a:latin typeface="Pretendard SemiBold" pitchFamily="34" charset="0"/>
+                <a:ea typeface="Pretendard SemiBold" pitchFamily="34" charset="-127"/>
+                <a:cs typeface="Pretendard SemiBold" pitchFamily="34" charset="-120"/>
+              </a:rPr>
+              <a:t> 대형 멀티모달 모델  ·  학습 이미지 수는 타일 포함</a:t>
             </a:r>
             <a:endParaRPr lang="en-US" sz="800" dirty="0"/>
           </a:p>
@@ -18600,14 +19022,14 @@
       </p:sp>
       <p:sp>
         <p:nvSpPr>
-          <p:cNvPr id="110" name="0.93"/>
+          <p:cNvPr id="124" name="최종 결과"/>
           <p:cNvSpPr txBox="1"/>
           <p:nvPr/>
         </p:nvSpPr>
         <p:spPr>
           <a:xfrm>
-            <a:off x="4381500" y="3762573"/>
-            <a:ext cx="864592" cy="450850"/>
+            <a:off x="8902700" y="1282898"/>
+            <a:ext cx="588963" cy="184150"/>
           </a:xfrm>
           <a:prstGeom prst="rect">
             <a:avLst/>
@@ -18623,7 +19045,7 @@
               <a:buNone/>
             </a:pPr>
             <a:r>
-              <a:rPr lang="ko-KR" altLang="en-US" sz="3000" spc="-120" kern="0" dirty="0">
+              <a:rPr lang="ko-KR" altLang="en-US" sz="1200" spc="-36" kern="0" dirty="0">
                 <a:solidFill>
                   <a:srgbClr val="102A4C"/>
                 </a:solidFill>
@@ -18631,22 +19053,22 @@
                 <a:ea typeface="Pretendard ExtraBold" pitchFamily="34" charset="-127"/>
                 <a:cs typeface="Pretendard ExtraBold" pitchFamily="34" charset="-120"/>
               </a:rPr>
-              <a:t>0.93</a:t>
-            </a:r>
-            <a:endParaRPr lang="en-US" sz="3000" dirty="0"/>
-          </a:p>
-        </p:txBody>
-      </p:sp>
-      <p:sp>
-        <p:nvSpPr>
-          <p:cNvPr id="111" name="문"/>
+              <a:t>최종 결과</a:t>
+            </a:r>
+            <a:endParaRPr lang="en-US" sz="1200" dirty="0"/>
+          </a:p>
+        </p:txBody>
+      </p:sp>
+      <p:sp>
+        <p:nvSpPr>
+          <p:cNvPr id="125" name="최종 BIM 생성"/>
           <p:cNvSpPr txBox="1"/>
           <p:nvPr/>
         </p:nvSpPr>
         <p:spPr>
           <a:xfrm>
-            <a:off x="6375400" y="3616523"/>
-            <a:ext cx="153591" cy="146050"/>
+            <a:off x="8890000" y="1809948"/>
+            <a:ext cx="1080746" cy="228600"/>
           </a:xfrm>
           <a:prstGeom prst="rect">
             <a:avLst/>
@@ -18662,30 +19084,71 @@
               <a:buNone/>
             </a:pPr>
             <a:r>
-              <a:rPr lang="ko-KR" altLang="en-US" sz="950" b="1" spc="-12" kern="0" dirty="0">
-                <a:solidFill>
-                  <a:srgbClr val="3F4654"/>
+              <a:rPr lang="ko-KR" altLang="en-US" sz="1500" spc="-60" kern="0" dirty="0">
+                <a:solidFill>
+                  <a:srgbClr val="FFFFFF"/>
+                </a:solidFill>
+                <a:latin typeface="Pretendard ExtraBold" pitchFamily="34" charset="0"/>
+                <a:ea typeface="Pretendard ExtraBold" pitchFamily="34" charset="-127"/>
+                <a:cs typeface="Pretendard ExtraBold" pitchFamily="34" charset="-120"/>
+              </a:rPr>
+              <a:t>최종 BIM 생성</a:t>
+            </a:r>
+            <a:endParaRPr lang="en-US" sz="1500" dirty="0"/>
+          </a:p>
+        </p:txBody>
+      </p:sp>
+      <p:sp>
+        <p:nvSpPr>
+          <p:cNvPr id="126" name="건물 1동 실증"/>
+          <p:cNvSpPr txBox="1"/>
+          <p:nvPr/>
+        </p:nvSpPr>
+        <p:spPr>
+          <a:xfrm>
+            <a:off x="10722173" y="1860748"/>
+            <a:ext cx="568127" cy="120650"/>
+          </a:xfrm>
+          <a:prstGeom prst="rect">
+            <a:avLst/>
+          </a:prstGeom>
+          <a:noFill/>
+          <a:ln/>
+        </p:spPr>
+        <p:txBody>
+          <a:bodyPr wrap="none" lIns="0" tIns="0" rIns="0" bIns="0" rtlCol="0" anchor="ctr"/>
+          <a:lstStyle/>
+          <a:p>
+            <a:pPr algn="l" indent="0" marL="0">
+              <a:buNone/>
+            </a:pPr>
+            <a:r>
+              <a:rPr lang="ko-KR" altLang="en-US" sz="800" b="1" spc="-16" kern="0" dirty="0">
+                <a:solidFill>
+                  <a:srgbClr val="FFFFFF">
+                    <a:alpha val="88000"/>
+                  </a:srgbClr>
                 </a:solidFill>
                 <a:latin typeface="Pretendard" pitchFamily="34" charset="0"/>
                 <a:ea typeface="Pretendard" pitchFamily="34" charset="-127"/>
                 <a:cs typeface="Pretendard" pitchFamily="34" charset="-120"/>
               </a:rPr>
-              <a:t>문</a:t>
-            </a:r>
-            <a:endParaRPr lang="en-US" sz="950" dirty="0"/>
-          </a:p>
-        </p:txBody>
-      </p:sp>
-      <p:sp>
-        <p:nvSpPr>
-          <p:cNvPr id="112" name="48개"/>
+              <a:t>건물 1동 실증</a:t>
+            </a:r>
+            <a:endParaRPr lang="en-US" sz="800" dirty="0"/>
+          </a:p>
+        </p:txBody>
+      </p:sp>
+      <p:sp>
+        <p:nvSpPr>
+          <p:cNvPr id="127" name="379"/>
           <p:cNvSpPr txBox="1"/>
           <p:nvPr/>
         </p:nvSpPr>
         <p:spPr>
           <a:xfrm>
-            <a:off x="7951291" y="3635573"/>
-            <a:ext cx="265609" cy="120650"/>
+            <a:off x="8890000" y="2006798"/>
+            <a:ext cx="1597350" cy="971550"/>
           </a:xfrm>
           <a:prstGeom prst="rect">
             <a:avLst/>
@@ -18701,44 +19164,112 @@
               <a:buNone/>
             </a:pPr>
             <a:r>
-              <a:rPr lang="ko-KR" altLang="en-US" sz="800" b="1" spc="-16" kern="0" dirty="0">
-                <a:solidFill>
-                  <a:srgbClr val="3F4654"/>
+              <a:rPr lang="ko-KR" altLang="en-US" sz="6400" spc="-43" kern="0" dirty="0">
+                <a:solidFill>
+                  <a:srgbClr val="FFFFFF"/>
+                </a:solidFill>
+                <a:latin typeface="Pretendard ExtraBold" pitchFamily="34" charset="0"/>
+                <a:ea typeface="Pretendard ExtraBold" pitchFamily="34" charset="-127"/>
+                <a:cs typeface="Pretendard ExtraBold" pitchFamily="34" charset="-120"/>
+              </a:rPr>
+              <a:t>379</a:t>
+            </a:r>
+            <a:endParaRPr lang="en-US" sz="6400" dirty="0"/>
+          </a:p>
+        </p:txBody>
+      </p:sp>
+      <p:sp>
+        <p:nvSpPr>
+          <p:cNvPr id="128" name="/ 406"/>
+          <p:cNvSpPr txBox="1"/>
+          <p:nvPr/>
+        </p:nvSpPr>
+        <p:spPr>
+          <a:xfrm>
+            <a:off x="10498534" y="2540198"/>
+            <a:ext cx="664170" cy="304800"/>
+          </a:xfrm>
+          <a:prstGeom prst="rect">
+            <a:avLst/>
+          </a:prstGeom>
+          <a:noFill/>
+          <a:ln/>
+        </p:spPr>
+        <p:txBody>
+          <a:bodyPr wrap="none" lIns="0" tIns="0" rIns="0" bIns="0" rtlCol="0" anchor="ctr"/>
+          <a:lstStyle/>
+          <a:p>
+            <a:pPr algn="l" indent="0" marL="0">
+              <a:buNone/>
+            </a:pPr>
+            <a:r>
+              <a:rPr lang="ko-KR" altLang="en-US" sz="2000" b="1" spc="-59" kern="0" dirty="0">
+                <a:solidFill>
+                  <a:srgbClr val="FFFFFF">
+                    <a:alpha val="55000"/>
+                  </a:srgbClr>
                 </a:solidFill>
                 <a:latin typeface="Pretendard" pitchFamily="34" charset="0"/>
                 <a:ea typeface="Pretendard" pitchFamily="34" charset="-127"/>
                 <a:cs typeface="Pretendard" pitchFamily="34" charset="-120"/>
               </a:rPr>
-              <a:t>48</a:t>
-            </a:r>
+              <a:t>/ 406</a:t>
+            </a:r>
+            <a:endParaRPr lang="en-US" sz="2000" dirty="0"/>
+          </a:p>
+        </p:txBody>
+      </p:sp>
+      <p:sp>
+        <p:nvSpPr>
+          <p:cNvPr id="129" name="406개 객체 중 379개 자동 생성"/>
+          <p:cNvSpPr txBox="1"/>
+          <p:nvPr/>
+        </p:nvSpPr>
+        <p:spPr>
+          <a:xfrm>
+            <a:off x="8890000" y="2965648"/>
+            <a:ext cx="1763522" cy="158750"/>
+          </a:xfrm>
+          <a:prstGeom prst="rect">
+            <a:avLst/>
+          </a:prstGeom>
+          <a:noFill/>
+          <a:ln/>
+        </p:spPr>
+        <p:txBody>
+          <a:bodyPr wrap="none" lIns="0" tIns="0" rIns="0" bIns="0" rtlCol="0" anchor="ctr"/>
+          <a:lstStyle/>
+          <a:p>
             <a:pPr algn="l" indent="0" marL="0">
               <a:buNone/>
             </a:pPr>
             <a:r>
-              <a:rPr lang="ko-KR" altLang="en-US" sz="800" spc="-16" kern="0" dirty="0">
-                <a:solidFill>
-                  <a:srgbClr val="737C8B"/>
+              <a:rPr lang="ko-KR" altLang="en-US" sz="1050" spc="-12" kern="0" dirty="0">
+                <a:solidFill>
+                  <a:srgbClr val="FFFFFF">
+                    <a:alpha val="82000"/>
+                  </a:srgbClr>
                 </a:solidFill>
                 <a:latin typeface="Pretendard SemiBold" pitchFamily="34" charset="0"/>
                 <a:ea typeface="Pretendard SemiBold" pitchFamily="34" charset="-127"/>
                 <a:cs typeface="Pretendard SemiBold" pitchFamily="34" charset="-120"/>
               </a:rPr>
-              <a:t>개</a:t>
-            </a:r>
-            <a:endParaRPr lang="en-US" sz="800" dirty="0"/>
-          </a:p>
-        </p:txBody>
-      </p:sp>
-      <p:sp>
-        <p:nvSpPr>
-          <p:cNvPr id="113" name="0.95"/>
+              <a:t>406개 객체 중 379개 자동 생성</a:t>
+            </a:r>
+            <a:endParaRPr lang="en-US" sz="1050" dirty="0"/>
+          </a:p>
+        </p:txBody>
+      </p:sp>
+      <p:sp>
+        <p:nvSpPr>
+          <p:cNvPr id="130" name="생성 완성도"/>
           <p:cNvSpPr txBox="1"/>
           <p:nvPr/>
         </p:nvSpPr>
         <p:spPr>
           <a:xfrm>
-            <a:off x="6375400" y="3762573"/>
-            <a:ext cx="864592" cy="450850"/>
+            <a:off x="8890000" y="3526929"/>
+            <a:ext cx="590848" cy="146050"/>
           </a:xfrm>
           <a:prstGeom prst="rect">
             <a:avLst/>
@@ -18754,30 +19285,71 @@
               <a:buNone/>
             </a:pPr>
             <a:r>
-              <a:rPr lang="ko-KR" altLang="en-US" sz="3000" spc="-120" kern="0" dirty="0">
-                <a:solidFill>
-                  <a:srgbClr val="102A4C"/>
+              <a:rPr lang="ko-KR" altLang="en-US" sz="950" b="1" spc="-12" kern="0" dirty="0">
+                <a:solidFill>
+                  <a:srgbClr val="FFFFFF">
+                    <a:alpha val="75000"/>
+                  </a:srgbClr>
+                </a:solidFill>
+                <a:latin typeface="Pretendard" pitchFamily="34" charset="0"/>
+                <a:ea typeface="Pretendard" pitchFamily="34" charset="-127"/>
+                <a:cs typeface="Pretendard" pitchFamily="34" charset="-120"/>
+              </a:rPr>
+              <a:t>생성 완성도</a:t>
+            </a:r>
+            <a:endParaRPr lang="en-US" sz="950" dirty="0"/>
+          </a:p>
+        </p:txBody>
+      </p:sp>
+      <p:sp>
+        <p:nvSpPr>
+          <p:cNvPr id="131" name="93.3%"/>
+          <p:cNvSpPr txBox="1"/>
+          <p:nvPr/>
+        </p:nvSpPr>
+        <p:spPr>
+          <a:xfrm>
+            <a:off x="10690721" y="3450729"/>
+            <a:ext cx="688479" cy="241300"/>
+          </a:xfrm>
+          <a:prstGeom prst="rect">
+            <a:avLst/>
+          </a:prstGeom>
+          <a:noFill/>
+          <a:ln/>
+        </p:spPr>
+        <p:txBody>
+          <a:bodyPr wrap="none" lIns="0" tIns="0" rIns="0" bIns="0" rtlCol="0" anchor="ctr"/>
+          <a:lstStyle/>
+          <a:p>
+            <a:pPr algn="l" indent="0" marL="0">
+              <a:buNone/>
+            </a:pPr>
+            <a:r>
+              <a:rPr lang="ko-KR" altLang="en-US" sz="1600" spc="-16" kern="0" dirty="0">
+                <a:solidFill>
+                  <a:srgbClr val="FFFFFF"/>
                 </a:solidFill>
                 <a:latin typeface="Pretendard ExtraBold" pitchFamily="34" charset="0"/>
                 <a:ea typeface="Pretendard ExtraBold" pitchFamily="34" charset="-127"/>
                 <a:cs typeface="Pretendard ExtraBold" pitchFamily="34" charset="-120"/>
               </a:rPr>
-              <a:t>0.95</a:t>
-            </a:r>
-            <a:endParaRPr lang="en-US" sz="3000" dirty="0"/>
-          </a:p>
-        </p:txBody>
-      </p:sp>
-      <p:sp>
-        <p:nvSpPr>
-          <p:cNvPr id="114" name="기여 3"/>
+              <a:t>93.3%</a:t>
+            </a:r>
+            <a:endParaRPr lang="en-US" sz="1600" dirty="0"/>
+          </a:p>
+        </p:txBody>
+      </p:sp>
+      <p:sp>
+        <p:nvSpPr>
+          <p:cNvPr id="132" name="요소별 생성"/>
           <p:cNvSpPr txBox="1"/>
           <p:nvPr/>
         </p:nvSpPr>
         <p:spPr>
           <a:xfrm>
-            <a:off x="1473200" y="5023842"/>
-            <a:ext cx="331093" cy="120650"/>
+            <a:off x="8890000" y="3812679"/>
+            <a:ext cx="507206" cy="120650"/>
           </a:xfrm>
           <a:prstGeom prst="rect">
             <a:avLst/>
@@ -18793,30 +19365,97 @@
               <a:buNone/>
             </a:pPr>
             <a:r>
-              <a:rPr lang="ko-KR" altLang="en-US" sz="800" spc="32" kern="0" dirty="0">
-                <a:solidFill>
-                  <a:srgbClr val="EA002C"/>
+              <a:rPr lang="ko-KR" altLang="en-US" sz="800" b="1" spc="-8" kern="0" dirty="0">
+                <a:solidFill>
+                  <a:srgbClr val="FFFFFF">
+                    <a:alpha val="62000"/>
+                  </a:srgbClr>
+                </a:solidFill>
+                <a:latin typeface="Pretendard" pitchFamily="34" charset="0"/>
+                <a:ea typeface="Pretendard" pitchFamily="34" charset="-127"/>
+                <a:cs typeface="Pretendard" pitchFamily="34" charset="-120"/>
+              </a:rPr>
+              <a:t>요소별 생성</a:t>
+            </a:r>
+            <a:endParaRPr lang="en-US" sz="800" dirty="0"/>
+          </a:p>
+        </p:txBody>
+      </p:sp>
+      <p:sp>
+        <p:nvSpPr>
+          <p:cNvPr id="133" name="벽 135 / 153"/>
+          <p:cNvSpPr txBox="1"/>
+          <p:nvPr/>
+        </p:nvSpPr>
+        <p:spPr>
+          <a:xfrm>
+            <a:off x="8890000" y="4003179"/>
+            <a:ext cx="730945" cy="146050"/>
+          </a:xfrm>
+          <a:prstGeom prst="rect">
+            <a:avLst/>
+          </a:prstGeom>
+          <a:noFill/>
+          <a:ln/>
+        </p:spPr>
+        <p:txBody>
+          <a:bodyPr wrap="none" lIns="0" tIns="0" rIns="0" bIns="0" rtlCol="0" anchor="ctr"/>
+          <a:lstStyle/>
+          <a:p>
+            <a:pPr algn="l" indent="0" marL="0">
+              <a:buNone/>
+            </a:pPr>
+            <a:r>
+              <a:rPr lang="ko-KR" altLang="en-US" sz="950" spc="-19" kern="0" dirty="0">
+                <a:solidFill>
+                  <a:srgbClr val="FFFFFF">
+                    <a:alpha val="60000"/>
+                  </a:srgbClr>
+                </a:solidFill>
+                <a:latin typeface="Pretendard SemiBold" pitchFamily="34" charset="0"/>
+                <a:ea typeface="Pretendard SemiBold" pitchFamily="34" charset="-127"/>
+                <a:cs typeface="Pretendard SemiBold" pitchFamily="34" charset="-120"/>
+              </a:rPr>
+              <a:t>벽 </a:t>
+            </a:r>
+            <a:r>
+              <a:rPr lang="ko-KR" altLang="en-US" sz="950" spc="57" kern="0" dirty="0">
+                <a:solidFill>
+                  <a:srgbClr val="FFFFFF"/>
                 </a:solidFill>
                 <a:latin typeface="Pretendard ExtraBold" pitchFamily="34" charset="0"/>
                 <a:ea typeface="Pretendard ExtraBold" pitchFamily="34" charset="-127"/>
                 <a:cs typeface="Pretendard ExtraBold" pitchFamily="34" charset="-120"/>
               </a:rPr>
-              <a:t>기여 3</a:t>
-            </a:r>
-            <a:endParaRPr lang="en-US" sz="800" dirty="0"/>
-          </a:p>
-        </p:txBody>
-      </p:sp>
-      <p:sp>
-        <p:nvSpPr>
-          <p:cNvPr id="115" name="LMM 기반 축척 인식으로 불완전한도면에서도 안정적인 치수 보정"/>
+              <a:t>135</a:t>
+            </a:r>
+            <a:r>
+              <a:rPr lang="ko-KR" altLang="en-US" sz="950" spc="22" kern="0" dirty="0">
+                <a:solidFill>
+                  <a:srgbClr val="FFFFFF">
+                    <a:alpha val="60000"/>
+                  </a:srgbClr>
+                </a:solidFill>
+                <a:latin typeface="Pretendard SemiBold" pitchFamily="34" charset="0"/>
+                <a:ea typeface="Pretendard SemiBold" pitchFamily="34" charset="-127"/>
+                <a:cs typeface="Pretendard SemiBold" pitchFamily="34" charset="-120"/>
+              </a:rPr>
+              <a:t> / 153</a:t>
+            </a:r>
+            <a:endParaRPr lang="en-US" sz="950" dirty="0"/>
+          </a:p>
+        </p:txBody>
+      </p:sp>
+      <p:sp>
+        <p:nvSpPr>
+          <p:cNvPr id="134" name="문 64 / 64"/>
           <p:cNvSpPr txBox="1"/>
           <p:nvPr/>
         </p:nvSpPr>
         <p:spPr>
           <a:xfrm>
-            <a:off x="1473200" y="5221486"/>
-            <a:ext cx="2247207" cy="455612"/>
+            <a:off x="9794776" y="4003179"/>
+            <a:ext cx="577751" cy="146050"/>
           </a:xfrm>
           <a:prstGeom prst="rect">
             <a:avLst/>
@@ -18825,60 +19464,128 @@
           <a:ln/>
         </p:spPr>
         <p:txBody>
-          <a:bodyPr wrap="none" lIns="0" tIns="0" rIns="0" bIns="0" rtlCol="0" anchor="t"/>
+          <a:bodyPr wrap="none" lIns="0" tIns="0" rIns="0" bIns="0" rtlCol="0" anchor="ctr"/>
           <a:lstStyle/>
           <a:p>
             <a:pPr algn="l" indent="0" marL="0">
-              <a:lnSpc>
-                <a:spcPts val="1794"/>
-              </a:lnSpc>
               <a:buNone/>
             </a:pPr>
             <a:r>
-              <a:rPr lang="ko-KR" altLang="en-US" sz="1300" spc="-52" kern="0" dirty="0">
-                <a:solidFill>
-                  <a:srgbClr val="102A4C"/>
+              <a:rPr lang="ko-KR" altLang="en-US" sz="950" spc="-19" kern="0" dirty="0">
+                <a:solidFill>
+                  <a:srgbClr val="FFFFFF">
+                    <a:alpha val="60000"/>
+                  </a:srgbClr>
+                </a:solidFill>
+                <a:latin typeface="Pretendard SemiBold" pitchFamily="34" charset="0"/>
+                <a:ea typeface="Pretendard SemiBold" pitchFamily="34" charset="-127"/>
+                <a:cs typeface="Pretendard SemiBold" pitchFamily="34" charset="-120"/>
+              </a:rPr>
+              <a:t>문 </a:t>
+            </a:r>
+            <a:r>
+              <a:rPr lang="ko-KR" altLang="en-US" sz="950" spc="-12" kern="0" dirty="0">
+                <a:solidFill>
+                  <a:srgbClr val="FFFFFF"/>
                 </a:solidFill>
                 <a:latin typeface="Pretendard ExtraBold" pitchFamily="34" charset="0"/>
                 <a:ea typeface="Pretendard ExtraBold" pitchFamily="34" charset="-127"/>
                 <a:cs typeface="Pretendard ExtraBold" pitchFamily="34" charset="-120"/>
               </a:rPr>
-              <a:t>LMM 기반 축척 인식으로 불완전한</a:t>
-            </a:r>
-            <a:endParaRPr lang="en-US" sz="1300" dirty="0"/>
-          </a:p>
+              <a:t>64</a:t>
+            </a:r>
+            <a:r>
+              <a:rPr lang="ko-KR" altLang="en-US" sz="950" spc="-18" kern="0" dirty="0">
+                <a:solidFill>
+                  <a:srgbClr val="FFFFFF">
+                    <a:alpha val="60000"/>
+                  </a:srgbClr>
+                </a:solidFill>
+                <a:latin typeface="Pretendard SemiBold" pitchFamily="34" charset="0"/>
+                <a:ea typeface="Pretendard SemiBold" pitchFamily="34" charset="-127"/>
+                <a:cs typeface="Pretendard SemiBold" pitchFamily="34" charset="-120"/>
+              </a:rPr>
+              <a:t> / 64</a:t>
+            </a:r>
+            <a:endParaRPr lang="en-US" sz="950" dirty="0"/>
+          </a:p>
+        </p:txBody>
+      </p:sp>
+      <p:sp>
+        <p:nvSpPr>
+          <p:cNvPr id="135" name="창문 180 / 189"/>
+          <p:cNvSpPr txBox="1"/>
+          <p:nvPr/>
+        </p:nvSpPr>
+        <p:spPr>
+          <a:xfrm>
+            <a:off x="10546358" y="4003179"/>
+            <a:ext cx="832842" cy="146050"/>
+          </a:xfrm>
+          <a:prstGeom prst="rect">
+            <a:avLst/>
+          </a:prstGeom>
+          <a:noFill/>
+          <a:ln/>
+        </p:spPr>
+        <p:txBody>
+          <a:bodyPr wrap="none" lIns="0" tIns="0" rIns="0" bIns="0" rtlCol="0" anchor="ctr"/>
+          <a:lstStyle/>
           <a:p>
             <a:pPr algn="l" indent="0" marL="0">
-              <a:lnSpc>
-                <a:spcPts val="1794"/>
-              </a:lnSpc>
               <a:buNone/>
             </a:pPr>
             <a:r>
-              <a:rPr lang="ko-KR" altLang="en-US" sz="1300" spc="-52" kern="0" dirty="0">
-                <a:solidFill>
-                  <a:srgbClr val="102A4C"/>
+              <a:rPr lang="ko-KR" altLang="en-US" sz="950" spc="-19" kern="0" dirty="0">
+                <a:solidFill>
+                  <a:srgbClr val="FFFFFF">
+                    <a:alpha val="60000"/>
+                  </a:srgbClr>
+                </a:solidFill>
+                <a:latin typeface="Pretendard SemiBold" pitchFamily="34" charset="0"/>
+                <a:ea typeface="Pretendard SemiBold" pitchFamily="34" charset="-127"/>
+                <a:cs typeface="Pretendard SemiBold" pitchFamily="34" charset="-120"/>
+              </a:rPr>
+              <a:t>창문 </a:t>
+            </a:r>
+            <a:r>
+              <a:rPr lang="ko-KR" altLang="en-US" sz="950" spc="41" kern="0" dirty="0">
+                <a:solidFill>
+                  <a:srgbClr val="FFFFFF"/>
                 </a:solidFill>
                 <a:latin typeface="Pretendard ExtraBold" pitchFamily="34" charset="0"/>
                 <a:ea typeface="Pretendard ExtraBold" pitchFamily="34" charset="-127"/>
                 <a:cs typeface="Pretendard ExtraBold" pitchFamily="34" charset="-120"/>
               </a:rPr>
-              <a:t>도면에서도 안정적인 치수 보정</a:t>
-            </a:r>
-            <a:endParaRPr lang="en-US" sz="1300" dirty="0"/>
-          </a:p>
-        </p:txBody>
-      </p:sp>
-      <p:sp>
-        <p:nvSpPr>
-          <p:cNvPr id="116" name="축척 인식 정확도"/>
+              <a:t>180</a:t>
+            </a:r>
+            <a:r>
+              <a:rPr lang="ko-KR" altLang="en-US" sz="950" spc="19" kern="0" dirty="0">
+                <a:solidFill>
+                  <a:srgbClr val="FFFFFF">
+                    <a:alpha val="60000"/>
+                  </a:srgbClr>
+                </a:solidFill>
+                <a:latin typeface="Pretendard SemiBold" pitchFamily="34" charset="0"/>
+                <a:ea typeface="Pretendard SemiBold" pitchFamily="34" charset="-127"/>
+                <a:cs typeface="Pretendard SemiBold" pitchFamily="34" charset="-120"/>
+              </a:rPr>
+              <a:t> / 189</a:t>
+            </a:r>
+            <a:endParaRPr lang="en-US" sz="950" dirty="0"/>
+          </a:p>
+        </p:txBody>
+      </p:sp>
+      <p:sp>
+        <p:nvSpPr>
+          <p:cNvPr id="136" name="자동 생성된 3D BIM"/>
           <p:cNvSpPr txBox="1"/>
           <p:nvPr/>
         </p:nvSpPr>
         <p:spPr>
           <a:xfrm>
-            <a:off x="4381500" y="4861123"/>
-            <a:ext cx="812998" cy="146050"/>
+            <a:off x="8890000" y="6019998"/>
+            <a:ext cx="856258" cy="120650"/>
           </a:xfrm>
           <a:prstGeom prst="rect">
             <a:avLst/>
@@ -18894,7 +19601,87 @@
               <a:buNone/>
             </a:pPr>
             <a:r>
-              <a:rPr lang="ko-KR" altLang="en-US" sz="950" spc="-19" kern="0" dirty="0">
+              <a:rPr lang="ko-KR" altLang="en-US" sz="800" spc="-12" kern="0" dirty="0">
+                <a:solidFill>
+                  <a:srgbClr val="FFFFFF">
+                    <a:alpha val="62000"/>
+                  </a:srgbClr>
+                </a:solidFill>
+                <a:latin typeface="Pretendard SemiBold" pitchFamily="34" charset="0"/>
+                <a:ea typeface="Pretendard SemiBold" pitchFamily="34" charset="-127"/>
+                <a:cs typeface="Pretendard SemiBold" pitchFamily="34" charset="-120"/>
+              </a:rPr>
+              <a:t>자동 생성된 3D BIM</a:t>
+            </a:r>
+            <a:endParaRPr lang="en-US" sz="800" dirty="0"/>
+          </a:p>
+        </p:txBody>
+      </p:sp>
+      <p:sp>
+        <p:nvSpPr>
+          <p:cNvPr id="137" name="석사 연구 발표  ·  평면도와 입면도 객체 인식 및 정보 통합을 통한 "/>
+          <p:cNvSpPr txBox="1"/>
+          <p:nvPr/>
+        </p:nvSpPr>
+        <p:spPr>
+          <a:xfrm>
+            <a:off x="609600" y="6472238"/>
+            <a:ext cx="5145113" cy="114300"/>
+          </a:xfrm>
+          <a:prstGeom prst="rect">
+            <a:avLst/>
+          </a:prstGeom>
+          <a:noFill/>
+          <a:ln/>
+        </p:spPr>
+        <p:txBody>
+          <a:bodyPr wrap="none" lIns="0" tIns="0" rIns="0" bIns="0" rtlCol="0" anchor="ctr"/>
+          <a:lstStyle/>
+          <a:p>
+            <a:pPr algn="l" indent="0" marL="0">
+              <a:buNone/>
+            </a:pPr>
+            <a:r>
+              <a:rPr lang="ko-KR" altLang="en-US" sz="750" spc="-12" kern="0" dirty="0">
+                <a:solidFill>
+                  <a:srgbClr val="737C8B"/>
+                </a:solidFill>
+                <a:latin typeface="Pretendard Medium" pitchFamily="34" charset="0"/>
+                <a:ea typeface="Pretendard Medium" pitchFamily="34" charset="-127"/>
+                <a:cs typeface="Pretendard Medium" pitchFamily="34" charset="-120"/>
+              </a:rPr>
+              <a:t>석사 연구 발표  ·  평면도와 입면도 객체 인식 및 정보 통합을 통한 3D BIM 자동 생성 연구  ·  Utility 기술(건축, BIM/5D) 지원자 ○○○</a:t>
+            </a:r>
+            <a:endParaRPr lang="en-US" sz="750" dirty="0"/>
+          </a:p>
+        </p:txBody>
+      </p:sp>
+      <p:sp>
+        <p:nvSpPr>
+          <p:cNvPr id="138" name="04 / 05"/>
+          <p:cNvSpPr txBox="1"/>
+          <p:nvPr/>
+        </p:nvSpPr>
+        <p:spPr>
+          <a:xfrm>
+            <a:off x="11214795" y="6472238"/>
+            <a:ext cx="418405" cy="114300"/>
+          </a:xfrm>
+          <a:prstGeom prst="rect">
+            <a:avLst/>
+          </a:prstGeom>
+          <a:noFill/>
+          <a:ln/>
+        </p:spPr>
+        <p:txBody>
+          <a:bodyPr wrap="none" lIns="0" tIns="0" rIns="0" bIns="0" rtlCol="0" anchor="ctr"/>
+          <a:lstStyle/>
+          <a:p>
+            <a:pPr algn="l" indent="0" marL="0">
+              <a:buNone/>
+            </a:pPr>
+            <a:r>
+              <a:rPr lang="ko-KR" altLang="en-US" sz="750" spc="45" kern="0" dirty="0">
                 <a:solidFill>
                   <a:srgbClr val="102A4C"/>
                 </a:solidFill>
@@ -18902,1122 +19689,8 @@
                 <a:ea typeface="Pretendard ExtraBold" pitchFamily="34" charset="-127"/>
                 <a:cs typeface="Pretendard ExtraBold" pitchFamily="34" charset="-120"/>
               </a:rPr>
-              <a:t>축척 인식 정확도</a:t>
-            </a:r>
-            <a:endParaRPr lang="en-US" sz="950" dirty="0"/>
-          </a:p>
-        </p:txBody>
-      </p:sp>
-      <p:sp>
-        <p:nvSpPr>
-          <p:cNvPr id="117" name="·  Tesseract OCR 대비"/>
-          <p:cNvSpPr txBox="1"/>
-          <p:nvPr/>
-        </p:nvSpPr>
-        <p:spPr>
-          <a:xfrm>
-            <a:off x="5194498" y="4861123"/>
-            <a:ext cx="1179292" cy="146050"/>
-          </a:xfrm>
-          <a:prstGeom prst="rect">
-            <a:avLst/>
-          </a:prstGeom>
-          <a:noFill/>
-          <a:ln/>
-        </p:spPr>
-        <p:txBody>
-          <a:bodyPr wrap="none" lIns="0" tIns="0" rIns="0" bIns="0" rtlCol="0" anchor="ctr"/>
-          <a:lstStyle/>
-          <a:p>
-            <a:pPr algn="l" indent="0" marL="0">
-              <a:buNone/>
-            </a:pPr>
-            <a:r>
-              <a:rPr lang="ko-KR" altLang="en-US" sz="950" spc="-19" kern="0" dirty="0">
-                <a:solidFill>
-                  <a:srgbClr val="737C8B"/>
-                </a:solidFill>
-                <a:latin typeface="Pretendard SemiBold" pitchFamily="34" charset="0"/>
-                <a:ea typeface="Pretendard SemiBold" pitchFamily="34" charset="-127"/>
-                <a:cs typeface="Pretendard SemiBold" pitchFamily="34" charset="-120"/>
-              </a:rPr>
-              <a:t>·  Tesseract OCR 대비</a:t>
-            </a:r>
-            <a:endParaRPr lang="en-US" sz="950" dirty="0"/>
-          </a:p>
-        </p:txBody>
-      </p:sp>
-      <p:sp>
-        <p:nvSpPr>
-          <p:cNvPr id="118" name="LMM(GPT-4o)"/>
-          <p:cNvSpPr txBox="1"/>
-          <p:nvPr/>
-        </p:nvSpPr>
-        <p:spPr>
-          <a:xfrm>
-            <a:off x="4381500" y="5140523"/>
-            <a:ext cx="845245" cy="146050"/>
-          </a:xfrm>
-          <a:prstGeom prst="rect">
-            <a:avLst/>
-          </a:prstGeom>
-          <a:noFill/>
-          <a:ln/>
-        </p:spPr>
-        <p:txBody>
-          <a:bodyPr wrap="none" lIns="0" tIns="0" rIns="0" bIns="0" rtlCol="0" anchor="ctr"/>
-          <a:lstStyle/>
-          <a:p>
-            <a:pPr algn="l" indent="0" marL="0">
-              <a:buNone/>
-            </a:pPr>
-            <a:r>
-              <a:rPr lang="ko-KR" altLang="en-US" sz="950" b="1" spc="-12" kern="0" dirty="0">
-                <a:solidFill>
-                  <a:srgbClr val="3F4654"/>
-                </a:solidFill>
-                <a:latin typeface="Pretendard" pitchFamily="34" charset="0"/>
-                <a:ea typeface="Pretendard" pitchFamily="34" charset="-127"/>
-                <a:cs typeface="Pretendard" pitchFamily="34" charset="-120"/>
-              </a:rPr>
-              <a:t>LMM(GPT-4o)</a:t>
-            </a:r>
-            <a:endParaRPr lang="en-US" sz="950" dirty="0"/>
-          </a:p>
-        </p:txBody>
-      </p:sp>
-      <p:sp>
-        <p:nvSpPr>
-          <p:cNvPr id="119" name="0.707"/>
-          <p:cNvSpPr txBox="1"/>
-          <p:nvPr/>
-        </p:nvSpPr>
-        <p:spPr>
-          <a:xfrm>
-            <a:off x="4381500" y="5286573"/>
-            <a:ext cx="1116294" cy="450850"/>
-          </a:xfrm>
-          <a:prstGeom prst="rect">
-            <a:avLst/>
-          </a:prstGeom>
-          <a:noFill/>
-          <a:ln/>
-        </p:spPr>
-        <p:txBody>
-          <a:bodyPr wrap="none" lIns="0" tIns="0" rIns="0" bIns="0" rtlCol="0" anchor="ctr"/>
-          <a:lstStyle/>
-          <a:p>
-            <a:pPr algn="l" indent="0" marL="0">
-              <a:buNone/>
-            </a:pPr>
-            <a:r>
-              <a:rPr lang="ko-KR" altLang="en-US" sz="3000" spc="-120" kern="0" dirty="0">
-                <a:solidFill>
-                  <a:srgbClr val="102A4C"/>
-                </a:solidFill>
-                <a:latin typeface="Pretendard ExtraBold" pitchFamily="34" charset="0"/>
-                <a:ea typeface="Pretendard ExtraBold" pitchFamily="34" charset="-127"/>
-                <a:cs typeface="Pretendard ExtraBold" pitchFamily="34" charset="-120"/>
-              </a:rPr>
-              <a:t>0.707</a:t>
-            </a:r>
-            <a:endParaRPr lang="en-US" sz="3000" dirty="0"/>
-          </a:p>
-        </p:txBody>
-      </p:sp>
-      <p:sp>
-        <p:nvSpPr>
-          <p:cNvPr id="120" name="+33.8%p"/>
-          <p:cNvSpPr txBox="1"/>
-          <p:nvPr/>
-        </p:nvSpPr>
-        <p:spPr>
-          <a:xfrm>
-            <a:off x="5561608" y="5445026"/>
-            <a:ext cx="549771" cy="133350"/>
-          </a:xfrm>
-          <a:prstGeom prst="rect">
-            <a:avLst/>
-          </a:prstGeom>
-          <a:noFill/>
-          <a:ln/>
-        </p:spPr>
-        <p:txBody>
-          <a:bodyPr wrap="none" lIns="0" tIns="0" rIns="0" bIns="0" rtlCol="0" anchor="ctr"/>
-          <a:lstStyle/>
-          <a:p>
-            <a:pPr algn="l" indent="0" marL="0">
-              <a:buNone/>
-            </a:pPr>
-            <a:r>
-              <a:rPr lang="ko-KR" altLang="en-US" sz="900" spc="-12" kern="0" dirty="0">
-                <a:solidFill>
-                  <a:srgbClr val="EA002C"/>
-                </a:solidFill>
-                <a:latin typeface="Pretendard ExtraBold" pitchFamily="34" charset="0"/>
-                <a:ea typeface="Pretendard ExtraBold" pitchFamily="34" charset="-127"/>
-                <a:cs typeface="Pretendard ExtraBold" pitchFamily="34" charset="-120"/>
-              </a:rPr>
-              <a:t>+33.8%p</a:t>
-            </a:r>
-            <a:endParaRPr lang="en-US" sz="900" dirty="0"/>
-          </a:p>
-        </p:txBody>
-      </p:sp>
-      <p:sp>
-        <p:nvSpPr>
-          <p:cNvPr id="121" name="Tesseract OCR"/>
-          <p:cNvSpPr txBox="1"/>
-          <p:nvPr/>
-        </p:nvSpPr>
-        <p:spPr>
-          <a:xfrm>
-            <a:off x="6375400" y="5140523"/>
-            <a:ext cx="875209" cy="146050"/>
-          </a:xfrm>
-          <a:prstGeom prst="rect">
-            <a:avLst/>
-          </a:prstGeom>
-          <a:noFill/>
-          <a:ln/>
-        </p:spPr>
-        <p:txBody>
-          <a:bodyPr wrap="none" lIns="0" tIns="0" rIns="0" bIns="0" rtlCol="0" anchor="ctr"/>
-          <a:lstStyle/>
-          <a:p>
-            <a:pPr algn="l" indent="0" marL="0">
-              <a:buNone/>
-            </a:pPr>
-            <a:r>
-              <a:rPr lang="ko-KR" altLang="en-US" sz="950" b="1" spc="-12" kern="0" dirty="0">
-                <a:solidFill>
-                  <a:srgbClr val="737C8B"/>
-                </a:solidFill>
-                <a:latin typeface="Pretendard" pitchFamily="34" charset="0"/>
-                <a:ea typeface="Pretendard" pitchFamily="34" charset="-127"/>
-                <a:cs typeface="Pretendard" pitchFamily="34" charset="-120"/>
-              </a:rPr>
-              <a:t>Tesseract OCR</a:t>
-            </a:r>
-            <a:endParaRPr lang="en-US" sz="950" dirty="0"/>
-          </a:p>
-        </p:txBody>
-      </p:sp>
-      <p:sp>
-        <p:nvSpPr>
-          <p:cNvPr id="122" name="0.369"/>
-          <p:cNvSpPr txBox="1"/>
-          <p:nvPr/>
-        </p:nvSpPr>
-        <p:spPr>
-          <a:xfrm>
-            <a:off x="6375400" y="5356423"/>
-            <a:ext cx="893266" cy="368300"/>
-          </a:xfrm>
-          <a:prstGeom prst="rect">
-            <a:avLst/>
-          </a:prstGeom>
-          <a:noFill/>
-          <a:ln/>
-        </p:spPr>
-        <p:txBody>
-          <a:bodyPr wrap="none" lIns="0" tIns="0" rIns="0" bIns="0" rtlCol="0" anchor="ctr"/>
-          <a:lstStyle/>
-          <a:p>
-            <a:pPr algn="l" indent="0" marL="0">
-              <a:buNone/>
-            </a:pPr>
-            <a:r>
-              <a:rPr lang="ko-KR" altLang="en-US" sz="2400" spc="-96" kern="0" dirty="0">
-                <a:solidFill>
-                  <a:srgbClr val="737C8B"/>
-                </a:solidFill>
-                <a:latin typeface="Pretendard ExtraBold" pitchFamily="34" charset="0"/>
-                <a:ea typeface="Pretendard ExtraBold" pitchFamily="34" charset="-127"/>
-                <a:cs typeface="Pretendard ExtraBold" pitchFamily="34" charset="-120"/>
-              </a:rPr>
-              <a:t>0.369</a:t>
-            </a:r>
-            <a:endParaRPr lang="en-US" sz="2400" dirty="0"/>
-          </a:p>
-        </p:txBody>
-      </p:sp>
-      <p:sp>
-        <p:nvSpPr>
-          <p:cNvPr id="123" name="mAP@0.5 객체를 맞게 찾아낸 정도  ·  F1-score 정밀도·재"/>
-          <p:cNvSpPr txBox="1"/>
-          <p:nvPr/>
-        </p:nvSpPr>
-        <p:spPr>
-          <a:xfrm>
-            <a:off x="609600" y="6197798"/>
-            <a:ext cx="6665793" cy="120650"/>
-          </a:xfrm>
-          <a:prstGeom prst="rect">
-            <a:avLst/>
-          </a:prstGeom>
-          <a:noFill/>
-          <a:ln/>
-        </p:spPr>
-        <p:txBody>
-          <a:bodyPr wrap="none" lIns="0" tIns="0" rIns="0" bIns="0" rtlCol="0" anchor="ctr"/>
-          <a:lstStyle/>
-          <a:p>
-            <a:pPr algn="l" indent="0" marL="0">
-              <a:buNone/>
-            </a:pPr>
-            <a:r>
-              <a:rPr lang="ko-KR" altLang="en-US" sz="800" b="1" spc="-12" kern="0" dirty="0">
-                <a:solidFill>
-                  <a:srgbClr val="3F4654"/>
-                </a:solidFill>
-                <a:latin typeface="Pretendard" pitchFamily="34" charset="0"/>
-                <a:ea typeface="Pretendard" pitchFamily="34" charset="-127"/>
-                <a:cs typeface="Pretendard" pitchFamily="34" charset="-120"/>
-              </a:rPr>
-              <a:t>mAP@0.5</a:t>
-            </a:r>
-            <a:pPr algn="l" indent="0" marL="0">
-              <a:buNone/>
-            </a:pPr>
-            <a:r>
-              <a:rPr lang="ko-KR" altLang="en-US" sz="800" spc="-12" kern="0" dirty="0">
-                <a:solidFill>
-                  <a:srgbClr val="737C8B"/>
-                </a:solidFill>
-                <a:latin typeface="Pretendard SemiBold" pitchFamily="34" charset="0"/>
-                <a:ea typeface="Pretendard SemiBold" pitchFamily="34" charset="-127"/>
-                <a:cs typeface="Pretendard SemiBold" pitchFamily="34" charset="-120"/>
-              </a:rPr>
-              <a:t> 객체를 맞게 찾아낸 정도  ·  </a:t>
-            </a:r>
-            <a:pPr algn="l" indent="0" marL="0">
-              <a:buNone/>
-            </a:pPr>
-            <a:r>
-              <a:rPr lang="ko-KR" altLang="en-US" sz="800" b="1" spc="-12" kern="0" dirty="0">
-                <a:solidFill>
-                  <a:srgbClr val="3F4654"/>
-                </a:solidFill>
-                <a:latin typeface="Pretendard" pitchFamily="34" charset="0"/>
-                <a:ea typeface="Pretendard" pitchFamily="34" charset="-127"/>
-                <a:cs typeface="Pretendard" pitchFamily="34" charset="-120"/>
-              </a:rPr>
-              <a:t>F1-score</a:t>
-            </a:r>
-            <a:pPr algn="l" indent="0" marL="0">
-              <a:buNone/>
-            </a:pPr>
-            <a:r>
-              <a:rPr lang="ko-KR" altLang="en-US" sz="800" spc="-12" kern="0" dirty="0">
-                <a:solidFill>
-                  <a:srgbClr val="737C8B"/>
-                </a:solidFill>
-                <a:latin typeface="Pretendard SemiBold" pitchFamily="34" charset="0"/>
-                <a:ea typeface="Pretendard SemiBold" pitchFamily="34" charset="-127"/>
-                <a:cs typeface="Pretendard SemiBold" pitchFamily="34" charset="-120"/>
-              </a:rPr>
-              <a:t> 정밀도·재현율의 조화평균 (모두 1에 가까울수록 좋음)  ·  </a:t>
-            </a:r>
-            <a:pPr algn="l" indent="0" marL="0">
-              <a:buNone/>
-            </a:pPr>
-            <a:r>
-              <a:rPr lang="ko-KR" altLang="en-US" sz="800" b="1" spc="-12" kern="0" dirty="0">
-                <a:solidFill>
-                  <a:srgbClr val="3F4654"/>
-                </a:solidFill>
-                <a:latin typeface="Pretendard" pitchFamily="34" charset="0"/>
-                <a:ea typeface="Pretendard" pitchFamily="34" charset="-127"/>
-                <a:cs typeface="Pretendard" pitchFamily="34" charset="-120"/>
-              </a:rPr>
-              <a:t>LMM</a:t>
-            </a:r>
-            <a:pPr algn="l" indent="0" marL="0">
-              <a:buNone/>
-            </a:pPr>
-            <a:r>
-              <a:rPr lang="ko-KR" altLang="en-US" sz="800" spc="-12" kern="0" dirty="0">
-                <a:solidFill>
-                  <a:srgbClr val="737C8B"/>
-                </a:solidFill>
-                <a:latin typeface="Pretendard SemiBold" pitchFamily="34" charset="0"/>
-                <a:ea typeface="Pretendard SemiBold" pitchFamily="34" charset="-127"/>
-                <a:cs typeface="Pretendard SemiBold" pitchFamily="34" charset="-120"/>
-              </a:rPr>
-              <a:t> 대형 멀티모달 모델  ·  학습 이미지 수는 타일 포함</a:t>
-            </a:r>
-            <a:endParaRPr lang="en-US" sz="800" dirty="0"/>
-          </a:p>
-        </p:txBody>
-      </p:sp>
-      <p:sp>
-        <p:nvSpPr>
-          <p:cNvPr id="124" name="최종 결과"/>
-          <p:cNvSpPr txBox="1"/>
-          <p:nvPr/>
-        </p:nvSpPr>
-        <p:spPr>
-          <a:xfrm>
-            <a:off x="8902700" y="1282898"/>
-            <a:ext cx="588963" cy="184150"/>
-          </a:xfrm>
-          <a:prstGeom prst="rect">
-            <a:avLst/>
-          </a:prstGeom>
-          <a:noFill/>
-          <a:ln/>
-        </p:spPr>
-        <p:txBody>
-          <a:bodyPr wrap="none" lIns="0" tIns="0" rIns="0" bIns="0" rtlCol="0" anchor="ctr"/>
-          <a:lstStyle/>
-          <a:p>
-            <a:pPr algn="l" indent="0" marL="0">
-              <a:buNone/>
-            </a:pPr>
-            <a:r>
-              <a:rPr lang="ko-KR" altLang="en-US" sz="1200" spc="-36" kern="0" dirty="0">
-                <a:solidFill>
-                  <a:srgbClr val="102A4C"/>
-                </a:solidFill>
-                <a:latin typeface="Pretendard ExtraBold" pitchFamily="34" charset="0"/>
-                <a:ea typeface="Pretendard ExtraBold" pitchFamily="34" charset="-127"/>
-                <a:cs typeface="Pretendard ExtraBold" pitchFamily="34" charset="-120"/>
-              </a:rPr>
-              <a:t>최종 결과</a:t>
-            </a:r>
-            <a:endParaRPr lang="en-US" sz="1200" dirty="0"/>
-          </a:p>
-        </p:txBody>
-      </p:sp>
-      <p:sp>
-        <p:nvSpPr>
-          <p:cNvPr id="125" name="최종 BIM 생성"/>
-          <p:cNvSpPr txBox="1"/>
-          <p:nvPr/>
-        </p:nvSpPr>
-        <p:spPr>
-          <a:xfrm>
-            <a:off x="8890000" y="1809948"/>
-            <a:ext cx="1080746" cy="228600"/>
-          </a:xfrm>
-          <a:prstGeom prst="rect">
-            <a:avLst/>
-          </a:prstGeom>
-          <a:noFill/>
-          <a:ln/>
-        </p:spPr>
-        <p:txBody>
-          <a:bodyPr wrap="none" lIns="0" tIns="0" rIns="0" bIns="0" rtlCol="0" anchor="ctr"/>
-          <a:lstStyle/>
-          <a:p>
-            <a:pPr algn="l" indent="0" marL="0">
-              <a:buNone/>
-            </a:pPr>
-            <a:r>
-              <a:rPr lang="ko-KR" altLang="en-US" sz="1500" spc="-60" kern="0" dirty="0">
-                <a:solidFill>
-                  <a:srgbClr val="FFFFFF"/>
-                </a:solidFill>
-                <a:latin typeface="Pretendard ExtraBold" pitchFamily="34" charset="0"/>
-                <a:ea typeface="Pretendard ExtraBold" pitchFamily="34" charset="-127"/>
-                <a:cs typeface="Pretendard ExtraBold" pitchFamily="34" charset="-120"/>
-              </a:rPr>
-              <a:t>최종 BIM 생성</a:t>
-            </a:r>
-            <a:endParaRPr lang="en-US" sz="1500" dirty="0"/>
-          </a:p>
-        </p:txBody>
-      </p:sp>
-      <p:sp>
-        <p:nvSpPr>
-          <p:cNvPr id="126" name="건물 1동 실증"/>
-          <p:cNvSpPr txBox="1"/>
-          <p:nvPr/>
-        </p:nvSpPr>
-        <p:spPr>
-          <a:xfrm>
-            <a:off x="10722173" y="1860748"/>
-            <a:ext cx="568127" cy="120650"/>
-          </a:xfrm>
-          <a:prstGeom prst="rect">
-            <a:avLst/>
-          </a:prstGeom>
-          <a:noFill/>
-          <a:ln/>
-        </p:spPr>
-        <p:txBody>
-          <a:bodyPr wrap="none" lIns="0" tIns="0" rIns="0" bIns="0" rtlCol="0" anchor="ctr"/>
-          <a:lstStyle/>
-          <a:p>
-            <a:pPr algn="l" indent="0" marL="0">
-              <a:buNone/>
-            </a:pPr>
-            <a:r>
-              <a:rPr lang="ko-KR" altLang="en-US" sz="800" b="1" spc="-16" kern="0" dirty="0">
-                <a:solidFill>
-                  <a:srgbClr val="FFFFFF">
-                    <a:alpha val="88000"/>
-                  </a:srgbClr>
-                </a:solidFill>
-                <a:latin typeface="Pretendard" pitchFamily="34" charset="0"/>
-                <a:ea typeface="Pretendard" pitchFamily="34" charset="-127"/>
-                <a:cs typeface="Pretendard" pitchFamily="34" charset="-120"/>
-              </a:rPr>
-              <a:t>건물 1동 실증</a:t>
-            </a:r>
-            <a:endParaRPr lang="en-US" sz="800" dirty="0"/>
-          </a:p>
-        </p:txBody>
-      </p:sp>
-      <p:sp>
-        <p:nvSpPr>
-          <p:cNvPr id="127" name="379"/>
-          <p:cNvSpPr txBox="1"/>
-          <p:nvPr/>
-        </p:nvSpPr>
-        <p:spPr>
-          <a:xfrm>
-            <a:off x="8890000" y="2006798"/>
-            <a:ext cx="1597350" cy="971550"/>
-          </a:xfrm>
-          <a:prstGeom prst="rect">
-            <a:avLst/>
-          </a:prstGeom>
-          <a:noFill/>
-          <a:ln/>
-        </p:spPr>
-        <p:txBody>
-          <a:bodyPr wrap="none" lIns="0" tIns="0" rIns="0" bIns="0" rtlCol="0" anchor="ctr"/>
-          <a:lstStyle/>
-          <a:p>
-            <a:pPr algn="l" indent="0" marL="0">
-              <a:buNone/>
-            </a:pPr>
-            <a:r>
-              <a:rPr lang="ko-KR" altLang="en-US" sz="6400" spc="-320" kern="0" dirty="0">
-                <a:solidFill>
-                  <a:srgbClr val="FFFFFF"/>
-                </a:solidFill>
-                <a:latin typeface="Pretendard ExtraBold" pitchFamily="34" charset="0"/>
-                <a:ea typeface="Pretendard ExtraBold" pitchFamily="34" charset="-127"/>
-                <a:cs typeface="Pretendard ExtraBold" pitchFamily="34" charset="-120"/>
-              </a:rPr>
-              <a:t>379</a:t>
-            </a:r>
-            <a:endParaRPr lang="en-US" sz="6400" dirty="0"/>
-          </a:p>
-        </p:txBody>
-      </p:sp>
-      <p:sp>
-        <p:nvSpPr>
-          <p:cNvPr id="128" name="/ 406"/>
-          <p:cNvSpPr txBox="1"/>
-          <p:nvPr/>
-        </p:nvSpPr>
-        <p:spPr>
-          <a:xfrm>
-            <a:off x="10498534" y="2540198"/>
-            <a:ext cx="664170" cy="304800"/>
-          </a:xfrm>
-          <a:prstGeom prst="rect">
-            <a:avLst/>
-          </a:prstGeom>
-          <a:noFill/>
-          <a:ln/>
-        </p:spPr>
-        <p:txBody>
-          <a:bodyPr wrap="none" lIns="0" tIns="0" rIns="0" bIns="0" rtlCol="0" anchor="ctr"/>
-          <a:lstStyle/>
-          <a:p>
-            <a:pPr algn="l" indent="0" marL="0">
-              <a:buNone/>
-            </a:pPr>
-            <a:r>
-              <a:rPr lang="ko-KR" altLang="en-US" sz="2000" b="1" spc="-60" kern="0" dirty="0">
-                <a:solidFill>
-                  <a:srgbClr val="FFFFFF">
-                    <a:alpha val="55000"/>
-                  </a:srgbClr>
-                </a:solidFill>
-                <a:latin typeface="Pretendard" pitchFamily="34" charset="0"/>
-                <a:ea typeface="Pretendard" pitchFamily="34" charset="-127"/>
-                <a:cs typeface="Pretendard" pitchFamily="34" charset="-120"/>
-              </a:rPr>
-              <a:t>/ 406</a:t>
-            </a:r>
-            <a:endParaRPr lang="en-US" sz="2000" dirty="0"/>
-          </a:p>
-        </p:txBody>
-      </p:sp>
-      <p:sp>
-        <p:nvSpPr>
-          <p:cNvPr id="129" name="406개 객체 중 379개 자동 생성"/>
-          <p:cNvSpPr txBox="1"/>
-          <p:nvPr/>
-        </p:nvSpPr>
-        <p:spPr>
-          <a:xfrm>
-            <a:off x="8890000" y="2965648"/>
-            <a:ext cx="1763522" cy="158750"/>
-          </a:xfrm>
-          <a:prstGeom prst="rect">
-            <a:avLst/>
-          </a:prstGeom>
-          <a:noFill/>
-          <a:ln/>
-        </p:spPr>
-        <p:txBody>
-          <a:bodyPr wrap="none" lIns="0" tIns="0" rIns="0" bIns="0" rtlCol="0" anchor="ctr"/>
-          <a:lstStyle/>
-          <a:p>
-            <a:pPr algn="l" indent="0" marL="0">
-              <a:buNone/>
-            </a:pPr>
-            <a:r>
-              <a:rPr lang="ko-KR" altLang="en-US" sz="1050" spc="-12" kern="0" dirty="0">
-                <a:solidFill>
-                  <a:srgbClr val="FFFFFF">
-                    <a:alpha val="82000"/>
-                  </a:srgbClr>
-                </a:solidFill>
-                <a:latin typeface="Pretendard SemiBold" pitchFamily="34" charset="0"/>
-                <a:ea typeface="Pretendard SemiBold" pitchFamily="34" charset="-127"/>
-                <a:cs typeface="Pretendard SemiBold" pitchFamily="34" charset="-120"/>
-              </a:rPr>
-              <a:t>406개 객체 중 379개 자동 생성</a:t>
-            </a:r>
-            <a:endParaRPr lang="en-US" sz="1050" dirty="0"/>
-          </a:p>
-        </p:txBody>
-      </p:sp>
-      <p:sp>
-        <p:nvSpPr>
-          <p:cNvPr id="130" name="생성 완성도"/>
-          <p:cNvSpPr txBox="1"/>
-          <p:nvPr/>
-        </p:nvSpPr>
-        <p:spPr>
-          <a:xfrm>
-            <a:off x="8890000" y="3526929"/>
-            <a:ext cx="590848" cy="146050"/>
-          </a:xfrm>
-          <a:prstGeom prst="rect">
-            <a:avLst/>
-          </a:prstGeom>
-          <a:noFill/>
-          <a:ln/>
-        </p:spPr>
-        <p:txBody>
-          <a:bodyPr wrap="none" lIns="0" tIns="0" rIns="0" bIns="0" rtlCol="0" anchor="ctr"/>
-          <a:lstStyle/>
-          <a:p>
-            <a:pPr algn="l" indent="0" marL="0">
-              <a:buNone/>
-            </a:pPr>
-            <a:r>
-              <a:rPr lang="ko-KR" altLang="en-US" sz="950" b="1" spc="-12" kern="0" dirty="0">
-                <a:solidFill>
-                  <a:srgbClr val="FFFFFF">
-                    <a:alpha val="75000"/>
-                  </a:srgbClr>
-                </a:solidFill>
-                <a:latin typeface="Pretendard" pitchFamily="34" charset="0"/>
-                <a:ea typeface="Pretendard" pitchFamily="34" charset="-127"/>
-                <a:cs typeface="Pretendard" pitchFamily="34" charset="-120"/>
-              </a:rPr>
-              <a:t>생성 완성도</a:t>
-            </a:r>
-            <a:endParaRPr lang="en-US" sz="950" dirty="0"/>
-          </a:p>
-        </p:txBody>
-      </p:sp>
-      <p:sp>
-        <p:nvSpPr>
-          <p:cNvPr id="131" name="93.3%"/>
-          <p:cNvSpPr txBox="1"/>
-          <p:nvPr/>
-        </p:nvSpPr>
-        <p:spPr>
-          <a:xfrm>
-            <a:off x="10690721" y="3450729"/>
-            <a:ext cx="688479" cy="241300"/>
-          </a:xfrm>
-          <a:prstGeom prst="rect">
-            <a:avLst/>
-          </a:prstGeom>
-          <a:noFill/>
-          <a:ln/>
-        </p:spPr>
-        <p:txBody>
-          <a:bodyPr wrap="none" lIns="0" tIns="0" rIns="0" bIns="0" rtlCol="0" anchor="ctr"/>
-          <a:lstStyle/>
-          <a:p>
-            <a:pPr algn="l" indent="0" marL="0">
-              <a:buNone/>
-            </a:pPr>
-            <a:r>
-              <a:rPr lang="ko-KR" altLang="en-US" sz="1600" spc="-48" kern="0" dirty="0">
-                <a:solidFill>
-                  <a:srgbClr val="FFFFFF"/>
-                </a:solidFill>
-                <a:latin typeface="Pretendard ExtraBold" pitchFamily="34" charset="0"/>
-                <a:ea typeface="Pretendard ExtraBold" pitchFamily="34" charset="-127"/>
-                <a:cs typeface="Pretendard ExtraBold" pitchFamily="34" charset="-120"/>
-              </a:rPr>
-              <a:t>93.3%</a:t>
-            </a:r>
-            <a:endParaRPr lang="en-US" sz="1600" dirty="0"/>
-          </a:p>
-        </p:txBody>
-      </p:sp>
-      <p:sp>
-        <p:nvSpPr>
-          <p:cNvPr id="132" name="요소별 생성"/>
-          <p:cNvSpPr txBox="1"/>
-          <p:nvPr/>
-        </p:nvSpPr>
-        <p:spPr>
-          <a:xfrm>
-            <a:off x="8890000" y="3812679"/>
-            <a:ext cx="507206" cy="120650"/>
-          </a:xfrm>
-          <a:prstGeom prst="rect">
-            <a:avLst/>
-          </a:prstGeom>
-          <a:noFill/>
-          <a:ln/>
-        </p:spPr>
-        <p:txBody>
-          <a:bodyPr wrap="none" lIns="0" tIns="0" rIns="0" bIns="0" rtlCol="0" anchor="ctr"/>
-          <a:lstStyle/>
-          <a:p>
-            <a:pPr algn="l" indent="0" marL="0">
-              <a:buNone/>
-            </a:pPr>
-            <a:r>
-              <a:rPr lang="ko-KR" altLang="en-US" sz="800" b="1" spc="-8" kern="0" dirty="0">
-                <a:solidFill>
-                  <a:srgbClr val="FFFFFF">
-                    <a:alpha val="62000"/>
-                  </a:srgbClr>
-                </a:solidFill>
-                <a:latin typeface="Pretendard" pitchFamily="34" charset="0"/>
-                <a:ea typeface="Pretendard" pitchFamily="34" charset="-127"/>
-                <a:cs typeface="Pretendard" pitchFamily="34" charset="-120"/>
-              </a:rPr>
-              <a:t>요소별 생성</a:t>
-            </a:r>
-            <a:endParaRPr lang="en-US" sz="800" dirty="0"/>
-          </a:p>
-        </p:txBody>
-      </p:sp>
-      <p:sp>
-        <p:nvSpPr>
-          <p:cNvPr id="133" name="벽"/>
-          <p:cNvSpPr txBox="1"/>
-          <p:nvPr/>
-        </p:nvSpPr>
-        <p:spPr>
-          <a:xfrm>
-            <a:off x="8890000" y="4003179"/>
-            <a:ext cx="152698" cy="146050"/>
-          </a:xfrm>
-          <a:prstGeom prst="rect">
-            <a:avLst/>
-          </a:prstGeom>
-          <a:noFill/>
-          <a:ln/>
-        </p:spPr>
-        <p:txBody>
-          <a:bodyPr wrap="none" lIns="0" tIns="0" rIns="0" bIns="0" rtlCol="0" anchor="ctr"/>
-          <a:lstStyle/>
-          <a:p>
-            <a:pPr algn="l" indent="0" marL="0">
-              <a:buNone/>
-            </a:pPr>
-            <a:r>
-              <a:rPr lang="ko-KR" altLang="en-US" sz="950" spc="-19" kern="0" dirty="0">
-                <a:solidFill>
-                  <a:srgbClr val="FFFFFF">
-                    <a:alpha val="60000"/>
-                  </a:srgbClr>
-                </a:solidFill>
-                <a:latin typeface="Pretendard SemiBold" pitchFamily="34" charset="0"/>
-                <a:ea typeface="Pretendard SemiBold" pitchFamily="34" charset="-127"/>
-                <a:cs typeface="Pretendard SemiBold" pitchFamily="34" charset="-120"/>
-              </a:rPr>
-              <a:t>벽</a:t>
-            </a:r>
-            <a:endParaRPr lang="en-US" sz="950" dirty="0"/>
-          </a:p>
-        </p:txBody>
-      </p:sp>
-      <p:sp>
-        <p:nvSpPr>
-          <p:cNvPr id="134" name="135 / 153"/>
-          <p:cNvSpPr txBox="1"/>
-          <p:nvPr/>
-        </p:nvSpPr>
-        <p:spPr>
-          <a:xfrm>
-            <a:off x="9017298" y="4003179"/>
-            <a:ext cx="603647" cy="146050"/>
-          </a:xfrm>
-          <a:prstGeom prst="rect">
-            <a:avLst/>
-          </a:prstGeom>
-          <a:noFill/>
-          <a:ln/>
-        </p:spPr>
-        <p:txBody>
-          <a:bodyPr wrap="none" lIns="0" tIns="0" rIns="0" bIns="0" rtlCol="0" anchor="ctr"/>
-          <a:lstStyle/>
-          <a:p>
-            <a:pPr algn="l" indent="0" marL="0">
-              <a:buNone/>
-            </a:pPr>
-            <a:r>
-              <a:rPr lang="ko-KR" altLang="en-US" sz="950" spc="-19" kern="0" dirty="0">
-                <a:solidFill>
-                  <a:srgbClr val="FFFFFF"/>
-                </a:solidFill>
-                <a:latin typeface="Pretendard ExtraBold" pitchFamily="34" charset="0"/>
-                <a:ea typeface="Pretendard ExtraBold" pitchFamily="34" charset="-127"/>
-                <a:cs typeface="Pretendard ExtraBold" pitchFamily="34" charset="-120"/>
-              </a:rPr>
-              <a:t>135</a:t>
-            </a:r>
-            <a:pPr algn="l" indent="0" marL="0">
-              <a:buNone/>
-            </a:pPr>
-            <a:r>
-              <a:rPr lang="ko-KR" altLang="en-US" sz="950" spc="-19" kern="0" dirty="0">
-                <a:solidFill>
-                  <a:srgbClr val="FFFFFF">
-                    <a:alpha val="60000"/>
-                  </a:srgbClr>
-                </a:solidFill>
-                <a:latin typeface="Pretendard SemiBold" pitchFamily="34" charset="0"/>
-                <a:ea typeface="Pretendard SemiBold" pitchFamily="34" charset="-127"/>
-                <a:cs typeface="Pretendard SemiBold" pitchFamily="34" charset="-120"/>
-              </a:rPr>
-              <a:t> / 153</a:t>
-            </a:r>
-            <a:endParaRPr lang="en-US" sz="950" dirty="0"/>
-          </a:p>
-        </p:txBody>
-      </p:sp>
-      <p:sp>
-        <p:nvSpPr>
-          <p:cNvPr id="135" name="문"/>
-          <p:cNvSpPr txBox="1"/>
-          <p:nvPr/>
-        </p:nvSpPr>
-        <p:spPr>
-          <a:xfrm>
-            <a:off x="9794776" y="4003179"/>
-            <a:ext cx="152698" cy="146050"/>
-          </a:xfrm>
-          <a:prstGeom prst="rect">
-            <a:avLst/>
-          </a:prstGeom>
-          <a:noFill/>
-          <a:ln/>
-        </p:spPr>
-        <p:txBody>
-          <a:bodyPr wrap="none" lIns="0" tIns="0" rIns="0" bIns="0" rtlCol="0" anchor="ctr"/>
-          <a:lstStyle/>
-          <a:p>
-            <a:pPr algn="l" indent="0" marL="0">
-              <a:buNone/>
-            </a:pPr>
-            <a:r>
-              <a:rPr lang="ko-KR" altLang="en-US" sz="950" spc="-19" kern="0" dirty="0">
-                <a:solidFill>
-                  <a:srgbClr val="FFFFFF">
-                    <a:alpha val="60000"/>
-                  </a:srgbClr>
-                </a:solidFill>
-                <a:latin typeface="Pretendard SemiBold" pitchFamily="34" charset="0"/>
-                <a:ea typeface="Pretendard SemiBold" pitchFamily="34" charset="-127"/>
-                <a:cs typeface="Pretendard SemiBold" pitchFamily="34" charset="-120"/>
-              </a:rPr>
-              <a:t>문</a:t>
-            </a:r>
-            <a:endParaRPr lang="en-US" sz="950" dirty="0"/>
-          </a:p>
-        </p:txBody>
-      </p:sp>
-      <p:sp>
-        <p:nvSpPr>
-          <p:cNvPr id="136" name="64 / 64"/>
-          <p:cNvSpPr txBox="1"/>
-          <p:nvPr/>
-        </p:nvSpPr>
-        <p:spPr>
-          <a:xfrm>
-            <a:off x="9922073" y="4003179"/>
-            <a:ext cx="450453" cy="146050"/>
-          </a:xfrm>
-          <a:prstGeom prst="rect">
-            <a:avLst/>
-          </a:prstGeom>
-          <a:noFill/>
-          <a:ln/>
-        </p:spPr>
-        <p:txBody>
-          <a:bodyPr wrap="none" lIns="0" tIns="0" rIns="0" bIns="0" rtlCol="0" anchor="ctr"/>
-          <a:lstStyle/>
-          <a:p>
-            <a:pPr algn="l" indent="0" marL="0">
-              <a:buNone/>
-            </a:pPr>
-            <a:r>
-              <a:rPr lang="ko-KR" altLang="en-US" sz="950" spc="-19" kern="0" dirty="0">
-                <a:solidFill>
-                  <a:srgbClr val="FFFFFF"/>
-                </a:solidFill>
-                <a:latin typeface="Pretendard ExtraBold" pitchFamily="34" charset="0"/>
-                <a:ea typeface="Pretendard ExtraBold" pitchFamily="34" charset="-127"/>
-                <a:cs typeface="Pretendard ExtraBold" pitchFamily="34" charset="-120"/>
-              </a:rPr>
-              <a:t>64</a:t>
-            </a:r>
-            <a:pPr algn="l" indent="0" marL="0">
-              <a:buNone/>
-            </a:pPr>
-            <a:r>
-              <a:rPr lang="ko-KR" altLang="en-US" sz="950" spc="-19" kern="0" dirty="0">
-                <a:solidFill>
-                  <a:srgbClr val="FFFFFF">
-                    <a:alpha val="60000"/>
-                  </a:srgbClr>
-                </a:solidFill>
-                <a:latin typeface="Pretendard SemiBold" pitchFamily="34" charset="0"/>
-                <a:ea typeface="Pretendard SemiBold" pitchFamily="34" charset="-127"/>
-                <a:cs typeface="Pretendard SemiBold" pitchFamily="34" charset="-120"/>
-              </a:rPr>
-              <a:t> / 64</a:t>
-            </a:r>
-            <a:endParaRPr lang="en-US" sz="950" dirty="0"/>
-          </a:p>
-        </p:txBody>
-      </p:sp>
-      <p:sp>
-        <p:nvSpPr>
-          <p:cNvPr id="137" name="창문"/>
-          <p:cNvSpPr txBox="1"/>
-          <p:nvPr/>
-        </p:nvSpPr>
-        <p:spPr>
-          <a:xfrm>
-            <a:off x="10546358" y="4003179"/>
-            <a:ext cx="254595" cy="146050"/>
-          </a:xfrm>
-          <a:prstGeom prst="rect">
-            <a:avLst/>
-          </a:prstGeom>
-          <a:noFill/>
-          <a:ln/>
-        </p:spPr>
-        <p:txBody>
-          <a:bodyPr wrap="none" lIns="0" tIns="0" rIns="0" bIns="0" rtlCol="0" anchor="ctr"/>
-          <a:lstStyle/>
-          <a:p>
-            <a:pPr algn="l" indent="0" marL="0">
-              <a:buNone/>
-            </a:pPr>
-            <a:r>
-              <a:rPr lang="ko-KR" altLang="en-US" sz="950" spc="-19" kern="0" dirty="0">
-                <a:solidFill>
-                  <a:srgbClr val="FFFFFF">
-                    <a:alpha val="60000"/>
-                  </a:srgbClr>
-                </a:solidFill>
-                <a:latin typeface="Pretendard SemiBold" pitchFamily="34" charset="0"/>
-                <a:ea typeface="Pretendard SemiBold" pitchFamily="34" charset="-127"/>
-                <a:cs typeface="Pretendard SemiBold" pitchFamily="34" charset="-120"/>
-              </a:rPr>
-              <a:t>창문</a:t>
-            </a:r>
-            <a:endParaRPr lang="en-US" sz="950" dirty="0"/>
-          </a:p>
-        </p:txBody>
-      </p:sp>
-      <p:sp>
-        <p:nvSpPr>
-          <p:cNvPr id="138" name="180 / 189"/>
-          <p:cNvSpPr txBox="1"/>
-          <p:nvPr/>
-        </p:nvSpPr>
-        <p:spPr>
-          <a:xfrm>
-            <a:off x="10775553" y="4003179"/>
-            <a:ext cx="603647" cy="146050"/>
-          </a:xfrm>
-          <a:prstGeom prst="rect">
-            <a:avLst/>
-          </a:prstGeom>
-          <a:noFill/>
-          <a:ln/>
-        </p:spPr>
-        <p:txBody>
-          <a:bodyPr wrap="none" lIns="0" tIns="0" rIns="0" bIns="0" rtlCol="0" anchor="ctr"/>
-          <a:lstStyle/>
-          <a:p>
-            <a:pPr algn="l" indent="0" marL="0">
-              <a:buNone/>
-            </a:pPr>
-            <a:r>
-              <a:rPr lang="ko-KR" altLang="en-US" sz="950" spc="-19" kern="0" dirty="0">
-                <a:solidFill>
-                  <a:srgbClr val="FFFFFF"/>
-                </a:solidFill>
-                <a:latin typeface="Pretendard ExtraBold" pitchFamily="34" charset="0"/>
-                <a:ea typeface="Pretendard ExtraBold" pitchFamily="34" charset="-127"/>
-                <a:cs typeface="Pretendard ExtraBold" pitchFamily="34" charset="-120"/>
-              </a:rPr>
-              <a:t>180</a:t>
-            </a:r>
-            <a:pPr algn="l" indent="0" marL="0">
-              <a:buNone/>
-            </a:pPr>
-            <a:r>
-              <a:rPr lang="ko-KR" altLang="en-US" sz="950" spc="-19" kern="0" dirty="0">
-                <a:solidFill>
-                  <a:srgbClr val="FFFFFF">
-                    <a:alpha val="60000"/>
-                  </a:srgbClr>
-                </a:solidFill>
-                <a:latin typeface="Pretendard SemiBold" pitchFamily="34" charset="0"/>
-                <a:ea typeface="Pretendard SemiBold" pitchFamily="34" charset="-127"/>
-                <a:cs typeface="Pretendard SemiBold" pitchFamily="34" charset="-120"/>
-              </a:rPr>
-              <a:t> / 189</a:t>
-            </a:r>
-            <a:endParaRPr lang="en-US" sz="950" dirty="0"/>
-          </a:p>
-        </p:txBody>
-      </p:sp>
-      <p:sp>
-        <p:nvSpPr>
-          <p:cNvPr id="139" name="자동 생성된 3D BIM"/>
-          <p:cNvSpPr txBox="1"/>
-          <p:nvPr/>
-        </p:nvSpPr>
-        <p:spPr>
-          <a:xfrm>
-            <a:off x="8890000" y="6019998"/>
-            <a:ext cx="856258" cy="120650"/>
-          </a:xfrm>
-          <a:prstGeom prst="rect">
-            <a:avLst/>
-          </a:prstGeom>
-          <a:noFill/>
-          <a:ln/>
-        </p:spPr>
-        <p:txBody>
-          <a:bodyPr wrap="none" lIns="0" tIns="0" rIns="0" bIns="0" rtlCol="0" anchor="ctr"/>
-          <a:lstStyle/>
-          <a:p>
-            <a:pPr algn="l" indent="0" marL="0">
-              <a:buNone/>
-            </a:pPr>
-            <a:r>
-              <a:rPr lang="ko-KR" altLang="en-US" sz="800" spc="-12" kern="0" dirty="0">
-                <a:solidFill>
-                  <a:srgbClr val="FFFFFF">
-                    <a:alpha val="62000"/>
-                  </a:srgbClr>
-                </a:solidFill>
-                <a:latin typeface="Pretendard SemiBold" pitchFamily="34" charset="0"/>
-                <a:ea typeface="Pretendard SemiBold" pitchFamily="34" charset="-127"/>
-                <a:cs typeface="Pretendard SemiBold" pitchFamily="34" charset="-120"/>
-              </a:rPr>
-              <a:t>자동 생성된 3D BIM</a:t>
-            </a:r>
-            <a:endParaRPr lang="en-US" sz="800" dirty="0"/>
-          </a:p>
-        </p:txBody>
-      </p:sp>
-      <p:sp>
-        <p:nvSpPr>
-          <p:cNvPr id="140" name="석사 연구 발표  ·  평면도와 입면도 객체 인식 및 정보 통합을 통한 "/>
-          <p:cNvSpPr txBox="1"/>
-          <p:nvPr/>
-        </p:nvSpPr>
-        <p:spPr>
-          <a:xfrm>
-            <a:off x="609600" y="6472238"/>
-            <a:ext cx="5145113" cy="114300"/>
-          </a:xfrm>
-          <a:prstGeom prst="rect">
-            <a:avLst/>
-          </a:prstGeom>
-          <a:noFill/>
-          <a:ln/>
-        </p:spPr>
-        <p:txBody>
-          <a:bodyPr wrap="none" lIns="0" tIns="0" rIns="0" bIns="0" rtlCol="0" anchor="ctr"/>
-          <a:lstStyle/>
-          <a:p>
-            <a:pPr algn="l" indent="0" marL="0">
-              <a:buNone/>
-            </a:pPr>
-            <a:r>
-              <a:rPr lang="ko-KR" altLang="en-US" sz="750" spc="-12" kern="0" dirty="0">
-                <a:solidFill>
-                  <a:srgbClr val="737C8B"/>
-                </a:solidFill>
-                <a:latin typeface="Pretendard Medium" pitchFamily="34" charset="0"/>
-                <a:ea typeface="Pretendard Medium" pitchFamily="34" charset="-127"/>
-                <a:cs typeface="Pretendard Medium" pitchFamily="34" charset="-120"/>
-              </a:rPr>
-              <a:t>석사 연구 발표  ·  평면도와 입면도 객체 인식 및 정보 통합을 통한 3D BIM 자동 생성 연구  ·  Utility 기술(건축, BIM/5D) 지원자 ○○○</a:t>
-            </a:r>
-            <a:endParaRPr lang="en-US" sz="750" dirty="0"/>
-          </a:p>
-        </p:txBody>
-      </p:sp>
-      <p:sp>
-        <p:nvSpPr>
-          <p:cNvPr id="141" name="04 / 05"/>
-          <p:cNvSpPr txBox="1"/>
-          <p:nvPr/>
-        </p:nvSpPr>
-        <p:spPr>
-          <a:xfrm>
-            <a:off x="11214795" y="6472238"/>
-            <a:ext cx="418405" cy="114300"/>
-          </a:xfrm>
-          <a:prstGeom prst="rect">
-            <a:avLst/>
-          </a:prstGeom>
-          <a:noFill/>
-          <a:ln/>
-        </p:spPr>
-        <p:txBody>
-          <a:bodyPr wrap="none" lIns="0" tIns="0" rIns="0" bIns="0" rtlCol="0" anchor="ctr"/>
-          <a:lstStyle/>
-          <a:p>
-            <a:pPr algn="l" indent="0" marL="0">
-              <a:buNone/>
-            </a:pPr>
-            <a:r>
-              <a:rPr lang="ko-KR" altLang="en-US" sz="750" spc="45" kern="0" dirty="0">
-                <a:solidFill>
-                  <a:srgbClr val="102A4C"/>
-                </a:solidFill>
-                <a:latin typeface="Pretendard ExtraBold" pitchFamily="34" charset="0"/>
-                <a:ea typeface="Pretendard ExtraBold" pitchFamily="34" charset="-127"/>
-                <a:cs typeface="Pretendard ExtraBold" pitchFamily="34" charset="-120"/>
-              </a:rPr>
               <a:t>04</a:t>
             </a:r>
-            <a:pPr algn="l" indent="0" marL="0">
-              <a:buNone/>
-            </a:pPr>
             <a:r>
               <a:rPr lang="ko-KR" altLang="en-US" sz="750" spc="45" kern="0" dirty="0">
                 <a:solidFill>
@@ -23081,15 +22754,7 @@
               </a:rPr>
               <a:t>직무에서 마주할 세 가지 과제가</a:t>
             </a:r>
-            <a:endParaRPr lang="en-US" sz="2300" dirty="0"/>
-          </a:p>
-          <a:p>
-            <a:pPr algn="l" indent="0" marL="0">
-              <a:lnSpc>
-                <a:spcPts val="2852"/>
-              </a:lnSpc>
-              <a:buNone/>
-            </a:pPr>
+            <a:br/>
             <a:r>
               <a:rPr lang="ko-KR" altLang="en-US" sz="2300" spc="-92" kern="0" dirty="0">
                 <a:solidFill>
@@ -23101,12 +22766,6 @@
               </a:rPr>
               <a:t>제 연구와 맞닿아</a:t>
             </a:r>
-            <a:pPr algn="l" indent="0" marL="0">
-              <a:lnSpc>
-                <a:spcPts val="2852"/>
-              </a:lnSpc>
-              <a:buNone/>
-            </a:pPr>
             <a:r>
               <a:rPr lang="ko-KR" altLang="en-US" sz="2300" spc="-92" kern="0" dirty="0">
                 <a:solidFill>
@@ -23511,8 +23170,213 @@
               </a:rPr>
               <a:t>여러 출처의 도면·모델 데이터를</a:t>
             </a:r>
+            <a:br/>
+            <a:r>
+              <a:rPr lang="ko-KR" altLang="en-US" sz="1100" spc="-28" kern="0" dirty="0">
+                <a:solidFill>
+                  <a:srgbClr val="3F4654"/>
+                </a:solidFill>
+                <a:latin typeface="Pretendard Medium" pitchFamily="34" charset="0"/>
+                <a:ea typeface="Pretendard Medium" pitchFamily="34" charset="-127"/>
+                <a:cs typeface="Pretendard Medium" pitchFamily="34" charset="-120"/>
+              </a:rPr>
+              <a:t>하나로 통합</a:t>
+            </a:r>
             <a:endParaRPr lang="en-US" sz="1100" dirty="0"/>
           </a:p>
+        </p:txBody>
+      </p:sp>
+      <p:sp>
+        <p:nvSpPr>
+          <p:cNvPr id="78" name="서로 다른 도면의불완전한 정보를 짝지어"/>
+          <p:cNvSpPr txBox="1"/>
+          <p:nvPr/>
+        </p:nvSpPr>
+        <p:spPr>
+          <a:xfrm>
+            <a:off x="6604000" y="2269331"/>
+            <a:ext cx="1344412" cy="423466"/>
+          </a:xfrm>
+          <a:prstGeom prst="rect">
+            <a:avLst/>
+          </a:prstGeom>
+          <a:noFill/>
+          <a:ln/>
+        </p:spPr>
+        <p:txBody>
+          <a:bodyPr wrap="none" lIns="0" tIns="0" rIns="0" bIns="0" rtlCol="0" anchor="t"/>
+          <a:lstStyle/>
+          <a:p>
+            <a:pPr algn="l" indent="0" marL="0">
+              <a:lnSpc>
+                <a:spcPts val="1667"/>
+              </a:lnSpc>
+              <a:buNone/>
+            </a:pPr>
+            <a:r>
+              <a:rPr lang="ko-KR" altLang="en-US" sz="1150" b="1" spc="-40" kern="0" dirty="0">
+                <a:solidFill>
+                  <a:srgbClr val="141820"/>
+                </a:solidFill>
+                <a:latin typeface="Pretendard" pitchFamily="34" charset="0"/>
+                <a:ea typeface="Pretendard" pitchFamily="34" charset="-127"/>
+                <a:cs typeface="Pretendard" pitchFamily="34" charset="-120"/>
+              </a:rPr>
+              <a:t>서로 다른 도면의</a:t>
+            </a:r>
+            <a:br/>
+            <a:r>
+              <a:rPr lang="ko-KR" altLang="en-US" sz="1150" b="1" spc="-40" kern="0" dirty="0">
+                <a:solidFill>
+                  <a:srgbClr val="141820"/>
+                </a:solidFill>
+                <a:latin typeface="Pretendard" pitchFamily="34" charset="0"/>
+                <a:ea typeface="Pretendard" pitchFamily="34" charset="-127"/>
+                <a:cs typeface="Pretendard" pitchFamily="34" charset="-120"/>
+              </a:rPr>
+              <a:t>불완전한 정보를 짝지어</a:t>
+            </a:r>
+            <a:endParaRPr lang="en-US" sz="1150" dirty="0"/>
+          </a:p>
+        </p:txBody>
+      </p:sp>
+      <p:sp>
+        <p:nvSpPr>
+          <p:cNvPr id="79" name="하나의 3D 모델로 통합"/>
+          <p:cNvSpPr txBox="1"/>
+          <p:nvPr/>
+        </p:nvSpPr>
+        <p:spPr>
+          <a:xfrm>
+            <a:off x="8978900" y="2399407"/>
+            <a:ext cx="1473142" cy="196850"/>
+          </a:xfrm>
+          <a:prstGeom prst="rect">
+            <a:avLst/>
+          </a:prstGeom>
+          <a:noFill/>
+          <a:ln/>
+        </p:spPr>
+        <p:txBody>
+          <a:bodyPr wrap="none" lIns="0" tIns="0" rIns="0" bIns="0" rtlCol="0" anchor="ctr"/>
+          <a:lstStyle/>
+          <a:p>
+            <a:pPr algn="l" indent="0" marL="0">
+              <a:buNone/>
+            </a:pPr>
+            <a:r>
+              <a:rPr lang="ko-KR" altLang="en-US" sz="1300" spc="-52" kern="0" dirty="0">
+                <a:solidFill>
+                  <a:srgbClr val="102A4C"/>
+                </a:solidFill>
+                <a:latin typeface="Pretendard ExtraBold" pitchFamily="34" charset="0"/>
+                <a:ea typeface="Pretendard ExtraBold" pitchFamily="34" charset="-127"/>
+                <a:cs typeface="Pretendard ExtraBold" pitchFamily="34" charset="-120"/>
+              </a:rPr>
+              <a:t>하나의 3D 모델로 통합</a:t>
+            </a:r>
+            <a:endParaRPr lang="en-US" sz="1300" dirty="0"/>
+          </a:p>
+        </p:txBody>
+      </p:sp>
+      <p:sp>
+        <p:nvSpPr>
+          <p:cNvPr id="80" name="과제 2"/>
+          <p:cNvSpPr txBox="1"/>
+          <p:nvPr/>
+        </p:nvSpPr>
+        <p:spPr>
+          <a:xfrm>
+            <a:off x="1549400" y="3453507"/>
+            <a:ext cx="360759" cy="120650"/>
+          </a:xfrm>
+          <a:prstGeom prst="rect">
+            <a:avLst/>
+          </a:prstGeom>
+          <a:noFill/>
+          <a:ln/>
+        </p:spPr>
+        <p:txBody>
+          <a:bodyPr wrap="none" lIns="0" tIns="0" rIns="0" bIns="0" rtlCol="0" anchor="ctr"/>
+          <a:lstStyle/>
+          <a:p>
+            <a:pPr algn="l" indent="0" marL="0">
+              <a:buNone/>
+            </a:pPr>
+            <a:r>
+              <a:rPr lang="ko-KR" altLang="en-US" sz="800" spc="96" kern="0" dirty="0">
+                <a:solidFill>
+                  <a:srgbClr val="737C8B"/>
+                </a:solidFill>
+                <a:latin typeface="Pretendard ExtraBold" pitchFamily="34" charset="0"/>
+                <a:ea typeface="Pretendard ExtraBold" pitchFamily="34" charset="-127"/>
+                <a:cs typeface="Pretendard ExtraBold" pitchFamily="34" charset="-120"/>
+              </a:rPr>
+              <a:t>과제 2</a:t>
+            </a:r>
+            <a:endParaRPr lang="en-US" sz="800" dirty="0"/>
+          </a:p>
+        </p:txBody>
+      </p:sp>
+      <p:sp>
+        <p:nvSpPr>
+          <p:cNvPr id="81" name="기존 시설의 디지털 전환"/>
+          <p:cNvSpPr txBox="1"/>
+          <p:nvPr/>
+        </p:nvSpPr>
+        <p:spPr>
+          <a:xfrm>
+            <a:off x="1549400" y="3650357"/>
+            <a:ext cx="1657298" cy="215900"/>
+          </a:xfrm>
+          <a:prstGeom prst="rect">
+            <a:avLst/>
+          </a:prstGeom>
+          <a:noFill/>
+          <a:ln/>
+        </p:spPr>
+        <p:txBody>
+          <a:bodyPr wrap="none" lIns="0" tIns="0" rIns="0" bIns="0" rtlCol="0" anchor="ctr"/>
+          <a:lstStyle/>
+          <a:p>
+            <a:pPr algn="l" indent="0" marL="0">
+              <a:buNone/>
+            </a:pPr>
+            <a:r>
+              <a:rPr lang="ko-KR" altLang="en-US" sz="1400" spc="-56" kern="0" dirty="0">
+                <a:solidFill>
+                  <a:srgbClr val="102A4C"/>
+                </a:solidFill>
+                <a:latin typeface="Pretendard ExtraBold" pitchFamily="34" charset="0"/>
+                <a:ea typeface="Pretendard ExtraBold" pitchFamily="34" charset="-127"/>
+                <a:cs typeface="Pretendard ExtraBold" pitchFamily="34" charset="-120"/>
+              </a:rPr>
+              <a:t>기존 시설의 디지털 전환</a:t>
+            </a:r>
+            <a:endParaRPr lang="en-US" sz="1400" dirty="0"/>
+          </a:p>
+        </p:txBody>
+      </p:sp>
+      <p:sp>
+        <p:nvSpPr>
+          <p:cNvPr id="82" name="이미지 도면만 남은기존 시설이 많음"/>
+          <p:cNvSpPr txBox="1"/>
+          <p:nvPr/>
+        </p:nvSpPr>
+        <p:spPr>
+          <a:xfrm>
+            <a:off x="3841750" y="3435747"/>
+            <a:ext cx="1059186" cy="419100"/>
+          </a:xfrm>
+          <a:prstGeom prst="rect">
+            <a:avLst/>
+          </a:prstGeom>
+          <a:noFill/>
+          <a:ln/>
+        </p:spPr>
+        <p:txBody>
+          <a:bodyPr wrap="none" lIns="0" tIns="0" rIns="0" bIns="0" rtlCol="0" anchor="t"/>
+          <a:lstStyle/>
           <a:p>
             <a:pPr algn="l" indent="0" marL="0">
               <a:lnSpc>
@@ -23529,7 +23393,19 @@
                 <a:ea typeface="Pretendard Medium" pitchFamily="34" charset="-127"/>
                 <a:cs typeface="Pretendard Medium" pitchFamily="34" charset="-120"/>
               </a:rPr>
-              <a:t>하나로 통합</a:t>
+              <a:t>이미지 도면만 남은</a:t>
+            </a:r>
+            <a:br/>
+            <a:r>
+              <a:rPr lang="ko-KR" altLang="en-US" sz="1100" spc="-28" kern="0" dirty="0">
+                <a:solidFill>
+                  <a:srgbClr val="3F4654"/>
+                </a:solidFill>
+                <a:latin typeface="Pretendard Medium" pitchFamily="34" charset="0"/>
+                <a:ea typeface="Pretendard Medium" pitchFamily="34" charset="-127"/>
+                <a:cs typeface="Pretendard Medium" pitchFamily="34" charset="-120"/>
+              </a:rPr>
+              <a:t>기존 시설이 많음</a:t>
             </a:r>
             <a:endParaRPr lang="en-US" sz="1100" dirty="0"/>
           </a:p>
@@ -23537,14 +23413,14 @@
       </p:sp>
       <p:sp>
         <p:nvSpPr>
-          <p:cNvPr id="78" name="서로 다른 도면의불완전한 정보를 짝지어"/>
+          <p:cNvPr id="83" name="CAD 정보 없이이미지 도면에서 BIM 생성"/>
           <p:cNvSpPr txBox="1"/>
           <p:nvPr/>
         </p:nvSpPr>
         <p:spPr>
           <a:xfrm>
-            <a:off x="6604000" y="2269331"/>
-            <a:ext cx="1344412" cy="423466"/>
+            <a:off x="6604000" y="3437731"/>
+            <a:ext cx="1506377" cy="423466"/>
           </a:xfrm>
           <a:prstGeom prst="rect">
             <a:avLst/>
@@ -23571,10 +23447,215 @@
                 <a:ea typeface="Pretendard" pitchFamily="34" charset="-127"/>
                 <a:cs typeface="Pretendard" pitchFamily="34" charset="-120"/>
               </a:rPr>
-              <a:t>서로 다른 도면의</a:t>
+              <a:t>CAD 정보 없이</a:t>
+            </a:r>
+            <a:br/>
+            <a:r>
+              <a:rPr lang="ko-KR" altLang="en-US" sz="1150" b="1" spc="-40" kern="0" dirty="0">
+                <a:solidFill>
+                  <a:srgbClr val="141820"/>
+                </a:solidFill>
+                <a:latin typeface="Pretendard" pitchFamily="34" charset="0"/>
+                <a:ea typeface="Pretendard" pitchFamily="34" charset="-127"/>
+                <a:cs typeface="Pretendard" pitchFamily="34" charset="-120"/>
+              </a:rPr>
+              <a:t>이미지 도면에서 BIM 생성</a:t>
             </a:r>
             <a:endParaRPr lang="en-US" sz="1150" dirty="0"/>
           </a:p>
+        </p:txBody>
+      </p:sp>
+      <p:sp>
+        <p:nvSpPr>
+          <p:cNvPr id="84" name="디지털 전환 기간 단축"/>
+          <p:cNvSpPr txBox="1"/>
+          <p:nvPr/>
+        </p:nvSpPr>
+        <p:spPr>
+          <a:xfrm>
+            <a:off x="8978900" y="3567807"/>
+            <a:ext cx="1394684" cy="196850"/>
+          </a:xfrm>
+          <a:prstGeom prst="rect">
+            <a:avLst/>
+          </a:prstGeom>
+          <a:noFill/>
+          <a:ln/>
+        </p:spPr>
+        <p:txBody>
+          <a:bodyPr wrap="none" lIns="0" tIns="0" rIns="0" bIns="0" rtlCol="0" anchor="ctr"/>
+          <a:lstStyle/>
+          <a:p>
+            <a:pPr algn="l" indent="0" marL="0">
+              <a:buNone/>
+            </a:pPr>
+            <a:r>
+              <a:rPr lang="ko-KR" altLang="en-US" sz="1300" spc="-52" kern="0" dirty="0">
+                <a:solidFill>
+                  <a:srgbClr val="102A4C"/>
+                </a:solidFill>
+                <a:latin typeface="Pretendard ExtraBold" pitchFamily="34" charset="0"/>
+                <a:ea typeface="Pretendard ExtraBold" pitchFamily="34" charset="-127"/>
+                <a:cs typeface="Pretendard ExtraBold" pitchFamily="34" charset="-120"/>
+              </a:rPr>
+              <a:t>디지털 전환 기간 단축</a:t>
+            </a:r>
+            <a:endParaRPr lang="en-US" sz="1300" dirty="0"/>
+          </a:p>
+        </p:txBody>
+      </p:sp>
+      <p:sp>
+        <p:nvSpPr>
+          <p:cNvPr id="85" name="과제 3"/>
+          <p:cNvSpPr txBox="1"/>
+          <p:nvPr/>
+        </p:nvSpPr>
+        <p:spPr>
+          <a:xfrm>
+            <a:off x="1549400" y="4621907"/>
+            <a:ext cx="363637" cy="120650"/>
+          </a:xfrm>
+          <a:prstGeom prst="rect">
+            <a:avLst/>
+          </a:prstGeom>
+          <a:noFill/>
+          <a:ln/>
+        </p:spPr>
+        <p:txBody>
+          <a:bodyPr wrap="none" lIns="0" tIns="0" rIns="0" bIns="0" rtlCol="0" anchor="ctr"/>
+          <a:lstStyle/>
+          <a:p>
+            <a:pPr algn="l" indent="0" marL="0">
+              <a:buNone/>
+            </a:pPr>
+            <a:r>
+              <a:rPr lang="ko-KR" altLang="en-US" sz="800" spc="96" kern="0" dirty="0">
+                <a:solidFill>
+                  <a:srgbClr val="737C8B"/>
+                </a:solidFill>
+                <a:latin typeface="Pretendard ExtraBold" pitchFamily="34" charset="0"/>
+                <a:ea typeface="Pretendard ExtraBold" pitchFamily="34" charset="-127"/>
+                <a:cs typeface="Pretendard ExtraBold" pitchFamily="34" charset="-120"/>
+              </a:rPr>
+              <a:t>과제 3</a:t>
+            </a:r>
+            <a:endParaRPr lang="en-US" sz="800" dirty="0"/>
+          </a:p>
+        </p:txBody>
+      </p:sp>
+      <p:sp>
+        <p:nvSpPr>
+          <p:cNvPr id="86" name="5D(물량·원가) 관리"/>
+          <p:cNvSpPr txBox="1"/>
+          <p:nvPr/>
+        </p:nvSpPr>
+        <p:spPr>
+          <a:xfrm>
+            <a:off x="1549400" y="4818757"/>
+            <a:ext cx="1390477" cy="215900"/>
+          </a:xfrm>
+          <a:prstGeom prst="rect">
+            <a:avLst/>
+          </a:prstGeom>
+          <a:noFill/>
+          <a:ln/>
+        </p:spPr>
+        <p:txBody>
+          <a:bodyPr wrap="none" lIns="0" tIns="0" rIns="0" bIns="0" rtlCol="0" anchor="ctr"/>
+          <a:lstStyle/>
+          <a:p>
+            <a:pPr algn="l" indent="0" marL="0">
+              <a:buNone/>
+            </a:pPr>
+            <a:r>
+              <a:rPr lang="ko-KR" altLang="en-US" sz="1400" spc="-56" kern="0" dirty="0">
+                <a:solidFill>
+                  <a:srgbClr val="102A4C"/>
+                </a:solidFill>
+                <a:latin typeface="Pretendard ExtraBold" pitchFamily="34" charset="0"/>
+                <a:ea typeface="Pretendard ExtraBold" pitchFamily="34" charset="-127"/>
+                <a:cs typeface="Pretendard ExtraBold" pitchFamily="34" charset="-120"/>
+              </a:rPr>
+              <a:t>5D(물량·원가) 관리</a:t>
+            </a:r>
+            <a:endParaRPr lang="en-US" sz="1400" dirty="0"/>
+          </a:p>
+        </p:txBody>
+      </p:sp>
+      <p:sp>
+        <p:nvSpPr>
+          <p:cNvPr id="87" name="BIM 데이터가 정확해야물량·원가 관리가 의미 있음"/>
+          <p:cNvSpPr txBox="1"/>
+          <p:nvPr/>
+        </p:nvSpPr>
+        <p:spPr>
+          <a:xfrm>
+            <a:off x="3841750" y="4604147"/>
+            <a:ext cx="1499856" cy="419100"/>
+          </a:xfrm>
+          <a:prstGeom prst="rect">
+            <a:avLst/>
+          </a:prstGeom>
+          <a:noFill/>
+          <a:ln/>
+        </p:spPr>
+        <p:txBody>
+          <a:bodyPr wrap="none" lIns="0" tIns="0" rIns="0" bIns="0" rtlCol="0" anchor="t"/>
+          <a:lstStyle/>
+          <a:p>
+            <a:pPr algn="l" indent="0" marL="0">
+              <a:lnSpc>
+                <a:spcPts val="1650"/>
+              </a:lnSpc>
+              <a:buNone/>
+            </a:pPr>
+            <a:r>
+              <a:rPr lang="ko-KR" altLang="en-US" sz="1100" spc="-28" kern="0" dirty="0">
+                <a:solidFill>
+                  <a:srgbClr val="3F4654"/>
+                </a:solidFill>
+                <a:latin typeface="Pretendard Medium" pitchFamily="34" charset="0"/>
+                <a:ea typeface="Pretendard Medium" pitchFamily="34" charset="-127"/>
+                <a:cs typeface="Pretendard Medium" pitchFamily="34" charset="-120"/>
+              </a:rPr>
+              <a:t>BIM 데이터가 정확해야</a:t>
+            </a:r>
+            <a:br/>
+            <a:r>
+              <a:rPr lang="ko-KR" altLang="en-US" sz="1100" spc="-28" kern="0" dirty="0">
+                <a:solidFill>
+                  <a:srgbClr val="3F4654"/>
+                </a:solidFill>
+                <a:latin typeface="Pretendard Medium" pitchFamily="34" charset="0"/>
+                <a:ea typeface="Pretendard Medium" pitchFamily="34" charset="-127"/>
+                <a:cs typeface="Pretendard Medium" pitchFamily="34" charset="-120"/>
+              </a:rPr>
+              <a:t>물량·원가 관리가 의미 있음</a:t>
+            </a:r>
+            <a:endParaRPr lang="en-US" sz="1100" dirty="0"/>
+          </a:p>
+        </p:txBody>
+      </p:sp>
+      <p:sp>
+        <p:nvSpPr>
+          <p:cNvPr id="88" name="축척 보정·생성 완성도검증 경험"/>
+          <p:cNvSpPr txBox="1"/>
+          <p:nvPr/>
+        </p:nvSpPr>
+        <p:spPr>
+          <a:xfrm>
+            <a:off x="6604000" y="4606131"/>
+            <a:ext cx="1254280" cy="423466"/>
+          </a:xfrm>
+          <a:prstGeom prst="rect">
+            <a:avLst/>
+          </a:prstGeom>
+          <a:noFill/>
+          <a:ln/>
+        </p:spPr>
+        <p:txBody>
+          <a:bodyPr wrap="none" lIns="0" tIns="0" rIns="0" bIns="0" rtlCol="0" anchor="t"/>
+          <a:lstStyle/>
           <a:p>
             <a:pPr algn="l" indent="0" marL="0">
               <a:lnSpc>
@@ -23591,479 +23672,9 @@
                 <a:ea typeface="Pretendard" pitchFamily="34" charset="-127"/>
                 <a:cs typeface="Pretendard" pitchFamily="34" charset="-120"/>
               </a:rPr>
-              <a:t>불완전한 정보를 짝지어</a:t>
-            </a:r>
-            <a:endParaRPr lang="en-US" sz="1150" dirty="0"/>
-          </a:p>
-        </p:txBody>
-      </p:sp>
-      <p:sp>
-        <p:nvSpPr>
-          <p:cNvPr id="79" name="하나의 3D 모델로 통합"/>
-          <p:cNvSpPr txBox="1"/>
-          <p:nvPr/>
-        </p:nvSpPr>
-        <p:spPr>
-          <a:xfrm>
-            <a:off x="8978900" y="2399407"/>
-            <a:ext cx="1473142" cy="196850"/>
-          </a:xfrm>
-          <a:prstGeom prst="rect">
-            <a:avLst/>
-          </a:prstGeom>
-          <a:noFill/>
-          <a:ln/>
-        </p:spPr>
-        <p:txBody>
-          <a:bodyPr wrap="none" lIns="0" tIns="0" rIns="0" bIns="0" rtlCol="0" anchor="ctr"/>
-          <a:lstStyle/>
-          <a:p>
-            <a:pPr algn="l" indent="0" marL="0">
-              <a:buNone/>
-            </a:pPr>
-            <a:r>
-              <a:rPr lang="ko-KR" altLang="en-US" sz="1300" spc="-52" kern="0" dirty="0">
-                <a:solidFill>
-                  <a:srgbClr val="102A4C"/>
-                </a:solidFill>
-                <a:latin typeface="Pretendard ExtraBold" pitchFamily="34" charset="0"/>
-                <a:ea typeface="Pretendard ExtraBold" pitchFamily="34" charset="-127"/>
-                <a:cs typeface="Pretendard ExtraBold" pitchFamily="34" charset="-120"/>
-              </a:rPr>
-              <a:t>하나의 3D 모델로 통합</a:t>
-            </a:r>
-            <a:endParaRPr lang="en-US" sz="1300" dirty="0"/>
-          </a:p>
-        </p:txBody>
-      </p:sp>
-      <p:sp>
-        <p:nvSpPr>
-          <p:cNvPr id="80" name="과제 2"/>
-          <p:cNvSpPr txBox="1"/>
-          <p:nvPr/>
-        </p:nvSpPr>
-        <p:spPr>
-          <a:xfrm>
-            <a:off x="1549400" y="3453507"/>
-            <a:ext cx="360759" cy="120650"/>
-          </a:xfrm>
-          <a:prstGeom prst="rect">
-            <a:avLst/>
-          </a:prstGeom>
-          <a:noFill/>
-          <a:ln/>
-        </p:spPr>
-        <p:txBody>
-          <a:bodyPr wrap="none" lIns="0" tIns="0" rIns="0" bIns="0" rtlCol="0" anchor="ctr"/>
-          <a:lstStyle/>
-          <a:p>
-            <a:pPr algn="l" indent="0" marL="0">
-              <a:buNone/>
-            </a:pPr>
-            <a:r>
-              <a:rPr lang="ko-KR" altLang="en-US" sz="800" spc="96" kern="0" dirty="0">
-                <a:solidFill>
-                  <a:srgbClr val="737C8B"/>
-                </a:solidFill>
-                <a:latin typeface="Pretendard ExtraBold" pitchFamily="34" charset="0"/>
-                <a:ea typeface="Pretendard ExtraBold" pitchFamily="34" charset="-127"/>
-                <a:cs typeface="Pretendard ExtraBold" pitchFamily="34" charset="-120"/>
-              </a:rPr>
-              <a:t>과제 2</a:t>
-            </a:r>
-            <a:endParaRPr lang="en-US" sz="800" dirty="0"/>
-          </a:p>
-        </p:txBody>
-      </p:sp>
-      <p:sp>
-        <p:nvSpPr>
-          <p:cNvPr id="81" name="기존 시설의 디지털 전환"/>
-          <p:cNvSpPr txBox="1"/>
-          <p:nvPr/>
-        </p:nvSpPr>
-        <p:spPr>
-          <a:xfrm>
-            <a:off x="1549400" y="3650357"/>
-            <a:ext cx="1657298" cy="215900"/>
-          </a:xfrm>
-          <a:prstGeom prst="rect">
-            <a:avLst/>
-          </a:prstGeom>
-          <a:noFill/>
-          <a:ln/>
-        </p:spPr>
-        <p:txBody>
-          <a:bodyPr wrap="none" lIns="0" tIns="0" rIns="0" bIns="0" rtlCol="0" anchor="ctr"/>
-          <a:lstStyle/>
-          <a:p>
-            <a:pPr algn="l" indent="0" marL="0">
-              <a:buNone/>
-            </a:pPr>
-            <a:r>
-              <a:rPr lang="ko-KR" altLang="en-US" sz="1400" spc="-56" kern="0" dirty="0">
-                <a:solidFill>
-                  <a:srgbClr val="102A4C"/>
-                </a:solidFill>
-                <a:latin typeface="Pretendard ExtraBold" pitchFamily="34" charset="0"/>
-                <a:ea typeface="Pretendard ExtraBold" pitchFamily="34" charset="-127"/>
-                <a:cs typeface="Pretendard ExtraBold" pitchFamily="34" charset="-120"/>
-              </a:rPr>
-              <a:t>기존 시설의 디지털 전환</a:t>
-            </a:r>
-            <a:endParaRPr lang="en-US" sz="1400" dirty="0"/>
-          </a:p>
-        </p:txBody>
-      </p:sp>
-      <p:sp>
-        <p:nvSpPr>
-          <p:cNvPr id="82" name="이미지 도면만 남은기존 시설이 많음"/>
-          <p:cNvSpPr txBox="1"/>
-          <p:nvPr/>
-        </p:nvSpPr>
-        <p:spPr>
-          <a:xfrm>
-            <a:off x="3841750" y="3435747"/>
-            <a:ext cx="1059186" cy="419100"/>
-          </a:xfrm>
-          <a:prstGeom prst="rect">
-            <a:avLst/>
-          </a:prstGeom>
-          <a:noFill/>
-          <a:ln/>
-        </p:spPr>
-        <p:txBody>
-          <a:bodyPr wrap="none" lIns="0" tIns="0" rIns="0" bIns="0" rtlCol="0" anchor="t"/>
-          <a:lstStyle/>
-          <a:p>
-            <a:pPr algn="l" indent="0" marL="0">
-              <a:lnSpc>
-                <a:spcPts val="1650"/>
-              </a:lnSpc>
-              <a:buNone/>
-            </a:pPr>
-            <a:r>
-              <a:rPr lang="ko-KR" altLang="en-US" sz="1100" spc="-28" kern="0" dirty="0">
-                <a:solidFill>
-                  <a:srgbClr val="3F4654"/>
-                </a:solidFill>
-                <a:latin typeface="Pretendard Medium" pitchFamily="34" charset="0"/>
-                <a:ea typeface="Pretendard Medium" pitchFamily="34" charset="-127"/>
-                <a:cs typeface="Pretendard Medium" pitchFamily="34" charset="-120"/>
-              </a:rPr>
-              <a:t>이미지 도면만 남은</a:t>
-            </a:r>
-            <a:endParaRPr lang="en-US" sz="1100" dirty="0"/>
-          </a:p>
-          <a:p>
-            <a:pPr algn="l" indent="0" marL="0">
-              <a:lnSpc>
-                <a:spcPts val="1650"/>
-              </a:lnSpc>
-              <a:buNone/>
-            </a:pPr>
-            <a:r>
-              <a:rPr lang="ko-KR" altLang="en-US" sz="1100" spc="-28" kern="0" dirty="0">
-                <a:solidFill>
-                  <a:srgbClr val="3F4654"/>
-                </a:solidFill>
-                <a:latin typeface="Pretendard Medium" pitchFamily="34" charset="0"/>
-                <a:ea typeface="Pretendard Medium" pitchFamily="34" charset="-127"/>
-                <a:cs typeface="Pretendard Medium" pitchFamily="34" charset="-120"/>
-              </a:rPr>
-              <a:t>기존 시설이 많음</a:t>
-            </a:r>
-            <a:endParaRPr lang="en-US" sz="1100" dirty="0"/>
-          </a:p>
-        </p:txBody>
-      </p:sp>
-      <p:sp>
-        <p:nvSpPr>
-          <p:cNvPr id="83" name="CAD 정보 없이이미지 도면에서 BIM 생성"/>
-          <p:cNvSpPr txBox="1"/>
-          <p:nvPr/>
-        </p:nvSpPr>
-        <p:spPr>
-          <a:xfrm>
-            <a:off x="6604000" y="3437731"/>
-            <a:ext cx="1506377" cy="423466"/>
-          </a:xfrm>
-          <a:prstGeom prst="rect">
-            <a:avLst/>
-          </a:prstGeom>
-          <a:noFill/>
-          <a:ln/>
-        </p:spPr>
-        <p:txBody>
-          <a:bodyPr wrap="none" lIns="0" tIns="0" rIns="0" bIns="0" rtlCol="0" anchor="t"/>
-          <a:lstStyle/>
-          <a:p>
-            <a:pPr algn="l" indent="0" marL="0">
-              <a:lnSpc>
-                <a:spcPts val="1667"/>
-              </a:lnSpc>
-              <a:buNone/>
-            </a:pPr>
-            <a:r>
-              <a:rPr lang="ko-KR" altLang="en-US" sz="1150" b="1" spc="-40" kern="0" dirty="0">
-                <a:solidFill>
-                  <a:srgbClr val="141820"/>
-                </a:solidFill>
-                <a:latin typeface="Pretendard" pitchFamily="34" charset="0"/>
-                <a:ea typeface="Pretendard" pitchFamily="34" charset="-127"/>
-                <a:cs typeface="Pretendard" pitchFamily="34" charset="-120"/>
-              </a:rPr>
-              <a:t>CAD 정보 없이</a:t>
-            </a:r>
-            <a:endParaRPr lang="en-US" sz="1150" dirty="0"/>
-          </a:p>
-          <a:p>
-            <a:pPr algn="l" indent="0" marL="0">
-              <a:lnSpc>
-                <a:spcPts val="1667"/>
-              </a:lnSpc>
-              <a:buNone/>
-            </a:pPr>
-            <a:r>
-              <a:rPr lang="ko-KR" altLang="en-US" sz="1150" b="1" spc="-40" kern="0" dirty="0">
-                <a:solidFill>
-                  <a:srgbClr val="141820"/>
-                </a:solidFill>
-                <a:latin typeface="Pretendard" pitchFamily="34" charset="0"/>
-                <a:ea typeface="Pretendard" pitchFamily="34" charset="-127"/>
-                <a:cs typeface="Pretendard" pitchFamily="34" charset="-120"/>
-              </a:rPr>
-              <a:t>이미지 도면에서 BIM 생성</a:t>
-            </a:r>
-            <a:endParaRPr lang="en-US" sz="1150" dirty="0"/>
-          </a:p>
-        </p:txBody>
-      </p:sp>
-      <p:sp>
-        <p:nvSpPr>
-          <p:cNvPr id="84" name="디지털 전환 기간 단축"/>
-          <p:cNvSpPr txBox="1"/>
-          <p:nvPr/>
-        </p:nvSpPr>
-        <p:spPr>
-          <a:xfrm>
-            <a:off x="8978900" y="3567807"/>
-            <a:ext cx="1394684" cy="196850"/>
-          </a:xfrm>
-          <a:prstGeom prst="rect">
-            <a:avLst/>
-          </a:prstGeom>
-          <a:noFill/>
-          <a:ln/>
-        </p:spPr>
-        <p:txBody>
-          <a:bodyPr wrap="none" lIns="0" tIns="0" rIns="0" bIns="0" rtlCol="0" anchor="ctr"/>
-          <a:lstStyle/>
-          <a:p>
-            <a:pPr algn="l" indent="0" marL="0">
-              <a:buNone/>
-            </a:pPr>
-            <a:r>
-              <a:rPr lang="ko-KR" altLang="en-US" sz="1300" spc="-52" kern="0" dirty="0">
-                <a:solidFill>
-                  <a:srgbClr val="102A4C"/>
-                </a:solidFill>
-                <a:latin typeface="Pretendard ExtraBold" pitchFamily="34" charset="0"/>
-                <a:ea typeface="Pretendard ExtraBold" pitchFamily="34" charset="-127"/>
-                <a:cs typeface="Pretendard ExtraBold" pitchFamily="34" charset="-120"/>
-              </a:rPr>
-              <a:t>디지털 전환 기간 단축</a:t>
-            </a:r>
-            <a:endParaRPr lang="en-US" sz="1300" dirty="0"/>
-          </a:p>
-        </p:txBody>
-      </p:sp>
-      <p:sp>
-        <p:nvSpPr>
-          <p:cNvPr id="85" name="과제 3"/>
-          <p:cNvSpPr txBox="1"/>
-          <p:nvPr/>
-        </p:nvSpPr>
-        <p:spPr>
-          <a:xfrm>
-            <a:off x="1549400" y="4621907"/>
-            <a:ext cx="363637" cy="120650"/>
-          </a:xfrm>
-          <a:prstGeom prst="rect">
-            <a:avLst/>
-          </a:prstGeom>
-          <a:noFill/>
-          <a:ln/>
-        </p:spPr>
-        <p:txBody>
-          <a:bodyPr wrap="none" lIns="0" tIns="0" rIns="0" bIns="0" rtlCol="0" anchor="ctr"/>
-          <a:lstStyle/>
-          <a:p>
-            <a:pPr algn="l" indent="0" marL="0">
-              <a:buNone/>
-            </a:pPr>
-            <a:r>
-              <a:rPr lang="ko-KR" altLang="en-US" sz="800" spc="96" kern="0" dirty="0">
-                <a:solidFill>
-                  <a:srgbClr val="737C8B"/>
-                </a:solidFill>
-                <a:latin typeface="Pretendard ExtraBold" pitchFamily="34" charset="0"/>
-                <a:ea typeface="Pretendard ExtraBold" pitchFamily="34" charset="-127"/>
-                <a:cs typeface="Pretendard ExtraBold" pitchFamily="34" charset="-120"/>
-              </a:rPr>
-              <a:t>과제 3</a:t>
-            </a:r>
-            <a:endParaRPr lang="en-US" sz="800" dirty="0"/>
-          </a:p>
-        </p:txBody>
-      </p:sp>
-      <p:sp>
-        <p:nvSpPr>
-          <p:cNvPr id="86" name="5D(물량·원가) 관리"/>
-          <p:cNvSpPr txBox="1"/>
-          <p:nvPr/>
-        </p:nvSpPr>
-        <p:spPr>
-          <a:xfrm>
-            <a:off x="1549400" y="4818757"/>
-            <a:ext cx="1390477" cy="215900"/>
-          </a:xfrm>
-          <a:prstGeom prst="rect">
-            <a:avLst/>
-          </a:prstGeom>
-          <a:noFill/>
-          <a:ln/>
-        </p:spPr>
-        <p:txBody>
-          <a:bodyPr wrap="none" lIns="0" tIns="0" rIns="0" bIns="0" rtlCol="0" anchor="ctr"/>
-          <a:lstStyle/>
-          <a:p>
-            <a:pPr algn="l" indent="0" marL="0">
-              <a:buNone/>
-            </a:pPr>
-            <a:r>
-              <a:rPr lang="ko-KR" altLang="en-US" sz="1400" spc="-56" kern="0" dirty="0">
-                <a:solidFill>
-                  <a:srgbClr val="102A4C"/>
-                </a:solidFill>
-                <a:latin typeface="Pretendard ExtraBold" pitchFamily="34" charset="0"/>
-                <a:ea typeface="Pretendard ExtraBold" pitchFamily="34" charset="-127"/>
-                <a:cs typeface="Pretendard ExtraBold" pitchFamily="34" charset="-120"/>
-              </a:rPr>
-              <a:t>5D(물량·원가) 관리</a:t>
-            </a:r>
-            <a:endParaRPr lang="en-US" sz="1400" dirty="0"/>
-          </a:p>
-        </p:txBody>
-      </p:sp>
-      <p:sp>
-        <p:nvSpPr>
-          <p:cNvPr id="87" name="BIM 데이터가 정확해야물량·원가 관리가 의미 있음"/>
-          <p:cNvSpPr txBox="1"/>
-          <p:nvPr/>
-        </p:nvSpPr>
-        <p:spPr>
-          <a:xfrm>
-            <a:off x="3841750" y="4604147"/>
-            <a:ext cx="1499856" cy="419100"/>
-          </a:xfrm>
-          <a:prstGeom prst="rect">
-            <a:avLst/>
-          </a:prstGeom>
-          <a:noFill/>
-          <a:ln/>
-        </p:spPr>
-        <p:txBody>
-          <a:bodyPr wrap="none" lIns="0" tIns="0" rIns="0" bIns="0" rtlCol="0" anchor="t"/>
-          <a:lstStyle/>
-          <a:p>
-            <a:pPr algn="l" indent="0" marL="0">
-              <a:lnSpc>
-                <a:spcPts val="1650"/>
-              </a:lnSpc>
-              <a:buNone/>
-            </a:pPr>
-            <a:r>
-              <a:rPr lang="ko-KR" altLang="en-US" sz="1100" spc="-28" kern="0" dirty="0">
-                <a:solidFill>
-                  <a:srgbClr val="3F4654"/>
-                </a:solidFill>
-                <a:latin typeface="Pretendard Medium" pitchFamily="34" charset="0"/>
-                <a:ea typeface="Pretendard Medium" pitchFamily="34" charset="-127"/>
-                <a:cs typeface="Pretendard Medium" pitchFamily="34" charset="-120"/>
-              </a:rPr>
-              <a:t>BIM 데이터가 정확해야</a:t>
-            </a:r>
-            <a:endParaRPr lang="en-US" sz="1100" dirty="0"/>
-          </a:p>
-          <a:p>
-            <a:pPr algn="l" indent="0" marL="0">
-              <a:lnSpc>
-                <a:spcPts val="1650"/>
-              </a:lnSpc>
-              <a:buNone/>
-            </a:pPr>
-            <a:r>
-              <a:rPr lang="ko-KR" altLang="en-US" sz="1100" spc="-28" kern="0" dirty="0">
-                <a:solidFill>
-                  <a:srgbClr val="3F4654"/>
-                </a:solidFill>
-                <a:latin typeface="Pretendard Medium" pitchFamily="34" charset="0"/>
-                <a:ea typeface="Pretendard Medium" pitchFamily="34" charset="-127"/>
-                <a:cs typeface="Pretendard Medium" pitchFamily="34" charset="-120"/>
-              </a:rPr>
-              <a:t>물량·원가 관리가 의미 있음</a:t>
-            </a:r>
-            <a:endParaRPr lang="en-US" sz="1100" dirty="0"/>
-          </a:p>
-        </p:txBody>
-      </p:sp>
-      <p:sp>
-        <p:nvSpPr>
-          <p:cNvPr id="88" name="축척 보정·생성 완성도검증 경험"/>
-          <p:cNvSpPr txBox="1"/>
-          <p:nvPr/>
-        </p:nvSpPr>
-        <p:spPr>
-          <a:xfrm>
-            <a:off x="6604000" y="4606131"/>
-            <a:ext cx="1254280" cy="423466"/>
-          </a:xfrm>
-          <a:prstGeom prst="rect">
-            <a:avLst/>
-          </a:prstGeom>
-          <a:noFill/>
-          <a:ln/>
-        </p:spPr>
-        <p:txBody>
-          <a:bodyPr wrap="none" lIns="0" tIns="0" rIns="0" bIns="0" rtlCol="0" anchor="t"/>
-          <a:lstStyle/>
-          <a:p>
-            <a:pPr algn="l" indent="0" marL="0">
-              <a:lnSpc>
-                <a:spcPts val="1667"/>
-              </a:lnSpc>
-              <a:buNone/>
-            </a:pPr>
-            <a:r>
-              <a:rPr lang="ko-KR" altLang="en-US" sz="1150" b="1" spc="-40" kern="0" dirty="0">
-                <a:solidFill>
-                  <a:srgbClr val="141820"/>
-                </a:solidFill>
-                <a:latin typeface="Pretendard" pitchFamily="34" charset="0"/>
-                <a:ea typeface="Pretendard" pitchFamily="34" charset="-127"/>
-                <a:cs typeface="Pretendard" pitchFamily="34" charset="-120"/>
-              </a:rPr>
               <a:t>축척 보정·생성 완성도</a:t>
             </a:r>
-            <a:endParaRPr lang="en-US" sz="1150" dirty="0"/>
-          </a:p>
-          <a:p>
-            <a:pPr algn="l" indent="0" marL="0">
-              <a:lnSpc>
-                <a:spcPts val="1667"/>
-              </a:lnSpc>
-              <a:buNone/>
-            </a:pPr>
+            <a:br/>
             <a:r>
               <a:rPr lang="ko-KR" altLang="en-US" sz="1150" b="1" spc="-40" kern="0" dirty="0">
                 <a:solidFill>
@@ -24117,15 +23728,7 @@
               </a:rPr>
               <a:t>모델 데이터 품질 검증에</a:t>
             </a:r>
-            <a:endParaRPr lang="en-US" sz="1300" dirty="0"/>
-          </a:p>
-          <a:p>
-            <a:pPr algn="l" indent="0" marL="0">
-              <a:lnSpc>
-                <a:spcPts val="1820"/>
-              </a:lnSpc>
-              <a:buNone/>
-            </a:pPr>
+            <a:br/>
             <a:r>
               <a:rPr lang="ko-KR" altLang="en-US" sz="1300" spc="-52" kern="0" dirty="0">
                 <a:solidFill>
@@ -24218,12 +23821,6 @@
               </a:rPr>
               <a:t>도면 속 불완전한 정보를 </a:t>
             </a:r>
-            <a:pPr algn="l" indent="0" marL="0">
-              <a:lnSpc>
-                <a:spcPts val="1890"/>
-              </a:lnSpc>
-              <a:buNone/>
-            </a:pPr>
             <a:r>
               <a:rPr lang="ko-KR" altLang="en-US" sz="1350" b="1" spc="-47" kern="0" dirty="0">
                 <a:solidFill>
@@ -24235,12 +23832,6 @@
               </a:rPr>
               <a:t>정확한 3D 데이터</a:t>
             </a:r>
-            <a:pPr algn="l" indent="0" marL="0">
-              <a:lnSpc>
-                <a:spcPts val="1890"/>
-              </a:lnSpc>
-              <a:buNone/>
-            </a:pPr>
             <a:r>
               <a:rPr lang="ko-KR" altLang="en-US" sz="1350" b="1" spc="-47" kern="0" dirty="0">
                 <a:solidFill>
@@ -24252,15 +23843,7 @@
               </a:rPr>
               <a:t>로 잇는 경험으로,</a:t>
             </a:r>
-            <a:endParaRPr lang="en-US" sz="1350" dirty="0"/>
-          </a:p>
-          <a:p>
-            <a:pPr algn="l" indent="0" marL="0">
-              <a:lnSpc>
-                <a:spcPts val="1890"/>
-              </a:lnSpc>
-              <a:buNone/>
-            </a:pPr>
+            <a:br/>
             <a:r>
               <a:rPr lang="ko-KR" altLang="en-US" sz="1350" b="1" spc="-47" kern="0" dirty="0">
                 <a:solidFill>
@@ -24389,34 +23972,70 @@
               </a:rPr>
               <a:t>Automation in Construction</a:t>
             </a:r>
+            <a:r>
+              <a:rPr lang="ko-KR" altLang="en-US" sz="800" spc="-8" kern="0" dirty="0">
+                <a:solidFill>
+                  <a:srgbClr val="A9B7CB"/>
+                </a:solidFill>
+                <a:latin typeface="Pretendard SemiBold" pitchFamily="34" charset="0"/>
+                <a:ea typeface="Pretendard SemiBold" pitchFamily="34" charset="-127"/>
+                <a:cs typeface="Pretendard SemiBold" pitchFamily="34" charset="-120"/>
+              </a:rPr>
+              <a:t> · Vol. 187 · 2026 게재</a:t>
+            </a:r>
+            <a:endParaRPr lang="en-US" sz="800" dirty="0"/>
+          </a:p>
+        </p:txBody>
+      </p:sp>
+      <p:sp>
+        <p:nvSpPr>
+          <p:cNvPr id="95" name="석사 연구 발표  ·  평면도와 입면도 객체 인식 및 정보 통합을 통한 "/>
+          <p:cNvSpPr txBox="1"/>
+          <p:nvPr/>
+        </p:nvSpPr>
+        <p:spPr>
+          <a:xfrm>
+            <a:off x="609600" y="6472238"/>
+            <a:ext cx="5145113" cy="114300"/>
+          </a:xfrm>
+          <a:prstGeom prst="rect">
+            <a:avLst/>
+          </a:prstGeom>
+          <a:noFill/>
+          <a:ln/>
+        </p:spPr>
+        <p:txBody>
+          <a:bodyPr wrap="none" lIns="0" tIns="0" rIns="0" bIns="0" rtlCol="0" anchor="ctr"/>
+          <a:lstStyle/>
+          <a:p>
             <a:pPr algn="l" indent="0" marL="0">
               <a:buNone/>
             </a:pPr>
             <a:r>
-              <a:rPr lang="ko-KR" altLang="en-US" sz="800" spc="-8" kern="0" dirty="0">
-                <a:solidFill>
-                  <a:srgbClr val="A9B7CB"/>
-                </a:solidFill>
-                <a:latin typeface="Pretendard SemiBold" pitchFamily="34" charset="0"/>
-                <a:ea typeface="Pretendard SemiBold" pitchFamily="34" charset="-127"/>
-                <a:cs typeface="Pretendard SemiBold" pitchFamily="34" charset="-120"/>
-              </a:rPr>
-              <a:t> · Vol. 187 · 2026 게재</a:t>
-            </a:r>
-            <a:endParaRPr lang="en-US" sz="800" dirty="0"/>
-          </a:p>
-        </p:txBody>
-      </p:sp>
-      <p:sp>
-        <p:nvSpPr>
-          <p:cNvPr id="95" name="석사 연구 발표  ·  평면도와 입면도 객체 인식 및 정보 통합을 통한 "/>
+              <a:rPr lang="ko-KR" altLang="en-US" sz="750" spc="-12" kern="0" dirty="0">
+                <a:solidFill>
+                  <a:srgbClr val="737C8B"/>
+                </a:solidFill>
+                <a:latin typeface="Pretendard Medium" pitchFamily="34" charset="0"/>
+                <a:ea typeface="Pretendard Medium" pitchFamily="34" charset="-127"/>
+                <a:cs typeface="Pretendard Medium" pitchFamily="34" charset="-120"/>
+              </a:rPr>
+              <a:t>석사 연구 발표  ·  평면도와 입면도 객체 인식 및 정보 통합을 통한 3D BIM 자동 생성 연구  ·  Utility 기술(건축, BIM/5D) 지원자 ○○○</a:t>
+            </a:r>
+            <a:endParaRPr lang="en-US" sz="750" dirty="0"/>
+          </a:p>
+        </p:txBody>
+      </p:sp>
+      <p:sp>
+        <p:nvSpPr>
+          <p:cNvPr id="96" name="05 / 05"/>
           <p:cNvSpPr txBox="1"/>
           <p:nvPr/>
         </p:nvSpPr>
         <p:spPr>
           <a:xfrm>
-            <a:off x="609600" y="6472238"/>
-            <a:ext cx="5145113" cy="114300"/>
+            <a:off x="11217672" y="6472238"/>
+            <a:ext cx="415528" cy="114300"/>
           </a:xfrm>
           <a:prstGeom prst="rect">
             <a:avLst/>
@@ -24432,45 +24051,6 @@
               <a:buNone/>
             </a:pPr>
             <a:r>
-              <a:rPr lang="ko-KR" altLang="en-US" sz="750" spc="-12" kern="0" dirty="0">
-                <a:solidFill>
-                  <a:srgbClr val="737C8B"/>
-                </a:solidFill>
-                <a:latin typeface="Pretendard Medium" pitchFamily="34" charset="0"/>
-                <a:ea typeface="Pretendard Medium" pitchFamily="34" charset="-127"/>
-                <a:cs typeface="Pretendard Medium" pitchFamily="34" charset="-120"/>
-              </a:rPr>
-              <a:t>석사 연구 발표  ·  평면도와 입면도 객체 인식 및 정보 통합을 통한 3D BIM 자동 생성 연구  ·  Utility 기술(건축, BIM/5D) 지원자 ○○○</a:t>
-            </a:r>
-            <a:endParaRPr lang="en-US" sz="750" dirty="0"/>
-          </a:p>
-        </p:txBody>
-      </p:sp>
-      <p:sp>
-        <p:nvSpPr>
-          <p:cNvPr id="96" name="05 / 05"/>
-          <p:cNvSpPr txBox="1"/>
-          <p:nvPr/>
-        </p:nvSpPr>
-        <p:spPr>
-          <a:xfrm>
-            <a:off x="11217672" y="6472238"/>
-            <a:ext cx="415528" cy="114300"/>
-          </a:xfrm>
-          <a:prstGeom prst="rect">
-            <a:avLst/>
-          </a:prstGeom>
-          <a:noFill/>
-          <a:ln/>
-        </p:spPr>
-        <p:txBody>
-          <a:bodyPr wrap="none" lIns="0" tIns="0" rIns="0" bIns="0" rtlCol="0" anchor="ctr"/>
-          <a:lstStyle/>
-          <a:p>
-            <a:pPr algn="l" indent="0" marL="0">
-              <a:buNone/>
-            </a:pPr>
-            <a:r>
               <a:rPr lang="ko-KR" altLang="en-US" sz="750" spc="45" kern="0" dirty="0">
                 <a:solidFill>
                   <a:srgbClr val="102A4C"/>
@@ -24481,9 +24061,6 @@
               </a:rPr>
               <a:t>05</a:t>
             </a:r>
-            <a:pPr algn="l" indent="0" marL="0">
-              <a:buNone/>
-            </a:pPr>
             <a:r>
               <a:rPr lang="ko-KR" altLang="en-US" sz="750" spc="45" kern="0" dirty="0">
                 <a:solidFill>
